--- a/Arquitectura de Sistemas Computacionales/Clases/Clase 2 - Modelos de servicio IaaS PaaS SaaS/Presentacion.pptx
+++ b/Arquitectura de Sistemas Computacionales/Clases/Clase 2 - Modelos de servicio IaaS PaaS SaaS/Presentacion.pptx
@@ -3377,7 +3377,7 @@
                 </a:solidFill>
                 <a:latin typeface="Calibri"/>
               </a:rPr>
-              <a:t> · Teoría breve · Taller PI · Quiz/cierre.</a:t>
+              <a:t> · Teoría breve · Taller PI · cierre.</a:t>
             </a:r>
           </a:p>
           <a:p>
@@ -4542,7 +4542,7 @@
                 </a:solidFill>
                 <a:latin typeface="Calibri"/>
               </a:rPr>
-              <a:t> Quiz corto / revisión de evidencias.</a:t>
+              <a:t> Revisión de evidencias del PI.</a:t>
             </a:r>
           </a:p>
           <a:p>

--- a/Arquitectura de Sistemas Computacionales/Clases/Clase 2 - Modelos de servicio IaaS PaaS SaaS/Presentacion.pptx
+++ b/Arquitectura de Sistemas Computacionales/Clases/Clase 2 - Modelos de servicio IaaS PaaS SaaS/Presentacion.pptx
@@ -3850,7 +3850,7 @@
                 </a:solidFill>
                 <a:latin typeface="Calibri"/>
               </a:rPr>
-              <a:t>Subir evidencias al paquete CloudLite (Drive/repo) y a ExamLab domingo 23:59.</a:t>
+              <a:t>Subir evidencias al paquete CloudLite (Drive/repo) y a ExamLab (https://examlab.lovable.app/) domingo 23:59.</a:t>
             </a:r>
           </a:p>
         </p:txBody>

--- a/Arquitectura de Sistemas Computacionales/Clases/Clase 2 - Modelos de servicio IaaS PaaS SaaS/Presentacion.pptx
+++ b/Arquitectura de Sistemas Computacionales/Clases/Clase 2 - Modelos de servicio IaaS PaaS SaaS/Presentacion.pptx
@@ -6876,7 +6876,7 @@
                 </a:solidFill>
                 <a:latin typeface="Calibri"/>
               </a:rPr>
-              <a:t> Lea las diapositivas y el enunciado del PI (Clases/Proyecto Integrador).</a:t>
+              <a:t> Paso 1: relea la ficha y el C4 Context de la Clase 1 y copie en el encabezado del ADR el nombre del dominio y las 4 capacidades ya aprobadas, verificando que sean literalmente las mismas 4 y que no cambia de dominio a mitad de camino, porque al ser clase autonoma nadie corregira la inconsistencia antes de la entrega.</a:t>
             </a:r>
           </a:p>
           <a:p>
@@ -6910,7 +6910,7 @@
                 </a:solidFill>
                 <a:latin typeface="Calibri"/>
               </a:rPr>
-              <a:t> Complete una matriz IaaS/PaaS/SaaS vs su dominio (control, costo cualitativo, operación, time-to-demo).</a:t>
+              <a:t> Paso 2: complete la matriz de 4 columnas y 5 filas (control del sistema operativo, esfuerzo de operacion, tiempo hasta la primera demo, costo cualitativo con su driver, portabilidad) puntuando cada celda de 1 a 3 y sumando por columna, verificando que los tres totales de IaaS, PaaS y SaaS sean distintos: si dos empatan, vuelva a puntuar porque el criterio esta mal aplicado; la matriz queda en la seccion Modelo de servicio del informe del PI.</a:t>
             </a:r>
           </a:p>
           <a:p>
@@ -6944,7 +6944,7 @@
                 </a:solidFill>
                 <a:latin typeface="Calibri"/>
               </a:rPr>
-              <a:t> Redacte ADR-001 (decisión dominante + 2 alternativas descartadas).</a:t>
+              <a:t> Paso 3: redacte el ADR-001 con las 7 secciones obligatorias (titulo, estado, contexto en 3 frases, decision en 1 frase, 2 alternativas descartadas con motivo, 2 consecuencias positivas y 2 negativas, impacto en el PI), verificando que la decision nombre un unico modelo dominante y no un poco de todo, y que cada alternativa descartada explique el motivo en terminos de este dominio y no en teoria.</a:t>
             </a:r>
           </a:p>
           <a:p>
@@ -6978,7 +6978,7 @@
                 </a:solidFill>
                 <a:latin typeface="Calibri"/>
               </a:rPr>
-              <a:t> Actualice el informe PI (sección «Modelo de servicio»).</a:t>
+              <a:t> Paso 4: escriba en ExamLab el diagrama Mermaid de responsabilidad compartida con 3 subgrafos (IaaS, PaaS, SaaS), 4 capas por subgrafo y un nodo final de decision, verificando al renderizar que se cuentan 12 nodos de capa, que los nodos gestionados por el equipo y por el proveedor quedan pintados distinto y que la caja de decision cita el mismo modelo del ADR-001.</a:t>
             </a:r>
           </a:p>
           <a:p>
@@ -7012,25 +7012,7 @@
                 </a:solidFill>
                 <a:latin typeface="Calibri"/>
               </a:rPr>
-              <a:t> Entrega domingo 23:59 en </a:t>
-            </a:r>
-            <a:r>
-              <a:rPr sz="1600" b="1" i="0">
-                <a:solidFill>
-                  <a:srgbClr val="333333"/>
-                </a:solidFill>
-                <a:latin typeface="Calibri"/>
-              </a:rPr>
-              <a:t>ExamLab</a:t>
-            </a:r>
-            <a:r>
-              <a:rPr sz="1600" b="0" i="0">
-                <a:solidFill>
-                  <a:srgbClr val="333333"/>
-                </a:solidFill>
-                <a:latin typeface="Calibri"/>
-              </a:rPr>
-              <a:t> (Talleres) — mismo doc del PI o anexo.</a:t>
+              <a:t> Paso 5: pegue matriz, ADR-001 y diagrama en las 5 preguntas del taller, actualice la seccion Modelo de servicio del informe con el mismo texto del ADR y suba todo a ExamLab (modulo Talleres) antes del domingo 23:59, verificando que el modelo elegido se pueda demostrar sin tarjeta de credito ni cloud de pago.</a:t>
             </a:r>
           </a:p>
         </p:txBody>

--- a/Arquitectura de Sistemas Computacionales/Clases/Clase 2 - Modelos de servicio IaaS PaaS SaaS/Presentacion.pptx
+++ b/Arquitectura de Sistemas Computacionales/Clases/Clase 2 - Modelos de servicio IaaS PaaS SaaS/Presentacion.pptx
@@ -4517,7 +4517,7 @@
                 </a:solidFill>
                 <a:latin typeface="Calibri"/>
               </a:rPr>
-              <a:t> Taller guiado PI (demo en vivo + trabajo de equipo).</a:t>
+              <a:t> Taller guiado PI (demo en vivo + avance individual).</a:t>
             </a:r>
           </a:p>
           <a:p>
@@ -5168,7 +5168,7 @@
                 </a:solidFill>
                 <a:latin typeface="Calibri"/>
               </a:rPr>
-              <a:t>–   Equipos 2–3 · todos deben poder explicar el artefacto.</a:t>
+              <a:t>–   Individual por defecto · el docente puede autorizar equipos de 2–3; la entrega en ExamLab siempre es individual.</a:t>
             </a:r>
           </a:p>
         </p:txBody>

--- a/Arquitectura de Sistemas Computacionales/Clases/Clase 2 - Modelos de servicio IaaS PaaS SaaS/Presentacion.pptx
+++ b/Arquitectura de Sistemas Computacionales/Clases/Clase 2 - Modelos de servicio IaaS PaaS SaaS/Presentacion.pptx
@@ -3295,7 +3295,7 @@
                 </a:solidFill>
                 <a:latin typeface="Calibri"/>
               </a:rPr>
-              <a:t>Actividad autónoma · ADR del PI</a:t>
+              <a:t>ADR del PI · elección del modelo de servicio</a:t>
             </a:r>
           </a:p>
         </p:txBody>
@@ -6452,7 +6452,7 @@
                 </a:solidFill>
                 <a:latin typeface="Calibri"/>
               </a:rPr>
-              <a:t>MVP academico, equipo de 3, sin presupuesto cloud.</a:t>
+              <a:t>MVP academico, un desarrollador (2 o 3 si el docente autorizo equipo), sin presupuesto cloud.</a:t>
             </a:r>
           </a:p>
           <a:p>
@@ -6876,7 +6876,7 @@
                 </a:solidFill>
                 <a:latin typeface="Calibri"/>
               </a:rPr>
-              <a:t> Paso 1: relea la ficha y el C4 Context de la Clase 1 y copie en el encabezado del ADR el nombre del dominio y las 4 capacidades ya aprobadas, verificando que sean literalmente las mismas 4 y que no cambia de dominio a mitad de camino, porque al ser clase autonoma nadie corregira la inconsistencia antes de la entrega.</a:t>
+              <a:t> Paso 1: relea la ficha y el C4 Context de la Clase 1 y copie en el encabezado del ADR el nombre del dominio y las 4 capacidades ya aprobadas, verificando que sean literalmente las mismas 4 y que no cambia de dominio a mitad de camino, porque una inconsistencia aqui arrastra error en todos los diagramas que siguen.</a:t>
             </a:r>
           </a:p>
           <a:p>

--- a/Arquitectura de Sistemas Computacionales/Clases/Clase 2 - Modelos de servicio IaaS PaaS SaaS/Presentacion.pptx
+++ b/Arquitectura de Sistemas Computacionales/Clases/Clase 2 - Modelos de servicio IaaS PaaS SaaS/Presentacion.pptx
@@ -3850,7 +3850,7 @@
                 </a:solidFill>
                 <a:latin typeface="Calibri"/>
               </a:rPr>
-              <a:t>Subir evidencias al paquete CloudLite (Drive/repo) y a ExamLab (https://examlab.lovable.app/) domingo 23:59.</a:t>
+              <a:t>Subir evidencias al paquete CloudLite (Drive/repo) y a ExamLab (https://uniaj.examlab.workers.dev/) domingo 23:59.</a:t>
             </a:r>
           </a:p>
         </p:txBody>

--- a/Arquitectura de Sistemas Computacionales/Clases/Clase 2 - Modelos de servicio IaaS PaaS SaaS/Presentacion.pptx
+++ b/Arquitectura de Sistemas Computacionales/Clases/Clase 2 - Modelos de servicio IaaS PaaS SaaS/Presentacion.pptx
@@ -16,6 +16,8 @@
     <p:sldId id="264" r:id="rId15"/>
     <p:sldId id="265" r:id="rId16"/>
     <p:sldId id="266" r:id="rId17"/>
+    <p:sldId id="267" r:id="rId18"/>
+    <p:sldId id="268" r:id="rId19"/>
   </p:sldIdLst>
   <p:sldSz cx="12191695" cy="6858000" type="screen4x3"/>
   <p:notesSz cx="6858000" cy="9144000"/>
@@ -3468,7 +3470,7 @@
         <p:spPr>
           <a:xfrm>
             <a:off x="0" y="0"/>
-            <a:ext cx="12191695" cy="960120"/>
+            <a:ext cx="12191695" cy="1170432"/>
           </a:xfrm>
           <a:prstGeom prst="rect">
             <a:avLst/>
@@ -3510,7 +3512,7 @@
         </p:nvSpPr>
         <p:spPr>
           <a:xfrm>
-            <a:off x="0" y="960120"/>
+            <a:off x="0" y="1170432"/>
             <a:ext cx="12191695" cy="41148"/>
           </a:xfrm>
           <a:prstGeom prst="rect">
@@ -3554,7 +3556,7 @@
         <p:spPr>
           <a:xfrm>
             <a:off x="457200" y="164592"/>
-            <a:ext cx="11277295" cy="502920"/>
+            <a:ext cx="11277295" cy="384048"/>
           </a:xfrm>
           <a:prstGeom prst="rect">
             <a:avLst/>
@@ -3574,20 +3576,225 @@
                 </a:solidFill>
                 <a:latin typeface="Calibri"/>
               </a:rPr>
-              <a:t>Para continuar (PI)</a:t>
-            </a:r>
-          </a:p>
-        </p:txBody>
-      </p:sp>
-      <p:sp>
-        <p:nvSpPr>
-          <p:cNvPr id="5" name="Rounded Rectangle 4"/>
+              <a:t>Del boceto a ExamLab (diagrama)</a:t>
+            </a:r>
+          </a:p>
+        </p:txBody>
+      </p:sp>
+      <p:sp>
+        <p:nvSpPr>
+          <p:cNvPr id="5" name="TextBox 4"/>
+          <p:cNvSpPr txBox="1"/>
+          <p:nvPr/>
+        </p:nvSpPr>
+        <p:spPr>
+          <a:xfrm>
+            <a:off x="457200" y="566928"/>
+            <a:ext cx="11277295" cy="411480"/>
+          </a:xfrm>
+          <a:prstGeom prst="rect">
+            <a:avLst/>
+          </a:prstGeom>
+          <a:noFill/>
+        </p:spPr>
+        <p:txBody>
+          <a:bodyPr wrap="square">
+            <a:spAutoFit/>
+          </a:bodyPr>
+          <a:lstStyle/>
+          <a:p>
+            <a:r>
+              <a:rPr sz="1400" b="0" i="0">
+                <a:solidFill>
+                  <a:srgbClr val="B8D8EE"/>
+                </a:solidFill>
+                <a:latin typeface="Calibri"/>
+              </a:rPr>
+              <a:t>El diagrama se entrega como código Mermaid dentro de ExamLab, no como imagen</a:t>
+            </a:r>
+          </a:p>
+        </p:txBody>
+      </p:sp>
+      <p:sp>
+        <p:nvSpPr>
+          <p:cNvPr id="6" name="Rounded Rectangle 5"/>
           <p:cNvSpPr/>
           <p:nvPr/>
         </p:nvSpPr>
         <p:spPr>
           <a:xfrm>
-            <a:off x="457200" y="1261872"/>
+            <a:off x="457200" y="1659636"/>
+            <a:ext cx="11277295" cy="1051560"/>
+          </a:xfrm>
+          <a:prstGeom prst="roundRect">
+            <a:avLst>
+              <a:gd name="adj" fmla="val 12000"/>
+            </a:avLst>
+          </a:prstGeom>
+          <a:solidFill>
+            <a:srgbClr val="F2F2F2"/>
+          </a:solidFill>
+          <a:ln>
+            <a:noFill/>
+          </a:ln>
+        </p:spPr>
+        <p:style>
+          <a:lnRef idx="1">
+            <a:schemeClr val="accent1"/>
+          </a:lnRef>
+          <a:fillRef idx="3">
+            <a:schemeClr val="accent1"/>
+          </a:fillRef>
+          <a:effectRef idx="2">
+            <a:schemeClr val="accent1"/>
+          </a:effectRef>
+          <a:fontRef idx="minor">
+            <a:schemeClr val="lt1"/>
+          </a:fontRef>
+        </p:style>
+        <p:txBody>
+          <a:bodyPr rtlCol="0" anchor="ctr"/>
+          <a:lstStyle/>
+          <a:p>
+            <a:pPr algn="ctr"/>
+          </a:p>
+        </p:txBody>
+      </p:sp>
+      <p:sp>
+        <p:nvSpPr>
+          <p:cNvPr id="7" name="Rounded Rectangle 6"/>
+          <p:cNvSpPr/>
+          <p:nvPr/>
+        </p:nvSpPr>
+        <p:spPr>
+          <a:xfrm>
+            <a:off x="594360" y="1965960"/>
+            <a:ext cx="438912" cy="438912"/>
+          </a:xfrm>
+          <a:prstGeom prst="roundRect">
+            <a:avLst>
+              <a:gd name="adj" fmla="val 12000"/>
+            </a:avLst>
+          </a:prstGeom>
+          <a:solidFill>
+            <a:srgbClr val="095292"/>
+          </a:solidFill>
+          <a:ln>
+            <a:noFill/>
+          </a:ln>
+        </p:spPr>
+        <p:style>
+          <a:lnRef idx="1">
+            <a:schemeClr val="accent1"/>
+          </a:lnRef>
+          <a:fillRef idx="3">
+            <a:schemeClr val="accent1"/>
+          </a:fillRef>
+          <a:effectRef idx="2">
+            <a:schemeClr val="accent1"/>
+          </a:effectRef>
+          <a:fontRef idx="minor">
+            <a:schemeClr val="lt1"/>
+          </a:fontRef>
+        </p:style>
+        <p:txBody>
+          <a:bodyPr rtlCol="0" anchor="ctr"/>
+          <a:lstStyle/>
+          <a:p>
+            <a:pPr algn="ctr"/>
+          </a:p>
+        </p:txBody>
+      </p:sp>
+      <p:sp>
+        <p:nvSpPr>
+          <p:cNvPr id="8" name="TextBox 7"/>
+          <p:cNvSpPr txBox="1"/>
+          <p:nvPr/>
+        </p:nvSpPr>
+        <p:spPr>
+          <a:xfrm>
+            <a:off x="594360" y="1965960"/>
+            <a:ext cx="438912" cy="438912"/>
+          </a:xfrm>
+          <a:prstGeom prst="rect">
+            <a:avLst/>
+          </a:prstGeom>
+          <a:noFill/>
+        </p:spPr>
+        <p:txBody>
+          <a:bodyPr wrap="square" anchor="ctr"/>
+          <a:lstStyle/>
+          <a:p>
+            <a:pPr algn="ctr"/>
+            <a:r>
+              <a:rPr sz="1600" b="1" i="0">
+                <a:solidFill>
+                  <a:srgbClr val="FFFFFF"/>
+                </a:solidFill>
+                <a:latin typeface="Calibri"/>
+              </a:rPr>
+              <a:t>1</a:t>
+            </a:r>
+          </a:p>
+        </p:txBody>
+      </p:sp>
+      <p:sp>
+        <p:nvSpPr>
+          <p:cNvPr id="9" name="TextBox 8"/>
+          <p:cNvSpPr txBox="1"/>
+          <p:nvPr/>
+        </p:nvSpPr>
+        <p:spPr>
+          <a:xfrm>
+            <a:off x="1188720" y="1751076"/>
+            <a:ext cx="10271455" cy="886968"/>
+          </a:xfrm>
+          <a:prstGeom prst="rect">
+            <a:avLst/>
+          </a:prstGeom>
+          <a:noFill/>
+        </p:spPr>
+        <p:txBody>
+          <a:bodyPr wrap="square" anchor="ctr"/>
+          <a:lstStyle/>
+          <a:p>
+            <a:r>
+              <a:rPr sz="1500" b="1" i="0">
+                <a:solidFill>
+                  <a:srgbClr val="095292"/>
+                </a:solidFill>
+                <a:latin typeface="Calibri"/>
+              </a:rPr>
+              <a:t>Disena visual</a:t>
+            </a:r>
+          </a:p>
+          <a:p>
+            <a:pPr>
+              <a:spcBef>
+                <a:spcPts val="200"/>
+              </a:spcBef>
+            </a:pPr>
+            <a:r>
+              <a:rPr sz="1300" b="0" i="0">
+                <a:solidFill>
+                  <a:srgbClr val="333333"/>
+                </a:solidFill>
+                <a:latin typeface="Calibri"/>
+              </a:rPr>
+              <a:t>Dibuja el diagrama como quieras en Excalidraw o draw.io: es mas rapido arrastrar cajas que escribir codigo, y ahi es donde piensas el modelo.</a:t>
+            </a:r>
+          </a:p>
+        </p:txBody>
+      </p:sp>
+      <p:sp>
+        <p:nvSpPr>
+          <p:cNvPr id="10" name="Rounded Rectangle 9"/>
+          <p:cNvSpPr/>
+          <p:nvPr/>
+        </p:nvSpPr>
+        <p:spPr>
+          <a:xfrm>
+            <a:off x="457200" y="2802636"/>
             <a:ext cx="11277295" cy="1051560"/>
           </a:xfrm>
           <a:prstGeom prst="roundRect">
@@ -3626,20 +3833,22 @@
       </p:sp>
       <p:sp>
         <p:nvSpPr>
-          <p:cNvPr id="6" name="Rectangle 5"/>
+          <p:cNvPr id="11" name="Rounded Rectangle 10"/>
           <p:cNvSpPr/>
           <p:nvPr/>
         </p:nvSpPr>
         <p:spPr>
           <a:xfrm>
-            <a:off x="457200" y="1261872"/>
-            <a:ext cx="128016" cy="1051560"/>
-          </a:xfrm>
-          <a:prstGeom prst="rect">
-            <a:avLst/>
+            <a:off x="594360" y="3108960"/>
+            <a:ext cx="438912" cy="438912"/>
+          </a:xfrm>
+          <a:prstGeom prst="roundRect">
+            <a:avLst>
+              <a:gd name="adj" fmla="val 12000"/>
+            </a:avLst>
           </a:prstGeom>
           <a:solidFill>
-            <a:srgbClr val="269CCB"/>
+            <a:srgbClr val="095292"/>
           </a:solidFill>
           <a:ln>
             <a:noFill/>
@@ -3669,14 +3878,14 @@
       </p:sp>
       <p:sp>
         <p:nvSpPr>
-          <p:cNvPr id="7" name="TextBox 6"/>
+          <p:cNvPr id="12" name="TextBox 11"/>
           <p:cNvSpPr txBox="1"/>
           <p:nvPr/>
         </p:nvSpPr>
         <p:spPr>
           <a:xfrm>
-            <a:off x="777240" y="1399031"/>
-            <a:ext cx="10774375" cy="822959"/>
+            <a:off x="594360" y="3108960"/>
+            <a:ext cx="438912" cy="438912"/>
           </a:xfrm>
           <a:prstGeom prst="rect">
             <a:avLst/>
@@ -3684,48 +3893,79 @@
           <a:noFill/>
         </p:spPr>
         <p:txBody>
-          <a:bodyPr wrap="square">
-            <a:spAutoFit/>
-          </a:bodyPr>
-          <a:lstStyle/>
-          <a:p>
-            <a:r>
-              <a:rPr sz="1200" b="1" i="0">
-                <a:solidFill>
-                  <a:srgbClr val="269CCB"/>
-                </a:solidFill>
-                <a:latin typeface="Calibri"/>
-              </a:rPr>
-              <a:t>Info</a:t>
+          <a:bodyPr wrap="square" anchor="ctr"/>
+          <a:lstStyle/>
+          <a:p>
+            <a:pPr algn="ctr"/>
+            <a:r>
+              <a:rPr sz="1600" b="1" i="0">
+                <a:solidFill>
+                  <a:srgbClr val="FFFFFF"/>
+                </a:solidFill>
+                <a:latin typeface="Calibri"/>
+              </a:rPr>
+              <a:t>2</a:t>
+            </a:r>
+          </a:p>
+        </p:txBody>
+      </p:sp>
+      <p:sp>
+        <p:nvSpPr>
+          <p:cNvPr id="13" name="TextBox 12"/>
+          <p:cNvSpPr txBox="1"/>
+          <p:nvPr/>
+        </p:nvSpPr>
+        <p:spPr>
+          <a:xfrm>
+            <a:off x="1188720" y="2894076"/>
+            <a:ext cx="10271455" cy="886968"/>
+          </a:xfrm>
+          <a:prstGeom prst="rect">
+            <a:avLst/>
+          </a:prstGeom>
+          <a:noFill/>
+        </p:spPr>
+        <p:txBody>
+          <a:bodyPr wrap="square" anchor="ctr"/>
+          <a:lstStyle/>
+          <a:p>
+            <a:r>
+              <a:rPr sz="1500" b="1" i="0">
+                <a:solidFill>
+                  <a:srgbClr val="095292"/>
+                </a:solidFill>
+                <a:latin typeface="Calibri"/>
+              </a:rPr>
+              <a:t>Traduce con IA</a:t>
             </a:r>
           </a:p>
           <a:p>
             <a:pPr>
               <a:spcBef>
-                <a:spcPts val="400"/>
+                <a:spcPts val="200"/>
               </a:spcBef>
             </a:pPr>
             <a:r>
-              <a:rPr sz="1400" b="0" i="0">
+              <a:rPr sz="1300" b="0" i="0">
                 <a:solidFill>
                   <a:srgbClr val="333333"/>
                 </a:solidFill>
                 <a:latin typeface="Calibri"/>
               </a:rPr>
-              <a:t>Entregable: ADR-001: decisión de modelo de servicio + matriz de comparación aplicada al dominio</a:t>
-            </a:r>
-          </a:p>
-        </p:txBody>
-      </p:sp>
-      <p:sp>
-        <p:nvSpPr>
-          <p:cNvPr id="8" name="Rounded Rectangle 7"/>
+              <a:t>Copia o describe tu boceto a una IA y pidele el codigo Mermaid: «convierte este diagrama a Mermaid usando flowchart». Revisa el resultado: la IA acierta la sintaxis, no tu modelo.</a:t>
+            </a:r>
+          </a:p>
+        </p:txBody>
+      </p:sp>
+      <p:sp>
+        <p:nvSpPr>
+          <p:cNvPr id="14" name="Rounded Rectangle 13"/>
           <p:cNvSpPr/>
           <p:nvPr/>
         </p:nvSpPr>
         <p:spPr>
           <a:xfrm>
-            <a:off x="457200" y="2478024"/>
+            <a:off x="457200" y="3945636"/>
             <a:ext cx="11277295" cy="1051560"/>
           </a:xfrm>
           <a:prstGeom prst="roundRect">
@@ -3734,7 +3974,7 @@
             </a:avLst>
           </a:prstGeom>
           <a:solidFill>
-            <a:srgbClr val="FFF8E1"/>
+            <a:srgbClr val="F2F2F2"/>
           </a:solidFill>
           <a:ln>
             <a:noFill/>
@@ -3764,20 +4004,22 @@
       </p:sp>
       <p:sp>
         <p:nvSpPr>
-          <p:cNvPr id="9" name="Rectangle 8"/>
+          <p:cNvPr id="15" name="Rounded Rectangle 14"/>
           <p:cNvSpPr/>
           <p:nvPr/>
         </p:nvSpPr>
         <p:spPr>
           <a:xfrm>
-            <a:off x="457200" y="2478024"/>
-            <a:ext cx="128016" cy="1051560"/>
-          </a:xfrm>
-          <a:prstGeom prst="rect">
-            <a:avLst/>
+            <a:off x="594360" y="4251960"/>
+            <a:ext cx="438912" cy="438912"/>
+          </a:xfrm>
+          <a:prstGeom prst="roundRect">
+            <a:avLst>
+              <a:gd name="adj" fmla="val 12000"/>
+            </a:avLst>
           </a:prstGeom>
           <a:solidFill>
-            <a:srgbClr val="FFD000"/>
+            <a:srgbClr val="095292"/>
           </a:solidFill>
           <a:ln>
             <a:noFill/>
@@ -3807,14 +4049,14 @@
       </p:sp>
       <p:sp>
         <p:nvSpPr>
-          <p:cNvPr id="10" name="TextBox 9"/>
+          <p:cNvPr id="16" name="TextBox 15"/>
           <p:cNvSpPr txBox="1"/>
           <p:nvPr/>
         </p:nvSpPr>
         <p:spPr>
           <a:xfrm>
-            <a:off x="777240" y="2615184"/>
-            <a:ext cx="10774375" cy="822959"/>
+            <a:off x="594360" y="4251960"/>
+            <a:ext cx="438912" cy="438912"/>
           </a:xfrm>
           <a:prstGeom prst="rect">
             <a:avLst/>
@@ -3822,48 +4064,79 @@
           <a:noFill/>
         </p:spPr>
         <p:txBody>
-          <a:bodyPr wrap="square">
-            <a:spAutoFit/>
-          </a:bodyPr>
-          <a:lstStyle/>
-          <a:p>
-            <a:r>
-              <a:rPr sz="1200" b="1" i="0">
-                <a:solidFill>
-                  <a:srgbClr val="FFD000"/>
-                </a:solidFill>
-                <a:latin typeface="Calibri"/>
-              </a:rPr>
-              <a:t>Aclaración</a:t>
+          <a:bodyPr wrap="square" anchor="ctr"/>
+          <a:lstStyle/>
+          <a:p>
+            <a:pPr algn="ctr"/>
+            <a:r>
+              <a:rPr sz="1600" b="1" i="0">
+                <a:solidFill>
+                  <a:srgbClr val="FFFFFF"/>
+                </a:solidFill>
+                <a:latin typeface="Calibri"/>
+              </a:rPr>
+              <a:t>3</a:t>
+            </a:r>
+          </a:p>
+        </p:txBody>
+      </p:sp>
+      <p:sp>
+        <p:nvSpPr>
+          <p:cNvPr id="17" name="TextBox 16"/>
+          <p:cNvSpPr txBox="1"/>
+          <p:nvPr/>
+        </p:nvSpPr>
+        <p:spPr>
+          <a:xfrm>
+            <a:off x="1188720" y="4037076"/>
+            <a:ext cx="10271455" cy="886968"/>
+          </a:xfrm>
+          <a:prstGeom prst="rect">
+            <a:avLst/>
+          </a:prstGeom>
+          <a:noFill/>
+        </p:spPr>
+        <p:txBody>
+          <a:bodyPr wrap="square" anchor="ctr"/>
+          <a:lstStyle/>
+          <a:p>
+            <a:r>
+              <a:rPr sz="1500" b="1" i="0">
+                <a:solidFill>
+                  <a:srgbClr val="095292"/>
+                </a:solidFill>
+                <a:latin typeface="Calibri"/>
+              </a:rPr>
+              <a:t>Pega y renderiza en ExamLab</a:t>
             </a:r>
           </a:p>
           <a:p>
             <a:pPr>
               <a:spcBef>
-                <a:spcPts val="400"/>
+                <a:spcPts val="200"/>
               </a:spcBef>
             </a:pPr>
             <a:r>
-              <a:rPr sz="1400" b="0" i="0">
+              <a:rPr sz="1300" b="0" i="0">
                 <a:solidFill>
                   <a:srgbClr val="333333"/>
                 </a:solidFill>
                 <a:latin typeface="Calibri"/>
               </a:rPr>
-              <a:t>Subir evidencias al paquete CloudLite (Drive/repo) y a ExamLab (https://uniaj.examlab.workers.dev/) domingo 23:59.</a:t>
-            </a:r>
-          </a:p>
-        </p:txBody>
-      </p:sp>
-      <p:sp>
-        <p:nvSpPr>
-          <p:cNvPr id="11" name="Rounded Rectangle 10"/>
+              <a:t>Pega ese codigo en la caja de texto de la pregunta y mira como lo dibuja la plataforma. Si no renderiza, corrige ahi mismo: lo que se califica es el diagrama renderizado dentro de ExamLab.</a:t>
+            </a:r>
+          </a:p>
+        </p:txBody>
+      </p:sp>
+      <p:sp>
+        <p:nvSpPr>
+          <p:cNvPr id="18" name="Rounded Rectangle 17"/>
           <p:cNvSpPr/>
           <p:nvPr/>
         </p:nvSpPr>
         <p:spPr>
           <a:xfrm>
-            <a:off x="457200" y="3694176"/>
+            <a:off x="457200" y="5088636"/>
             <a:ext cx="11277295" cy="1051560"/>
           </a:xfrm>
           <a:prstGeom prst="roundRect">
@@ -3872,7 +4145,7 @@
             </a:avLst>
           </a:prstGeom>
           <a:solidFill>
-            <a:srgbClr val="FBE4E4"/>
+            <a:srgbClr val="E8F4FA"/>
           </a:solidFill>
           <a:ln>
             <a:noFill/>
@@ -3902,20 +4175,22 @@
       </p:sp>
       <p:sp>
         <p:nvSpPr>
-          <p:cNvPr id="12" name="Rectangle 11"/>
+          <p:cNvPr id="19" name="Rounded Rectangle 18"/>
           <p:cNvSpPr/>
           <p:nvPr/>
         </p:nvSpPr>
         <p:spPr>
           <a:xfrm>
-            <a:off x="457200" y="3694176"/>
-            <a:ext cx="128016" cy="1051560"/>
-          </a:xfrm>
-          <a:prstGeom prst="rect">
-            <a:avLst/>
+            <a:off x="594360" y="5394960"/>
+            <a:ext cx="438912" cy="438912"/>
+          </a:xfrm>
+          <a:prstGeom prst="roundRect">
+            <a:avLst>
+              <a:gd name="adj" fmla="val 12000"/>
+            </a:avLst>
           </a:prstGeom>
           <a:solidFill>
-            <a:srgbClr val="A02030"/>
+            <a:srgbClr val="095292"/>
           </a:solidFill>
           <a:ln>
             <a:noFill/>
@@ -3945,14 +4220,14 @@
       </p:sp>
       <p:sp>
         <p:nvSpPr>
-          <p:cNvPr id="13" name="TextBox 12"/>
+          <p:cNvPr id="20" name="TextBox 19"/>
           <p:cNvSpPr txBox="1"/>
           <p:nvPr/>
         </p:nvSpPr>
         <p:spPr>
           <a:xfrm>
-            <a:off x="777240" y="3831336"/>
-            <a:ext cx="10774375" cy="822959"/>
+            <a:off x="594360" y="5394960"/>
+            <a:ext cx="438912" cy="438912"/>
           </a:xfrm>
           <a:prstGeom prst="rect">
             <a:avLst/>
@@ -3960,42 +4235,73 @@
           <a:noFill/>
         </p:spPr>
         <p:txBody>
-          <a:bodyPr wrap="square">
-            <a:spAutoFit/>
-          </a:bodyPr>
-          <a:lstStyle/>
-          <a:p>
-            <a:r>
-              <a:rPr sz="1200" b="1" i="0">
-                <a:solidFill>
-                  <a:srgbClr val="A02030"/>
-                </a:solidFill>
-                <a:latin typeface="Calibri"/>
-              </a:rPr>
-              <a:t>Atención</a:t>
+          <a:bodyPr wrap="square" anchor="ctr"/>
+          <a:lstStyle/>
+          <a:p>
+            <a:pPr algn="ctr"/>
+            <a:r>
+              <a:rPr sz="1600" b="1" i="0">
+                <a:solidFill>
+                  <a:srgbClr val="FFFFFF"/>
+                </a:solidFill>
+                <a:latin typeface="Calibri"/>
+              </a:rPr>
+              <a:t>4</a:t>
+            </a:r>
+          </a:p>
+        </p:txBody>
+      </p:sp>
+      <p:sp>
+        <p:nvSpPr>
+          <p:cNvPr id="21" name="TextBox 20"/>
+          <p:cNvSpPr txBox="1"/>
+          <p:nvPr/>
+        </p:nvSpPr>
+        <p:spPr>
+          <a:xfrm>
+            <a:off x="1188720" y="5180076"/>
+            <a:ext cx="10271455" cy="886968"/>
+          </a:xfrm>
+          <a:prstGeom prst="rect">
+            <a:avLst/>
+          </a:prstGeom>
+          <a:noFill/>
+        </p:spPr>
+        <p:txBody>
+          <a:bodyPr wrap="square" anchor="ctr"/>
+          <a:lstStyle/>
+          <a:p>
+            <a:r>
+              <a:rPr sz="1500" b="1" i="0">
+                <a:solidFill>
+                  <a:srgbClr val="095292"/>
+                </a:solidFill>
+                <a:latin typeface="Calibri"/>
+              </a:rPr>
+              <a:t>Guarda el PNG para tu PI</a:t>
             </a:r>
           </a:p>
           <a:p>
             <a:pPr>
               <a:spcBef>
-                <a:spcPts val="400"/>
+                <a:spcPts val="200"/>
               </a:spcBef>
             </a:pPr>
             <a:r>
-              <a:rPr sz="1400" b="0" i="0">
+              <a:rPr sz="1300" b="0" i="0">
                 <a:solidFill>
                   <a:srgbClr val="333333"/>
                 </a:solidFill>
                 <a:latin typeface="Calibri"/>
               </a:rPr>
-              <a:t>Sin cloud de pago ni instalaciones obligatorias de hipervisores/Docker Desktop.</a:t>
-            </a:r>
-          </a:p>
-        </p:txBody>
-      </p:sp>
-      <p:sp>
-        <p:nvSpPr>
-          <p:cNvPr id="14" name="TextBox 13"/>
+              <a:t>Exporta tambien la imagen a la carpeta de tu Proyecto Integrador. Esa copia es para tu informe; no reemplaza la respuesta en la plataforma.</a:t>
+            </a:r>
+          </a:p>
+        </p:txBody>
+      </p:sp>
+      <p:sp>
+        <p:nvSpPr>
+          <p:cNvPr id="22" name="TextBox 21"/>
           <p:cNvSpPr txBox="1"/>
           <p:nvPr/>
         </p:nvSpPr>
@@ -4063,6 +4369,966 @@
         <p:spPr>
           <a:xfrm>
             <a:off x="0" y="0"/>
+            <a:ext cx="12191695" cy="960120"/>
+          </a:xfrm>
+          <a:prstGeom prst="rect">
+            <a:avLst/>
+          </a:prstGeom>
+          <a:solidFill>
+            <a:srgbClr val="095292"/>
+          </a:solidFill>
+          <a:ln>
+            <a:noFill/>
+          </a:ln>
+        </p:spPr>
+        <p:style>
+          <a:lnRef idx="1">
+            <a:schemeClr val="accent1"/>
+          </a:lnRef>
+          <a:fillRef idx="3">
+            <a:schemeClr val="accent1"/>
+          </a:fillRef>
+          <a:effectRef idx="2">
+            <a:schemeClr val="accent1"/>
+          </a:effectRef>
+          <a:fontRef idx="minor">
+            <a:schemeClr val="lt1"/>
+          </a:fontRef>
+        </p:style>
+        <p:txBody>
+          <a:bodyPr rtlCol="0" anchor="ctr"/>
+          <a:lstStyle/>
+          <a:p>
+            <a:pPr algn="ctr"/>
+          </a:p>
+        </p:txBody>
+      </p:sp>
+      <p:sp>
+        <p:nvSpPr>
+          <p:cNvPr id="3" name="Rectangle 2"/>
+          <p:cNvSpPr/>
+          <p:nvPr/>
+        </p:nvSpPr>
+        <p:spPr>
+          <a:xfrm>
+            <a:off x="0" y="960120"/>
+            <a:ext cx="12191695" cy="41148"/>
+          </a:xfrm>
+          <a:prstGeom prst="rect">
+            <a:avLst/>
+          </a:prstGeom>
+          <a:solidFill>
+            <a:srgbClr val="FFD000"/>
+          </a:solidFill>
+          <a:ln>
+            <a:noFill/>
+          </a:ln>
+        </p:spPr>
+        <p:style>
+          <a:lnRef idx="1">
+            <a:schemeClr val="accent1"/>
+          </a:lnRef>
+          <a:fillRef idx="3">
+            <a:schemeClr val="accent1"/>
+          </a:fillRef>
+          <a:effectRef idx="2">
+            <a:schemeClr val="accent1"/>
+          </a:effectRef>
+          <a:fontRef idx="minor">
+            <a:schemeClr val="lt1"/>
+          </a:fontRef>
+        </p:style>
+        <p:txBody>
+          <a:bodyPr rtlCol="0" anchor="ctr"/>
+          <a:lstStyle/>
+          <a:p>
+            <a:pPr algn="ctr"/>
+          </a:p>
+        </p:txBody>
+      </p:sp>
+      <p:sp>
+        <p:nvSpPr>
+          <p:cNvPr id="4" name="TextBox 3"/>
+          <p:cNvSpPr txBox="1"/>
+          <p:nvPr/>
+        </p:nvSpPr>
+        <p:spPr>
+          <a:xfrm>
+            <a:off x="457200" y="164592"/>
+            <a:ext cx="11277295" cy="502920"/>
+          </a:xfrm>
+          <a:prstGeom prst="rect">
+            <a:avLst/>
+          </a:prstGeom>
+          <a:noFill/>
+        </p:spPr>
+        <p:txBody>
+          <a:bodyPr wrap="square">
+            <a:spAutoFit/>
+          </a:bodyPr>
+          <a:lstStyle/>
+          <a:p>
+            <a:r>
+              <a:rPr sz="2600" b="1" i="0">
+                <a:solidFill>
+                  <a:srgbClr val="FFFFFF"/>
+                </a:solidFill>
+                <a:latin typeface="Calibri"/>
+              </a:rPr>
+              <a:t>Taller PI (paso a paso)</a:t>
+            </a:r>
+          </a:p>
+        </p:txBody>
+      </p:sp>
+      <p:sp>
+        <p:nvSpPr>
+          <p:cNvPr id="5" name="TextBox 4"/>
+          <p:cNvSpPr txBox="1"/>
+          <p:nvPr/>
+        </p:nvSpPr>
+        <p:spPr>
+          <a:xfrm>
+            <a:off x="457200" y="1170432"/>
+            <a:ext cx="11277295" cy="5230368"/>
+          </a:xfrm>
+          <a:prstGeom prst="rect">
+            <a:avLst/>
+          </a:prstGeom>
+          <a:noFill/>
+        </p:spPr>
+        <p:txBody>
+          <a:bodyPr wrap="square">
+            <a:spAutoFit/>
+          </a:bodyPr>
+          <a:lstStyle/>
+          <a:p>
+            <a:pPr>
+              <a:spcAft>
+                <a:spcPts val="800"/>
+              </a:spcAft>
+            </a:pPr>
+            <a:r>
+              <a:rPr sz="1600" b="1" i="0">
+                <a:solidFill>
+                  <a:srgbClr val="333333"/>
+                </a:solidFill>
+                <a:latin typeface="Calibri"/>
+              </a:rPr>
+              <a:t>1.</a:t>
+            </a:r>
+            <a:r>
+              <a:rPr sz="1600" b="0" i="0">
+                <a:solidFill>
+                  <a:srgbClr val="333333"/>
+                </a:solidFill>
+                <a:latin typeface="Calibri"/>
+              </a:rPr>
+              <a:t> Paso 1: relea la ficha y el C4 Context de la Clase 1 y copie en el encabezado del ADR el nombre del dominio y las 4 capacidades ya aprobadas, verificando que sean literalmente las mismas 4 y que no cambia de dominio a mitad de camino, porque una inconsistencia aqui arrastra error en todos los diagramas que siguen.</a:t>
+            </a:r>
+          </a:p>
+          <a:p>
+            <a:pPr>
+              <a:spcAft>
+                <a:spcPts val="800"/>
+              </a:spcAft>
+            </a:pPr>
+            <a:r>
+              <a:rPr sz="1600" b="0" i="0">
+                <a:solidFill>
+                  <a:srgbClr val="333333"/>
+                </a:solidFill>
+                <a:latin typeface="Calibri"/>
+              </a:rPr>
+              <a:t>–   </a:t>
+            </a:r>
+            <a:r>
+              <a:rPr sz="1600" b="1" i="0">
+                <a:solidFill>
+                  <a:srgbClr val="333333"/>
+                </a:solidFill>
+                <a:latin typeface="Calibri"/>
+              </a:rPr>
+              <a:t>2.</a:t>
+            </a:r>
+            <a:r>
+              <a:rPr sz="1600" b="0" i="0">
+                <a:solidFill>
+                  <a:srgbClr val="333333"/>
+                </a:solidFill>
+                <a:latin typeface="Calibri"/>
+              </a:rPr>
+              <a:t> Paso 2: complete la matriz de 4 columnas y 5 filas (control del sistema operativo, esfuerzo de operacion, tiempo hasta la primera demo, costo cualitativo con su driver, portabilidad) puntuando cada celda de 1 a 3 y sumando por columna, verificando que los tres totales de IaaS, PaaS y SaaS sean distintos: si dos empatan, vuelva a puntuar porque el criterio esta mal aplicado; la matriz queda en la seccion Modelo de servicio del informe del PI.</a:t>
+            </a:r>
+          </a:p>
+          <a:p>
+            <a:pPr>
+              <a:spcAft>
+                <a:spcPts val="800"/>
+              </a:spcAft>
+            </a:pPr>
+            <a:r>
+              <a:rPr sz="1600" b="0" i="0">
+                <a:solidFill>
+                  <a:srgbClr val="333333"/>
+                </a:solidFill>
+                <a:latin typeface="Calibri"/>
+              </a:rPr>
+              <a:t>–   </a:t>
+            </a:r>
+            <a:r>
+              <a:rPr sz="1600" b="1" i="0">
+                <a:solidFill>
+                  <a:srgbClr val="333333"/>
+                </a:solidFill>
+                <a:latin typeface="Calibri"/>
+              </a:rPr>
+              <a:t>3.</a:t>
+            </a:r>
+            <a:r>
+              <a:rPr sz="1600" b="0" i="0">
+                <a:solidFill>
+                  <a:srgbClr val="333333"/>
+                </a:solidFill>
+                <a:latin typeface="Calibri"/>
+              </a:rPr>
+              <a:t> Paso 3: redacte el ADR-001 con las 7 secciones obligatorias (titulo, estado, contexto en 3 frases, decision en 1 frase, 2 alternativas descartadas con motivo, 2 consecuencias positivas y 2 negativas, impacto en el PI), verificando que la decision nombre un unico modelo dominante y no un poco de todo, y que cada alternativa descartada explique el motivo en terminos de este dominio y no en teoria.</a:t>
+            </a:r>
+          </a:p>
+          <a:p>
+            <a:pPr>
+              <a:spcAft>
+                <a:spcPts val="800"/>
+              </a:spcAft>
+            </a:pPr>
+            <a:r>
+              <a:rPr sz="1600" b="0" i="0">
+                <a:solidFill>
+                  <a:srgbClr val="333333"/>
+                </a:solidFill>
+                <a:latin typeface="Calibri"/>
+              </a:rPr>
+              <a:t>–   </a:t>
+            </a:r>
+            <a:r>
+              <a:rPr sz="1600" b="1" i="0">
+                <a:solidFill>
+                  <a:srgbClr val="333333"/>
+                </a:solidFill>
+                <a:latin typeface="Calibri"/>
+              </a:rPr>
+              <a:t>4.</a:t>
+            </a:r>
+            <a:r>
+              <a:rPr sz="1600" b="0" i="0">
+                <a:solidFill>
+                  <a:srgbClr val="333333"/>
+                </a:solidFill>
+                <a:latin typeface="Calibri"/>
+              </a:rPr>
+              <a:t> Paso 4: escriba en ExamLab el diagrama Mermaid de responsabilidad compartida con 3 subgrafos (IaaS, PaaS, SaaS), 4 capas por subgrafo y un nodo final de decision, verificando al renderizar que se cuentan 12 nodos de capa, que los nodos gestionados por el equipo y por el proveedor quedan pintados distinto y que la caja de decision cita el mismo modelo del ADR-001.</a:t>
+            </a:r>
+          </a:p>
+          <a:p>
+            <a:pPr>
+              <a:spcAft>
+                <a:spcPts val="800"/>
+              </a:spcAft>
+            </a:pPr>
+            <a:r>
+              <a:rPr sz="1600" b="0" i="0">
+                <a:solidFill>
+                  <a:srgbClr val="333333"/>
+                </a:solidFill>
+                <a:latin typeface="Calibri"/>
+              </a:rPr>
+              <a:t>–   </a:t>
+            </a:r>
+            <a:r>
+              <a:rPr sz="1600" b="1" i="0">
+                <a:solidFill>
+                  <a:srgbClr val="333333"/>
+                </a:solidFill>
+                <a:latin typeface="Calibri"/>
+              </a:rPr>
+              <a:t>5.</a:t>
+            </a:r>
+            <a:r>
+              <a:rPr sz="1600" b="0" i="0">
+                <a:solidFill>
+                  <a:srgbClr val="333333"/>
+                </a:solidFill>
+                <a:latin typeface="Calibri"/>
+              </a:rPr>
+              <a:t> Paso 5: pegue matriz, ADR-001 y diagrama en las 5 preguntas del taller, actualice la seccion Modelo de servicio del informe con el mismo texto del ADR y suba todo a ExamLab (modulo Talleres) antes del domingo 23:59, verificando que el modelo elegido se pueda demostrar sin tarjeta de credito ni cloud de pago.</a:t>
+            </a:r>
+          </a:p>
+        </p:txBody>
+      </p:sp>
+      <p:sp>
+        <p:nvSpPr>
+          <p:cNvPr id="6" name="TextBox 5"/>
+          <p:cNvSpPr txBox="1"/>
+          <p:nvPr/>
+        </p:nvSpPr>
+        <p:spPr>
+          <a:xfrm>
+            <a:off x="11185855" y="6473952"/>
+            <a:ext cx="640080" cy="274320"/>
+          </a:xfrm>
+          <a:prstGeom prst="rect">
+            <a:avLst/>
+          </a:prstGeom>
+          <a:noFill/>
+        </p:spPr>
+        <p:txBody>
+          <a:bodyPr wrap="square">
+            <a:spAutoFit/>
+          </a:bodyPr>
+          <a:lstStyle/>
+          <a:p>
+            <a:pPr algn="r"/>
+            <a:r>
+              <a:rPr sz="1100" b="0" i="0">
+                <a:solidFill>
+                  <a:srgbClr val="666666"/>
+                </a:solidFill>
+                <a:latin typeface="Calibri"/>
+              </a:rPr>
+              <a:t>11</a:t>
+            </a:r>
+          </a:p>
+        </p:txBody>
+      </p:sp>
+    </p:spTree>
+  </p:cSld>
+  <p:clrMapOvr>
+    <a:masterClrMapping/>
+  </p:clrMapOvr>
+</p:sld>
+</file>
+
+<file path=ppt/slides/slide12.xml><?xml version="1.0" encoding="utf-8"?>
+<p:sld xmlns:a="http://schemas.openxmlformats.org/drawingml/2006/main" xmlns:p="http://schemas.openxmlformats.org/presentationml/2006/main" xmlns:r="http://schemas.openxmlformats.org/officeDocument/2006/relationships">
+  <p:cSld>
+    <p:bg>
+      <p:bgPr>
+        <a:solidFill>
+          <a:srgbClr val="FFFFFF"/>
+        </a:solidFill>
+        <a:effectLst/>
+      </p:bgPr>
+    </p:bg>
+    <p:spTree>
+      <p:nvGrpSpPr>
+        <p:cNvPr id="1" name=""/>
+        <p:cNvGrpSpPr/>
+        <p:nvPr/>
+      </p:nvGrpSpPr>
+      <p:grpSpPr/>
+      <p:sp>
+        <p:nvSpPr>
+          <p:cNvPr id="2" name="Rectangle 1"/>
+          <p:cNvSpPr/>
+          <p:nvPr/>
+        </p:nvSpPr>
+        <p:spPr>
+          <a:xfrm>
+            <a:off x="0" y="0"/>
+            <a:ext cx="12191695" cy="960120"/>
+          </a:xfrm>
+          <a:prstGeom prst="rect">
+            <a:avLst/>
+          </a:prstGeom>
+          <a:solidFill>
+            <a:srgbClr val="095292"/>
+          </a:solidFill>
+          <a:ln>
+            <a:noFill/>
+          </a:ln>
+        </p:spPr>
+        <p:style>
+          <a:lnRef idx="1">
+            <a:schemeClr val="accent1"/>
+          </a:lnRef>
+          <a:fillRef idx="3">
+            <a:schemeClr val="accent1"/>
+          </a:fillRef>
+          <a:effectRef idx="2">
+            <a:schemeClr val="accent1"/>
+          </a:effectRef>
+          <a:fontRef idx="minor">
+            <a:schemeClr val="lt1"/>
+          </a:fontRef>
+        </p:style>
+        <p:txBody>
+          <a:bodyPr rtlCol="0" anchor="ctr"/>
+          <a:lstStyle/>
+          <a:p>
+            <a:pPr algn="ctr"/>
+          </a:p>
+        </p:txBody>
+      </p:sp>
+      <p:sp>
+        <p:nvSpPr>
+          <p:cNvPr id="3" name="Rectangle 2"/>
+          <p:cNvSpPr/>
+          <p:nvPr/>
+        </p:nvSpPr>
+        <p:spPr>
+          <a:xfrm>
+            <a:off x="0" y="960120"/>
+            <a:ext cx="12191695" cy="41148"/>
+          </a:xfrm>
+          <a:prstGeom prst="rect">
+            <a:avLst/>
+          </a:prstGeom>
+          <a:solidFill>
+            <a:srgbClr val="FFD000"/>
+          </a:solidFill>
+          <a:ln>
+            <a:noFill/>
+          </a:ln>
+        </p:spPr>
+        <p:style>
+          <a:lnRef idx="1">
+            <a:schemeClr val="accent1"/>
+          </a:lnRef>
+          <a:fillRef idx="3">
+            <a:schemeClr val="accent1"/>
+          </a:fillRef>
+          <a:effectRef idx="2">
+            <a:schemeClr val="accent1"/>
+          </a:effectRef>
+          <a:fontRef idx="minor">
+            <a:schemeClr val="lt1"/>
+          </a:fontRef>
+        </p:style>
+        <p:txBody>
+          <a:bodyPr rtlCol="0" anchor="ctr"/>
+          <a:lstStyle/>
+          <a:p>
+            <a:pPr algn="ctr"/>
+          </a:p>
+        </p:txBody>
+      </p:sp>
+      <p:sp>
+        <p:nvSpPr>
+          <p:cNvPr id="4" name="TextBox 3"/>
+          <p:cNvSpPr txBox="1"/>
+          <p:nvPr/>
+        </p:nvSpPr>
+        <p:spPr>
+          <a:xfrm>
+            <a:off x="457200" y="164592"/>
+            <a:ext cx="11277295" cy="502920"/>
+          </a:xfrm>
+          <a:prstGeom prst="rect">
+            <a:avLst/>
+          </a:prstGeom>
+          <a:noFill/>
+        </p:spPr>
+        <p:txBody>
+          <a:bodyPr wrap="square">
+            <a:spAutoFit/>
+          </a:bodyPr>
+          <a:lstStyle/>
+          <a:p>
+            <a:r>
+              <a:rPr sz="2600" b="1" i="0">
+                <a:solidFill>
+                  <a:srgbClr val="FFFFFF"/>
+                </a:solidFill>
+                <a:latin typeface="Calibri"/>
+              </a:rPr>
+              <a:t>Para continuar (PI)</a:t>
+            </a:r>
+          </a:p>
+        </p:txBody>
+      </p:sp>
+      <p:sp>
+        <p:nvSpPr>
+          <p:cNvPr id="5" name="Rounded Rectangle 4"/>
+          <p:cNvSpPr/>
+          <p:nvPr/>
+        </p:nvSpPr>
+        <p:spPr>
+          <a:xfrm>
+            <a:off x="457200" y="1261872"/>
+            <a:ext cx="11277295" cy="1051560"/>
+          </a:xfrm>
+          <a:prstGeom prst="roundRect">
+            <a:avLst>
+              <a:gd name="adj" fmla="val 12000"/>
+            </a:avLst>
+          </a:prstGeom>
+          <a:solidFill>
+            <a:srgbClr val="E8F4FA"/>
+          </a:solidFill>
+          <a:ln>
+            <a:noFill/>
+          </a:ln>
+        </p:spPr>
+        <p:style>
+          <a:lnRef idx="1">
+            <a:schemeClr val="accent1"/>
+          </a:lnRef>
+          <a:fillRef idx="3">
+            <a:schemeClr val="accent1"/>
+          </a:fillRef>
+          <a:effectRef idx="2">
+            <a:schemeClr val="accent1"/>
+          </a:effectRef>
+          <a:fontRef idx="minor">
+            <a:schemeClr val="lt1"/>
+          </a:fontRef>
+        </p:style>
+        <p:txBody>
+          <a:bodyPr rtlCol="0" anchor="ctr"/>
+          <a:lstStyle/>
+          <a:p>
+            <a:pPr algn="ctr"/>
+          </a:p>
+        </p:txBody>
+      </p:sp>
+      <p:sp>
+        <p:nvSpPr>
+          <p:cNvPr id="6" name="Rectangle 5"/>
+          <p:cNvSpPr/>
+          <p:nvPr/>
+        </p:nvSpPr>
+        <p:spPr>
+          <a:xfrm>
+            <a:off x="457200" y="1261872"/>
+            <a:ext cx="128016" cy="1051560"/>
+          </a:xfrm>
+          <a:prstGeom prst="rect">
+            <a:avLst/>
+          </a:prstGeom>
+          <a:solidFill>
+            <a:srgbClr val="269CCB"/>
+          </a:solidFill>
+          <a:ln>
+            <a:noFill/>
+          </a:ln>
+        </p:spPr>
+        <p:style>
+          <a:lnRef idx="1">
+            <a:schemeClr val="accent1"/>
+          </a:lnRef>
+          <a:fillRef idx="3">
+            <a:schemeClr val="accent1"/>
+          </a:fillRef>
+          <a:effectRef idx="2">
+            <a:schemeClr val="accent1"/>
+          </a:effectRef>
+          <a:fontRef idx="minor">
+            <a:schemeClr val="lt1"/>
+          </a:fontRef>
+        </p:style>
+        <p:txBody>
+          <a:bodyPr rtlCol="0" anchor="ctr"/>
+          <a:lstStyle/>
+          <a:p>
+            <a:pPr algn="ctr"/>
+          </a:p>
+        </p:txBody>
+      </p:sp>
+      <p:sp>
+        <p:nvSpPr>
+          <p:cNvPr id="7" name="TextBox 6"/>
+          <p:cNvSpPr txBox="1"/>
+          <p:nvPr/>
+        </p:nvSpPr>
+        <p:spPr>
+          <a:xfrm>
+            <a:off x="777240" y="1399031"/>
+            <a:ext cx="10774375" cy="822959"/>
+          </a:xfrm>
+          <a:prstGeom prst="rect">
+            <a:avLst/>
+          </a:prstGeom>
+          <a:noFill/>
+        </p:spPr>
+        <p:txBody>
+          <a:bodyPr wrap="square">
+            <a:spAutoFit/>
+          </a:bodyPr>
+          <a:lstStyle/>
+          <a:p>
+            <a:r>
+              <a:rPr sz="1200" b="1" i="0">
+                <a:solidFill>
+                  <a:srgbClr val="269CCB"/>
+                </a:solidFill>
+                <a:latin typeface="Calibri"/>
+              </a:rPr>
+              <a:t>Info</a:t>
+            </a:r>
+          </a:p>
+          <a:p>
+            <a:pPr>
+              <a:spcBef>
+                <a:spcPts val="400"/>
+              </a:spcBef>
+            </a:pPr>
+            <a:r>
+              <a:rPr sz="1400" b="0" i="0">
+                <a:solidFill>
+                  <a:srgbClr val="333333"/>
+                </a:solidFill>
+                <a:latin typeface="Calibri"/>
+              </a:rPr>
+              <a:t>Entregable: ADR-001: decisión de modelo de servicio + matriz de comparación aplicada al dominio</a:t>
+            </a:r>
+          </a:p>
+        </p:txBody>
+      </p:sp>
+      <p:sp>
+        <p:nvSpPr>
+          <p:cNvPr id="8" name="Rounded Rectangle 7"/>
+          <p:cNvSpPr/>
+          <p:nvPr/>
+        </p:nvSpPr>
+        <p:spPr>
+          <a:xfrm>
+            <a:off x="457200" y="2478024"/>
+            <a:ext cx="11277295" cy="1051560"/>
+          </a:xfrm>
+          <a:prstGeom prst="roundRect">
+            <a:avLst>
+              <a:gd name="adj" fmla="val 12000"/>
+            </a:avLst>
+          </a:prstGeom>
+          <a:solidFill>
+            <a:srgbClr val="FFF8E1"/>
+          </a:solidFill>
+          <a:ln>
+            <a:noFill/>
+          </a:ln>
+        </p:spPr>
+        <p:style>
+          <a:lnRef idx="1">
+            <a:schemeClr val="accent1"/>
+          </a:lnRef>
+          <a:fillRef idx="3">
+            <a:schemeClr val="accent1"/>
+          </a:fillRef>
+          <a:effectRef idx="2">
+            <a:schemeClr val="accent1"/>
+          </a:effectRef>
+          <a:fontRef idx="minor">
+            <a:schemeClr val="lt1"/>
+          </a:fontRef>
+        </p:style>
+        <p:txBody>
+          <a:bodyPr rtlCol="0" anchor="ctr"/>
+          <a:lstStyle/>
+          <a:p>
+            <a:pPr algn="ctr"/>
+          </a:p>
+        </p:txBody>
+      </p:sp>
+      <p:sp>
+        <p:nvSpPr>
+          <p:cNvPr id="9" name="Rectangle 8"/>
+          <p:cNvSpPr/>
+          <p:nvPr/>
+        </p:nvSpPr>
+        <p:spPr>
+          <a:xfrm>
+            <a:off x="457200" y="2478024"/>
+            <a:ext cx="128016" cy="1051560"/>
+          </a:xfrm>
+          <a:prstGeom prst="rect">
+            <a:avLst/>
+          </a:prstGeom>
+          <a:solidFill>
+            <a:srgbClr val="FFD000"/>
+          </a:solidFill>
+          <a:ln>
+            <a:noFill/>
+          </a:ln>
+        </p:spPr>
+        <p:style>
+          <a:lnRef idx="1">
+            <a:schemeClr val="accent1"/>
+          </a:lnRef>
+          <a:fillRef idx="3">
+            <a:schemeClr val="accent1"/>
+          </a:fillRef>
+          <a:effectRef idx="2">
+            <a:schemeClr val="accent1"/>
+          </a:effectRef>
+          <a:fontRef idx="minor">
+            <a:schemeClr val="lt1"/>
+          </a:fontRef>
+        </p:style>
+        <p:txBody>
+          <a:bodyPr rtlCol="0" anchor="ctr"/>
+          <a:lstStyle/>
+          <a:p>
+            <a:pPr algn="ctr"/>
+          </a:p>
+        </p:txBody>
+      </p:sp>
+      <p:sp>
+        <p:nvSpPr>
+          <p:cNvPr id="10" name="TextBox 9"/>
+          <p:cNvSpPr txBox="1"/>
+          <p:nvPr/>
+        </p:nvSpPr>
+        <p:spPr>
+          <a:xfrm>
+            <a:off x="777240" y="2615184"/>
+            <a:ext cx="10774375" cy="822959"/>
+          </a:xfrm>
+          <a:prstGeom prst="rect">
+            <a:avLst/>
+          </a:prstGeom>
+          <a:noFill/>
+        </p:spPr>
+        <p:txBody>
+          <a:bodyPr wrap="square">
+            <a:spAutoFit/>
+          </a:bodyPr>
+          <a:lstStyle/>
+          <a:p>
+            <a:r>
+              <a:rPr sz="1200" b="1" i="0">
+                <a:solidFill>
+                  <a:srgbClr val="FFD000"/>
+                </a:solidFill>
+                <a:latin typeface="Calibri"/>
+              </a:rPr>
+              <a:t>Aclaración</a:t>
+            </a:r>
+          </a:p>
+          <a:p>
+            <a:pPr>
+              <a:spcBef>
+                <a:spcPts val="400"/>
+              </a:spcBef>
+            </a:pPr>
+            <a:r>
+              <a:rPr sz="1400" b="0" i="0">
+                <a:solidFill>
+                  <a:srgbClr val="333333"/>
+                </a:solidFill>
+                <a:latin typeface="Calibri"/>
+              </a:rPr>
+              <a:t>Subir evidencias al paquete CloudLite (Drive/repo) y a ExamLab (https://uniaj.examlab.workers.dev/) domingo 23:59.</a:t>
+            </a:r>
+          </a:p>
+        </p:txBody>
+      </p:sp>
+      <p:sp>
+        <p:nvSpPr>
+          <p:cNvPr id="11" name="Rounded Rectangle 10"/>
+          <p:cNvSpPr/>
+          <p:nvPr/>
+        </p:nvSpPr>
+        <p:spPr>
+          <a:xfrm>
+            <a:off x="457200" y="3694176"/>
+            <a:ext cx="11277295" cy="1051560"/>
+          </a:xfrm>
+          <a:prstGeom prst="roundRect">
+            <a:avLst>
+              <a:gd name="adj" fmla="val 12000"/>
+            </a:avLst>
+          </a:prstGeom>
+          <a:solidFill>
+            <a:srgbClr val="FBE4E4"/>
+          </a:solidFill>
+          <a:ln>
+            <a:noFill/>
+          </a:ln>
+        </p:spPr>
+        <p:style>
+          <a:lnRef idx="1">
+            <a:schemeClr val="accent1"/>
+          </a:lnRef>
+          <a:fillRef idx="3">
+            <a:schemeClr val="accent1"/>
+          </a:fillRef>
+          <a:effectRef idx="2">
+            <a:schemeClr val="accent1"/>
+          </a:effectRef>
+          <a:fontRef idx="minor">
+            <a:schemeClr val="lt1"/>
+          </a:fontRef>
+        </p:style>
+        <p:txBody>
+          <a:bodyPr rtlCol="0" anchor="ctr"/>
+          <a:lstStyle/>
+          <a:p>
+            <a:pPr algn="ctr"/>
+          </a:p>
+        </p:txBody>
+      </p:sp>
+      <p:sp>
+        <p:nvSpPr>
+          <p:cNvPr id="12" name="Rectangle 11"/>
+          <p:cNvSpPr/>
+          <p:nvPr/>
+        </p:nvSpPr>
+        <p:spPr>
+          <a:xfrm>
+            <a:off x="457200" y="3694176"/>
+            <a:ext cx="128016" cy="1051560"/>
+          </a:xfrm>
+          <a:prstGeom prst="rect">
+            <a:avLst/>
+          </a:prstGeom>
+          <a:solidFill>
+            <a:srgbClr val="A02030"/>
+          </a:solidFill>
+          <a:ln>
+            <a:noFill/>
+          </a:ln>
+        </p:spPr>
+        <p:style>
+          <a:lnRef idx="1">
+            <a:schemeClr val="accent1"/>
+          </a:lnRef>
+          <a:fillRef idx="3">
+            <a:schemeClr val="accent1"/>
+          </a:fillRef>
+          <a:effectRef idx="2">
+            <a:schemeClr val="accent1"/>
+          </a:effectRef>
+          <a:fontRef idx="minor">
+            <a:schemeClr val="lt1"/>
+          </a:fontRef>
+        </p:style>
+        <p:txBody>
+          <a:bodyPr rtlCol="0" anchor="ctr"/>
+          <a:lstStyle/>
+          <a:p>
+            <a:pPr algn="ctr"/>
+          </a:p>
+        </p:txBody>
+      </p:sp>
+      <p:sp>
+        <p:nvSpPr>
+          <p:cNvPr id="13" name="TextBox 12"/>
+          <p:cNvSpPr txBox="1"/>
+          <p:nvPr/>
+        </p:nvSpPr>
+        <p:spPr>
+          <a:xfrm>
+            <a:off x="777240" y="3831336"/>
+            <a:ext cx="10774375" cy="822959"/>
+          </a:xfrm>
+          <a:prstGeom prst="rect">
+            <a:avLst/>
+          </a:prstGeom>
+          <a:noFill/>
+        </p:spPr>
+        <p:txBody>
+          <a:bodyPr wrap="square">
+            <a:spAutoFit/>
+          </a:bodyPr>
+          <a:lstStyle/>
+          <a:p>
+            <a:r>
+              <a:rPr sz="1200" b="1" i="0">
+                <a:solidFill>
+                  <a:srgbClr val="A02030"/>
+                </a:solidFill>
+                <a:latin typeface="Calibri"/>
+              </a:rPr>
+              <a:t>Atención</a:t>
+            </a:r>
+          </a:p>
+          <a:p>
+            <a:pPr>
+              <a:spcBef>
+                <a:spcPts val="400"/>
+              </a:spcBef>
+            </a:pPr>
+            <a:r>
+              <a:rPr sz="1400" b="0" i="0">
+                <a:solidFill>
+                  <a:srgbClr val="333333"/>
+                </a:solidFill>
+                <a:latin typeface="Calibri"/>
+              </a:rPr>
+              <a:t>Sin cloud de pago ni instalaciones obligatorias de hipervisores/Docker Desktop.</a:t>
+            </a:r>
+          </a:p>
+        </p:txBody>
+      </p:sp>
+      <p:sp>
+        <p:nvSpPr>
+          <p:cNvPr id="14" name="TextBox 13"/>
+          <p:cNvSpPr txBox="1"/>
+          <p:nvPr/>
+        </p:nvSpPr>
+        <p:spPr>
+          <a:xfrm>
+            <a:off x="11185855" y="6473952"/>
+            <a:ext cx="640080" cy="274320"/>
+          </a:xfrm>
+          <a:prstGeom prst="rect">
+            <a:avLst/>
+          </a:prstGeom>
+          <a:noFill/>
+        </p:spPr>
+        <p:txBody>
+          <a:bodyPr wrap="square">
+            <a:spAutoFit/>
+          </a:bodyPr>
+          <a:lstStyle/>
+          <a:p>
+            <a:pPr algn="r"/>
+            <a:r>
+              <a:rPr sz="1100" b="0" i="0">
+                <a:solidFill>
+                  <a:srgbClr val="666666"/>
+                </a:solidFill>
+                <a:latin typeface="Calibri"/>
+              </a:rPr>
+              <a:t>12</a:t>
+            </a:r>
+          </a:p>
+        </p:txBody>
+      </p:sp>
+    </p:spTree>
+  </p:cSld>
+  <p:clrMapOvr>
+    <a:masterClrMapping/>
+  </p:clrMapOvr>
+</p:sld>
+</file>
+
+<file path=ppt/slides/slide13.xml><?xml version="1.0" encoding="utf-8"?>
+<p:sld xmlns:a="http://schemas.openxmlformats.org/drawingml/2006/main" xmlns:p="http://schemas.openxmlformats.org/presentationml/2006/main" xmlns:r="http://schemas.openxmlformats.org/officeDocument/2006/relationships">
+  <p:cSld>
+    <p:bg>
+      <p:bgPr>
+        <a:solidFill>
+          <a:srgbClr val="FFFFFF"/>
+        </a:solidFill>
+        <a:effectLst/>
+      </p:bgPr>
+    </p:bg>
+    <p:spTree>
+      <p:nvGrpSpPr>
+        <p:cNvPr id="1" name=""/>
+        <p:cNvGrpSpPr/>
+        <p:nvPr/>
+      </p:nvGrpSpPr>
+      <p:grpSpPr/>
+      <p:sp>
+        <p:nvSpPr>
+          <p:cNvPr id="2" name="Rectangle 1"/>
+          <p:cNvSpPr/>
+          <p:nvPr/>
+        </p:nvSpPr>
+        <p:spPr>
+          <a:xfrm>
+            <a:off x="0" y="0"/>
             <a:ext cx="12191695" cy="164592"/>
           </a:xfrm>
           <a:prstGeom prst="rect">
@@ -6722,7 +7988,7 @@
         <p:spPr>
           <a:xfrm>
             <a:off x="0" y="0"/>
-            <a:ext cx="12191695" cy="960120"/>
+            <a:ext cx="12191695" cy="1170432"/>
           </a:xfrm>
           <a:prstGeom prst="rect">
             <a:avLst/>
@@ -6764,7 +8030,7 @@
         </p:nvSpPr>
         <p:spPr>
           <a:xfrm>
-            <a:off x="0" y="960120"/>
+            <a:off x="0" y="1170432"/>
             <a:ext cx="12191695" cy="41148"/>
           </a:xfrm>
           <a:prstGeom prst="rect">
@@ -6808,7 +8074,7 @@
         <p:spPr>
           <a:xfrm>
             <a:off x="457200" y="164592"/>
-            <a:ext cx="11277295" cy="502920"/>
+            <a:ext cx="11277295" cy="384048"/>
           </a:xfrm>
           <a:prstGeom prst="rect">
             <a:avLst/>
@@ -6828,7 +8094,7 @@
                 </a:solidFill>
                 <a:latin typeface="Calibri"/>
               </a:rPr>
-              <a:t>Taller PI (paso a paso)</a:t>
+              <a:t>Herramientas de hoy</a:t>
             </a:r>
           </a:p>
         </p:txBody>
@@ -6841,8 +8107,8 @@
         </p:nvSpPr>
         <p:spPr>
           <a:xfrm>
-            <a:off x="457200" y="1170432"/>
-            <a:ext cx="11277295" cy="5230368"/>
+            <a:off x="457200" y="566928"/>
+            <a:ext cx="11277295" cy="411480"/>
           </a:xfrm>
           <a:prstGeom prst="rect">
             <a:avLst/>
@@ -6855,171 +8121,837 @@
           </a:bodyPr>
           <a:lstStyle/>
           <a:p>
-            <a:pPr>
-              <a:spcAft>
-                <a:spcPts val="800"/>
-              </a:spcAft>
+            <a:r>
+              <a:rPr sz="1400" b="0" i="0">
+                <a:solidFill>
+                  <a:srgbClr val="B8D8EE"/>
+                </a:solidFill>
+                <a:latin typeface="Calibri"/>
+              </a:rPr>
+              <a:t>Gratis · navegador o free tier · sin cuenta de pago</a:t>
+            </a:r>
+          </a:p>
+        </p:txBody>
+      </p:sp>
+      <p:sp>
+        <p:nvSpPr>
+          <p:cNvPr id="6" name="Rounded Rectangle 5"/>
+          <p:cNvSpPr/>
+          <p:nvPr/>
+        </p:nvSpPr>
+        <p:spPr>
+          <a:xfrm>
+            <a:off x="457200" y="1591056"/>
+            <a:ext cx="3624986" cy="2299716"/>
+          </a:xfrm>
+          <a:prstGeom prst="roundRect">
+            <a:avLst>
+              <a:gd name="adj" fmla="val 12000"/>
+            </a:avLst>
+          </a:prstGeom>
+          <a:solidFill>
+            <a:srgbClr val="F2F2F2"/>
+          </a:solidFill>
+          <a:ln>
+            <a:noFill/>
+          </a:ln>
+        </p:spPr>
+        <p:style>
+          <a:lnRef idx="1">
+            <a:schemeClr val="accent1"/>
+          </a:lnRef>
+          <a:fillRef idx="3">
+            <a:schemeClr val="accent1"/>
+          </a:fillRef>
+          <a:effectRef idx="2">
+            <a:schemeClr val="accent1"/>
+          </a:effectRef>
+          <a:fontRef idx="minor">
+            <a:schemeClr val="lt1"/>
+          </a:fontRef>
+        </p:style>
+        <p:txBody>
+          <a:bodyPr rtlCol="0" anchor="ctr"/>
+          <a:lstStyle/>
+          <a:p>
+            <a:pPr algn="ctr"/>
+          </a:p>
+        </p:txBody>
+      </p:sp>
+      <p:sp>
+        <p:nvSpPr>
+          <p:cNvPr id="7" name="Rectangle 6"/>
+          <p:cNvSpPr/>
+          <p:nvPr/>
+        </p:nvSpPr>
+        <p:spPr>
+          <a:xfrm>
+            <a:off x="457200" y="1591056"/>
+            <a:ext cx="3624986" cy="64008"/>
+          </a:xfrm>
+          <a:prstGeom prst="rect">
+            <a:avLst/>
+          </a:prstGeom>
+          <a:solidFill>
+            <a:srgbClr val="095292"/>
+          </a:solidFill>
+          <a:ln>
+            <a:noFill/>
+          </a:ln>
+        </p:spPr>
+        <p:style>
+          <a:lnRef idx="1">
+            <a:schemeClr val="accent1"/>
+          </a:lnRef>
+          <a:fillRef idx="3">
+            <a:schemeClr val="accent1"/>
+          </a:fillRef>
+          <a:effectRef idx="2">
+            <a:schemeClr val="accent1"/>
+          </a:effectRef>
+          <a:fontRef idx="minor">
+            <a:schemeClr val="lt1"/>
+          </a:fontRef>
+        </p:style>
+        <p:txBody>
+          <a:bodyPr rtlCol="0" anchor="ctr"/>
+          <a:lstStyle/>
+          <a:p>
+            <a:pPr algn="ctr"/>
+          </a:p>
+        </p:txBody>
+      </p:sp>
+      <p:sp>
+        <p:nvSpPr>
+          <p:cNvPr id="8" name="Rectangle 7"/>
+          <p:cNvSpPr/>
+          <p:nvPr/>
+        </p:nvSpPr>
+        <p:spPr>
+          <a:xfrm>
+            <a:off x="457200" y="1655064"/>
+            <a:ext cx="3624986" cy="27432"/>
+          </a:xfrm>
+          <a:prstGeom prst="rect">
+            <a:avLst/>
+          </a:prstGeom>
+          <a:solidFill>
+            <a:srgbClr val="FFD000"/>
+          </a:solidFill>
+          <a:ln>
+            <a:noFill/>
+          </a:ln>
+        </p:spPr>
+        <p:style>
+          <a:lnRef idx="1">
+            <a:schemeClr val="accent1"/>
+          </a:lnRef>
+          <a:fillRef idx="3">
+            <a:schemeClr val="accent1"/>
+          </a:fillRef>
+          <a:effectRef idx="2">
+            <a:schemeClr val="accent1"/>
+          </a:effectRef>
+          <a:fontRef idx="minor">
+            <a:schemeClr val="lt1"/>
+          </a:fontRef>
+        </p:style>
+        <p:txBody>
+          <a:bodyPr rtlCol="0" anchor="ctr"/>
+          <a:lstStyle/>
+          <a:p>
+            <a:pPr algn="ctr"/>
+          </a:p>
+        </p:txBody>
+      </p:sp>
+      <p:pic>
+        <p:nvPicPr>
+          <p:cNvPr id="9" name="Picture 8" descr="google_docs.png"/>
+          <p:cNvPicPr>
+            <a:picLocks noChangeAspect="1"/>
+          </p:cNvPicPr>
+          <p:nvPr/>
+        </p:nvPicPr>
+        <p:blipFill>
+          <a:blip r:embed="rId2"/>
+          <a:stretch>
+            <a:fillRect/>
+          </a:stretch>
+        </p:blipFill>
+        <p:spPr>
+          <a:xfrm>
+            <a:off x="1659331" y="1847087"/>
+            <a:ext cx="1220724" cy="1220724"/>
+          </a:xfrm>
+          <a:prstGeom prst="rect">
+            <a:avLst/>
+          </a:prstGeom>
+        </p:spPr>
+      </p:pic>
+      <p:sp>
+        <p:nvSpPr>
+          <p:cNvPr id="10" name="TextBox 9"/>
+          <p:cNvSpPr txBox="1"/>
+          <p:nvPr/>
+        </p:nvSpPr>
+        <p:spPr>
+          <a:xfrm>
+            <a:off x="530352" y="3159251"/>
+            <a:ext cx="3478682" cy="621792"/>
+          </a:xfrm>
+          <a:prstGeom prst="rect">
+            <a:avLst/>
+          </a:prstGeom>
+          <a:noFill/>
+        </p:spPr>
+        <p:txBody>
+          <a:bodyPr wrap="square" anchor="t"/>
+          <a:lstStyle/>
+          <a:p>
+            <a:pPr algn="ctr"/>
+            <a:r>
+              <a:rPr sz="1300" b="1" i="0">
+                <a:solidFill>
+                  <a:srgbClr val="095292"/>
+                </a:solidFill>
+                <a:latin typeface="Calibri"/>
+              </a:rPr>
+              <a:t>Google Docs</a:t>
+            </a:r>
+          </a:p>
+          <a:p>
+            <a:pPr algn="ctr">
+              <a:spcBef>
+                <a:spcPts val="200"/>
+              </a:spcBef>
             </a:pPr>
             <a:r>
-              <a:rPr sz="1600" b="1" i="0">
-                <a:solidFill>
-                  <a:srgbClr val="333333"/>
-                </a:solidFill>
-                <a:latin typeface="Calibri"/>
-              </a:rPr>
-              <a:t>1.</a:t>
-            </a:r>
-            <a:r>
-              <a:rPr sz="1600" b="0" i="0">
-                <a:solidFill>
-                  <a:srgbClr val="333333"/>
-                </a:solidFill>
-                <a:latin typeface="Calibri"/>
-              </a:rPr>
-              <a:t> Paso 1: relea la ficha y el C4 Context de la Clase 1 y copie en el encabezado del ADR el nombre del dominio y las 4 capacidades ya aprobadas, verificando que sean literalmente las mismas 4 y que no cambia de dominio a mitad de camino, porque una inconsistencia aqui arrastra error en todos los diagramas que siguen.</a:t>
-            </a:r>
-          </a:p>
-          <a:p>
-            <a:pPr>
-              <a:spcAft>
-                <a:spcPts val="800"/>
-              </a:spcAft>
+              <a:rPr sz="1000" b="0" i="0">
+                <a:solidFill>
+                  <a:srgbClr val="666666"/>
+                </a:solidFill>
+                <a:latin typeface="Calibri"/>
+              </a:rPr>
+              <a:t>ADR-001</a:t>
+            </a:r>
+          </a:p>
+        </p:txBody>
+      </p:sp>
+      <p:sp>
+        <p:nvSpPr>
+          <p:cNvPr id="11" name="Rounded Rectangle 10"/>
+          <p:cNvSpPr/>
+          <p:nvPr/>
+        </p:nvSpPr>
+        <p:spPr>
+          <a:xfrm>
+            <a:off x="4283354" y="1591056"/>
+            <a:ext cx="3624986" cy="2299716"/>
+          </a:xfrm>
+          <a:prstGeom prst="roundRect">
+            <a:avLst>
+              <a:gd name="adj" fmla="val 12000"/>
+            </a:avLst>
+          </a:prstGeom>
+          <a:solidFill>
+            <a:srgbClr val="F2F2F2"/>
+          </a:solidFill>
+          <a:ln>
+            <a:noFill/>
+          </a:ln>
+        </p:spPr>
+        <p:style>
+          <a:lnRef idx="1">
+            <a:schemeClr val="accent1"/>
+          </a:lnRef>
+          <a:fillRef idx="3">
+            <a:schemeClr val="accent1"/>
+          </a:fillRef>
+          <a:effectRef idx="2">
+            <a:schemeClr val="accent1"/>
+          </a:effectRef>
+          <a:fontRef idx="minor">
+            <a:schemeClr val="lt1"/>
+          </a:fontRef>
+        </p:style>
+        <p:txBody>
+          <a:bodyPr rtlCol="0" anchor="ctr"/>
+          <a:lstStyle/>
+          <a:p>
+            <a:pPr algn="ctr"/>
+          </a:p>
+        </p:txBody>
+      </p:sp>
+      <p:sp>
+        <p:nvSpPr>
+          <p:cNvPr id="12" name="Rectangle 11"/>
+          <p:cNvSpPr/>
+          <p:nvPr/>
+        </p:nvSpPr>
+        <p:spPr>
+          <a:xfrm>
+            <a:off x="4283354" y="1591056"/>
+            <a:ext cx="3624986" cy="64008"/>
+          </a:xfrm>
+          <a:prstGeom prst="rect">
+            <a:avLst/>
+          </a:prstGeom>
+          <a:solidFill>
+            <a:srgbClr val="095292"/>
+          </a:solidFill>
+          <a:ln>
+            <a:noFill/>
+          </a:ln>
+        </p:spPr>
+        <p:style>
+          <a:lnRef idx="1">
+            <a:schemeClr val="accent1"/>
+          </a:lnRef>
+          <a:fillRef idx="3">
+            <a:schemeClr val="accent1"/>
+          </a:fillRef>
+          <a:effectRef idx="2">
+            <a:schemeClr val="accent1"/>
+          </a:effectRef>
+          <a:fontRef idx="minor">
+            <a:schemeClr val="lt1"/>
+          </a:fontRef>
+        </p:style>
+        <p:txBody>
+          <a:bodyPr rtlCol="0" anchor="ctr"/>
+          <a:lstStyle/>
+          <a:p>
+            <a:pPr algn="ctr"/>
+          </a:p>
+        </p:txBody>
+      </p:sp>
+      <p:sp>
+        <p:nvSpPr>
+          <p:cNvPr id="13" name="Rectangle 12"/>
+          <p:cNvSpPr/>
+          <p:nvPr/>
+        </p:nvSpPr>
+        <p:spPr>
+          <a:xfrm>
+            <a:off x="4283354" y="1655064"/>
+            <a:ext cx="3624986" cy="27432"/>
+          </a:xfrm>
+          <a:prstGeom prst="rect">
+            <a:avLst/>
+          </a:prstGeom>
+          <a:solidFill>
+            <a:srgbClr val="FFD000"/>
+          </a:solidFill>
+          <a:ln>
+            <a:noFill/>
+          </a:ln>
+        </p:spPr>
+        <p:style>
+          <a:lnRef idx="1">
+            <a:schemeClr val="accent1"/>
+          </a:lnRef>
+          <a:fillRef idx="3">
+            <a:schemeClr val="accent1"/>
+          </a:fillRef>
+          <a:effectRef idx="2">
+            <a:schemeClr val="accent1"/>
+          </a:effectRef>
+          <a:fontRef idx="minor">
+            <a:schemeClr val="lt1"/>
+          </a:fontRef>
+        </p:style>
+        <p:txBody>
+          <a:bodyPr rtlCol="0" anchor="ctr"/>
+          <a:lstStyle/>
+          <a:p>
+            <a:pPr algn="ctr"/>
+          </a:p>
+        </p:txBody>
+      </p:sp>
+      <p:pic>
+        <p:nvPicPr>
+          <p:cNvPr id="14" name="Picture 13" descr="drawio.png"/>
+          <p:cNvPicPr>
+            <a:picLocks noChangeAspect="1"/>
+          </p:cNvPicPr>
+          <p:nvPr/>
+        </p:nvPicPr>
+        <p:blipFill>
+          <a:blip r:embed="rId3"/>
+          <a:stretch>
+            <a:fillRect/>
+          </a:stretch>
+        </p:blipFill>
+        <p:spPr>
+          <a:xfrm>
+            <a:off x="5485485" y="1847087"/>
+            <a:ext cx="1220724" cy="1220724"/>
+          </a:xfrm>
+          <a:prstGeom prst="rect">
+            <a:avLst/>
+          </a:prstGeom>
+        </p:spPr>
+      </p:pic>
+      <p:sp>
+        <p:nvSpPr>
+          <p:cNvPr id="15" name="TextBox 14"/>
+          <p:cNvSpPr txBox="1"/>
+          <p:nvPr/>
+        </p:nvSpPr>
+        <p:spPr>
+          <a:xfrm>
+            <a:off x="4356506" y="3159251"/>
+            <a:ext cx="3478682" cy="621792"/>
+          </a:xfrm>
+          <a:prstGeom prst="rect">
+            <a:avLst/>
+          </a:prstGeom>
+          <a:noFill/>
+        </p:spPr>
+        <p:txBody>
+          <a:bodyPr wrap="square" anchor="t"/>
+          <a:lstStyle/>
+          <a:p>
+            <a:pPr algn="ctr"/>
+            <a:r>
+              <a:rPr sz="1300" b="1" i="0">
+                <a:solidFill>
+                  <a:srgbClr val="095292"/>
+                </a:solidFill>
+                <a:latin typeface="Calibri"/>
+              </a:rPr>
+              <a:t>draw.io</a:t>
+            </a:r>
+          </a:p>
+          <a:p>
+            <a:pPr algn="ctr">
+              <a:spcBef>
+                <a:spcPts val="200"/>
+              </a:spcBef>
             </a:pPr>
             <a:r>
-              <a:rPr sz="1600" b="0" i="0">
-                <a:solidFill>
-                  <a:srgbClr val="333333"/>
-                </a:solidFill>
-                <a:latin typeface="Calibri"/>
-              </a:rPr>
-              <a:t>–   </a:t>
-            </a:r>
-            <a:r>
-              <a:rPr sz="1600" b="1" i="0">
-                <a:solidFill>
-                  <a:srgbClr val="333333"/>
-                </a:solidFill>
-                <a:latin typeface="Calibri"/>
-              </a:rPr>
-              <a:t>2.</a:t>
-            </a:r>
-            <a:r>
-              <a:rPr sz="1600" b="0" i="0">
-                <a:solidFill>
-                  <a:srgbClr val="333333"/>
-                </a:solidFill>
-                <a:latin typeface="Calibri"/>
-              </a:rPr>
-              <a:t> Paso 2: complete la matriz de 4 columnas y 5 filas (control del sistema operativo, esfuerzo de operacion, tiempo hasta la primera demo, costo cualitativo con su driver, portabilidad) puntuando cada celda de 1 a 3 y sumando por columna, verificando que los tres totales de IaaS, PaaS y SaaS sean distintos: si dos empatan, vuelva a puntuar porque el criterio esta mal aplicado; la matriz queda en la seccion Modelo de servicio del informe del PI.</a:t>
-            </a:r>
-          </a:p>
-          <a:p>
-            <a:pPr>
-              <a:spcAft>
-                <a:spcPts val="800"/>
-              </a:spcAft>
+              <a:rPr sz="1000" b="0" i="0">
+                <a:solidFill>
+                  <a:srgbClr val="666666"/>
+                </a:solidFill>
+                <a:latin typeface="Calibri"/>
+              </a:rPr>
+              <a:t>Matriz de modelos</a:t>
+            </a:r>
+          </a:p>
+        </p:txBody>
+      </p:sp>
+      <p:sp>
+        <p:nvSpPr>
+          <p:cNvPr id="16" name="Rounded Rectangle 15"/>
+          <p:cNvSpPr/>
+          <p:nvPr/>
+        </p:nvSpPr>
+        <p:spPr>
+          <a:xfrm>
+            <a:off x="8109508" y="1591056"/>
+            <a:ext cx="3624986" cy="2299716"/>
+          </a:xfrm>
+          <a:prstGeom prst="roundRect">
+            <a:avLst>
+              <a:gd name="adj" fmla="val 12000"/>
+            </a:avLst>
+          </a:prstGeom>
+          <a:solidFill>
+            <a:srgbClr val="F2F2F2"/>
+          </a:solidFill>
+          <a:ln>
+            <a:noFill/>
+          </a:ln>
+        </p:spPr>
+        <p:style>
+          <a:lnRef idx="1">
+            <a:schemeClr val="accent1"/>
+          </a:lnRef>
+          <a:fillRef idx="3">
+            <a:schemeClr val="accent1"/>
+          </a:fillRef>
+          <a:effectRef idx="2">
+            <a:schemeClr val="accent1"/>
+          </a:effectRef>
+          <a:fontRef idx="minor">
+            <a:schemeClr val="lt1"/>
+          </a:fontRef>
+        </p:style>
+        <p:txBody>
+          <a:bodyPr rtlCol="0" anchor="ctr"/>
+          <a:lstStyle/>
+          <a:p>
+            <a:pPr algn="ctr"/>
+          </a:p>
+        </p:txBody>
+      </p:sp>
+      <p:sp>
+        <p:nvSpPr>
+          <p:cNvPr id="17" name="Rectangle 16"/>
+          <p:cNvSpPr/>
+          <p:nvPr/>
+        </p:nvSpPr>
+        <p:spPr>
+          <a:xfrm>
+            <a:off x="8109508" y="1591056"/>
+            <a:ext cx="3624986" cy="64008"/>
+          </a:xfrm>
+          <a:prstGeom prst="rect">
+            <a:avLst/>
+          </a:prstGeom>
+          <a:solidFill>
+            <a:srgbClr val="095292"/>
+          </a:solidFill>
+          <a:ln>
+            <a:noFill/>
+          </a:ln>
+        </p:spPr>
+        <p:style>
+          <a:lnRef idx="1">
+            <a:schemeClr val="accent1"/>
+          </a:lnRef>
+          <a:fillRef idx="3">
+            <a:schemeClr val="accent1"/>
+          </a:fillRef>
+          <a:effectRef idx="2">
+            <a:schemeClr val="accent1"/>
+          </a:effectRef>
+          <a:fontRef idx="minor">
+            <a:schemeClr val="lt1"/>
+          </a:fontRef>
+        </p:style>
+        <p:txBody>
+          <a:bodyPr rtlCol="0" anchor="ctr"/>
+          <a:lstStyle/>
+          <a:p>
+            <a:pPr algn="ctr"/>
+          </a:p>
+        </p:txBody>
+      </p:sp>
+      <p:sp>
+        <p:nvSpPr>
+          <p:cNvPr id="18" name="Rectangle 17"/>
+          <p:cNvSpPr/>
+          <p:nvPr/>
+        </p:nvSpPr>
+        <p:spPr>
+          <a:xfrm>
+            <a:off x="8109508" y="1655064"/>
+            <a:ext cx="3624986" cy="27432"/>
+          </a:xfrm>
+          <a:prstGeom prst="rect">
+            <a:avLst/>
+          </a:prstGeom>
+          <a:solidFill>
+            <a:srgbClr val="FFD000"/>
+          </a:solidFill>
+          <a:ln>
+            <a:noFill/>
+          </a:ln>
+        </p:spPr>
+        <p:style>
+          <a:lnRef idx="1">
+            <a:schemeClr val="accent1"/>
+          </a:lnRef>
+          <a:fillRef idx="3">
+            <a:schemeClr val="accent1"/>
+          </a:fillRef>
+          <a:effectRef idx="2">
+            <a:schemeClr val="accent1"/>
+          </a:effectRef>
+          <a:fontRef idx="minor">
+            <a:schemeClr val="lt1"/>
+          </a:fontRef>
+        </p:style>
+        <p:txBody>
+          <a:bodyPr rtlCol="0" anchor="ctr"/>
+          <a:lstStyle/>
+          <a:p>
+            <a:pPr algn="ctr"/>
+          </a:p>
+        </p:txBody>
+      </p:sp>
+      <p:pic>
+        <p:nvPicPr>
+          <p:cNvPr id="19" name="Picture 18" descr="mermaid.png"/>
+          <p:cNvPicPr>
+            <a:picLocks noChangeAspect="1"/>
+          </p:cNvPicPr>
+          <p:nvPr/>
+        </p:nvPicPr>
+        <p:blipFill>
+          <a:blip r:embed="rId4"/>
+          <a:stretch>
+            <a:fillRect/>
+          </a:stretch>
+        </p:blipFill>
+        <p:spPr>
+          <a:xfrm>
+            <a:off x="9311640" y="1847087"/>
+            <a:ext cx="1220724" cy="1220724"/>
+          </a:xfrm>
+          <a:prstGeom prst="rect">
+            <a:avLst/>
+          </a:prstGeom>
+        </p:spPr>
+      </p:pic>
+      <p:sp>
+        <p:nvSpPr>
+          <p:cNvPr id="20" name="TextBox 19"/>
+          <p:cNvSpPr txBox="1"/>
+          <p:nvPr/>
+        </p:nvSpPr>
+        <p:spPr>
+          <a:xfrm>
+            <a:off x="8182660" y="3159251"/>
+            <a:ext cx="3478682" cy="621792"/>
+          </a:xfrm>
+          <a:prstGeom prst="rect">
+            <a:avLst/>
+          </a:prstGeom>
+          <a:noFill/>
+        </p:spPr>
+        <p:txBody>
+          <a:bodyPr wrap="square" anchor="t"/>
+          <a:lstStyle/>
+          <a:p>
+            <a:pPr algn="ctr"/>
+            <a:r>
+              <a:rPr sz="1300" b="1" i="0">
+                <a:solidFill>
+                  <a:srgbClr val="095292"/>
+                </a:solidFill>
+                <a:latin typeface="Calibri"/>
+              </a:rPr>
+              <a:t>Mermaid</a:t>
+            </a:r>
+          </a:p>
+          <a:p>
+            <a:pPr algn="ctr">
+              <a:spcBef>
+                <a:spcPts val="200"/>
+              </a:spcBef>
             </a:pPr>
             <a:r>
-              <a:rPr sz="1600" b="0" i="0">
-                <a:solidFill>
-                  <a:srgbClr val="333333"/>
-                </a:solidFill>
-                <a:latin typeface="Calibri"/>
-              </a:rPr>
-              <a:t>–   </a:t>
-            </a:r>
-            <a:r>
-              <a:rPr sz="1600" b="1" i="0">
-                <a:solidFill>
-                  <a:srgbClr val="333333"/>
-                </a:solidFill>
-                <a:latin typeface="Calibri"/>
-              </a:rPr>
-              <a:t>3.</a:t>
-            </a:r>
-            <a:r>
-              <a:rPr sz="1600" b="0" i="0">
-                <a:solidFill>
-                  <a:srgbClr val="333333"/>
-                </a:solidFill>
-                <a:latin typeface="Calibri"/>
-              </a:rPr>
-              <a:t> Paso 3: redacte el ADR-001 con las 7 secciones obligatorias (titulo, estado, contexto en 3 frases, decision en 1 frase, 2 alternativas descartadas con motivo, 2 consecuencias positivas y 2 negativas, impacto en el PI), verificando que la decision nombre un unico modelo dominante y no un poco de todo, y que cada alternativa descartada explique el motivo en terminos de este dominio y no en teoria.</a:t>
-            </a:r>
-          </a:p>
-          <a:p>
-            <a:pPr>
-              <a:spcAft>
-                <a:spcPts val="800"/>
-              </a:spcAft>
+              <a:rPr sz="1000" b="0" i="0">
+                <a:solidFill>
+                  <a:srgbClr val="666666"/>
+                </a:solidFill>
+                <a:latin typeface="Calibri"/>
+              </a:rPr>
+              <a:t>Codigo del diagrama</a:t>
+            </a:r>
+          </a:p>
+        </p:txBody>
+      </p:sp>
+      <p:sp>
+        <p:nvSpPr>
+          <p:cNvPr id="21" name="Rounded Rectangle 20"/>
+          <p:cNvSpPr/>
+          <p:nvPr/>
+        </p:nvSpPr>
+        <p:spPr>
+          <a:xfrm>
+            <a:off x="4283354" y="4055364"/>
+            <a:ext cx="3624986" cy="2299716"/>
+          </a:xfrm>
+          <a:prstGeom prst="roundRect">
+            <a:avLst>
+              <a:gd name="adj" fmla="val 12000"/>
+            </a:avLst>
+          </a:prstGeom>
+          <a:solidFill>
+            <a:srgbClr val="F2F2F2"/>
+          </a:solidFill>
+          <a:ln>
+            <a:noFill/>
+          </a:ln>
+        </p:spPr>
+        <p:style>
+          <a:lnRef idx="1">
+            <a:schemeClr val="accent1"/>
+          </a:lnRef>
+          <a:fillRef idx="3">
+            <a:schemeClr val="accent1"/>
+          </a:fillRef>
+          <a:effectRef idx="2">
+            <a:schemeClr val="accent1"/>
+          </a:effectRef>
+          <a:fontRef idx="minor">
+            <a:schemeClr val="lt1"/>
+          </a:fontRef>
+        </p:style>
+        <p:txBody>
+          <a:bodyPr rtlCol="0" anchor="ctr"/>
+          <a:lstStyle/>
+          <a:p>
+            <a:pPr algn="ctr"/>
+          </a:p>
+        </p:txBody>
+      </p:sp>
+      <p:sp>
+        <p:nvSpPr>
+          <p:cNvPr id="22" name="Rectangle 21"/>
+          <p:cNvSpPr/>
+          <p:nvPr/>
+        </p:nvSpPr>
+        <p:spPr>
+          <a:xfrm>
+            <a:off x="4283354" y="4055364"/>
+            <a:ext cx="3624986" cy="64008"/>
+          </a:xfrm>
+          <a:prstGeom prst="rect">
+            <a:avLst/>
+          </a:prstGeom>
+          <a:solidFill>
+            <a:srgbClr val="095292"/>
+          </a:solidFill>
+          <a:ln>
+            <a:noFill/>
+          </a:ln>
+        </p:spPr>
+        <p:style>
+          <a:lnRef idx="1">
+            <a:schemeClr val="accent1"/>
+          </a:lnRef>
+          <a:fillRef idx="3">
+            <a:schemeClr val="accent1"/>
+          </a:fillRef>
+          <a:effectRef idx="2">
+            <a:schemeClr val="accent1"/>
+          </a:effectRef>
+          <a:fontRef idx="minor">
+            <a:schemeClr val="lt1"/>
+          </a:fontRef>
+        </p:style>
+        <p:txBody>
+          <a:bodyPr rtlCol="0" anchor="ctr"/>
+          <a:lstStyle/>
+          <a:p>
+            <a:pPr algn="ctr"/>
+          </a:p>
+        </p:txBody>
+      </p:sp>
+      <p:sp>
+        <p:nvSpPr>
+          <p:cNvPr id="23" name="Rectangle 22"/>
+          <p:cNvSpPr/>
+          <p:nvPr/>
+        </p:nvSpPr>
+        <p:spPr>
+          <a:xfrm>
+            <a:off x="4283354" y="4119372"/>
+            <a:ext cx="3624986" cy="27432"/>
+          </a:xfrm>
+          <a:prstGeom prst="rect">
+            <a:avLst/>
+          </a:prstGeom>
+          <a:solidFill>
+            <a:srgbClr val="FFD000"/>
+          </a:solidFill>
+          <a:ln>
+            <a:noFill/>
+          </a:ln>
+        </p:spPr>
+        <p:style>
+          <a:lnRef idx="1">
+            <a:schemeClr val="accent1"/>
+          </a:lnRef>
+          <a:fillRef idx="3">
+            <a:schemeClr val="accent1"/>
+          </a:fillRef>
+          <a:effectRef idx="2">
+            <a:schemeClr val="accent1"/>
+          </a:effectRef>
+          <a:fontRef idx="minor">
+            <a:schemeClr val="lt1"/>
+          </a:fontRef>
+        </p:style>
+        <p:txBody>
+          <a:bodyPr rtlCol="0" anchor="ctr"/>
+          <a:lstStyle/>
+          <a:p>
+            <a:pPr algn="ctr"/>
+          </a:p>
+        </p:txBody>
+      </p:sp>
+      <p:pic>
+        <p:nvPicPr>
+          <p:cNvPr id="24" name="Picture 23" descr="examlab.png"/>
+          <p:cNvPicPr>
+            <a:picLocks noChangeAspect="1"/>
+          </p:cNvPicPr>
+          <p:nvPr/>
+        </p:nvPicPr>
+        <p:blipFill>
+          <a:blip r:embed="rId5"/>
+          <a:stretch>
+            <a:fillRect/>
+          </a:stretch>
+        </p:blipFill>
+        <p:spPr>
+          <a:xfrm>
+            <a:off x="5485485" y="4311396"/>
+            <a:ext cx="1220724" cy="1220724"/>
+          </a:xfrm>
+          <a:prstGeom prst="rect">
+            <a:avLst/>
+          </a:prstGeom>
+        </p:spPr>
+      </p:pic>
+      <p:sp>
+        <p:nvSpPr>
+          <p:cNvPr id="25" name="TextBox 24"/>
+          <p:cNvSpPr txBox="1"/>
+          <p:nvPr/>
+        </p:nvSpPr>
+        <p:spPr>
+          <a:xfrm>
+            <a:off x="4356506" y="5623560"/>
+            <a:ext cx="3478682" cy="621792"/>
+          </a:xfrm>
+          <a:prstGeom prst="rect">
+            <a:avLst/>
+          </a:prstGeom>
+          <a:noFill/>
+        </p:spPr>
+        <p:txBody>
+          <a:bodyPr wrap="square" anchor="t"/>
+          <a:lstStyle/>
+          <a:p>
+            <a:pPr algn="ctr"/>
+            <a:r>
+              <a:rPr sz="1300" b="1" i="0">
+                <a:solidFill>
+                  <a:srgbClr val="095292"/>
+                </a:solidFill>
+                <a:latin typeface="Calibri"/>
+              </a:rPr>
+              <a:t>ExamLab</a:t>
+            </a:r>
+          </a:p>
+          <a:p>
+            <a:pPr algn="ctr">
+              <a:spcBef>
+                <a:spcPts val="200"/>
+              </a:spcBef>
             </a:pPr>
             <a:r>
-              <a:rPr sz="1600" b="0" i="0">
-                <a:solidFill>
-                  <a:srgbClr val="333333"/>
-                </a:solidFill>
-                <a:latin typeface="Calibri"/>
-              </a:rPr>
-              <a:t>–   </a:t>
-            </a:r>
-            <a:r>
-              <a:rPr sz="1600" b="1" i="0">
-                <a:solidFill>
-                  <a:srgbClr val="333333"/>
-                </a:solidFill>
-                <a:latin typeface="Calibri"/>
-              </a:rPr>
-              <a:t>4.</a:t>
-            </a:r>
-            <a:r>
-              <a:rPr sz="1600" b="0" i="0">
-                <a:solidFill>
-                  <a:srgbClr val="333333"/>
-                </a:solidFill>
-                <a:latin typeface="Calibri"/>
-              </a:rPr>
-              <a:t> Paso 4: escriba en ExamLab el diagrama Mermaid de responsabilidad compartida con 3 subgrafos (IaaS, PaaS, SaaS), 4 capas por subgrafo y un nodo final de decision, verificando al renderizar que se cuentan 12 nodos de capa, que los nodos gestionados por el equipo y por el proveedor quedan pintados distinto y que la caja de decision cita el mismo modelo del ADR-001.</a:t>
-            </a:r>
-          </a:p>
-          <a:p>
-            <a:pPr>
-              <a:spcAft>
-                <a:spcPts val="800"/>
-              </a:spcAft>
-            </a:pPr>
-            <a:r>
-              <a:rPr sz="1600" b="0" i="0">
-                <a:solidFill>
-                  <a:srgbClr val="333333"/>
-                </a:solidFill>
-                <a:latin typeface="Calibri"/>
-              </a:rPr>
-              <a:t>–   </a:t>
-            </a:r>
-            <a:r>
-              <a:rPr sz="1600" b="1" i="0">
-                <a:solidFill>
-                  <a:srgbClr val="333333"/>
-                </a:solidFill>
-                <a:latin typeface="Calibri"/>
-              </a:rPr>
-              <a:t>5.</a:t>
-            </a:r>
-            <a:r>
-              <a:rPr sz="1600" b="0" i="0">
-                <a:solidFill>
-                  <a:srgbClr val="333333"/>
-                </a:solidFill>
-                <a:latin typeface="Calibri"/>
-              </a:rPr>
-              <a:t> Paso 5: pegue matriz, ADR-001 y diagrama en las 5 preguntas del taller, actualice la seccion Modelo de servicio del informe con el mismo texto del ADR y suba todo a ExamLab (modulo Talleres) antes del domingo 23:59, verificando que el modelo elegido se pueda demostrar sin tarjeta de credito ni cloud de pago.</a:t>
-            </a:r>
-          </a:p>
-        </p:txBody>
-      </p:sp>
-      <p:sp>
-        <p:nvSpPr>
-          <p:cNvPr id="6" name="TextBox 5"/>
+              <a:rPr sz="1000" b="0" i="0">
+                <a:solidFill>
+                  <a:srgbClr val="666666"/>
+                </a:solidFill>
+                <a:latin typeface="Calibri"/>
+              </a:rPr>
+              <a:t>Donde se entrega</a:t>
+            </a:r>
+          </a:p>
+        </p:txBody>
+      </p:sp>
+      <p:sp>
+        <p:nvSpPr>
+          <p:cNvPr id="26" name="TextBox 25"/>
           <p:cNvSpPr txBox="1"/>
           <p:nvPr/>
         </p:nvSpPr>

--- a/Arquitectura de Sistemas Computacionales/Clases/Clase 2 - Modelos de servicio IaaS PaaS SaaS/Presentacion.pptx
+++ b/Arquitectura de Sistemas Computacionales/Clases/Clase 2 - Modelos de servicio IaaS PaaS SaaS/Presentacion.pptx
@@ -17,7 +17,6 @@
     <p:sldId id="265" r:id="rId16"/>
     <p:sldId id="266" r:id="rId17"/>
     <p:sldId id="267" r:id="rId18"/>
-    <p:sldId id="268" r:id="rId19"/>
   </p:sldIdLst>
   <p:sldSz cx="12191695" cy="6858000" type="screen4x3"/>
   <p:notesSz cx="6858000" cy="9144000"/>
@@ -3470,7 +3469,7 @@
         <p:spPr>
           <a:xfrm>
             <a:off x="0" y="0"/>
-            <a:ext cx="12191695" cy="1170432"/>
+            <a:ext cx="12191695" cy="960120"/>
           </a:xfrm>
           <a:prstGeom prst="rect">
             <a:avLst/>
@@ -3512,7 +3511,7 @@
         </p:nvSpPr>
         <p:spPr>
           <a:xfrm>
-            <a:off x="0" y="1170432"/>
+            <a:off x="0" y="960120"/>
             <a:ext cx="12191695" cy="41148"/>
           </a:xfrm>
           <a:prstGeom prst="rect">
@@ -3556,7 +3555,7 @@
         <p:spPr>
           <a:xfrm>
             <a:off x="457200" y="164592"/>
-            <a:ext cx="11277295" cy="384048"/>
+            <a:ext cx="11277295" cy="502920"/>
           </a:xfrm>
           <a:prstGeom prst="rect">
             <a:avLst/>
@@ -3576,7 +3575,7 @@
                 </a:solidFill>
                 <a:latin typeface="Calibri"/>
               </a:rPr>
-              <a:t>Del boceto a ExamLab (diagrama)</a:t>
+              <a:t>Taller PI (paso a paso)</a:t>
             </a:r>
           </a:p>
         </p:txBody>
@@ -3589,8 +3588,8 @@
         </p:nvSpPr>
         <p:spPr>
           <a:xfrm>
-            <a:off x="457200" y="566928"/>
-            <a:ext cx="11277295" cy="411480"/>
+            <a:off x="457200" y="1170432"/>
+            <a:ext cx="11277295" cy="5230368"/>
           </a:xfrm>
           <a:prstGeom prst="rect">
             <a:avLst/>
@@ -3603,705 +3602,137 @@
           </a:bodyPr>
           <a:lstStyle/>
           <a:p>
-            <a:r>
-              <a:rPr sz="1400" b="0" i="0">
-                <a:solidFill>
-                  <a:srgbClr val="B8D8EE"/>
-                </a:solidFill>
-                <a:latin typeface="Calibri"/>
-              </a:rPr>
-              <a:t>El diagrama se entrega como código Mermaid dentro de ExamLab, no como imagen</a:t>
-            </a:r>
-          </a:p>
-        </p:txBody>
-      </p:sp>
-      <p:sp>
-        <p:nvSpPr>
-          <p:cNvPr id="6" name="Rounded Rectangle 5"/>
-          <p:cNvSpPr/>
-          <p:nvPr/>
-        </p:nvSpPr>
-        <p:spPr>
-          <a:xfrm>
-            <a:off x="457200" y="1659636"/>
-            <a:ext cx="11277295" cy="1051560"/>
-          </a:xfrm>
-          <a:prstGeom prst="roundRect">
-            <a:avLst>
-              <a:gd name="adj" fmla="val 12000"/>
-            </a:avLst>
-          </a:prstGeom>
-          <a:solidFill>
-            <a:srgbClr val="F2F2F2"/>
-          </a:solidFill>
-          <a:ln>
-            <a:noFill/>
-          </a:ln>
-        </p:spPr>
-        <p:style>
-          <a:lnRef idx="1">
-            <a:schemeClr val="accent1"/>
-          </a:lnRef>
-          <a:fillRef idx="3">
-            <a:schemeClr val="accent1"/>
-          </a:fillRef>
-          <a:effectRef idx="2">
-            <a:schemeClr val="accent1"/>
-          </a:effectRef>
-          <a:fontRef idx="minor">
-            <a:schemeClr val="lt1"/>
-          </a:fontRef>
-        </p:style>
-        <p:txBody>
-          <a:bodyPr rtlCol="0" anchor="ctr"/>
-          <a:lstStyle/>
-          <a:p>
-            <a:pPr algn="ctr"/>
-          </a:p>
-        </p:txBody>
-      </p:sp>
-      <p:sp>
-        <p:nvSpPr>
-          <p:cNvPr id="7" name="Rounded Rectangle 6"/>
-          <p:cNvSpPr/>
-          <p:nvPr/>
-        </p:nvSpPr>
-        <p:spPr>
-          <a:xfrm>
-            <a:off x="594360" y="1965960"/>
-            <a:ext cx="438912" cy="438912"/>
-          </a:xfrm>
-          <a:prstGeom prst="roundRect">
-            <a:avLst>
-              <a:gd name="adj" fmla="val 12000"/>
-            </a:avLst>
-          </a:prstGeom>
-          <a:solidFill>
-            <a:srgbClr val="095292"/>
-          </a:solidFill>
-          <a:ln>
-            <a:noFill/>
-          </a:ln>
-        </p:spPr>
-        <p:style>
-          <a:lnRef idx="1">
-            <a:schemeClr val="accent1"/>
-          </a:lnRef>
-          <a:fillRef idx="3">
-            <a:schemeClr val="accent1"/>
-          </a:fillRef>
-          <a:effectRef idx="2">
-            <a:schemeClr val="accent1"/>
-          </a:effectRef>
-          <a:fontRef idx="minor">
-            <a:schemeClr val="lt1"/>
-          </a:fontRef>
-        </p:style>
-        <p:txBody>
-          <a:bodyPr rtlCol="0" anchor="ctr"/>
-          <a:lstStyle/>
-          <a:p>
-            <a:pPr algn="ctr"/>
-          </a:p>
-        </p:txBody>
-      </p:sp>
-      <p:sp>
-        <p:nvSpPr>
-          <p:cNvPr id="8" name="TextBox 7"/>
-          <p:cNvSpPr txBox="1"/>
-          <p:nvPr/>
-        </p:nvSpPr>
-        <p:spPr>
-          <a:xfrm>
-            <a:off x="594360" y="1965960"/>
-            <a:ext cx="438912" cy="438912"/>
-          </a:xfrm>
-          <a:prstGeom prst="rect">
-            <a:avLst/>
-          </a:prstGeom>
-          <a:noFill/>
-        </p:spPr>
-        <p:txBody>
-          <a:bodyPr wrap="square" anchor="ctr"/>
-          <a:lstStyle/>
-          <a:p>
-            <a:pPr algn="ctr"/>
+            <a:pPr>
+              <a:spcAft>
+                <a:spcPts val="800"/>
+              </a:spcAft>
+            </a:pPr>
             <a:r>
               <a:rPr sz="1600" b="1" i="0">
                 <a:solidFill>
-                  <a:srgbClr val="FFFFFF"/>
-                </a:solidFill>
-                <a:latin typeface="Calibri"/>
-              </a:rPr>
-              <a:t>1</a:t>
-            </a:r>
-          </a:p>
-        </p:txBody>
-      </p:sp>
-      <p:sp>
-        <p:nvSpPr>
-          <p:cNvPr id="9" name="TextBox 8"/>
-          <p:cNvSpPr txBox="1"/>
-          <p:nvPr/>
-        </p:nvSpPr>
-        <p:spPr>
-          <a:xfrm>
-            <a:off x="1188720" y="1751076"/>
-            <a:ext cx="10271455" cy="886968"/>
-          </a:xfrm>
-          <a:prstGeom prst="rect">
-            <a:avLst/>
-          </a:prstGeom>
-          <a:noFill/>
-        </p:spPr>
-        <p:txBody>
-          <a:bodyPr wrap="square" anchor="ctr"/>
-          <a:lstStyle/>
-          <a:p>
-            <a:r>
-              <a:rPr sz="1500" b="1" i="0">
-                <a:solidFill>
-                  <a:srgbClr val="095292"/>
-                </a:solidFill>
-                <a:latin typeface="Calibri"/>
-              </a:rPr>
-              <a:t>Disena visual</a:t>
+                  <a:srgbClr val="333333"/>
+                </a:solidFill>
+                <a:latin typeface="Calibri"/>
+              </a:rPr>
+              <a:t>1.</a:t>
+            </a:r>
+            <a:r>
+              <a:rPr sz="1600" b="0" i="0">
+                <a:solidFill>
+                  <a:srgbClr val="333333"/>
+                </a:solidFill>
+                <a:latin typeface="Calibri"/>
+              </a:rPr>
+              <a:t> Paso 1: relea su ficha y su C4 Context de la Clase 1. No cambie de dominio: las preguntas 5 a 7 se califican sobre el mismo sistema, y el ADR que redacte hoy se reutiliza en el informe del PI y en la sustentacion de la Clase 15.</a:t>
             </a:r>
           </a:p>
           <a:p>
             <a:pPr>
-              <a:spcBef>
-                <a:spcPts val="200"/>
-              </a:spcBef>
+              <a:spcAft>
+                <a:spcPts val="800"/>
+              </a:spcAft>
             </a:pPr>
             <a:r>
-              <a:rPr sz="1300" b="0" i="0">
+              <a:rPr sz="1600" b="0" i="0">
                 <a:solidFill>
                   <a:srgbClr val="333333"/>
                 </a:solidFill>
                 <a:latin typeface="Calibri"/>
               </a:rPr>
-              <a:t>Dibuja el diagrama como quieras en Excalidraw o draw.io: es mas rapido arrastrar cajas que escribir codigo, y ahi es donde piensas el modelo.</a:t>
-            </a:r>
-          </a:p>
-        </p:txBody>
-      </p:sp>
-      <p:sp>
-        <p:nvSpPr>
-          <p:cNvPr id="10" name="Rounded Rectangle 9"/>
-          <p:cNvSpPr/>
-          <p:nvPr/>
-        </p:nvSpPr>
-        <p:spPr>
-          <a:xfrm>
-            <a:off x="457200" y="2802636"/>
-            <a:ext cx="11277295" cy="1051560"/>
-          </a:xfrm>
-          <a:prstGeom prst="roundRect">
-            <a:avLst>
-              <a:gd name="adj" fmla="val 12000"/>
-            </a:avLst>
-          </a:prstGeom>
-          <a:solidFill>
-            <a:srgbClr val="E8F4FA"/>
-          </a:solidFill>
-          <a:ln>
-            <a:noFill/>
-          </a:ln>
-        </p:spPr>
-        <p:style>
-          <a:lnRef idx="1">
-            <a:schemeClr val="accent1"/>
-          </a:lnRef>
-          <a:fillRef idx="3">
-            <a:schemeClr val="accent1"/>
-          </a:fillRef>
-          <a:effectRef idx="2">
-            <a:schemeClr val="accent1"/>
-          </a:effectRef>
-          <a:fontRef idx="minor">
-            <a:schemeClr val="lt1"/>
-          </a:fontRef>
-        </p:style>
-        <p:txBody>
-          <a:bodyPr rtlCol="0" anchor="ctr"/>
-          <a:lstStyle/>
-          <a:p>
-            <a:pPr algn="ctr"/>
-          </a:p>
-        </p:txBody>
-      </p:sp>
-      <p:sp>
-        <p:nvSpPr>
-          <p:cNvPr id="11" name="Rounded Rectangle 10"/>
-          <p:cNvSpPr/>
-          <p:nvPr/>
-        </p:nvSpPr>
-        <p:spPr>
-          <a:xfrm>
-            <a:off x="594360" y="3108960"/>
-            <a:ext cx="438912" cy="438912"/>
-          </a:xfrm>
-          <a:prstGeom prst="roundRect">
-            <a:avLst>
-              <a:gd name="adj" fmla="val 12000"/>
-            </a:avLst>
-          </a:prstGeom>
-          <a:solidFill>
-            <a:srgbClr val="095292"/>
-          </a:solidFill>
-          <a:ln>
-            <a:noFill/>
-          </a:ln>
-        </p:spPr>
-        <p:style>
-          <a:lnRef idx="1">
-            <a:schemeClr val="accent1"/>
-          </a:lnRef>
-          <a:fillRef idx="3">
-            <a:schemeClr val="accent1"/>
-          </a:fillRef>
-          <a:effectRef idx="2">
-            <a:schemeClr val="accent1"/>
-          </a:effectRef>
-          <a:fontRef idx="minor">
-            <a:schemeClr val="lt1"/>
-          </a:fontRef>
-        </p:style>
-        <p:txBody>
-          <a:bodyPr rtlCol="0" anchor="ctr"/>
-          <a:lstStyle/>
-          <a:p>
-            <a:pPr algn="ctr"/>
-          </a:p>
-        </p:txBody>
-      </p:sp>
-      <p:sp>
-        <p:nvSpPr>
-          <p:cNvPr id="12" name="TextBox 11"/>
-          <p:cNvSpPr txBox="1"/>
-          <p:nvPr/>
-        </p:nvSpPr>
-        <p:spPr>
-          <a:xfrm>
-            <a:off x="594360" y="3108960"/>
-            <a:ext cx="438912" cy="438912"/>
-          </a:xfrm>
-          <a:prstGeom prst="rect">
-            <a:avLst/>
-          </a:prstGeom>
-          <a:noFill/>
-        </p:spPr>
-        <p:txBody>
-          <a:bodyPr wrap="square" anchor="ctr"/>
-          <a:lstStyle/>
-          <a:p>
-            <a:pPr algn="ctr"/>
+              <a:t>–   </a:t>
+            </a:r>
             <a:r>
               <a:rPr sz="1600" b="1" i="0">
                 <a:solidFill>
-                  <a:srgbClr val="FFFFFF"/>
-                </a:solidFill>
-                <a:latin typeface="Calibri"/>
-              </a:rPr>
-              <a:t>2</a:t>
-            </a:r>
-          </a:p>
-        </p:txBody>
-      </p:sp>
-      <p:sp>
-        <p:nvSpPr>
-          <p:cNvPr id="13" name="TextBox 12"/>
-          <p:cNvSpPr txBox="1"/>
-          <p:nvPr/>
-        </p:nvSpPr>
-        <p:spPr>
-          <a:xfrm>
-            <a:off x="1188720" y="2894076"/>
-            <a:ext cx="10271455" cy="886968"/>
-          </a:xfrm>
-          <a:prstGeom prst="rect">
-            <a:avLst/>
-          </a:prstGeom>
-          <a:noFill/>
-        </p:spPr>
-        <p:txBody>
-          <a:bodyPr wrap="square" anchor="ctr"/>
-          <a:lstStyle/>
-          <a:p>
-            <a:r>
-              <a:rPr sz="1500" b="1" i="0">
-                <a:solidFill>
-                  <a:srgbClr val="095292"/>
-                </a:solidFill>
-                <a:latin typeface="Calibri"/>
-              </a:rPr>
-              <a:t>Traduce con IA</a:t>
+                  <a:srgbClr val="333333"/>
+                </a:solidFill>
+                <a:latin typeface="Calibri"/>
+              </a:rPr>
+              <a:t>2.</a:t>
+            </a:r>
+            <a:r>
+              <a:rPr sz="1600" b="0" i="0">
+                <a:solidFill>
+                  <a:srgbClr val="333333"/>
+                </a:solidFill>
+                <a:latin typeface="Calibri"/>
+              </a:rPr>
+              <a:t> Paso 2: construya en la pregunta 5 la matriz `Criterio | IaaS | PaaS | SaaS` con las cuatro filas en orden (control, costo cualitativo, operacion, time-to-demo) y maximo 2 lineas por celda; verifique que cada celda nombre una capacidad o una restriccion de SU dominio, y que la fila de operacion no afirme que en PaaS o SaaS usted deja de responder por su propia aplicacion.</a:t>
             </a:r>
           </a:p>
           <a:p>
             <a:pPr>
-              <a:spcBef>
-                <a:spcPts val="200"/>
-              </a:spcBef>
+              <a:spcAft>
+                <a:spcPts val="800"/>
+              </a:spcAft>
             </a:pPr>
             <a:r>
-              <a:rPr sz="1300" b="0" i="0">
+              <a:rPr sz="1600" b="0" i="0">
                 <a:solidFill>
                   <a:srgbClr val="333333"/>
                 </a:solidFill>
                 <a:latin typeface="Calibri"/>
               </a:rPr>
-              <a:t>Copia o describe tu boceto a una IA y pidele el codigo Mermaid: «convierte este diagrama a Mermaid usando flowchart». Revisa el resultado: la IA acierta la sintaxis, no tu modelo.</a:t>
-            </a:r>
-          </a:p>
-        </p:txBody>
-      </p:sp>
-      <p:sp>
-        <p:nvSpPr>
-          <p:cNvPr id="14" name="Rounded Rectangle 13"/>
-          <p:cNvSpPr/>
-          <p:nvPr/>
-        </p:nvSpPr>
-        <p:spPr>
-          <a:xfrm>
-            <a:off x="457200" y="3945636"/>
-            <a:ext cx="11277295" cy="1051560"/>
-          </a:xfrm>
-          <a:prstGeom prst="roundRect">
-            <a:avLst>
-              <a:gd name="adj" fmla="val 12000"/>
-            </a:avLst>
-          </a:prstGeom>
-          <a:solidFill>
-            <a:srgbClr val="F2F2F2"/>
-          </a:solidFill>
-          <a:ln>
-            <a:noFill/>
-          </a:ln>
-        </p:spPr>
-        <p:style>
-          <a:lnRef idx="1">
-            <a:schemeClr val="accent1"/>
-          </a:lnRef>
-          <a:fillRef idx="3">
-            <a:schemeClr val="accent1"/>
-          </a:fillRef>
-          <a:effectRef idx="2">
-            <a:schemeClr val="accent1"/>
-          </a:effectRef>
-          <a:fontRef idx="minor">
-            <a:schemeClr val="lt1"/>
-          </a:fontRef>
-        </p:style>
-        <p:txBody>
-          <a:bodyPr rtlCol="0" anchor="ctr"/>
-          <a:lstStyle/>
-          <a:p>
-            <a:pPr algn="ctr"/>
-          </a:p>
-        </p:txBody>
-      </p:sp>
-      <p:sp>
-        <p:nvSpPr>
-          <p:cNvPr id="15" name="Rounded Rectangle 14"/>
-          <p:cNvSpPr/>
-          <p:nvPr/>
-        </p:nvSpPr>
-        <p:spPr>
-          <a:xfrm>
-            <a:off x="594360" y="4251960"/>
-            <a:ext cx="438912" cy="438912"/>
-          </a:xfrm>
-          <a:prstGeom prst="roundRect">
-            <a:avLst>
-              <a:gd name="adj" fmla="val 12000"/>
-            </a:avLst>
-          </a:prstGeom>
-          <a:solidFill>
-            <a:srgbClr val="095292"/>
-          </a:solidFill>
-          <a:ln>
-            <a:noFill/>
-          </a:ln>
-        </p:spPr>
-        <p:style>
-          <a:lnRef idx="1">
-            <a:schemeClr val="accent1"/>
-          </a:lnRef>
-          <a:fillRef idx="3">
-            <a:schemeClr val="accent1"/>
-          </a:fillRef>
-          <a:effectRef idx="2">
-            <a:schemeClr val="accent1"/>
-          </a:effectRef>
-          <a:fontRef idx="minor">
-            <a:schemeClr val="lt1"/>
-          </a:fontRef>
-        </p:style>
-        <p:txBody>
-          <a:bodyPr rtlCol="0" anchor="ctr"/>
-          <a:lstStyle/>
-          <a:p>
-            <a:pPr algn="ctr"/>
-          </a:p>
-        </p:txBody>
-      </p:sp>
-      <p:sp>
-        <p:nvSpPr>
-          <p:cNvPr id="16" name="TextBox 15"/>
-          <p:cNvSpPr txBox="1"/>
-          <p:nvPr/>
-        </p:nvSpPr>
-        <p:spPr>
-          <a:xfrm>
-            <a:off x="594360" y="4251960"/>
-            <a:ext cx="438912" cy="438912"/>
-          </a:xfrm>
-          <a:prstGeom prst="rect">
-            <a:avLst/>
-          </a:prstGeom>
-          <a:noFill/>
-        </p:spPr>
-        <p:txBody>
-          <a:bodyPr wrap="square" anchor="ctr"/>
-          <a:lstStyle/>
-          <a:p>
-            <a:pPr algn="ctr"/>
+              <a:t>–   </a:t>
+            </a:r>
             <a:r>
               <a:rPr sz="1600" b="1" i="0">
                 <a:solidFill>
-                  <a:srgbClr val="FFFFFF"/>
-                </a:solidFill>
-                <a:latin typeface="Calibri"/>
-              </a:rPr>
-              <a:t>3</a:t>
-            </a:r>
-          </a:p>
-        </p:txBody>
-      </p:sp>
-      <p:sp>
-        <p:nvSpPr>
-          <p:cNvPr id="17" name="TextBox 16"/>
-          <p:cNvSpPr txBox="1"/>
-          <p:nvPr/>
-        </p:nvSpPr>
-        <p:spPr>
-          <a:xfrm>
-            <a:off x="1188720" y="4037076"/>
-            <a:ext cx="10271455" cy="886968"/>
-          </a:xfrm>
-          <a:prstGeom prst="rect">
-            <a:avLst/>
-          </a:prstGeom>
-          <a:noFill/>
-        </p:spPr>
-        <p:txBody>
-          <a:bodyPr wrap="square" anchor="ctr"/>
-          <a:lstStyle/>
-          <a:p>
-            <a:r>
-              <a:rPr sz="1500" b="1" i="0">
-                <a:solidFill>
-                  <a:srgbClr val="095292"/>
-                </a:solidFill>
-                <a:latin typeface="Calibri"/>
-              </a:rPr>
-              <a:t>Pega y renderiza en ExamLab</a:t>
+                  <a:srgbClr val="333333"/>
+                </a:solidFill>
+                <a:latin typeface="Calibri"/>
+              </a:rPr>
+              <a:t>3.</a:t>
+            </a:r>
+            <a:r>
+              <a:rPr sz="1600" b="0" i="0">
+                <a:solidFill>
+                  <a:srgbClr val="333333"/>
+                </a:solidFill>
+                <a:latin typeface="Calibri"/>
+              </a:rPr>
+              <a:t> Paso 3: redacte en la pregunta 6 el ADR-001 con titulo, estado con fecha, la decision en UNA sola frase con UN modelo dominante, y exactamente 2 alternativas descartadas con el motivo atado a su dominio; verifique que la seccion de decision no nombre dos modelos, porque en ese caso vale cero.</a:t>
             </a:r>
           </a:p>
           <a:p>
             <a:pPr>
-              <a:spcBef>
-                <a:spcPts val="200"/>
-              </a:spcBef>
+              <a:spcAft>
+                <a:spcPts val="800"/>
+              </a:spcAft>
             </a:pPr>
             <a:r>
-              <a:rPr sz="1300" b="0" i="0">
+              <a:rPr sz="1600" b="0" i="0">
                 <a:solidFill>
                   <a:srgbClr val="333333"/>
                 </a:solidFill>
                 <a:latin typeface="Calibri"/>
               </a:rPr>
-              <a:t>Pega ese codigo en la caja de texto de la pregunta y mira como lo dibuja la plataforma. Si no renderiza, corrige ahi mismo: lo que se califica es el diagrama renderizado dentro de ExamLab.</a:t>
-            </a:r>
-          </a:p>
-        </p:txBody>
-      </p:sp>
-      <p:sp>
-        <p:nvSpPr>
-          <p:cNvPr id="18" name="Rounded Rectangle 17"/>
-          <p:cNvSpPr/>
-          <p:nvPr/>
-        </p:nvSpPr>
-        <p:spPr>
-          <a:xfrm>
-            <a:off x="457200" y="5088636"/>
-            <a:ext cx="11277295" cy="1051560"/>
-          </a:xfrm>
-          <a:prstGeom prst="roundRect">
-            <a:avLst>
-              <a:gd name="adj" fmla="val 12000"/>
-            </a:avLst>
-          </a:prstGeom>
-          <a:solidFill>
-            <a:srgbClr val="E8F4FA"/>
-          </a:solidFill>
-          <a:ln>
-            <a:noFill/>
-          </a:ln>
-        </p:spPr>
-        <p:style>
-          <a:lnRef idx="1">
-            <a:schemeClr val="accent1"/>
-          </a:lnRef>
-          <a:fillRef idx="3">
-            <a:schemeClr val="accent1"/>
-          </a:fillRef>
-          <a:effectRef idx="2">
-            <a:schemeClr val="accent1"/>
-          </a:effectRef>
-          <a:fontRef idx="minor">
-            <a:schemeClr val="lt1"/>
-          </a:fontRef>
-        </p:style>
-        <p:txBody>
-          <a:bodyPr rtlCol="0" anchor="ctr"/>
-          <a:lstStyle/>
-          <a:p>
-            <a:pPr algn="ctr"/>
-          </a:p>
-        </p:txBody>
-      </p:sp>
-      <p:sp>
-        <p:nvSpPr>
-          <p:cNvPr id="19" name="Rounded Rectangle 18"/>
-          <p:cNvSpPr/>
-          <p:nvPr/>
-        </p:nvSpPr>
-        <p:spPr>
-          <a:xfrm>
-            <a:off x="594360" y="5394960"/>
-            <a:ext cx="438912" cy="438912"/>
-          </a:xfrm>
-          <a:prstGeom prst="roundRect">
-            <a:avLst>
-              <a:gd name="adj" fmla="val 12000"/>
-            </a:avLst>
-          </a:prstGeom>
-          <a:solidFill>
-            <a:srgbClr val="095292"/>
-          </a:solidFill>
-          <a:ln>
-            <a:noFill/>
-          </a:ln>
-        </p:spPr>
-        <p:style>
-          <a:lnRef idx="1">
-            <a:schemeClr val="accent1"/>
-          </a:lnRef>
-          <a:fillRef idx="3">
-            <a:schemeClr val="accent1"/>
-          </a:fillRef>
-          <a:effectRef idx="2">
-            <a:schemeClr val="accent1"/>
-          </a:effectRef>
-          <a:fontRef idx="minor">
-            <a:schemeClr val="lt1"/>
-          </a:fontRef>
-        </p:style>
-        <p:txBody>
-          <a:bodyPr rtlCol="0" anchor="ctr"/>
-          <a:lstStyle/>
-          <a:p>
-            <a:pPr algn="ctr"/>
-          </a:p>
-        </p:txBody>
-      </p:sp>
-      <p:sp>
-        <p:nvSpPr>
-          <p:cNvPr id="20" name="TextBox 19"/>
-          <p:cNvSpPr txBox="1"/>
-          <p:nvPr/>
-        </p:nvSpPr>
-        <p:spPr>
-          <a:xfrm>
-            <a:off x="594360" y="5394960"/>
-            <a:ext cx="438912" cy="438912"/>
-          </a:xfrm>
-          <a:prstGeom prst="rect">
-            <a:avLst/>
-          </a:prstGeom>
-          <a:noFill/>
-        </p:spPr>
-        <p:txBody>
-          <a:bodyPr wrap="square" anchor="ctr"/>
-          <a:lstStyle/>
-          <a:p>
-            <a:pPr algn="ctr"/>
+              <a:t>–   </a:t>
+            </a:r>
             <a:r>
               <a:rPr sz="1600" b="1" i="0">
                 <a:solidFill>
-                  <a:srgbClr val="FFFFFF"/>
-                </a:solidFill>
-                <a:latin typeface="Calibri"/>
-              </a:rPr>
-              <a:t>4</a:t>
-            </a:r>
-          </a:p>
-        </p:txBody>
-      </p:sp>
-      <p:sp>
-        <p:nvSpPr>
-          <p:cNvPr id="21" name="TextBox 20"/>
-          <p:cNvSpPr txBox="1"/>
-          <p:nvPr/>
-        </p:nvSpPr>
-        <p:spPr>
-          <a:xfrm>
-            <a:off x="1188720" y="5180076"/>
-            <a:ext cx="10271455" cy="886968"/>
-          </a:xfrm>
-          <a:prstGeom prst="rect">
-            <a:avLst/>
-          </a:prstGeom>
-          <a:noFill/>
-        </p:spPr>
-        <p:txBody>
-          <a:bodyPr wrap="square" anchor="ctr"/>
-          <a:lstStyle/>
-          <a:p>
-            <a:r>
-              <a:rPr sz="1500" b="1" i="0">
-                <a:solidFill>
-                  <a:srgbClr val="095292"/>
-                </a:solidFill>
-                <a:latin typeface="Calibri"/>
-              </a:rPr>
-              <a:t>Guarda el PNG para tu PI</a:t>
-            </a:r>
-          </a:p>
-          <a:p>
-            <a:pPr>
-              <a:spcBef>
-                <a:spcPts val="200"/>
-              </a:spcBef>
-            </a:pPr>
-            <a:r>
-              <a:rPr sz="1300" b="0" i="0">
-                <a:solidFill>
                   <a:srgbClr val="333333"/>
                 </a:solidFill>
                 <a:latin typeface="Calibri"/>
               </a:rPr>
-              <a:t>Exporta tambien la imagen a la carpeta de tu Proyecto Integrador. Esa copia es para tu informe; no reemplaza la respuesta en la plataforma.</a:t>
-            </a:r>
-          </a:p>
-        </p:txBody>
-      </p:sp>
-      <p:sp>
-        <p:nvSpPr>
-          <p:cNvPr id="22" name="TextBox 21"/>
+              <a:t>4.</a:t>
+            </a:r>
+            <a:r>
+              <a:rPr sz="1600" b="0" i="0">
+                <a:solidFill>
+                  <a:srgbClr val="333333"/>
+                </a:solidFill>
+                <a:latin typeface="Calibri"/>
+              </a:rPr>
+              <a:t> Paso 4: escriba en la pregunta 7 las consecuencias en los tres ejes (operacion, costo y aprendizaje), con al menos una positiva y una negativa por eje marcadas con + y -, y verifique que al menos una negativa hable de amarre al proveedor o de perdida de control; guarde y continue, que la actividad se entrega completa al cierre del corte.</a:t>
+            </a:r>
+          </a:p>
+        </p:txBody>
+      </p:sp>
+      <p:sp>
+        <p:nvSpPr>
+          <p:cNvPr id="6" name="TextBox 5"/>
           <p:cNvSpPr txBox="1"/>
           <p:nvPr/>
         </p:nvSpPr>
@@ -4475,21 +3906,109 @@
                 </a:solidFill>
                 <a:latin typeface="Calibri"/>
               </a:rPr>
-              <a:t>Taller PI (paso a paso)</a:t>
-            </a:r>
-          </a:p>
-        </p:txBody>
-      </p:sp>
-      <p:sp>
-        <p:nvSpPr>
-          <p:cNvPr id="5" name="TextBox 4"/>
+              <a:t>Para continuar (PI)</a:t>
+            </a:r>
+          </a:p>
+        </p:txBody>
+      </p:sp>
+      <p:sp>
+        <p:nvSpPr>
+          <p:cNvPr id="5" name="Rounded Rectangle 4"/>
+          <p:cNvSpPr/>
+          <p:nvPr/>
+        </p:nvSpPr>
+        <p:spPr>
+          <a:xfrm>
+            <a:off x="457200" y="1261872"/>
+            <a:ext cx="11277295" cy="1051560"/>
+          </a:xfrm>
+          <a:prstGeom prst="roundRect">
+            <a:avLst>
+              <a:gd name="adj" fmla="val 12000"/>
+            </a:avLst>
+          </a:prstGeom>
+          <a:solidFill>
+            <a:srgbClr val="E8F4FA"/>
+          </a:solidFill>
+          <a:ln>
+            <a:noFill/>
+          </a:ln>
+        </p:spPr>
+        <p:style>
+          <a:lnRef idx="1">
+            <a:schemeClr val="accent1"/>
+          </a:lnRef>
+          <a:fillRef idx="3">
+            <a:schemeClr val="accent1"/>
+          </a:fillRef>
+          <a:effectRef idx="2">
+            <a:schemeClr val="accent1"/>
+          </a:effectRef>
+          <a:fontRef idx="minor">
+            <a:schemeClr val="lt1"/>
+          </a:fontRef>
+        </p:style>
+        <p:txBody>
+          <a:bodyPr rtlCol="0" anchor="ctr"/>
+          <a:lstStyle/>
+          <a:p>
+            <a:pPr algn="ctr"/>
+          </a:p>
+        </p:txBody>
+      </p:sp>
+      <p:sp>
+        <p:nvSpPr>
+          <p:cNvPr id="6" name="Rectangle 5"/>
+          <p:cNvSpPr/>
+          <p:nvPr/>
+        </p:nvSpPr>
+        <p:spPr>
+          <a:xfrm>
+            <a:off x="457200" y="1261872"/>
+            <a:ext cx="128016" cy="1051560"/>
+          </a:xfrm>
+          <a:prstGeom prst="rect">
+            <a:avLst/>
+          </a:prstGeom>
+          <a:solidFill>
+            <a:srgbClr val="269CCB"/>
+          </a:solidFill>
+          <a:ln>
+            <a:noFill/>
+          </a:ln>
+        </p:spPr>
+        <p:style>
+          <a:lnRef idx="1">
+            <a:schemeClr val="accent1"/>
+          </a:lnRef>
+          <a:fillRef idx="3">
+            <a:schemeClr val="accent1"/>
+          </a:fillRef>
+          <a:effectRef idx="2">
+            <a:schemeClr val="accent1"/>
+          </a:effectRef>
+          <a:fontRef idx="minor">
+            <a:schemeClr val="lt1"/>
+          </a:fontRef>
+        </p:style>
+        <p:txBody>
+          <a:bodyPr rtlCol="0" anchor="ctr"/>
+          <a:lstStyle/>
+          <a:p>
+            <a:pPr algn="ctr"/>
+          </a:p>
+        </p:txBody>
+      </p:sp>
+      <p:sp>
+        <p:nvSpPr>
+          <p:cNvPr id="7" name="TextBox 6"/>
           <p:cNvSpPr txBox="1"/>
           <p:nvPr/>
         </p:nvSpPr>
         <p:spPr>
           <a:xfrm>
-            <a:off x="457200" y="1170432"/>
-            <a:ext cx="11277295" cy="5230368"/>
+            <a:off x="777240" y="1399031"/>
+            <a:ext cx="10774375" cy="822959"/>
           </a:xfrm>
           <a:prstGeom prst="rect">
             <a:avLst/>
@@ -4502,171 +4021,313 @@
           </a:bodyPr>
           <a:lstStyle/>
           <a:p>
+            <a:r>
+              <a:rPr sz="1200" b="1" i="0">
+                <a:solidFill>
+                  <a:srgbClr val="269CCB"/>
+                </a:solidFill>
+                <a:latin typeface="Calibri"/>
+              </a:rPr>
+              <a:t>Info</a:t>
+            </a:r>
+          </a:p>
+          <a:p>
             <a:pPr>
-              <a:spcAft>
-                <a:spcPts val="800"/>
-              </a:spcAft>
+              <a:spcBef>
+                <a:spcPts val="400"/>
+              </a:spcBef>
             </a:pPr>
             <a:r>
-              <a:rPr sz="1600" b="1" i="0">
+              <a:rPr sz="1400" b="0" i="0">
                 <a:solidFill>
                   <a:srgbClr val="333333"/>
                 </a:solidFill>
                 <a:latin typeface="Calibri"/>
               </a:rPr>
-              <a:t>1.</a:t>
-            </a:r>
-            <a:r>
-              <a:rPr sz="1600" b="0" i="0">
+              <a:t>Entregable: ADR-001: decisión de modelo de servicio + matriz de comparación aplicada al dominio</a:t>
+            </a:r>
+          </a:p>
+        </p:txBody>
+      </p:sp>
+      <p:sp>
+        <p:nvSpPr>
+          <p:cNvPr id="8" name="Rounded Rectangle 7"/>
+          <p:cNvSpPr/>
+          <p:nvPr/>
+        </p:nvSpPr>
+        <p:spPr>
+          <a:xfrm>
+            <a:off x="457200" y="2478024"/>
+            <a:ext cx="11277295" cy="1051560"/>
+          </a:xfrm>
+          <a:prstGeom prst="roundRect">
+            <a:avLst>
+              <a:gd name="adj" fmla="val 12000"/>
+            </a:avLst>
+          </a:prstGeom>
+          <a:solidFill>
+            <a:srgbClr val="FFF8E1"/>
+          </a:solidFill>
+          <a:ln>
+            <a:noFill/>
+          </a:ln>
+        </p:spPr>
+        <p:style>
+          <a:lnRef idx="1">
+            <a:schemeClr val="accent1"/>
+          </a:lnRef>
+          <a:fillRef idx="3">
+            <a:schemeClr val="accent1"/>
+          </a:fillRef>
+          <a:effectRef idx="2">
+            <a:schemeClr val="accent1"/>
+          </a:effectRef>
+          <a:fontRef idx="minor">
+            <a:schemeClr val="lt1"/>
+          </a:fontRef>
+        </p:style>
+        <p:txBody>
+          <a:bodyPr rtlCol="0" anchor="ctr"/>
+          <a:lstStyle/>
+          <a:p>
+            <a:pPr algn="ctr"/>
+          </a:p>
+        </p:txBody>
+      </p:sp>
+      <p:sp>
+        <p:nvSpPr>
+          <p:cNvPr id="9" name="Rectangle 8"/>
+          <p:cNvSpPr/>
+          <p:nvPr/>
+        </p:nvSpPr>
+        <p:spPr>
+          <a:xfrm>
+            <a:off x="457200" y="2478024"/>
+            <a:ext cx="128016" cy="1051560"/>
+          </a:xfrm>
+          <a:prstGeom prst="rect">
+            <a:avLst/>
+          </a:prstGeom>
+          <a:solidFill>
+            <a:srgbClr val="FFD000"/>
+          </a:solidFill>
+          <a:ln>
+            <a:noFill/>
+          </a:ln>
+        </p:spPr>
+        <p:style>
+          <a:lnRef idx="1">
+            <a:schemeClr val="accent1"/>
+          </a:lnRef>
+          <a:fillRef idx="3">
+            <a:schemeClr val="accent1"/>
+          </a:fillRef>
+          <a:effectRef idx="2">
+            <a:schemeClr val="accent1"/>
+          </a:effectRef>
+          <a:fontRef idx="minor">
+            <a:schemeClr val="lt1"/>
+          </a:fontRef>
+        </p:style>
+        <p:txBody>
+          <a:bodyPr rtlCol="0" anchor="ctr"/>
+          <a:lstStyle/>
+          <a:p>
+            <a:pPr algn="ctr"/>
+          </a:p>
+        </p:txBody>
+      </p:sp>
+      <p:sp>
+        <p:nvSpPr>
+          <p:cNvPr id="10" name="TextBox 9"/>
+          <p:cNvSpPr txBox="1"/>
+          <p:nvPr/>
+        </p:nvSpPr>
+        <p:spPr>
+          <a:xfrm>
+            <a:off x="777240" y="2615184"/>
+            <a:ext cx="10774375" cy="822959"/>
+          </a:xfrm>
+          <a:prstGeom prst="rect">
+            <a:avLst/>
+          </a:prstGeom>
+          <a:noFill/>
+        </p:spPr>
+        <p:txBody>
+          <a:bodyPr wrap="square">
+            <a:spAutoFit/>
+          </a:bodyPr>
+          <a:lstStyle/>
+          <a:p>
+            <a:r>
+              <a:rPr sz="1200" b="1" i="0">
+                <a:solidFill>
+                  <a:srgbClr val="FFD000"/>
+                </a:solidFill>
+                <a:latin typeface="Calibri"/>
+              </a:rPr>
+              <a:t>Aclaración</a:t>
+            </a:r>
+          </a:p>
+          <a:p>
+            <a:pPr>
+              <a:spcBef>
+                <a:spcPts val="400"/>
+              </a:spcBef>
+            </a:pPr>
+            <a:r>
+              <a:rPr sz="1400" b="0" i="0">
                 <a:solidFill>
                   <a:srgbClr val="333333"/>
                 </a:solidFill>
                 <a:latin typeface="Calibri"/>
               </a:rPr>
-              <a:t> Paso 1: relea la ficha y el C4 Context de la Clase 1 y copie en el encabezado del ADR el nombre del dominio y las 4 capacidades ya aprobadas, verificando que sean literalmente las mismas 4 y que no cambia de dominio a mitad de camino, porque una inconsistencia aqui arrastra error en todos los diagramas que siguen.</a:t>
+              <a:t>Subir evidencias al paquete CloudLite (Drive/repo) y a ExamLab (https://uniaj.examlab.workers.dev/) domingo 23:59.</a:t>
+            </a:r>
+          </a:p>
+        </p:txBody>
+      </p:sp>
+      <p:sp>
+        <p:nvSpPr>
+          <p:cNvPr id="11" name="Rounded Rectangle 10"/>
+          <p:cNvSpPr/>
+          <p:nvPr/>
+        </p:nvSpPr>
+        <p:spPr>
+          <a:xfrm>
+            <a:off x="457200" y="3694176"/>
+            <a:ext cx="11277295" cy="1051560"/>
+          </a:xfrm>
+          <a:prstGeom prst="roundRect">
+            <a:avLst>
+              <a:gd name="adj" fmla="val 12000"/>
+            </a:avLst>
+          </a:prstGeom>
+          <a:solidFill>
+            <a:srgbClr val="FBE4E4"/>
+          </a:solidFill>
+          <a:ln>
+            <a:noFill/>
+          </a:ln>
+        </p:spPr>
+        <p:style>
+          <a:lnRef idx="1">
+            <a:schemeClr val="accent1"/>
+          </a:lnRef>
+          <a:fillRef idx="3">
+            <a:schemeClr val="accent1"/>
+          </a:fillRef>
+          <a:effectRef idx="2">
+            <a:schemeClr val="accent1"/>
+          </a:effectRef>
+          <a:fontRef idx="minor">
+            <a:schemeClr val="lt1"/>
+          </a:fontRef>
+        </p:style>
+        <p:txBody>
+          <a:bodyPr rtlCol="0" anchor="ctr"/>
+          <a:lstStyle/>
+          <a:p>
+            <a:pPr algn="ctr"/>
+          </a:p>
+        </p:txBody>
+      </p:sp>
+      <p:sp>
+        <p:nvSpPr>
+          <p:cNvPr id="12" name="Rectangle 11"/>
+          <p:cNvSpPr/>
+          <p:nvPr/>
+        </p:nvSpPr>
+        <p:spPr>
+          <a:xfrm>
+            <a:off x="457200" y="3694176"/>
+            <a:ext cx="128016" cy="1051560"/>
+          </a:xfrm>
+          <a:prstGeom prst="rect">
+            <a:avLst/>
+          </a:prstGeom>
+          <a:solidFill>
+            <a:srgbClr val="A02030"/>
+          </a:solidFill>
+          <a:ln>
+            <a:noFill/>
+          </a:ln>
+        </p:spPr>
+        <p:style>
+          <a:lnRef idx="1">
+            <a:schemeClr val="accent1"/>
+          </a:lnRef>
+          <a:fillRef idx="3">
+            <a:schemeClr val="accent1"/>
+          </a:fillRef>
+          <a:effectRef idx="2">
+            <a:schemeClr val="accent1"/>
+          </a:effectRef>
+          <a:fontRef idx="minor">
+            <a:schemeClr val="lt1"/>
+          </a:fontRef>
+        </p:style>
+        <p:txBody>
+          <a:bodyPr rtlCol="0" anchor="ctr"/>
+          <a:lstStyle/>
+          <a:p>
+            <a:pPr algn="ctr"/>
+          </a:p>
+        </p:txBody>
+      </p:sp>
+      <p:sp>
+        <p:nvSpPr>
+          <p:cNvPr id="13" name="TextBox 12"/>
+          <p:cNvSpPr txBox="1"/>
+          <p:nvPr/>
+        </p:nvSpPr>
+        <p:spPr>
+          <a:xfrm>
+            <a:off x="777240" y="3831336"/>
+            <a:ext cx="10774375" cy="822959"/>
+          </a:xfrm>
+          <a:prstGeom prst="rect">
+            <a:avLst/>
+          </a:prstGeom>
+          <a:noFill/>
+        </p:spPr>
+        <p:txBody>
+          <a:bodyPr wrap="square">
+            <a:spAutoFit/>
+          </a:bodyPr>
+          <a:lstStyle/>
+          <a:p>
+            <a:r>
+              <a:rPr sz="1200" b="1" i="0">
+                <a:solidFill>
+                  <a:srgbClr val="A02030"/>
+                </a:solidFill>
+                <a:latin typeface="Calibri"/>
+              </a:rPr>
+              <a:t>Atención</a:t>
             </a:r>
           </a:p>
           <a:p>
             <a:pPr>
-              <a:spcAft>
-                <a:spcPts val="800"/>
-              </a:spcAft>
+              <a:spcBef>
+                <a:spcPts val="400"/>
+              </a:spcBef>
             </a:pPr>
             <a:r>
-              <a:rPr sz="1600" b="0" i="0">
+              <a:rPr sz="1400" b="0" i="0">
                 <a:solidFill>
                   <a:srgbClr val="333333"/>
                 </a:solidFill>
                 <a:latin typeface="Calibri"/>
               </a:rPr>
-              <a:t>–   </a:t>
-            </a:r>
-            <a:r>
-              <a:rPr sz="1600" b="1" i="0">
-                <a:solidFill>
-                  <a:srgbClr val="333333"/>
-                </a:solidFill>
-                <a:latin typeface="Calibri"/>
-              </a:rPr>
-              <a:t>2.</a:t>
-            </a:r>
-            <a:r>
-              <a:rPr sz="1600" b="0" i="0">
-                <a:solidFill>
-                  <a:srgbClr val="333333"/>
-                </a:solidFill>
-                <a:latin typeface="Calibri"/>
-              </a:rPr>
-              <a:t> Paso 2: complete la matriz de 4 columnas y 5 filas (control del sistema operativo, esfuerzo de operacion, tiempo hasta la primera demo, costo cualitativo con su driver, portabilidad) puntuando cada celda de 1 a 3 y sumando por columna, verificando que los tres totales de IaaS, PaaS y SaaS sean distintos: si dos empatan, vuelva a puntuar porque el criterio esta mal aplicado; la matriz queda en la seccion Modelo de servicio del informe del PI.</a:t>
-            </a:r>
-          </a:p>
-          <a:p>
-            <a:pPr>
-              <a:spcAft>
-                <a:spcPts val="800"/>
-              </a:spcAft>
-            </a:pPr>
-            <a:r>
-              <a:rPr sz="1600" b="0" i="0">
-                <a:solidFill>
-                  <a:srgbClr val="333333"/>
-                </a:solidFill>
-                <a:latin typeface="Calibri"/>
-              </a:rPr>
-              <a:t>–   </a:t>
-            </a:r>
-            <a:r>
-              <a:rPr sz="1600" b="1" i="0">
-                <a:solidFill>
-                  <a:srgbClr val="333333"/>
-                </a:solidFill>
-                <a:latin typeface="Calibri"/>
-              </a:rPr>
-              <a:t>3.</a:t>
-            </a:r>
-            <a:r>
-              <a:rPr sz="1600" b="0" i="0">
-                <a:solidFill>
-                  <a:srgbClr val="333333"/>
-                </a:solidFill>
-                <a:latin typeface="Calibri"/>
-              </a:rPr>
-              <a:t> Paso 3: redacte el ADR-001 con las 7 secciones obligatorias (titulo, estado, contexto en 3 frases, decision en 1 frase, 2 alternativas descartadas con motivo, 2 consecuencias positivas y 2 negativas, impacto en el PI), verificando que la decision nombre un unico modelo dominante y no un poco de todo, y que cada alternativa descartada explique el motivo en terminos de este dominio y no en teoria.</a:t>
-            </a:r>
-          </a:p>
-          <a:p>
-            <a:pPr>
-              <a:spcAft>
-                <a:spcPts val="800"/>
-              </a:spcAft>
-            </a:pPr>
-            <a:r>
-              <a:rPr sz="1600" b="0" i="0">
-                <a:solidFill>
-                  <a:srgbClr val="333333"/>
-                </a:solidFill>
-                <a:latin typeface="Calibri"/>
-              </a:rPr>
-              <a:t>–   </a:t>
-            </a:r>
-            <a:r>
-              <a:rPr sz="1600" b="1" i="0">
-                <a:solidFill>
-                  <a:srgbClr val="333333"/>
-                </a:solidFill>
-                <a:latin typeface="Calibri"/>
-              </a:rPr>
-              <a:t>4.</a:t>
-            </a:r>
-            <a:r>
-              <a:rPr sz="1600" b="0" i="0">
-                <a:solidFill>
-                  <a:srgbClr val="333333"/>
-                </a:solidFill>
-                <a:latin typeface="Calibri"/>
-              </a:rPr>
-              <a:t> Paso 4: escriba en ExamLab el diagrama Mermaid de responsabilidad compartida con 3 subgrafos (IaaS, PaaS, SaaS), 4 capas por subgrafo y un nodo final de decision, verificando al renderizar que se cuentan 12 nodos de capa, que los nodos gestionados por el equipo y por el proveedor quedan pintados distinto y que la caja de decision cita el mismo modelo del ADR-001.</a:t>
-            </a:r>
-          </a:p>
-          <a:p>
-            <a:pPr>
-              <a:spcAft>
-                <a:spcPts val="800"/>
-              </a:spcAft>
-            </a:pPr>
-            <a:r>
-              <a:rPr sz="1600" b="0" i="0">
-                <a:solidFill>
-                  <a:srgbClr val="333333"/>
-                </a:solidFill>
-                <a:latin typeface="Calibri"/>
-              </a:rPr>
-              <a:t>–   </a:t>
-            </a:r>
-            <a:r>
-              <a:rPr sz="1600" b="1" i="0">
-                <a:solidFill>
-                  <a:srgbClr val="333333"/>
-                </a:solidFill>
-                <a:latin typeface="Calibri"/>
-              </a:rPr>
-              <a:t>5.</a:t>
-            </a:r>
-            <a:r>
-              <a:rPr sz="1600" b="0" i="0">
-                <a:solidFill>
-                  <a:srgbClr val="333333"/>
-                </a:solidFill>
-                <a:latin typeface="Calibri"/>
-              </a:rPr>
-              <a:t> Paso 5: pegue matriz, ADR-001 y diagrama en las 5 preguntas del taller, actualice la seccion Modelo de servicio del informe con el mismo texto del ADR y suba todo a ExamLab (modulo Talleres) antes del domingo 23:59, verificando que el modelo elegido se pueda demostrar sin tarjeta de credito ni cloud de pago.</a:t>
-            </a:r>
-          </a:p>
-        </p:txBody>
-      </p:sp>
-      <p:sp>
-        <p:nvSpPr>
-          <p:cNvPr id="6" name="TextBox 5"/>
+              <a:t>Sin cloud de pago ni instalaciones obligatorias de hipervisores/Docker Desktop.</a:t>
+            </a:r>
+          </a:p>
+        </p:txBody>
+      </p:sp>
+      <p:sp>
+        <p:nvSpPr>
+          <p:cNvPr id="14" name="TextBox 13"/>
           <p:cNvSpPr txBox="1"/>
           <p:nvPr/>
         </p:nvSpPr>
@@ -4734,601 +4395,6 @@
         <p:spPr>
           <a:xfrm>
             <a:off x="0" y="0"/>
-            <a:ext cx="12191695" cy="960120"/>
-          </a:xfrm>
-          <a:prstGeom prst="rect">
-            <a:avLst/>
-          </a:prstGeom>
-          <a:solidFill>
-            <a:srgbClr val="095292"/>
-          </a:solidFill>
-          <a:ln>
-            <a:noFill/>
-          </a:ln>
-        </p:spPr>
-        <p:style>
-          <a:lnRef idx="1">
-            <a:schemeClr val="accent1"/>
-          </a:lnRef>
-          <a:fillRef idx="3">
-            <a:schemeClr val="accent1"/>
-          </a:fillRef>
-          <a:effectRef idx="2">
-            <a:schemeClr val="accent1"/>
-          </a:effectRef>
-          <a:fontRef idx="minor">
-            <a:schemeClr val="lt1"/>
-          </a:fontRef>
-        </p:style>
-        <p:txBody>
-          <a:bodyPr rtlCol="0" anchor="ctr"/>
-          <a:lstStyle/>
-          <a:p>
-            <a:pPr algn="ctr"/>
-          </a:p>
-        </p:txBody>
-      </p:sp>
-      <p:sp>
-        <p:nvSpPr>
-          <p:cNvPr id="3" name="Rectangle 2"/>
-          <p:cNvSpPr/>
-          <p:nvPr/>
-        </p:nvSpPr>
-        <p:spPr>
-          <a:xfrm>
-            <a:off x="0" y="960120"/>
-            <a:ext cx="12191695" cy="41148"/>
-          </a:xfrm>
-          <a:prstGeom prst="rect">
-            <a:avLst/>
-          </a:prstGeom>
-          <a:solidFill>
-            <a:srgbClr val="FFD000"/>
-          </a:solidFill>
-          <a:ln>
-            <a:noFill/>
-          </a:ln>
-        </p:spPr>
-        <p:style>
-          <a:lnRef idx="1">
-            <a:schemeClr val="accent1"/>
-          </a:lnRef>
-          <a:fillRef idx="3">
-            <a:schemeClr val="accent1"/>
-          </a:fillRef>
-          <a:effectRef idx="2">
-            <a:schemeClr val="accent1"/>
-          </a:effectRef>
-          <a:fontRef idx="minor">
-            <a:schemeClr val="lt1"/>
-          </a:fontRef>
-        </p:style>
-        <p:txBody>
-          <a:bodyPr rtlCol="0" anchor="ctr"/>
-          <a:lstStyle/>
-          <a:p>
-            <a:pPr algn="ctr"/>
-          </a:p>
-        </p:txBody>
-      </p:sp>
-      <p:sp>
-        <p:nvSpPr>
-          <p:cNvPr id="4" name="TextBox 3"/>
-          <p:cNvSpPr txBox="1"/>
-          <p:nvPr/>
-        </p:nvSpPr>
-        <p:spPr>
-          <a:xfrm>
-            <a:off x="457200" y="164592"/>
-            <a:ext cx="11277295" cy="502920"/>
-          </a:xfrm>
-          <a:prstGeom prst="rect">
-            <a:avLst/>
-          </a:prstGeom>
-          <a:noFill/>
-        </p:spPr>
-        <p:txBody>
-          <a:bodyPr wrap="square">
-            <a:spAutoFit/>
-          </a:bodyPr>
-          <a:lstStyle/>
-          <a:p>
-            <a:r>
-              <a:rPr sz="2600" b="1" i="0">
-                <a:solidFill>
-                  <a:srgbClr val="FFFFFF"/>
-                </a:solidFill>
-                <a:latin typeface="Calibri"/>
-              </a:rPr>
-              <a:t>Para continuar (PI)</a:t>
-            </a:r>
-          </a:p>
-        </p:txBody>
-      </p:sp>
-      <p:sp>
-        <p:nvSpPr>
-          <p:cNvPr id="5" name="Rounded Rectangle 4"/>
-          <p:cNvSpPr/>
-          <p:nvPr/>
-        </p:nvSpPr>
-        <p:spPr>
-          <a:xfrm>
-            <a:off x="457200" y="1261872"/>
-            <a:ext cx="11277295" cy="1051560"/>
-          </a:xfrm>
-          <a:prstGeom prst="roundRect">
-            <a:avLst>
-              <a:gd name="adj" fmla="val 12000"/>
-            </a:avLst>
-          </a:prstGeom>
-          <a:solidFill>
-            <a:srgbClr val="E8F4FA"/>
-          </a:solidFill>
-          <a:ln>
-            <a:noFill/>
-          </a:ln>
-        </p:spPr>
-        <p:style>
-          <a:lnRef idx="1">
-            <a:schemeClr val="accent1"/>
-          </a:lnRef>
-          <a:fillRef idx="3">
-            <a:schemeClr val="accent1"/>
-          </a:fillRef>
-          <a:effectRef idx="2">
-            <a:schemeClr val="accent1"/>
-          </a:effectRef>
-          <a:fontRef idx="minor">
-            <a:schemeClr val="lt1"/>
-          </a:fontRef>
-        </p:style>
-        <p:txBody>
-          <a:bodyPr rtlCol="0" anchor="ctr"/>
-          <a:lstStyle/>
-          <a:p>
-            <a:pPr algn="ctr"/>
-          </a:p>
-        </p:txBody>
-      </p:sp>
-      <p:sp>
-        <p:nvSpPr>
-          <p:cNvPr id="6" name="Rectangle 5"/>
-          <p:cNvSpPr/>
-          <p:nvPr/>
-        </p:nvSpPr>
-        <p:spPr>
-          <a:xfrm>
-            <a:off x="457200" y="1261872"/>
-            <a:ext cx="128016" cy="1051560"/>
-          </a:xfrm>
-          <a:prstGeom prst="rect">
-            <a:avLst/>
-          </a:prstGeom>
-          <a:solidFill>
-            <a:srgbClr val="269CCB"/>
-          </a:solidFill>
-          <a:ln>
-            <a:noFill/>
-          </a:ln>
-        </p:spPr>
-        <p:style>
-          <a:lnRef idx="1">
-            <a:schemeClr val="accent1"/>
-          </a:lnRef>
-          <a:fillRef idx="3">
-            <a:schemeClr val="accent1"/>
-          </a:fillRef>
-          <a:effectRef idx="2">
-            <a:schemeClr val="accent1"/>
-          </a:effectRef>
-          <a:fontRef idx="minor">
-            <a:schemeClr val="lt1"/>
-          </a:fontRef>
-        </p:style>
-        <p:txBody>
-          <a:bodyPr rtlCol="0" anchor="ctr"/>
-          <a:lstStyle/>
-          <a:p>
-            <a:pPr algn="ctr"/>
-          </a:p>
-        </p:txBody>
-      </p:sp>
-      <p:sp>
-        <p:nvSpPr>
-          <p:cNvPr id="7" name="TextBox 6"/>
-          <p:cNvSpPr txBox="1"/>
-          <p:nvPr/>
-        </p:nvSpPr>
-        <p:spPr>
-          <a:xfrm>
-            <a:off x="777240" y="1399031"/>
-            <a:ext cx="10774375" cy="822959"/>
-          </a:xfrm>
-          <a:prstGeom prst="rect">
-            <a:avLst/>
-          </a:prstGeom>
-          <a:noFill/>
-        </p:spPr>
-        <p:txBody>
-          <a:bodyPr wrap="square">
-            <a:spAutoFit/>
-          </a:bodyPr>
-          <a:lstStyle/>
-          <a:p>
-            <a:r>
-              <a:rPr sz="1200" b="1" i="0">
-                <a:solidFill>
-                  <a:srgbClr val="269CCB"/>
-                </a:solidFill>
-                <a:latin typeface="Calibri"/>
-              </a:rPr>
-              <a:t>Info</a:t>
-            </a:r>
-          </a:p>
-          <a:p>
-            <a:pPr>
-              <a:spcBef>
-                <a:spcPts val="400"/>
-              </a:spcBef>
-            </a:pPr>
-            <a:r>
-              <a:rPr sz="1400" b="0" i="0">
-                <a:solidFill>
-                  <a:srgbClr val="333333"/>
-                </a:solidFill>
-                <a:latin typeface="Calibri"/>
-              </a:rPr>
-              <a:t>Entregable: ADR-001: decisión de modelo de servicio + matriz de comparación aplicada al dominio</a:t>
-            </a:r>
-          </a:p>
-        </p:txBody>
-      </p:sp>
-      <p:sp>
-        <p:nvSpPr>
-          <p:cNvPr id="8" name="Rounded Rectangle 7"/>
-          <p:cNvSpPr/>
-          <p:nvPr/>
-        </p:nvSpPr>
-        <p:spPr>
-          <a:xfrm>
-            <a:off x="457200" y="2478024"/>
-            <a:ext cx="11277295" cy="1051560"/>
-          </a:xfrm>
-          <a:prstGeom prst="roundRect">
-            <a:avLst>
-              <a:gd name="adj" fmla="val 12000"/>
-            </a:avLst>
-          </a:prstGeom>
-          <a:solidFill>
-            <a:srgbClr val="FFF8E1"/>
-          </a:solidFill>
-          <a:ln>
-            <a:noFill/>
-          </a:ln>
-        </p:spPr>
-        <p:style>
-          <a:lnRef idx="1">
-            <a:schemeClr val="accent1"/>
-          </a:lnRef>
-          <a:fillRef idx="3">
-            <a:schemeClr val="accent1"/>
-          </a:fillRef>
-          <a:effectRef idx="2">
-            <a:schemeClr val="accent1"/>
-          </a:effectRef>
-          <a:fontRef idx="minor">
-            <a:schemeClr val="lt1"/>
-          </a:fontRef>
-        </p:style>
-        <p:txBody>
-          <a:bodyPr rtlCol="0" anchor="ctr"/>
-          <a:lstStyle/>
-          <a:p>
-            <a:pPr algn="ctr"/>
-          </a:p>
-        </p:txBody>
-      </p:sp>
-      <p:sp>
-        <p:nvSpPr>
-          <p:cNvPr id="9" name="Rectangle 8"/>
-          <p:cNvSpPr/>
-          <p:nvPr/>
-        </p:nvSpPr>
-        <p:spPr>
-          <a:xfrm>
-            <a:off x="457200" y="2478024"/>
-            <a:ext cx="128016" cy="1051560"/>
-          </a:xfrm>
-          <a:prstGeom prst="rect">
-            <a:avLst/>
-          </a:prstGeom>
-          <a:solidFill>
-            <a:srgbClr val="FFD000"/>
-          </a:solidFill>
-          <a:ln>
-            <a:noFill/>
-          </a:ln>
-        </p:spPr>
-        <p:style>
-          <a:lnRef idx="1">
-            <a:schemeClr val="accent1"/>
-          </a:lnRef>
-          <a:fillRef idx="3">
-            <a:schemeClr val="accent1"/>
-          </a:fillRef>
-          <a:effectRef idx="2">
-            <a:schemeClr val="accent1"/>
-          </a:effectRef>
-          <a:fontRef idx="minor">
-            <a:schemeClr val="lt1"/>
-          </a:fontRef>
-        </p:style>
-        <p:txBody>
-          <a:bodyPr rtlCol="0" anchor="ctr"/>
-          <a:lstStyle/>
-          <a:p>
-            <a:pPr algn="ctr"/>
-          </a:p>
-        </p:txBody>
-      </p:sp>
-      <p:sp>
-        <p:nvSpPr>
-          <p:cNvPr id="10" name="TextBox 9"/>
-          <p:cNvSpPr txBox="1"/>
-          <p:nvPr/>
-        </p:nvSpPr>
-        <p:spPr>
-          <a:xfrm>
-            <a:off x="777240" y="2615184"/>
-            <a:ext cx="10774375" cy="822959"/>
-          </a:xfrm>
-          <a:prstGeom prst="rect">
-            <a:avLst/>
-          </a:prstGeom>
-          <a:noFill/>
-        </p:spPr>
-        <p:txBody>
-          <a:bodyPr wrap="square">
-            <a:spAutoFit/>
-          </a:bodyPr>
-          <a:lstStyle/>
-          <a:p>
-            <a:r>
-              <a:rPr sz="1200" b="1" i="0">
-                <a:solidFill>
-                  <a:srgbClr val="FFD000"/>
-                </a:solidFill>
-                <a:latin typeface="Calibri"/>
-              </a:rPr>
-              <a:t>Aclaración</a:t>
-            </a:r>
-          </a:p>
-          <a:p>
-            <a:pPr>
-              <a:spcBef>
-                <a:spcPts val="400"/>
-              </a:spcBef>
-            </a:pPr>
-            <a:r>
-              <a:rPr sz="1400" b="0" i="0">
-                <a:solidFill>
-                  <a:srgbClr val="333333"/>
-                </a:solidFill>
-                <a:latin typeface="Calibri"/>
-              </a:rPr>
-              <a:t>Subir evidencias al paquete CloudLite (Drive/repo) y a ExamLab (https://uniaj.examlab.workers.dev/) domingo 23:59.</a:t>
-            </a:r>
-          </a:p>
-        </p:txBody>
-      </p:sp>
-      <p:sp>
-        <p:nvSpPr>
-          <p:cNvPr id="11" name="Rounded Rectangle 10"/>
-          <p:cNvSpPr/>
-          <p:nvPr/>
-        </p:nvSpPr>
-        <p:spPr>
-          <a:xfrm>
-            <a:off x="457200" y="3694176"/>
-            <a:ext cx="11277295" cy="1051560"/>
-          </a:xfrm>
-          <a:prstGeom prst="roundRect">
-            <a:avLst>
-              <a:gd name="adj" fmla="val 12000"/>
-            </a:avLst>
-          </a:prstGeom>
-          <a:solidFill>
-            <a:srgbClr val="FBE4E4"/>
-          </a:solidFill>
-          <a:ln>
-            <a:noFill/>
-          </a:ln>
-        </p:spPr>
-        <p:style>
-          <a:lnRef idx="1">
-            <a:schemeClr val="accent1"/>
-          </a:lnRef>
-          <a:fillRef idx="3">
-            <a:schemeClr val="accent1"/>
-          </a:fillRef>
-          <a:effectRef idx="2">
-            <a:schemeClr val="accent1"/>
-          </a:effectRef>
-          <a:fontRef idx="minor">
-            <a:schemeClr val="lt1"/>
-          </a:fontRef>
-        </p:style>
-        <p:txBody>
-          <a:bodyPr rtlCol="0" anchor="ctr"/>
-          <a:lstStyle/>
-          <a:p>
-            <a:pPr algn="ctr"/>
-          </a:p>
-        </p:txBody>
-      </p:sp>
-      <p:sp>
-        <p:nvSpPr>
-          <p:cNvPr id="12" name="Rectangle 11"/>
-          <p:cNvSpPr/>
-          <p:nvPr/>
-        </p:nvSpPr>
-        <p:spPr>
-          <a:xfrm>
-            <a:off x="457200" y="3694176"/>
-            <a:ext cx="128016" cy="1051560"/>
-          </a:xfrm>
-          <a:prstGeom prst="rect">
-            <a:avLst/>
-          </a:prstGeom>
-          <a:solidFill>
-            <a:srgbClr val="A02030"/>
-          </a:solidFill>
-          <a:ln>
-            <a:noFill/>
-          </a:ln>
-        </p:spPr>
-        <p:style>
-          <a:lnRef idx="1">
-            <a:schemeClr val="accent1"/>
-          </a:lnRef>
-          <a:fillRef idx="3">
-            <a:schemeClr val="accent1"/>
-          </a:fillRef>
-          <a:effectRef idx="2">
-            <a:schemeClr val="accent1"/>
-          </a:effectRef>
-          <a:fontRef idx="minor">
-            <a:schemeClr val="lt1"/>
-          </a:fontRef>
-        </p:style>
-        <p:txBody>
-          <a:bodyPr rtlCol="0" anchor="ctr"/>
-          <a:lstStyle/>
-          <a:p>
-            <a:pPr algn="ctr"/>
-          </a:p>
-        </p:txBody>
-      </p:sp>
-      <p:sp>
-        <p:nvSpPr>
-          <p:cNvPr id="13" name="TextBox 12"/>
-          <p:cNvSpPr txBox="1"/>
-          <p:nvPr/>
-        </p:nvSpPr>
-        <p:spPr>
-          <a:xfrm>
-            <a:off x="777240" y="3831336"/>
-            <a:ext cx="10774375" cy="822959"/>
-          </a:xfrm>
-          <a:prstGeom prst="rect">
-            <a:avLst/>
-          </a:prstGeom>
-          <a:noFill/>
-        </p:spPr>
-        <p:txBody>
-          <a:bodyPr wrap="square">
-            <a:spAutoFit/>
-          </a:bodyPr>
-          <a:lstStyle/>
-          <a:p>
-            <a:r>
-              <a:rPr sz="1200" b="1" i="0">
-                <a:solidFill>
-                  <a:srgbClr val="A02030"/>
-                </a:solidFill>
-                <a:latin typeface="Calibri"/>
-              </a:rPr>
-              <a:t>Atención</a:t>
-            </a:r>
-          </a:p>
-          <a:p>
-            <a:pPr>
-              <a:spcBef>
-                <a:spcPts val="400"/>
-              </a:spcBef>
-            </a:pPr>
-            <a:r>
-              <a:rPr sz="1400" b="0" i="0">
-                <a:solidFill>
-                  <a:srgbClr val="333333"/>
-                </a:solidFill>
-                <a:latin typeface="Calibri"/>
-              </a:rPr>
-              <a:t>Sin cloud de pago ni instalaciones obligatorias de hipervisores/Docker Desktop.</a:t>
-            </a:r>
-          </a:p>
-        </p:txBody>
-      </p:sp>
-      <p:sp>
-        <p:nvSpPr>
-          <p:cNvPr id="14" name="TextBox 13"/>
-          <p:cNvSpPr txBox="1"/>
-          <p:nvPr/>
-        </p:nvSpPr>
-        <p:spPr>
-          <a:xfrm>
-            <a:off x="11185855" y="6473952"/>
-            <a:ext cx="640080" cy="274320"/>
-          </a:xfrm>
-          <a:prstGeom prst="rect">
-            <a:avLst/>
-          </a:prstGeom>
-          <a:noFill/>
-        </p:spPr>
-        <p:txBody>
-          <a:bodyPr wrap="square">
-            <a:spAutoFit/>
-          </a:bodyPr>
-          <a:lstStyle/>
-          <a:p>
-            <a:pPr algn="r"/>
-            <a:r>
-              <a:rPr sz="1100" b="0" i="0">
-                <a:solidFill>
-                  <a:srgbClr val="666666"/>
-                </a:solidFill>
-                <a:latin typeface="Calibri"/>
-              </a:rPr>
-              <a:t>12</a:t>
-            </a:r>
-          </a:p>
-        </p:txBody>
-      </p:sp>
-    </p:spTree>
-  </p:cSld>
-  <p:clrMapOvr>
-    <a:masterClrMapping/>
-  </p:clrMapOvr>
-</p:sld>
-</file>
-
-<file path=ppt/slides/slide13.xml><?xml version="1.0" encoding="utf-8"?>
-<p:sld xmlns:a="http://schemas.openxmlformats.org/drawingml/2006/main" xmlns:p="http://schemas.openxmlformats.org/presentationml/2006/main" xmlns:r="http://schemas.openxmlformats.org/officeDocument/2006/relationships">
-  <p:cSld>
-    <p:bg>
-      <p:bgPr>
-        <a:solidFill>
-          <a:srgbClr val="FFFFFF"/>
-        </a:solidFill>
-        <a:effectLst/>
-      </p:bgPr>
-    </p:bg>
-    <p:spTree>
-      <p:nvGrpSpPr>
-        <p:cNvPr id="1" name=""/>
-        <p:cNvGrpSpPr/>
-        <p:nvPr/>
-      </p:nvGrpSpPr>
-      <p:grpSpPr/>
-      <p:sp>
-        <p:nvSpPr>
-          <p:cNvPr id="2" name="Rectangle 1"/>
-          <p:cNvSpPr/>
-          <p:nvPr/>
-        </p:nvSpPr>
-        <p:spPr>
-          <a:xfrm>
-            <a:off x="0" y="0"/>
             <a:ext cx="12191695" cy="164592"/>
           </a:xfrm>
           <a:prstGeom prst="rect">
@@ -8142,7 +7208,7 @@
         <p:spPr>
           <a:xfrm>
             <a:off x="457200" y="1591056"/>
-            <a:ext cx="3624986" cy="2299716"/>
+            <a:ext cx="3624986" cy="2331720"/>
           </a:xfrm>
           <a:prstGeom prst="roundRect">
             <a:avLst>
@@ -8280,8 +7346,8 @@
         </p:blipFill>
         <p:spPr>
           <a:xfrm>
-            <a:off x="1659331" y="1847087"/>
-            <a:ext cx="1220724" cy="1220724"/>
+            <a:off x="1643329" y="1847087"/>
+            <a:ext cx="1252728" cy="1252728"/>
           </a:xfrm>
           <a:prstGeom prst="rect">
             <a:avLst/>
@@ -8296,7 +7362,7 @@
         </p:nvSpPr>
         <p:spPr>
           <a:xfrm>
-            <a:off x="530352" y="3159251"/>
+            <a:off x="530352" y="3191256"/>
             <a:ext cx="3478682" cy="621792"/>
           </a:xfrm>
           <a:prstGeom prst="rect">
@@ -8346,7 +7412,7 @@
         <p:spPr>
           <a:xfrm>
             <a:off x="4283354" y="1591056"/>
-            <a:ext cx="3624986" cy="2299716"/>
+            <a:ext cx="3624986" cy="2331720"/>
           </a:xfrm>
           <a:prstGeom prst="roundRect">
             <a:avLst>
@@ -8484,8 +7550,8 @@
         </p:blipFill>
         <p:spPr>
           <a:xfrm>
-            <a:off x="5485485" y="1847087"/>
-            <a:ext cx="1220724" cy="1220724"/>
+            <a:off x="5469483" y="1847087"/>
+            <a:ext cx="1252728" cy="1252728"/>
           </a:xfrm>
           <a:prstGeom prst="rect">
             <a:avLst/>
@@ -8500,7 +7566,7 @@
         </p:nvSpPr>
         <p:spPr>
           <a:xfrm>
-            <a:off x="4356506" y="3159251"/>
+            <a:off x="4356506" y="3191256"/>
             <a:ext cx="3478682" cy="621792"/>
           </a:xfrm>
           <a:prstGeom prst="rect">
@@ -8550,7 +7616,7 @@
         <p:spPr>
           <a:xfrm>
             <a:off x="8109508" y="1591056"/>
-            <a:ext cx="3624986" cy="2299716"/>
+            <a:ext cx="3624986" cy="2331720"/>
           </a:xfrm>
           <a:prstGeom prst="roundRect">
             <a:avLst>
@@ -8674,7 +7740,7 @@
       </p:sp>
       <p:pic>
         <p:nvPicPr>
-          <p:cNvPr id="19" name="Picture 18" descr="mermaid.png"/>
+          <p:cNvPr id="19" name="Picture 18" descr="examlab.png"/>
           <p:cNvPicPr>
             <a:picLocks noChangeAspect="1"/>
           </p:cNvPicPr>
@@ -8688,8 +7754,8 @@
         </p:blipFill>
         <p:spPr>
           <a:xfrm>
-            <a:off x="9311640" y="1847087"/>
-            <a:ext cx="1220724" cy="1220724"/>
+            <a:off x="9295638" y="1847087"/>
+            <a:ext cx="1252728" cy="1252728"/>
           </a:xfrm>
           <a:prstGeom prst="rect">
             <a:avLst/>
@@ -8704,7 +7770,7 @@
         </p:nvSpPr>
         <p:spPr>
           <a:xfrm>
-            <a:off x="8182660" y="3159251"/>
+            <a:off x="8182660" y="3191256"/>
             <a:ext cx="3478682" cy="621792"/>
           </a:xfrm>
           <a:prstGeom prst="rect">
@@ -8724,7 +7790,7 @@
                 </a:solidFill>
                 <a:latin typeface="Calibri"/>
               </a:rPr>
-              <a:t>Mermaid</a:t>
+              <a:t>ExamLab</a:t>
             </a:r>
           </a:p>
           <a:p>
@@ -8740,210 +7806,6 @@
                 </a:solidFill>
                 <a:latin typeface="Calibri"/>
               </a:rPr>
-              <a:t>Codigo del diagrama</a:t>
-            </a:r>
-          </a:p>
-        </p:txBody>
-      </p:sp>
-      <p:sp>
-        <p:nvSpPr>
-          <p:cNvPr id="21" name="Rounded Rectangle 20"/>
-          <p:cNvSpPr/>
-          <p:nvPr/>
-        </p:nvSpPr>
-        <p:spPr>
-          <a:xfrm>
-            <a:off x="4283354" y="4055364"/>
-            <a:ext cx="3624986" cy="2299716"/>
-          </a:xfrm>
-          <a:prstGeom prst="roundRect">
-            <a:avLst>
-              <a:gd name="adj" fmla="val 12000"/>
-            </a:avLst>
-          </a:prstGeom>
-          <a:solidFill>
-            <a:srgbClr val="F2F2F2"/>
-          </a:solidFill>
-          <a:ln>
-            <a:noFill/>
-          </a:ln>
-        </p:spPr>
-        <p:style>
-          <a:lnRef idx="1">
-            <a:schemeClr val="accent1"/>
-          </a:lnRef>
-          <a:fillRef idx="3">
-            <a:schemeClr val="accent1"/>
-          </a:fillRef>
-          <a:effectRef idx="2">
-            <a:schemeClr val="accent1"/>
-          </a:effectRef>
-          <a:fontRef idx="minor">
-            <a:schemeClr val="lt1"/>
-          </a:fontRef>
-        </p:style>
-        <p:txBody>
-          <a:bodyPr rtlCol="0" anchor="ctr"/>
-          <a:lstStyle/>
-          <a:p>
-            <a:pPr algn="ctr"/>
-          </a:p>
-        </p:txBody>
-      </p:sp>
-      <p:sp>
-        <p:nvSpPr>
-          <p:cNvPr id="22" name="Rectangle 21"/>
-          <p:cNvSpPr/>
-          <p:nvPr/>
-        </p:nvSpPr>
-        <p:spPr>
-          <a:xfrm>
-            <a:off x="4283354" y="4055364"/>
-            <a:ext cx="3624986" cy="64008"/>
-          </a:xfrm>
-          <a:prstGeom prst="rect">
-            <a:avLst/>
-          </a:prstGeom>
-          <a:solidFill>
-            <a:srgbClr val="095292"/>
-          </a:solidFill>
-          <a:ln>
-            <a:noFill/>
-          </a:ln>
-        </p:spPr>
-        <p:style>
-          <a:lnRef idx="1">
-            <a:schemeClr val="accent1"/>
-          </a:lnRef>
-          <a:fillRef idx="3">
-            <a:schemeClr val="accent1"/>
-          </a:fillRef>
-          <a:effectRef idx="2">
-            <a:schemeClr val="accent1"/>
-          </a:effectRef>
-          <a:fontRef idx="minor">
-            <a:schemeClr val="lt1"/>
-          </a:fontRef>
-        </p:style>
-        <p:txBody>
-          <a:bodyPr rtlCol="0" anchor="ctr"/>
-          <a:lstStyle/>
-          <a:p>
-            <a:pPr algn="ctr"/>
-          </a:p>
-        </p:txBody>
-      </p:sp>
-      <p:sp>
-        <p:nvSpPr>
-          <p:cNvPr id="23" name="Rectangle 22"/>
-          <p:cNvSpPr/>
-          <p:nvPr/>
-        </p:nvSpPr>
-        <p:spPr>
-          <a:xfrm>
-            <a:off x="4283354" y="4119372"/>
-            <a:ext cx="3624986" cy="27432"/>
-          </a:xfrm>
-          <a:prstGeom prst="rect">
-            <a:avLst/>
-          </a:prstGeom>
-          <a:solidFill>
-            <a:srgbClr val="FFD000"/>
-          </a:solidFill>
-          <a:ln>
-            <a:noFill/>
-          </a:ln>
-        </p:spPr>
-        <p:style>
-          <a:lnRef idx="1">
-            <a:schemeClr val="accent1"/>
-          </a:lnRef>
-          <a:fillRef idx="3">
-            <a:schemeClr val="accent1"/>
-          </a:fillRef>
-          <a:effectRef idx="2">
-            <a:schemeClr val="accent1"/>
-          </a:effectRef>
-          <a:fontRef idx="minor">
-            <a:schemeClr val="lt1"/>
-          </a:fontRef>
-        </p:style>
-        <p:txBody>
-          <a:bodyPr rtlCol="0" anchor="ctr"/>
-          <a:lstStyle/>
-          <a:p>
-            <a:pPr algn="ctr"/>
-          </a:p>
-        </p:txBody>
-      </p:sp>
-      <p:pic>
-        <p:nvPicPr>
-          <p:cNvPr id="24" name="Picture 23" descr="examlab.png"/>
-          <p:cNvPicPr>
-            <a:picLocks noChangeAspect="1"/>
-          </p:cNvPicPr>
-          <p:nvPr/>
-        </p:nvPicPr>
-        <p:blipFill>
-          <a:blip r:embed="rId5"/>
-          <a:stretch>
-            <a:fillRect/>
-          </a:stretch>
-        </p:blipFill>
-        <p:spPr>
-          <a:xfrm>
-            <a:off x="5485485" y="4311396"/>
-            <a:ext cx="1220724" cy="1220724"/>
-          </a:xfrm>
-          <a:prstGeom prst="rect">
-            <a:avLst/>
-          </a:prstGeom>
-        </p:spPr>
-      </p:pic>
-      <p:sp>
-        <p:nvSpPr>
-          <p:cNvPr id="25" name="TextBox 24"/>
-          <p:cNvSpPr txBox="1"/>
-          <p:nvPr/>
-        </p:nvSpPr>
-        <p:spPr>
-          <a:xfrm>
-            <a:off x="4356506" y="5623560"/>
-            <a:ext cx="3478682" cy="621792"/>
-          </a:xfrm>
-          <a:prstGeom prst="rect">
-            <a:avLst/>
-          </a:prstGeom>
-          <a:noFill/>
-        </p:spPr>
-        <p:txBody>
-          <a:bodyPr wrap="square" anchor="t"/>
-          <a:lstStyle/>
-          <a:p>
-            <a:pPr algn="ctr"/>
-            <a:r>
-              <a:rPr sz="1300" b="1" i="0">
-                <a:solidFill>
-                  <a:srgbClr val="095292"/>
-                </a:solidFill>
-                <a:latin typeface="Calibri"/>
-              </a:rPr>
-              <a:t>ExamLab</a:t>
-            </a:r>
-          </a:p>
-          <a:p>
-            <a:pPr algn="ctr">
-              <a:spcBef>
-                <a:spcPts val="200"/>
-              </a:spcBef>
-            </a:pPr>
-            <a:r>
-              <a:rPr sz="1000" b="0" i="0">
-                <a:solidFill>
-                  <a:srgbClr val="666666"/>
-                </a:solidFill>
-                <a:latin typeface="Calibri"/>
-              </a:rPr>
               <a:t>Donde se entrega</a:t>
             </a:r>
           </a:p>
@@ -8951,7 +7813,7 @@
       </p:sp>
       <p:sp>
         <p:nvSpPr>
-          <p:cNvPr id="26" name="TextBox 25"/>
+          <p:cNvPr id="21" name="TextBox 20"/>
           <p:cNvSpPr txBox="1"/>
           <p:nvPr/>
         </p:nvSpPr>

--- a/Arquitectura de Sistemas Computacionales/Clases/Clase 2 - Modelos de servicio IaaS PaaS SaaS/Presentacion.pptx
+++ b/Arquitectura de Sistemas Computacionales/Clases/Clase 2 - Modelos de servicio IaaS PaaS SaaS/Presentacion.pptx
@@ -3657,7 +3657,7 @@
                 </a:solidFill>
                 <a:latin typeface="Calibri"/>
               </a:rPr>
-              <a:t> Paso 2: construya en la pregunta 5 la matriz `Criterio | IaaS | PaaS | SaaS` con las cuatro filas en orden (control, costo cualitativo, operacion, time-to-demo) y maximo 2 lineas por celda; verifique que cada celda nombre una capacidad o una restriccion de SU dominio, y que la fila de operacion no afirme que en PaaS o SaaS usted deja de responder por su propia aplicacion.</a:t>
+              <a:t> Paso 2: construya en la pregunta 5 la matriz «Criterio | IaaS | PaaS | SaaS» con las cuatro filas en orden (control, costo cualitativo, operacion, time-to-demo) y maximo 2 lineas por celda; verifique que cada celda nombre una capacidad o una restriccion de SU dominio, y que la fila de operacion no afirme que en PaaS o SaaS usted deja de responder por su propia aplicacion.</a:t>
             </a:r>
           </a:p>
           <a:p>
@@ -3691,7 +3691,7 @@
                 </a:solidFill>
                 <a:latin typeface="Calibri"/>
               </a:rPr>
-              <a:t> Paso 3: redacte en la pregunta 6 el ADR-001 con titulo, estado con fecha, la decision en UNA sola frase con UN modelo dominante, y exactamente 2 alternativas descartadas con el motivo atado a su dominio; verifique que la seccion de decision no nombre dos modelos, porque en ese caso vale cero.</a:t>
+              <a:t> Paso 3: redacte en la pregunta 6 el ADR-001 con las cinco secciones rotuladas —titulo, estado con fecha, contexto con sus restricciones reales, la decision en UNA sola frase con UN modelo dominante, y exactamente 2 alternativas descartadas con el motivo atado a su dominio—; verifique que la seccion de decision no nombre dos modelos, porque en ese caso vale cero.</a:t>
             </a:r>
           </a:p>
           <a:p>
@@ -3725,7 +3725,7 @@
                 </a:solidFill>
                 <a:latin typeface="Calibri"/>
               </a:rPr>
-              <a:t> Paso 4: escriba en la pregunta 7 las consecuencias en los tres ejes (operacion, costo y aprendizaje), con al menos una positiva y una negativa por eje marcadas con + y -, y verifique que al menos una negativa hable de amarre al proveedor o de perdida de control; guarde y continue, que la actividad se entrega completa al cierre del corte.</a:t>
+              <a:t> Paso 4: escriba en la pregunta 7 la seccion 6 del mismo ADR, las consecuencias en los tres ejes (operacion, costo y aprendizaje), con al menos una positiva y una negativa por eje marcadas con + y -, y verifique que al menos una negativa hable de amarre al proveedor o de perdida de control; guarde y continue, que la actividad se entrega completa al cierre del corte.</a:t>
             </a:r>
           </a:p>
         </p:txBody>
@@ -6364,7 +6364,25 @@
                 </a:solidFill>
                 <a:latin typeface="Calibri"/>
               </a:rPr>
-              <a:t>–   Contexto · Decisión · Alternativas · Consecuencias · Riesgos.</a:t>
+              <a:t>–   </a:t>
+            </a:r>
+            <a:r>
+              <a:rPr sz="1600" b="1" i="0">
+                <a:solidFill>
+                  <a:srgbClr val="333333"/>
+                </a:solidFill>
+                <a:latin typeface="Calibri"/>
+              </a:rPr>
+              <a:t>6 secciones rotuladas</a:t>
+            </a:r>
+            <a:r>
+              <a:rPr sz="1600" b="0" i="0">
+                <a:solidFill>
+                  <a:srgbClr val="333333"/>
+                </a:solidFill>
+                <a:latin typeface="Calibri"/>
+              </a:rPr>
+              <a:t>: Título · Estado · Contexto · Decisión · Alternativas descartadas · Consecuencias.</a:t>
             </a:r>
           </a:p>
           <a:p>
@@ -6380,7 +6398,43 @@
                 </a:solidFill>
                 <a:latin typeface="Calibri"/>
               </a:rPr>
-              <a:t>–   Máximo 1 página. Lenguaje de arquitectura, no marketing.</a:t>
+              <a:t>–   </a:t>
+            </a:r>
+            <a:r>
+              <a:rPr sz="1600" b="1" i="0">
+                <a:solidFill>
+                  <a:srgbClr val="333333"/>
+                </a:solidFill>
+                <a:latin typeface="Calibri"/>
+              </a:rPr>
+              <a:t>Título</a:t>
+            </a:r>
+            <a:r>
+              <a:rPr sz="1600" b="0" i="0">
+                <a:solidFill>
+                  <a:srgbClr val="333333"/>
+                </a:solidFill>
+                <a:latin typeface="Calibri"/>
+              </a:rPr>
+              <a:t>: «ADR-001 Modelo de servicio dominante de CloudLite App».  </a:t>
+            </a:r>
+            <a:r>
+              <a:rPr sz="1600" b="1" i="0">
+                <a:solidFill>
+                  <a:srgbClr val="333333"/>
+                </a:solidFill>
+                <a:latin typeface="Calibri"/>
+              </a:rPr>
+              <a:t>Estado</a:t>
+            </a:r>
+            <a:r>
+              <a:rPr sz="1600" b="0" i="0">
+                <a:solidFill>
+                  <a:srgbClr val="333333"/>
+                </a:solidFill>
+                <a:latin typeface="Calibri"/>
+              </a:rPr>
+              <a:t>: Aceptado + fecha de hoy.</a:t>
             </a:r>
           </a:p>
           <a:p>
@@ -6396,7 +6450,147 @@
                 </a:solidFill>
                 <a:latin typeface="Calibri"/>
               </a:rPr>
-              <a:t>–   Debe citar 2 trade-offs (ej.: control vs velocidad de entrega).</a:t>
+              <a:t>–   </a:t>
+            </a:r>
+            <a:r>
+              <a:rPr sz="1600" b="1" i="0">
+                <a:solidFill>
+                  <a:srgbClr val="333333"/>
+                </a:solidFill>
+                <a:latin typeface="Calibri"/>
+              </a:rPr>
+              <a:t>Contexto</a:t>
+            </a:r>
+            <a:r>
+              <a:rPr sz="1600" b="0" i="0">
+                <a:solidFill>
+                  <a:srgbClr val="333333"/>
+                </a:solidFill>
+                <a:latin typeface="Calibri"/>
+              </a:rPr>
+              <a:t> = las restricciones (quién lo sostiene, cuánto tiempo, qué presupuesto), no el resumen del tema.</a:t>
+            </a:r>
+          </a:p>
+          <a:p>
+            <a:pPr>
+              <a:spcAft>
+                <a:spcPts val="800"/>
+              </a:spcAft>
+            </a:pPr>
+            <a:r>
+              <a:rPr sz="1600" b="0" i="0">
+                <a:solidFill>
+                  <a:srgbClr val="333333"/>
+                </a:solidFill>
+                <a:latin typeface="Calibri"/>
+              </a:rPr>
+              <a:t>–   </a:t>
+            </a:r>
+            <a:r>
+              <a:rPr sz="1600" b="1" i="0">
+                <a:solidFill>
+                  <a:srgbClr val="333333"/>
+                </a:solidFill>
+                <a:latin typeface="Calibri"/>
+              </a:rPr>
+              <a:t>Decisión</a:t>
+            </a:r>
+            <a:r>
+              <a:rPr sz="1600" b="0" i="0">
+                <a:solidFill>
+                  <a:srgbClr val="333333"/>
+                </a:solidFill>
+                <a:latin typeface="Calibri"/>
+              </a:rPr>
+              <a:t>: 1 frase, 1 modelo dominante.  </a:t>
+            </a:r>
+            <a:r>
+              <a:rPr sz="1600" b="1" i="0">
+                <a:solidFill>
+                  <a:srgbClr val="333333"/>
+                </a:solidFill>
+                <a:latin typeface="Calibri"/>
+              </a:rPr>
+              <a:t>Alternativas descartadas</a:t>
+            </a:r>
+            <a:r>
+              <a:rPr sz="1600" b="0" i="0">
+                <a:solidFill>
+                  <a:srgbClr val="333333"/>
+                </a:solidFill>
+                <a:latin typeface="Calibri"/>
+              </a:rPr>
+              <a:t>: exactamente 2, con motivo del dominio.</a:t>
+            </a:r>
+          </a:p>
+          <a:p>
+            <a:pPr>
+              <a:spcAft>
+                <a:spcPts val="800"/>
+              </a:spcAft>
+            </a:pPr>
+            <a:r>
+              <a:rPr sz="1600" b="0" i="0">
+                <a:solidFill>
+                  <a:srgbClr val="333333"/>
+                </a:solidFill>
+                <a:latin typeface="Calibri"/>
+              </a:rPr>
+              <a:t>–   Máximo 1 página. Las 5 primeras secciones son la </a:t>
+            </a:r>
+            <a:r>
+              <a:rPr sz="1600" b="1" i="0">
+                <a:solidFill>
+                  <a:srgbClr val="333333"/>
+                </a:solidFill>
+                <a:latin typeface="Calibri"/>
+              </a:rPr>
+              <a:t>pregunta 6</a:t>
+            </a:r>
+            <a:r>
+              <a:rPr sz="1600" b="0" i="0">
+                <a:solidFill>
+                  <a:srgbClr val="333333"/>
+                </a:solidFill>
+                <a:latin typeface="Calibri"/>
+              </a:rPr>
+              <a:t>; </a:t>
+            </a:r>
+            <a:r>
+              <a:rPr sz="1600" b="1" i="0">
+                <a:solidFill>
+                  <a:srgbClr val="333333"/>
+                </a:solidFill>
+                <a:latin typeface="Calibri"/>
+              </a:rPr>
+              <a:t>Consecuencias</a:t>
+            </a:r>
+            <a:r>
+              <a:rPr sz="1600" b="0" i="0">
+                <a:solidFill>
+                  <a:srgbClr val="333333"/>
+                </a:solidFill>
+                <a:latin typeface="Calibri"/>
+              </a:rPr>
+              <a:t> es la </a:t>
+            </a:r>
+            <a:r>
+              <a:rPr sz="1600" b="1" i="0">
+                <a:solidFill>
+                  <a:srgbClr val="333333"/>
+                </a:solidFill>
+                <a:latin typeface="Calibri"/>
+              </a:rPr>
+              <a:t>pregunta 7</a:t>
+            </a:r>
+            <a:r>
+              <a:rPr sz="1600" b="0" i="0">
+                <a:solidFill>
+                  <a:srgbClr val="333333"/>
+                </a:solidFill>
+                <a:latin typeface="Calibri"/>
+              </a:rPr>
+              <a:t>.</a:t>
             </a:r>
           </a:p>
         </p:txBody>
@@ -6577,7 +6771,7 @@
                 </a:solidFill>
                 <a:latin typeface="Calibri"/>
               </a:rPr>
-              <a:t>ADR-001 — la plantilla completa cabe en una pagina</a:t>
+              <a:t>ADR-001 — las 6 secciones caben en una pagina</a:t>
             </a:r>
           </a:p>
         </p:txBody>
@@ -6736,7 +6930,7 @@
                 </a:solidFill>
                 <a:latin typeface="Calibri"/>
               </a:rPr>
-              <a:t># ADR-001: Modelo de servicio de CloudLite</a:t>
+              <a:t>## 1. Titulo     ADR-001 Modelo de servicio dominante de CloudLite App</a:t>
             </a:r>
           </a:p>
           <a:p>
@@ -6752,7 +6946,7 @@
                 </a:solidFill>
                 <a:latin typeface="Calibri"/>
               </a:rPr>
-              <a:t/>
+              <a:t>## 2. Estado     Aceptado — &lt;fecha de hoy&gt;</a:t>
             </a:r>
           </a:p>
           <a:p>
@@ -6768,7 +6962,7 @@
                 </a:solidFill>
                 <a:latin typeface="Calibri"/>
               </a:rPr>
-              <a:t>## Contexto</a:t>
+              <a:t/>
             </a:r>
           </a:p>
           <a:p>
@@ -6784,7 +6978,7 @@
                 </a:solidFill>
                 <a:latin typeface="Calibri"/>
               </a:rPr>
-              <a:t>MVP academico, un desarrollador (2 o 3 si el docente autorizo equipo), sin presupuesto cloud.</a:t>
+              <a:t>## 3. Contexto                    &lt;- restricciones, no resumen del tema</a:t>
             </a:r>
           </a:p>
           <a:p>
@@ -6800,7 +6994,7 @@
                 </a:solidFill>
                 <a:latin typeface="Calibri"/>
               </a:rPr>
-              <a:t/>
+              <a:t>Lo sostengo yo solo, 12 semanas, sin presupuesto cloud ni tarjeta; demo viva el dia de la sustentacion.</a:t>
             </a:r>
           </a:p>
           <a:p>
@@ -6816,7 +7010,7 @@
                 </a:solidFill>
                 <a:latin typeface="Calibri"/>
               </a:rPr>
-              <a:t>## Decision</a:t>
+              <a:t/>
             </a:r>
           </a:p>
           <a:p>
@@ -6832,7 +7026,7 @@
                 </a:solidFill>
                 <a:latin typeface="Calibri"/>
               </a:rPr>
-              <a:t>PaaS conceptual + contenedores (portable).</a:t>
+              <a:t>## 4. Decision                    &lt;- UNA frase, UN modelo dominante</a:t>
             </a:r>
           </a:p>
           <a:p>
@@ -6848,7 +7042,7 @@
                 </a:solidFill>
                 <a:latin typeface="Calibri"/>
               </a:rPr>
-              <a:t/>
+              <a:t>La aplicacion de CloudLite se despliega sobre PaaS.</a:t>
             </a:r>
           </a:p>
           <a:p>
@@ -6864,7 +7058,7 @@
                 </a:solidFill>
                 <a:latin typeface="Calibri"/>
               </a:rPr>
-              <a:t>## Alternativas descartadas</a:t>
+              <a:t/>
             </a:r>
           </a:p>
           <a:p>
@@ -6880,7 +7074,7 @@
                 </a:solidFill>
                 <a:latin typeface="Calibri"/>
               </a:rPr>
-              <a:t>- IaaS: control total, pero operamos SO y red -&gt; tiempo que no tenemos.</a:t>
+              <a:t>## 5. Alternativas descartadas    &lt;- exactamente 2, con motivo del dominio</a:t>
             </a:r>
           </a:p>
           <a:p>
@@ -6896,7 +7090,7 @@
                 </a:solidFill>
                 <a:latin typeface="Calibri"/>
               </a:rPr>
-              <a:t>- SaaS como nucleo: no personalizable; solo satelite (auth/email).</a:t>
+              <a:t>- IaaS: control total, pero yo opero SO y parches -&gt; tiempo que no tengo.</a:t>
             </a:r>
           </a:p>
           <a:p>
@@ -6912,7 +7106,7 @@
                 </a:solidFill>
                 <a:latin typeface="Calibri"/>
               </a:rPr>
-              <a:t/>
+              <a:t>- SaaS como nucleo: no queda nada que arquitecturar; solo satelite (auth/email).</a:t>
             </a:r>
           </a:p>
           <a:p>
@@ -6928,7 +7122,7 @@
                 </a:solidFill>
                 <a:latin typeface="Calibri"/>
               </a:rPr>
-              <a:t>## Consecuencias</a:t>
+              <a:t/>
             </a:r>
           </a:p>
           <a:p>
@@ -6944,7 +7138,23 @@
                 </a:solidFill>
                 <a:latin typeface="Calibri"/>
               </a:rPr>
-              <a:t>+ Menos operacion.  - Menos control de red.  ~ Portabilidad OK.</a:t>
+              <a:t>## 6. Consecuencias               &lt;- pregunta 7: 3 ejes, cada uno con + y -</a:t>
+            </a:r>
+          </a:p>
+          <a:p>
+            <a:pPr>
+              <a:spcAft>
+                <a:spcPts val="400"/>
+              </a:spcAft>
+            </a:pPr>
+            <a:r>
+              <a:rPr sz="1400" b="0" i="0">
+                <a:solidFill>
+                  <a:srgbClr val="FFFFFF"/>
+                </a:solidFill>
+                <a:latin typeface="Calibri"/>
+              </a:rPr>
+              <a:t>Operacion + / -        Costo + / -        Aprendizaje + / -</a:t>
             </a:r>
           </a:p>
         </p:txBody>
@@ -6979,7 +7189,7 @@
                 </a:solidFill>
                 <a:latin typeface="Calibri"/>
               </a:rPr>
-              <a:t>Si el ADR no nombra un modelo DOMINANTE y 2 descartes con razon, no es un ADR.</a:t>
+              <a:t>Sin Titulo y Estado con fecha no hay ADR que citar en la Clase 15: son 1.5 puntos de la pregunta 6.</a:t>
             </a:r>
           </a:p>
         </p:txBody>

--- a/Arquitectura de Sistemas Computacionales/Clases/Clase 2 - Modelos de servicio IaaS PaaS SaaS/Presentacion.pptx
+++ b/Arquitectura de Sistemas Computacionales/Clases/Clase 2 - Modelos de servicio IaaS PaaS SaaS/Presentacion.pptx
@@ -3608,7 +3608,7 @@
               </a:spcAft>
             </a:pPr>
             <a:r>
-              <a:rPr sz="1600" b="1" i="0">
+              <a:rPr sz="2000" b="1" i="0">
                 <a:solidFill>
                   <a:srgbClr val="333333"/>
                 </a:solidFill>
@@ -3617,7 +3617,7 @@
               <a:t>1.</a:t>
             </a:r>
             <a:r>
-              <a:rPr sz="1600" b="0" i="0">
+              <a:rPr sz="2000" b="0" i="0">
                 <a:solidFill>
                   <a:srgbClr val="333333"/>
                 </a:solidFill>
@@ -3633,7 +3633,7 @@
               </a:spcAft>
             </a:pPr>
             <a:r>
-              <a:rPr sz="1600" b="0" i="0">
+              <a:rPr sz="2000" b="0" i="0">
                 <a:solidFill>
                   <a:srgbClr val="333333"/>
                 </a:solidFill>
@@ -3642,7 +3642,7 @@
               <a:t>–   </a:t>
             </a:r>
             <a:r>
-              <a:rPr sz="1600" b="1" i="0">
+              <a:rPr sz="2000" b="1" i="0">
                 <a:solidFill>
                   <a:srgbClr val="333333"/>
                 </a:solidFill>
@@ -3651,7 +3651,7 @@
               <a:t>2.</a:t>
             </a:r>
             <a:r>
-              <a:rPr sz="1600" b="0" i="0">
+              <a:rPr sz="2000" b="0" i="0">
                 <a:solidFill>
                   <a:srgbClr val="333333"/>
                 </a:solidFill>
@@ -3667,7 +3667,7 @@
               </a:spcAft>
             </a:pPr>
             <a:r>
-              <a:rPr sz="1600" b="0" i="0">
+              <a:rPr sz="2000" b="0" i="0">
                 <a:solidFill>
                   <a:srgbClr val="333333"/>
                 </a:solidFill>
@@ -3676,7 +3676,7 @@
               <a:t>–   </a:t>
             </a:r>
             <a:r>
-              <a:rPr sz="1600" b="1" i="0">
+              <a:rPr sz="2000" b="1" i="0">
                 <a:solidFill>
                   <a:srgbClr val="333333"/>
                 </a:solidFill>
@@ -3685,7 +3685,7 @@
               <a:t>3.</a:t>
             </a:r>
             <a:r>
-              <a:rPr sz="1600" b="0" i="0">
+              <a:rPr sz="2000" b="0" i="0">
                 <a:solidFill>
                   <a:srgbClr val="333333"/>
                 </a:solidFill>
@@ -3701,7 +3701,7 @@
               </a:spcAft>
             </a:pPr>
             <a:r>
-              <a:rPr sz="1600" b="0" i="0">
+              <a:rPr sz="2000" b="0" i="0">
                 <a:solidFill>
                   <a:srgbClr val="333333"/>
                 </a:solidFill>
@@ -3710,7 +3710,7 @@
               <a:t>–   </a:t>
             </a:r>
             <a:r>
-              <a:rPr sz="1600" b="1" i="0">
+              <a:rPr sz="2000" b="1" i="0">
                 <a:solidFill>
                   <a:srgbClr val="333333"/>
                 </a:solidFill>
@@ -3719,7 +3719,7 @@
               <a:t>4.</a:t>
             </a:r>
             <a:r>
-              <a:rPr sz="1600" b="0" i="0">
+              <a:rPr sz="2000" b="0" i="0">
                 <a:solidFill>
                   <a:srgbClr val="333333"/>
                 </a:solidFill>
@@ -4766,7 +4766,7 @@
               </a:spcAft>
             </a:pPr>
             <a:r>
-              <a:rPr sz="1600" b="0" i="0">
+              <a:rPr sz="2000" b="0" i="0">
                 <a:solidFill>
                   <a:srgbClr val="333333"/>
                 </a:solidFill>
@@ -4775,7 +4775,7 @@
               <a:t>–   </a:t>
             </a:r>
             <a:r>
-              <a:rPr sz="1600" b="1" i="0">
+              <a:rPr sz="2000" b="1" i="0">
                 <a:solidFill>
                   <a:srgbClr val="333333"/>
                 </a:solidFill>
@@ -4784,7 +4784,7 @@
               <a:t>0–10</a:t>
             </a:r>
             <a:r>
-              <a:rPr sz="1600" b="0" i="0">
+              <a:rPr sz="2000" b="0" i="0">
                 <a:solidFill>
                   <a:srgbClr val="333333"/>
                 </a:solidFill>
@@ -4800,7 +4800,7 @@
               </a:spcAft>
             </a:pPr>
             <a:r>
-              <a:rPr sz="1600" b="1" i="0">
+              <a:rPr sz="2000" b="1" i="0">
                 <a:solidFill>
                   <a:srgbClr val="333333"/>
                 </a:solidFill>
@@ -4809,7 +4809,7 @@
               <a:t>10–40</a:t>
             </a:r>
             <a:r>
-              <a:rPr sz="1600" b="0" i="0">
+              <a:rPr sz="2000" b="0" i="0">
                 <a:solidFill>
                   <a:srgbClr val="333333"/>
                 </a:solidFill>
@@ -4825,7 +4825,7 @@
               </a:spcAft>
             </a:pPr>
             <a:r>
-              <a:rPr sz="1600" b="0" i="0">
+              <a:rPr sz="2000" b="0" i="0">
                 <a:solidFill>
                   <a:srgbClr val="333333"/>
                 </a:solidFill>
@@ -4834,7 +4834,7 @@
               <a:t>–   </a:t>
             </a:r>
             <a:r>
-              <a:rPr sz="1600" b="1" i="0">
+              <a:rPr sz="2000" b="1" i="0">
                 <a:solidFill>
                   <a:srgbClr val="333333"/>
                 </a:solidFill>
@@ -4843,7 +4843,7 @@
               <a:t>40–100</a:t>
             </a:r>
             <a:r>
-              <a:rPr sz="1600" b="0" i="0">
+              <a:rPr sz="2000" b="0" i="0">
                 <a:solidFill>
                   <a:srgbClr val="333333"/>
                 </a:solidFill>
@@ -4859,7 +4859,7 @@
               </a:spcAft>
             </a:pPr>
             <a:r>
-              <a:rPr sz="1600" b="1" i="0">
+              <a:rPr sz="2000" b="1" i="0">
                 <a:solidFill>
                   <a:srgbClr val="333333"/>
                 </a:solidFill>
@@ -4868,7 +4868,7 @@
               <a:t>100–115</a:t>
             </a:r>
             <a:r>
-              <a:rPr sz="1600" b="0" i="0">
+              <a:rPr sz="2000" b="0" i="0">
                 <a:solidFill>
                   <a:srgbClr val="333333"/>
                 </a:solidFill>
@@ -4884,7 +4884,7 @@
               </a:spcAft>
             </a:pPr>
             <a:r>
-              <a:rPr sz="1600" b="1" i="0">
+              <a:rPr sz="2000" b="1" i="0">
                 <a:solidFill>
                   <a:srgbClr val="333333"/>
                 </a:solidFill>
@@ -4893,7 +4893,7 @@
               <a:t>115–120</a:t>
             </a:r>
             <a:r>
-              <a:rPr sz="1600" b="0" i="0">
+              <a:rPr sz="2000" b="0" i="0">
                 <a:solidFill>
                   <a:srgbClr val="333333"/>
                 </a:solidFill>
@@ -5113,7 +5113,7 @@
               </a:spcAft>
             </a:pPr>
             <a:r>
-              <a:rPr sz="1600" b="0" i="0">
+              <a:rPr sz="2000" b="0" i="0">
                 <a:solidFill>
                   <a:srgbClr val="333333"/>
                 </a:solidFill>
@@ -5129,7 +5129,7 @@
               </a:spcAft>
             </a:pPr>
             <a:r>
-              <a:rPr sz="1600" b="0" i="0">
+              <a:rPr sz="2000" b="0" i="0">
                 <a:solidFill>
                   <a:srgbClr val="333333"/>
                 </a:solidFill>
@@ -5138,7 +5138,7 @@
               <a:t>–   Elegir el </a:t>
             </a:r>
             <a:r>
-              <a:rPr sz="1600" b="1" i="0">
+              <a:rPr sz="2000" b="1" i="0">
                 <a:solidFill>
                   <a:srgbClr val="333333"/>
                 </a:solidFill>
@@ -5147,7 +5147,7 @@
               <a:t>modelo dominante</a:t>
             </a:r>
             <a:r>
-              <a:rPr sz="1600" b="0" i="0">
+              <a:rPr sz="2000" b="0" i="0">
                 <a:solidFill>
                   <a:srgbClr val="333333"/>
                 </a:solidFill>
@@ -5163,7 +5163,7 @@
               </a:spcAft>
             </a:pPr>
             <a:r>
-              <a:rPr sz="1600" b="0" i="0">
+              <a:rPr sz="2000" b="0" i="0">
                 <a:solidFill>
                   <a:srgbClr val="333333"/>
                 </a:solidFill>
@@ -5172,7 +5172,7 @@
               <a:t>–   Documentar la decisión como </a:t>
             </a:r>
             <a:r>
-              <a:rPr sz="1600" b="1" i="0">
+              <a:rPr sz="2000" b="1" i="0">
                 <a:solidFill>
                   <a:srgbClr val="333333"/>
                 </a:solidFill>
@@ -5181,7 +5181,7 @@
               <a:t>ADR</a:t>
             </a:r>
             <a:r>
-              <a:rPr sz="1600" b="0" i="0">
+              <a:rPr sz="2000" b="0" i="0">
                 <a:solidFill>
                   <a:srgbClr val="333333"/>
                 </a:solidFill>
@@ -5401,7 +5401,7 @@
               </a:spcAft>
             </a:pPr>
             <a:r>
-              <a:rPr sz="1600" b="0" i="0">
+              <a:rPr sz="2000" b="0" i="0">
                 <a:solidFill>
                   <a:srgbClr val="333333"/>
                 </a:solidFill>
@@ -5410,7 +5410,7 @@
               <a:t>–   </a:t>
             </a:r>
             <a:r>
-              <a:rPr sz="1600" b="1" i="0">
+              <a:rPr sz="2000" b="1" i="0">
                 <a:solidFill>
                   <a:srgbClr val="333333"/>
                 </a:solidFill>
@@ -5419,7 +5419,7 @@
               <a:t>Entregable:</a:t>
             </a:r>
             <a:r>
-              <a:rPr sz="1600" b="0" i="0">
+              <a:rPr sz="2000" b="0" i="0">
                 <a:solidFill>
                   <a:srgbClr val="333333"/>
                 </a:solidFill>
@@ -5435,7 +5435,7 @@
               </a:spcAft>
             </a:pPr>
             <a:r>
-              <a:rPr sz="1600" b="0" i="0">
+              <a:rPr sz="2000" b="0" i="0">
                 <a:solidFill>
                   <a:srgbClr val="333333"/>
                 </a:solidFill>
@@ -5444,7 +5444,7 @@
               <a:t>–   Herramienta: </a:t>
             </a:r>
             <a:r>
-              <a:rPr sz="1600" b="1" i="0">
+              <a:rPr sz="2000" b="1" i="0">
                 <a:solidFill>
                   <a:srgbClr val="333333"/>
                 </a:solidFill>
@@ -5460,7 +5460,7 @@
               </a:spcAft>
             </a:pPr>
             <a:r>
-              <a:rPr sz="1600" b="0" i="0">
+              <a:rPr sz="2000" b="0" i="0">
                 <a:solidFill>
                   <a:srgbClr val="333333"/>
                 </a:solidFill>
@@ -5469,7 +5469,7 @@
               <a:t>–   Todo lo que construyan hoy entra al </a:t>
             </a:r>
             <a:r>
-              <a:rPr sz="1600" b="1" i="0">
+              <a:rPr sz="2000" b="1" i="0">
                 <a:solidFill>
                   <a:srgbClr val="333333"/>
                 </a:solidFill>
@@ -5478,7 +5478,7 @@
               <a:t>informe/repo del PI</a:t>
             </a:r>
             <a:r>
-              <a:rPr sz="1600" b="0" i="0">
+              <a:rPr sz="2000" b="0" i="0">
                 <a:solidFill>
                   <a:srgbClr val="333333"/>
                 </a:solidFill>
@@ -5494,7 +5494,7 @@
               </a:spcAft>
             </a:pPr>
             <a:r>
-              <a:rPr sz="1600" b="0" i="0">
+              <a:rPr sz="2000" b="0" i="0">
                 <a:solidFill>
                   <a:srgbClr val="333333"/>
                 </a:solidFill>
@@ -5714,7 +5714,7 @@
               </a:spcAft>
             </a:pPr>
             <a:r>
-              <a:rPr sz="1600" b="0" i="0">
+              <a:rPr sz="2000" b="0" i="0">
                 <a:solidFill>
                   <a:srgbClr val="333333"/>
                 </a:solidFill>
@@ -5723,7 +5723,7 @@
               <a:t>–   </a:t>
             </a:r>
             <a:r>
-              <a:rPr sz="1600" b="1" i="0">
+              <a:rPr sz="2000" b="1" i="0">
                 <a:solidFill>
                   <a:srgbClr val="333333"/>
                 </a:solidFill>
@@ -5732,7 +5732,7 @@
               <a:t>IaaS</a:t>
             </a:r>
             <a:r>
-              <a:rPr sz="1600" b="0" i="0">
+              <a:rPr sz="2000" b="0" i="0">
                 <a:solidFill>
                   <a:srgbClr val="333333"/>
                 </a:solidFill>
@@ -5748,7 +5748,7 @@
               </a:spcAft>
             </a:pPr>
             <a:r>
-              <a:rPr sz="1600" b="0" i="0">
+              <a:rPr sz="2000" b="0" i="0">
                 <a:solidFill>
                   <a:srgbClr val="333333"/>
                 </a:solidFill>
@@ -5757,7 +5757,7 @@
               <a:t>–   </a:t>
             </a:r>
             <a:r>
-              <a:rPr sz="1600" b="1" i="0">
+              <a:rPr sz="2000" b="1" i="0">
                 <a:solidFill>
                   <a:srgbClr val="333333"/>
                 </a:solidFill>
@@ -5766,7 +5766,7 @@
               <a:t>PaaS</a:t>
             </a:r>
             <a:r>
-              <a:rPr sz="1600" b="0" i="0">
+              <a:rPr sz="2000" b="0" i="0">
                 <a:solidFill>
                   <a:srgbClr val="333333"/>
                 </a:solidFill>
@@ -5782,7 +5782,7 @@
               </a:spcAft>
             </a:pPr>
             <a:r>
-              <a:rPr sz="1600" b="0" i="0">
+              <a:rPr sz="2000" b="0" i="0">
                 <a:solidFill>
                   <a:srgbClr val="333333"/>
                 </a:solidFill>
@@ -5791,7 +5791,7 @@
               <a:t>–   </a:t>
             </a:r>
             <a:r>
-              <a:rPr sz="1600" b="1" i="0">
+              <a:rPr sz="2000" b="1" i="0">
                 <a:solidFill>
                   <a:srgbClr val="333333"/>
                 </a:solidFill>
@@ -5800,7 +5800,7 @@
               <a:t>SaaS</a:t>
             </a:r>
             <a:r>
-              <a:rPr sz="1600" b="0" i="0">
+              <a:rPr sz="2000" b="0" i="0">
                 <a:solidFill>
                   <a:srgbClr val="333333"/>
                 </a:solidFill>
@@ -5816,7 +5816,7 @@
               </a:spcAft>
             </a:pPr>
             <a:r>
-              <a:rPr sz="1600" b="0" i="0">
+              <a:rPr sz="2000" b="0" i="0">
                 <a:solidFill>
                   <a:srgbClr val="333333"/>
                 </a:solidFill>
@@ -5825,7 +5825,7 @@
               <a:t>–   En este curso </a:t>
             </a:r>
             <a:r>
-              <a:rPr sz="1600" b="1" i="0">
+              <a:rPr sz="2000" b="1" i="0">
                 <a:solidFill>
                   <a:srgbClr val="333333"/>
                 </a:solidFill>
@@ -5834,7 +5834,7 @@
               <a:t>simulamos</a:t>
             </a:r>
             <a:r>
-              <a:rPr sz="1600" b="0" i="0">
+              <a:rPr sz="2000" b="0" i="0">
                 <a:solidFill>
                   <a:srgbClr val="333333"/>
                 </a:solidFill>
@@ -6054,7 +6054,7 @@
               </a:spcAft>
             </a:pPr>
             <a:r>
-              <a:rPr sz="1600" b="0" i="0">
+              <a:rPr sz="2000" b="0" i="0">
                 <a:solidFill>
                   <a:srgbClr val="333333"/>
                 </a:solidFill>
@@ -6070,7 +6070,7 @@
               </a:spcAft>
             </a:pPr>
             <a:r>
-              <a:rPr sz="1600" b="0" i="0">
+              <a:rPr sz="2000" b="0" i="0">
                 <a:solidFill>
                   <a:srgbClr val="333333"/>
                 </a:solidFill>
@@ -6079,7 +6079,7 @@
               <a:t>–   Para un MVP académico suele ganar </a:t>
             </a:r>
             <a:r>
-              <a:rPr sz="1600" b="1" i="0">
+              <a:rPr sz="2000" b="1" i="0">
                 <a:solidFill>
                   <a:srgbClr val="333333"/>
                 </a:solidFill>
@@ -6088,7 +6088,7 @@
               <a:t>PaaS conceptual</a:t>
             </a:r>
             <a:r>
-              <a:rPr sz="1600" b="0" i="0">
+              <a:rPr sz="2000" b="0" i="0">
                 <a:solidFill>
                   <a:srgbClr val="333333"/>
                 </a:solidFill>
@@ -6104,7 +6104,7 @@
               </a:spcAft>
             </a:pPr>
             <a:r>
-              <a:rPr sz="1600" b="0" i="0">
+              <a:rPr sz="2000" b="0" i="0">
                 <a:solidFill>
                   <a:srgbClr val="333333"/>
                 </a:solidFill>
@@ -6120,7 +6120,7 @@
               </a:spcAft>
             </a:pPr>
             <a:r>
-              <a:rPr sz="1600" b="0" i="0">
+              <a:rPr sz="2000" b="0" i="0">
                 <a:solidFill>
                   <a:srgbClr val="333333"/>
                 </a:solidFill>
@@ -6129,7 +6129,7 @@
               <a:t>–   SaaS solo como </a:t>
             </a:r>
             <a:r>
-              <a:rPr sz="1600" b="1" i="0">
+              <a:rPr sz="2000" b="1" i="0">
                 <a:solidFill>
                   <a:srgbClr val="333333"/>
                 </a:solidFill>
@@ -6138,7 +6138,7 @@
               <a:t>satélite</a:t>
             </a:r>
             <a:r>
-              <a:rPr sz="1600" b="0" i="0">
+              <a:rPr sz="2000" b="0" i="0">
                 <a:solidFill>
                   <a:srgbClr val="333333"/>
                 </a:solidFill>
@@ -6358,7 +6358,7 @@
               </a:spcAft>
             </a:pPr>
             <a:r>
-              <a:rPr sz="1600" b="0" i="0">
+              <a:rPr sz="2000" b="0" i="0">
                 <a:solidFill>
                   <a:srgbClr val="333333"/>
                 </a:solidFill>
@@ -6367,7 +6367,7 @@
               <a:t>–   </a:t>
             </a:r>
             <a:r>
-              <a:rPr sz="1600" b="1" i="0">
+              <a:rPr sz="2000" b="1" i="0">
                 <a:solidFill>
                   <a:srgbClr val="333333"/>
                 </a:solidFill>
@@ -6376,7 +6376,7 @@
               <a:t>6 secciones rotuladas</a:t>
             </a:r>
             <a:r>
-              <a:rPr sz="1600" b="0" i="0">
+              <a:rPr sz="2000" b="0" i="0">
                 <a:solidFill>
                   <a:srgbClr val="333333"/>
                 </a:solidFill>
@@ -6392,7 +6392,7 @@
               </a:spcAft>
             </a:pPr>
             <a:r>
-              <a:rPr sz="1600" b="0" i="0">
+              <a:rPr sz="2000" b="0" i="0">
                 <a:solidFill>
                   <a:srgbClr val="333333"/>
                 </a:solidFill>
@@ -6401,7 +6401,7 @@
               <a:t>–   </a:t>
             </a:r>
             <a:r>
-              <a:rPr sz="1600" b="1" i="0">
+              <a:rPr sz="2000" b="1" i="0">
                 <a:solidFill>
                   <a:srgbClr val="333333"/>
                 </a:solidFill>
@@ -6410,7 +6410,7 @@
               <a:t>Título</a:t>
             </a:r>
             <a:r>
-              <a:rPr sz="1600" b="0" i="0">
+              <a:rPr sz="2000" b="0" i="0">
                 <a:solidFill>
                   <a:srgbClr val="333333"/>
                 </a:solidFill>
@@ -6419,7 +6419,7 @@
               <a:t>: «ADR-001 Modelo de servicio dominante de CloudLite App».  </a:t>
             </a:r>
             <a:r>
-              <a:rPr sz="1600" b="1" i="0">
+              <a:rPr sz="2000" b="1" i="0">
                 <a:solidFill>
                   <a:srgbClr val="333333"/>
                 </a:solidFill>
@@ -6428,7 +6428,7 @@
               <a:t>Estado</a:t>
             </a:r>
             <a:r>
-              <a:rPr sz="1600" b="0" i="0">
+              <a:rPr sz="2000" b="0" i="0">
                 <a:solidFill>
                   <a:srgbClr val="333333"/>
                 </a:solidFill>
@@ -6444,7 +6444,7 @@
               </a:spcAft>
             </a:pPr>
             <a:r>
-              <a:rPr sz="1600" b="0" i="0">
+              <a:rPr sz="2000" b="0" i="0">
                 <a:solidFill>
                   <a:srgbClr val="333333"/>
                 </a:solidFill>
@@ -6453,7 +6453,7 @@
               <a:t>–   </a:t>
             </a:r>
             <a:r>
-              <a:rPr sz="1600" b="1" i="0">
+              <a:rPr sz="2000" b="1" i="0">
                 <a:solidFill>
                   <a:srgbClr val="333333"/>
                 </a:solidFill>
@@ -6462,7 +6462,7 @@
               <a:t>Contexto</a:t>
             </a:r>
             <a:r>
-              <a:rPr sz="1600" b="0" i="0">
+              <a:rPr sz="2000" b="0" i="0">
                 <a:solidFill>
                   <a:srgbClr val="333333"/>
                 </a:solidFill>
@@ -6478,7 +6478,7 @@
               </a:spcAft>
             </a:pPr>
             <a:r>
-              <a:rPr sz="1600" b="0" i="0">
+              <a:rPr sz="2000" b="0" i="0">
                 <a:solidFill>
                   <a:srgbClr val="333333"/>
                 </a:solidFill>
@@ -6487,7 +6487,7 @@
               <a:t>–   </a:t>
             </a:r>
             <a:r>
-              <a:rPr sz="1600" b="1" i="0">
+              <a:rPr sz="2000" b="1" i="0">
                 <a:solidFill>
                   <a:srgbClr val="333333"/>
                 </a:solidFill>
@@ -6496,7 +6496,7 @@
               <a:t>Decisión</a:t>
             </a:r>
             <a:r>
-              <a:rPr sz="1600" b="0" i="0">
+              <a:rPr sz="2000" b="0" i="0">
                 <a:solidFill>
                   <a:srgbClr val="333333"/>
                 </a:solidFill>
@@ -6505,7 +6505,7 @@
               <a:t>: 1 frase, 1 modelo dominante.  </a:t>
             </a:r>
             <a:r>
-              <a:rPr sz="1600" b="1" i="0">
+              <a:rPr sz="2000" b="1" i="0">
                 <a:solidFill>
                   <a:srgbClr val="333333"/>
                 </a:solidFill>
@@ -6514,7 +6514,7 @@
               <a:t>Alternativas descartadas</a:t>
             </a:r>
             <a:r>
-              <a:rPr sz="1600" b="0" i="0">
+              <a:rPr sz="2000" b="0" i="0">
                 <a:solidFill>
                   <a:srgbClr val="333333"/>
                 </a:solidFill>
@@ -6530,7 +6530,7 @@
               </a:spcAft>
             </a:pPr>
             <a:r>
-              <a:rPr sz="1600" b="0" i="0">
+              <a:rPr sz="2000" b="0" i="0">
                 <a:solidFill>
                   <a:srgbClr val="333333"/>
                 </a:solidFill>
@@ -6539,7 +6539,7 @@
               <a:t>–   Máximo 1 página. Las 5 primeras secciones son la </a:t>
             </a:r>
             <a:r>
-              <a:rPr sz="1600" b="1" i="0">
+              <a:rPr sz="2000" b="1" i="0">
                 <a:solidFill>
                   <a:srgbClr val="333333"/>
                 </a:solidFill>
@@ -6548,7 +6548,7 @@
               <a:t>pregunta 6</a:t>
             </a:r>
             <a:r>
-              <a:rPr sz="1600" b="0" i="0">
+              <a:rPr sz="2000" b="0" i="0">
                 <a:solidFill>
                   <a:srgbClr val="333333"/>
                 </a:solidFill>
@@ -6557,7 +6557,7 @@
               <a:t>; </a:t>
             </a:r>
             <a:r>
-              <a:rPr sz="1600" b="1" i="0">
+              <a:rPr sz="2000" b="1" i="0">
                 <a:solidFill>
                   <a:srgbClr val="333333"/>
                 </a:solidFill>
@@ -6566,7 +6566,7 @@
               <a:t>Consecuencias</a:t>
             </a:r>
             <a:r>
-              <a:rPr sz="1600" b="0" i="0">
+              <a:rPr sz="2000" b="0" i="0">
                 <a:solidFill>
                   <a:srgbClr val="333333"/>
                 </a:solidFill>
@@ -6575,7 +6575,7 @@
               <a:t> es la </a:t>
             </a:r>
             <a:r>
-              <a:rPr sz="1600" b="1" i="0">
+              <a:rPr sz="2000" b="1" i="0">
                 <a:solidFill>
                   <a:srgbClr val="333333"/>
                 </a:solidFill>
@@ -6584,7 +6584,7 @@
               <a:t>pregunta 7</a:t>
             </a:r>
             <a:r>
-              <a:rPr sz="1600" b="0" i="0">
+              <a:rPr sz="2000" b="0" i="0">
                 <a:solidFill>
                   <a:srgbClr val="333333"/>
                 </a:solidFill>

--- a/Arquitectura de Sistemas Computacionales/Clases/Clase 2 - Modelos de servicio IaaS PaaS SaaS/Presentacion.pptx
+++ b/Arquitectura de Sistemas Computacionales/Clases/Clase 2 - Modelos de servicio IaaS PaaS SaaS/Presentacion.pptx
@@ -4182,7 +4182,7 @@
                 </a:solidFill>
                 <a:latin typeface="Calibri"/>
               </a:rPr>
-              <a:t>Subir evidencias al paquete CloudLite (Drive/repo) y a ExamLab (https://uniaj.examlab.workers.dev/) domingo 23:59.</a:t>
+              <a:t>Subir evidencias al paquete CloudLite (Drive/repo) y a la plataforma del curso en la fecha que indique el docente.</a:t>
             </a:r>
           </a:p>
         </p:txBody>
@@ -4899,7 +4899,7 @@
                 </a:solidFill>
                 <a:latin typeface="Calibri"/>
               </a:rPr>
-              <a:t> Cierre: criterio de éxito + plazo domingo 23:59.</a:t>
+              <a:t> Cierre: criterio de éxito + plazo en la fecha que indique el docente.</a:t>
             </a:r>
           </a:p>
         </p:txBody>
@@ -5500,7 +5500,7 @@
                 </a:solidFill>
                 <a:latin typeface="Calibri"/>
               </a:rPr>
-              <a:t>–   Individual por defecto · el docente puede autorizar equipos de 2–3; la entrega en ExamLab siempre es individual.</a:t>
+              <a:t>–   Individual por defecto · el docente puede autorizar equipos de 2–3; la entrega en la plataforma del curso siempre es individual.</a:t>
             </a:r>
           </a:p>
         </p:txBody>
@@ -8000,7 +8000,7 @@
                 </a:solidFill>
                 <a:latin typeface="Calibri"/>
               </a:rPr>
-              <a:t>ExamLab</a:t>
+              <a:t>la plataforma del curso</a:t>
             </a:r>
           </a:p>
           <a:p>

--- a/Arquitectura de Sistemas Computacionales/Clases/Clase 2 - Modelos de servicio IaaS PaaS SaaS/Presentacion.pptx
+++ b/Arquitectura de Sistemas Computacionales/Clases/Clase 2 - Modelos de servicio IaaS PaaS SaaS/Presentacion.pptx
@@ -17,6 +17,7 @@
     <p:sldId id="265" r:id="rId16"/>
     <p:sldId id="266" r:id="rId17"/>
     <p:sldId id="267" r:id="rId18"/>
+    <p:sldId id="268" r:id="rId19"/>
   </p:sldIdLst>
   <p:sldSz cx="12191695" cy="6858000" type="screen4x3"/>
   <p:notesSz cx="6858000" cy="9144000"/>
@@ -3469,7 +3470,7 @@
         <p:spPr>
           <a:xfrm>
             <a:off x="0" y="0"/>
-            <a:ext cx="12191695" cy="960120"/>
+            <a:ext cx="12191695" cy="1170432"/>
           </a:xfrm>
           <a:prstGeom prst="rect">
             <a:avLst/>
@@ -3511,7 +3512,7 @@
         </p:nvSpPr>
         <p:spPr>
           <a:xfrm>
-            <a:off x="0" y="960120"/>
+            <a:off x="0" y="1170432"/>
             <a:ext cx="12191695" cy="41148"/>
           </a:xfrm>
           <a:prstGeom prst="rect">
@@ -3555,7 +3556,7 @@
         <p:spPr>
           <a:xfrm>
             <a:off x="457200" y="164592"/>
-            <a:ext cx="11277295" cy="502920"/>
+            <a:ext cx="11277295" cy="384048"/>
           </a:xfrm>
           <a:prstGeom prst="rect">
             <a:avLst/>
@@ -3575,7 +3576,7 @@
                 </a:solidFill>
                 <a:latin typeface="Calibri"/>
               </a:rPr>
-              <a:t>Taller PI (paso a paso)</a:t>
+              <a:t>Herramientas de hoy</a:t>
             </a:r>
           </a:p>
         </p:txBody>
@@ -3588,8 +3589,8 @@
         </p:nvSpPr>
         <p:spPr>
           <a:xfrm>
-            <a:off x="457200" y="1170432"/>
-            <a:ext cx="11277295" cy="5230368"/>
+            <a:off x="457200" y="566928"/>
+            <a:ext cx="11277295" cy="411480"/>
           </a:xfrm>
           <a:prstGeom prst="rect">
             <a:avLst/>
@@ -3602,137 +3603,633 @@
           </a:bodyPr>
           <a:lstStyle/>
           <a:p>
-            <a:pPr>
-              <a:spcAft>
-                <a:spcPts val="800"/>
-              </a:spcAft>
+            <a:r>
+              <a:rPr sz="1400" b="0" i="0">
+                <a:solidFill>
+                  <a:srgbClr val="B8D8EE"/>
+                </a:solidFill>
+                <a:latin typeface="Calibri"/>
+              </a:rPr>
+              <a:t>Gratis · navegador o free tier · sin cuenta de pago</a:t>
+            </a:r>
+          </a:p>
+        </p:txBody>
+      </p:sp>
+      <p:sp>
+        <p:nvSpPr>
+          <p:cNvPr id="6" name="Rounded Rectangle 5"/>
+          <p:cNvSpPr/>
+          <p:nvPr/>
+        </p:nvSpPr>
+        <p:spPr>
+          <a:xfrm>
+            <a:off x="457200" y="1591056"/>
+            <a:ext cx="3624986" cy="2331720"/>
+          </a:xfrm>
+          <a:prstGeom prst="roundRect">
+            <a:avLst>
+              <a:gd name="adj" fmla="val 12000"/>
+            </a:avLst>
+          </a:prstGeom>
+          <a:solidFill>
+            <a:srgbClr val="F2F2F2"/>
+          </a:solidFill>
+          <a:ln>
+            <a:noFill/>
+          </a:ln>
+        </p:spPr>
+        <p:style>
+          <a:lnRef idx="1">
+            <a:schemeClr val="accent1"/>
+          </a:lnRef>
+          <a:fillRef idx="3">
+            <a:schemeClr val="accent1"/>
+          </a:fillRef>
+          <a:effectRef idx="2">
+            <a:schemeClr val="accent1"/>
+          </a:effectRef>
+          <a:fontRef idx="minor">
+            <a:schemeClr val="lt1"/>
+          </a:fontRef>
+        </p:style>
+        <p:txBody>
+          <a:bodyPr rtlCol="0" anchor="ctr"/>
+          <a:lstStyle/>
+          <a:p>
+            <a:pPr algn="ctr"/>
+          </a:p>
+        </p:txBody>
+      </p:sp>
+      <p:sp>
+        <p:nvSpPr>
+          <p:cNvPr id="7" name="Rectangle 6"/>
+          <p:cNvSpPr/>
+          <p:nvPr/>
+        </p:nvSpPr>
+        <p:spPr>
+          <a:xfrm>
+            <a:off x="457200" y="1591056"/>
+            <a:ext cx="3624986" cy="64008"/>
+          </a:xfrm>
+          <a:prstGeom prst="rect">
+            <a:avLst/>
+          </a:prstGeom>
+          <a:solidFill>
+            <a:srgbClr val="095292"/>
+          </a:solidFill>
+          <a:ln>
+            <a:noFill/>
+          </a:ln>
+        </p:spPr>
+        <p:style>
+          <a:lnRef idx="1">
+            <a:schemeClr val="accent1"/>
+          </a:lnRef>
+          <a:fillRef idx="3">
+            <a:schemeClr val="accent1"/>
+          </a:fillRef>
+          <a:effectRef idx="2">
+            <a:schemeClr val="accent1"/>
+          </a:effectRef>
+          <a:fontRef idx="minor">
+            <a:schemeClr val="lt1"/>
+          </a:fontRef>
+        </p:style>
+        <p:txBody>
+          <a:bodyPr rtlCol="0" anchor="ctr"/>
+          <a:lstStyle/>
+          <a:p>
+            <a:pPr algn="ctr"/>
+          </a:p>
+        </p:txBody>
+      </p:sp>
+      <p:sp>
+        <p:nvSpPr>
+          <p:cNvPr id="8" name="Rectangle 7"/>
+          <p:cNvSpPr/>
+          <p:nvPr/>
+        </p:nvSpPr>
+        <p:spPr>
+          <a:xfrm>
+            <a:off x="457200" y="1655064"/>
+            <a:ext cx="3624986" cy="27432"/>
+          </a:xfrm>
+          <a:prstGeom prst="rect">
+            <a:avLst/>
+          </a:prstGeom>
+          <a:solidFill>
+            <a:srgbClr val="FFD000"/>
+          </a:solidFill>
+          <a:ln>
+            <a:noFill/>
+          </a:ln>
+        </p:spPr>
+        <p:style>
+          <a:lnRef idx="1">
+            <a:schemeClr val="accent1"/>
+          </a:lnRef>
+          <a:fillRef idx="3">
+            <a:schemeClr val="accent1"/>
+          </a:fillRef>
+          <a:effectRef idx="2">
+            <a:schemeClr val="accent1"/>
+          </a:effectRef>
+          <a:fontRef idx="minor">
+            <a:schemeClr val="lt1"/>
+          </a:fontRef>
+        </p:style>
+        <p:txBody>
+          <a:bodyPr rtlCol="0" anchor="ctr"/>
+          <a:lstStyle/>
+          <a:p>
+            <a:pPr algn="ctr"/>
+          </a:p>
+        </p:txBody>
+      </p:sp>
+      <p:pic>
+        <p:nvPicPr>
+          <p:cNvPr id="9" name="Picture 8" descr="google_docs.png"/>
+          <p:cNvPicPr>
+            <a:picLocks noChangeAspect="1"/>
+          </p:cNvPicPr>
+          <p:nvPr/>
+        </p:nvPicPr>
+        <p:blipFill>
+          <a:blip r:embed="rId2"/>
+          <a:stretch>
+            <a:fillRect/>
+          </a:stretch>
+        </p:blipFill>
+        <p:spPr>
+          <a:xfrm>
+            <a:off x="1643329" y="1847087"/>
+            <a:ext cx="1252728" cy="1252728"/>
+          </a:xfrm>
+          <a:prstGeom prst="rect">
+            <a:avLst/>
+          </a:prstGeom>
+        </p:spPr>
+      </p:pic>
+      <p:sp>
+        <p:nvSpPr>
+          <p:cNvPr id="10" name="TextBox 9"/>
+          <p:cNvSpPr txBox="1"/>
+          <p:nvPr/>
+        </p:nvSpPr>
+        <p:spPr>
+          <a:xfrm>
+            <a:off x="530352" y="3191256"/>
+            <a:ext cx="3478682" cy="621792"/>
+          </a:xfrm>
+          <a:prstGeom prst="rect">
+            <a:avLst/>
+          </a:prstGeom>
+          <a:noFill/>
+        </p:spPr>
+        <p:txBody>
+          <a:bodyPr wrap="square" anchor="t"/>
+          <a:lstStyle/>
+          <a:p>
+            <a:pPr algn="ctr"/>
+            <a:r>
+              <a:rPr sz="1300" b="1" i="0">
+                <a:solidFill>
+                  <a:srgbClr val="095292"/>
+                </a:solidFill>
+                <a:latin typeface="Calibri"/>
+              </a:rPr>
+              <a:t>Google Docs</a:t>
+            </a:r>
+          </a:p>
+          <a:p>
+            <a:pPr algn="ctr">
+              <a:spcBef>
+                <a:spcPts val="200"/>
+              </a:spcBef>
             </a:pPr>
             <a:r>
-              <a:rPr sz="2000" b="1" i="0">
-                <a:solidFill>
-                  <a:srgbClr val="333333"/>
-                </a:solidFill>
-                <a:latin typeface="Calibri"/>
-              </a:rPr>
-              <a:t>1.</a:t>
-            </a:r>
-            <a:r>
-              <a:rPr sz="2000" b="0" i="0">
-                <a:solidFill>
-                  <a:srgbClr val="333333"/>
-                </a:solidFill>
-                <a:latin typeface="Calibri"/>
-              </a:rPr>
-              <a:t> Paso 1: relea su ficha y su C4 Context de la Clase 1. No cambie de dominio: las preguntas 5 a 7 se califican sobre el mismo sistema, y el ADR que redacte hoy se reutiliza en el informe del PI y en la sustentacion de la Clase 15.</a:t>
-            </a:r>
-          </a:p>
-          <a:p>
-            <a:pPr>
-              <a:spcAft>
-                <a:spcPts val="800"/>
-              </a:spcAft>
+              <a:rPr sz="1000" b="0" i="0">
+                <a:solidFill>
+                  <a:srgbClr val="666666"/>
+                </a:solidFill>
+                <a:latin typeface="Calibri"/>
+              </a:rPr>
+              <a:t>ADR-001</a:t>
+            </a:r>
+          </a:p>
+        </p:txBody>
+      </p:sp>
+      <p:sp>
+        <p:nvSpPr>
+          <p:cNvPr id="11" name="Rounded Rectangle 10"/>
+          <p:cNvSpPr/>
+          <p:nvPr/>
+        </p:nvSpPr>
+        <p:spPr>
+          <a:xfrm>
+            <a:off x="4283354" y="1591056"/>
+            <a:ext cx="3624986" cy="2331720"/>
+          </a:xfrm>
+          <a:prstGeom prst="roundRect">
+            <a:avLst>
+              <a:gd name="adj" fmla="val 12000"/>
+            </a:avLst>
+          </a:prstGeom>
+          <a:solidFill>
+            <a:srgbClr val="F2F2F2"/>
+          </a:solidFill>
+          <a:ln>
+            <a:noFill/>
+          </a:ln>
+        </p:spPr>
+        <p:style>
+          <a:lnRef idx="1">
+            <a:schemeClr val="accent1"/>
+          </a:lnRef>
+          <a:fillRef idx="3">
+            <a:schemeClr val="accent1"/>
+          </a:fillRef>
+          <a:effectRef idx="2">
+            <a:schemeClr val="accent1"/>
+          </a:effectRef>
+          <a:fontRef idx="minor">
+            <a:schemeClr val="lt1"/>
+          </a:fontRef>
+        </p:style>
+        <p:txBody>
+          <a:bodyPr rtlCol="0" anchor="ctr"/>
+          <a:lstStyle/>
+          <a:p>
+            <a:pPr algn="ctr"/>
+          </a:p>
+        </p:txBody>
+      </p:sp>
+      <p:sp>
+        <p:nvSpPr>
+          <p:cNvPr id="12" name="Rectangle 11"/>
+          <p:cNvSpPr/>
+          <p:nvPr/>
+        </p:nvSpPr>
+        <p:spPr>
+          <a:xfrm>
+            <a:off x="4283354" y="1591056"/>
+            <a:ext cx="3624986" cy="64008"/>
+          </a:xfrm>
+          <a:prstGeom prst="rect">
+            <a:avLst/>
+          </a:prstGeom>
+          <a:solidFill>
+            <a:srgbClr val="095292"/>
+          </a:solidFill>
+          <a:ln>
+            <a:noFill/>
+          </a:ln>
+        </p:spPr>
+        <p:style>
+          <a:lnRef idx="1">
+            <a:schemeClr val="accent1"/>
+          </a:lnRef>
+          <a:fillRef idx="3">
+            <a:schemeClr val="accent1"/>
+          </a:fillRef>
+          <a:effectRef idx="2">
+            <a:schemeClr val="accent1"/>
+          </a:effectRef>
+          <a:fontRef idx="minor">
+            <a:schemeClr val="lt1"/>
+          </a:fontRef>
+        </p:style>
+        <p:txBody>
+          <a:bodyPr rtlCol="0" anchor="ctr"/>
+          <a:lstStyle/>
+          <a:p>
+            <a:pPr algn="ctr"/>
+          </a:p>
+        </p:txBody>
+      </p:sp>
+      <p:sp>
+        <p:nvSpPr>
+          <p:cNvPr id="13" name="Rectangle 12"/>
+          <p:cNvSpPr/>
+          <p:nvPr/>
+        </p:nvSpPr>
+        <p:spPr>
+          <a:xfrm>
+            <a:off x="4283354" y="1655064"/>
+            <a:ext cx="3624986" cy="27432"/>
+          </a:xfrm>
+          <a:prstGeom prst="rect">
+            <a:avLst/>
+          </a:prstGeom>
+          <a:solidFill>
+            <a:srgbClr val="FFD000"/>
+          </a:solidFill>
+          <a:ln>
+            <a:noFill/>
+          </a:ln>
+        </p:spPr>
+        <p:style>
+          <a:lnRef idx="1">
+            <a:schemeClr val="accent1"/>
+          </a:lnRef>
+          <a:fillRef idx="3">
+            <a:schemeClr val="accent1"/>
+          </a:fillRef>
+          <a:effectRef idx="2">
+            <a:schemeClr val="accent1"/>
+          </a:effectRef>
+          <a:fontRef idx="minor">
+            <a:schemeClr val="lt1"/>
+          </a:fontRef>
+        </p:style>
+        <p:txBody>
+          <a:bodyPr rtlCol="0" anchor="ctr"/>
+          <a:lstStyle/>
+          <a:p>
+            <a:pPr algn="ctr"/>
+          </a:p>
+        </p:txBody>
+      </p:sp>
+      <p:pic>
+        <p:nvPicPr>
+          <p:cNvPr id="14" name="Picture 13" descr="drawio.png"/>
+          <p:cNvPicPr>
+            <a:picLocks noChangeAspect="1"/>
+          </p:cNvPicPr>
+          <p:nvPr/>
+        </p:nvPicPr>
+        <p:blipFill>
+          <a:blip r:embed="rId3"/>
+          <a:stretch>
+            <a:fillRect/>
+          </a:stretch>
+        </p:blipFill>
+        <p:spPr>
+          <a:xfrm>
+            <a:off x="5469483" y="1847087"/>
+            <a:ext cx="1252728" cy="1252728"/>
+          </a:xfrm>
+          <a:prstGeom prst="rect">
+            <a:avLst/>
+          </a:prstGeom>
+        </p:spPr>
+      </p:pic>
+      <p:sp>
+        <p:nvSpPr>
+          <p:cNvPr id="15" name="TextBox 14"/>
+          <p:cNvSpPr txBox="1"/>
+          <p:nvPr/>
+        </p:nvSpPr>
+        <p:spPr>
+          <a:xfrm>
+            <a:off x="4356506" y="3191256"/>
+            <a:ext cx="3478682" cy="621792"/>
+          </a:xfrm>
+          <a:prstGeom prst="rect">
+            <a:avLst/>
+          </a:prstGeom>
+          <a:noFill/>
+        </p:spPr>
+        <p:txBody>
+          <a:bodyPr wrap="square" anchor="t"/>
+          <a:lstStyle/>
+          <a:p>
+            <a:pPr algn="ctr"/>
+            <a:r>
+              <a:rPr sz="1300" b="1" i="0">
+                <a:solidFill>
+                  <a:srgbClr val="095292"/>
+                </a:solidFill>
+                <a:latin typeface="Calibri"/>
+              </a:rPr>
+              <a:t>draw.io</a:t>
+            </a:r>
+          </a:p>
+          <a:p>
+            <a:pPr algn="ctr">
+              <a:spcBef>
+                <a:spcPts val="200"/>
+              </a:spcBef>
             </a:pPr>
             <a:r>
-              <a:rPr sz="2000" b="0" i="0">
-                <a:solidFill>
-                  <a:srgbClr val="333333"/>
-                </a:solidFill>
-                <a:latin typeface="Calibri"/>
-              </a:rPr>
-              <a:t>–   </a:t>
-            </a:r>
-            <a:r>
-              <a:rPr sz="2000" b="1" i="0">
-                <a:solidFill>
-                  <a:srgbClr val="333333"/>
-                </a:solidFill>
-                <a:latin typeface="Calibri"/>
-              </a:rPr>
-              <a:t>2.</a:t>
-            </a:r>
-            <a:r>
-              <a:rPr sz="2000" b="0" i="0">
-                <a:solidFill>
-                  <a:srgbClr val="333333"/>
-                </a:solidFill>
-                <a:latin typeface="Calibri"/>
-              </a:rPr>
-              <a:t> Paso 2: construya en la pregunta 5 la matriz «Criterio | IaaS | PaaS | SaaS» con las cuatro filas en orden (control, costo cualitativo, operacion, time-to-demo) y maximo 2 lineas por celda; verifique que cada celda nombre una capacidad o una restriccion de SU dominio, y que la fila de operacion no afirme que en PaaS o SaaS usted deja de responder por su propia aplicacion.</a:t>
-            </a:r>
-          </a:p>
-          <a:p>
-            <a:pPr>
-              <a:spcAft>
-                <a:spcPts val="800"/>
-              </a:spcAft>
+              <a:rPr sz="1000" b="0" i="0">
+                <a:solidFill>
+                  <a:srgbClr val="666666"/>
+                </a:solidFill>
+                <a:latin typeface="Calibri"/>
+              </a:rPr>
+              <a:t>Matriz de modelos</a:t>
+            </a:r>
+          </a:p>
+        </p:txBody>
+      </p:sp>
+      <p:sp>
+        <p:nvSpPr>
+          <p:cNvPr id="16" name="Rounded Rectangle 15"/>
+          <p:cNvSpPr/>
+          <p:nvPr/>
+        </p:nvSpPr>
+        <p:spPr>
+          <a:xfrm>
+            <a:off x="8109508" y="1591056"/>
+            <a:ext cx="3624986" cy="2331720"/>
+          </a:xfrm>
+          <a:prstGeom prst="roundRect">
+            <a:avLst>
+              <a:gd name="adj" fmla="val 12000"/>
+            </a:avLst>
+          </a:prstGeom>
+          <a:solidFill>
+            <a:srgbClr val="F2F2F2"/>
+          </a:solidFill>
+          <a:ln>
+            <a:noFill/>
+          </a:ln>
+        </p:spPr>
+        <p:style>
+          <a:lnRef idx="1">
+            <a:schemeClr val="accent1"/>
+          </a:lnRef>
+          <a:fillRef idx="3">
+            <a:schemeClr val="accent1"/>
+          </a:fillRef>
+          <a:effectRef idx="2">
+            <a:schemeClr val="accent1"/>
+          </a:effectRef>
+          <a:fontRef idx="minor">
+            <a:schemeClr val="lt1"/>
+          </a:fontRef>
+        </p:style>
+        <p:txBody>
+          <a:bodyPr rtlCol="0" anchor="ctr"/>
+          <a:lstStyle/>
+          <a:p>
+            <a:pPr algn="ctr"/>
+          </a:p>
+        </p:txBody>
+      </p:sp>
+      <p:sp>
+        <p:nvSpPr>
+          <p:cNvPr id="17" name="Rectangle 16"/>
+          <p:cNvSpPr/>
+          <p:nvPr/>
+        </p:nvSpPr>
+        <p:spPr>
+          <a:xfrm>
+            <a:off x="8109508" y="1591056"/>
+            <a:ext cx="3624986" cy="64008"/>
+          </a:xfrm>
+          <a:prstGeom prst="rect">
+            <a:avLst/>
+          </a:prstGeom>
+          <a:solidFill>
+            <a:srgbClr val="095292"/>
+          </a:solidFill>
+          <a:ln>
+            <a:noFill/>
+          </a:ln>
+        </p:spPr>
+        <p:style>
+          <a:lnRef idx="1">
+            <a:schemeClr val="accent1"/>
+          </a:lnRef>
+          <a:fillRef idx="3">
+            <a:schemeClr val="accent1"/>
+          </a:fillRef>
+          <a:effectRef idx="2">
+            <a:schemeClr val="accent1"/>
+          </a:effectRef>
+          <a:fontRef idx="minor">
+            <a:schemeClr val="lt1"/>
+          </a:fontRef>
+        </p:style>
+        <p:txBody>
+          <a:bodyPr rtlCol="0" anchor="ctr"/>
+          <a:lstStyle/>
+          <a:p>
+            <a:pPr algn="ctr"/>
+          </a:p>
+        </p:txBody>
+      </p:sp>
+      <p:sp>
+        <p:nvSpPr>
+          <p:cNvPr id="18" name="Rectangle 17"/>
+          <p:cNvSpPr/>
+          <p:nvPr/>
+        </p:nvSpPr>
+        <p:spPr>
+          <a:xfrm>
+            <a:off x="8109508" y="1655064"/>
+            <a:ext cx="3624986" cy="27432"/>
+          </a:xfrm>
+          <a:prstGeom prst="rect">
+            <a:avLst/>
+          </a:prstGeom>
+          <a:solidFill>
+            <a:srgbClr val="FFD000"/>
+          </a:solidFill>
+          <a:ln>
+            <a:noFill/>
+          </a:ln>
+        </p:spPr>
+        <p:style>
+          <a:lnRef idx="1">
+            <a:schemeClr val="accent1"/>
+          </a:lnRef>
+          <a:fillRef idx="3">
+            <a:schemeClr val="accent1"/>
+          </a:fillRef>
+          <a:effectRef idx="2">
+            <a:schemeClr val="accent1"/>
+          </a:effectRef>
+          <a:fontRef idx="minor">
+            <a:schemeClr val="lt1"/>
+          </a:fontRef>
+        </p:style>
+        <p:txBody>
+          <a:bodyPr rtlCol="0" anchor="ctr"/>
+          <a:lstStyle/>
+          <a:p>
+            <a:pPr algn="ctr"/>
+          </a:p>
+        </p:txBody>
+      </p:sp>
+      <p:pic>
+        <p:nvPicPr>
+          <p:cNvPr id="19" name="Picture 18" descr="examlab.png"/>
+          <p:cNvPicPr>
+            <a:picLocks noChangeAspect="1"/>
+          </p:cNvPicPr>
+          <p:nvPr/>
+        </p:nvPicPr>
+        <p:blipFill>
+          <a:blip r:embed="rId4"/>
+          <a:stretch>
+            <a:fillRect/>
+          </a:stretch>
+        </p:blipFill>
+        <p:spPr>
+          <a:xfrm>
+            <a:off x="9295638" y="1847087"/>
+            <a:ext cx="1252728" cy="1252728"/>
+          </a:xfrm>
+          <a:prstGeom prst="rect">
+            <a:avLst/>
+          </a:prstGeom>
+        </p:spPr>
+      </p:pic>
+      <p:sp>
+        <p:nvSpPr>
+          <p:cNvPr id="20" name="TextBox 19"/>
+          <p:cNvSpPr txBox="1"/>
+          <p:nvPr/>
+        </p:nvSpPr>
+        <p:spPr>
+          <a:xfrm>
+            <a:off x="8182660" y="3191256"/>
+            <a:ext cx="3478682" cy="621792"/>
+          </a:xfrm>
+          <a:prstGeom prst="rect">
+            <a:avLst/>
+          </a:prstGeom>
+          <a:noFill/>
+        </p:spPr>
+        <p:txBody>
+          <a:bodyPr wrap="square" anchor="t"/>
+          <a:lstStyle/>
+          <a:p>
+            <a:pPr algn="ctr"/>
+            <a:r>
+              <a:rPr sz="1300" b="1" i="0">
+                <a:solidFill>
+                  <a:srgbClr val="095292"/>
+                </a:solidFill>
+                <a:latin typeface="Calibri"/>
+              </a:rPr>
+              <a:t>la plataforma del curso</a:t>
+            </a:r>
+          </a:p>
+          <a:p>
+            <a:pPr algn="ctr">
+              <a:spcBef>
+                <a:spcPts val="200"/>
+              </a:spcBef>
             </a:pPr>
             <a:r>
-              <a:rPr sz="2000" b="0" i="0">
-                <a:solidFill>
-                  <a:srgbClr val="333333"/>
-                </a:solidFill>
-                <a:latin typeface="Calibri"/>
-              </a:rPr>
-              <a:t>–   </a:t>
-            </a:r>
-            <a:r>
-              <a:rPr sz="2000" b="1" i="0">
-                <a:solidFill>
-                  <a:srgbClr val="333333"/>
-                </a:solidFill>
-                <a:latin typeface="Calibri"/>
-              </a:rPr>
-              <a:t>3.</a:t>
-            </a:r>
-            <a:r>
-              <a:rPr sz="2000" b="0" i="0">
-                <a:solidFill>
-                  <a:srgbClr val="333333"/>
-                </a:solidFill>
-                <a:latin typeface="Calibri"/>
-              </a:rPr>
-              <a:t> Paso 3: redacte en la pregunta 6 el ADR-001 con las cinco secciones rotuladas —titulo, estado con fecha, contexto con sus restricciones reales, la decision en UNA sola frase con UN modelo dominante, y exactamente 2 alternativas descartadas con el motivo atado a su dominio—; verifique que la seccion de decision no nombre dos modelos, porque en ese caso vale cero.</a:t>
-            </a:r>
-          </a:p>
-          <a:p>
-            <a:pPr>
-              <a:spcAft>
-                <a:spcPts val="800"/>
-              </a:spcAft>
-            </a:pPr>
-            <a:r>
-              <a:rPr sz="2000" b="0" i="0">
-                <a:solidFill>
-                  <a:srgbClr val="333333"/>
-                </a:solidFill>
-                <a:latin typeface="Calibri"/>
-              </a:rPr>
-              <a:t>–   </a:t>
-            </a:r>
-            <a:r>
-              <a:rPr sz="2000" b="1" i="0">
-                <a:solidFill>
-                  <a:srgbClr val="333333"/>
-                </a:solidFill>
-                <a:latin typeface="Calibri"/>
-              </a:rPr>
-              <a:t>4.</a:t>
-            </a:r>
-            <a:r>
-              <a:rPr sz="2000" b="0" i="0">
-                <a:solidFill>
-                  <a:srgbClr val="333333"/>
-                </a:solidFill>
-                <a:latin typeface="Calibri"/>
-              </a:rPr>
-              <a:t> Paso 4: escriba en la pregunta 7 la seccion 6 del mismo ADR, las consecuencias en los tres ejes (operacion, costo y aprendizaje), con al menos una positiva y una negativa por eje marcadas con + y -, y verifique que al menos una negativa hable de amarre al proveedor o de perdida de control; guarde y continue, que la actividad se entrega completa al cierre del corte.</a:t>
-            </a:r>
-          </a:p>
-        </p:txBody>
-      </p:sp>
-      <p:sp>
-        <p:nvSpPr>
-          <p:cNvPr id="6" name="TextBox 5"/>
+              <a:rPr sz="1000" b="0" i="0">
+                <a:solidFill>
+                  <a:srgbClr val="666666"/>
+                </a:solidFill>
+                <a:latin typeface="Calibri"/>
+              </a:rPr>
+              <a:t>Donde se entrega</a:t>
+            </a:r>
+          </a:p>
+        </p:txBody>
+      </p:sp>
+      <p:sp>
+        <p:nvSpPr>
+          <p:cNvPr id="21" name="TextBox 20"/>
           <p:cNvSpPr txBox="1"/>
           <p:nvPr/>
         </p:nvSpPr>
@@ -3906,109 +4403,21 @@
                 </a:solidFill>
                 <a:latin typeface="Calibri"/>
               </a:rPr>
-              <a:t>Para continuar (PI)</a:t>
-            </a:r>
-          </a:p>
-        </p:txBody>
-      </p:sp>
-      <p:sp>
-        <p:nvSpPr>
-          <p:cNvPr id="5" name="Rounded Rectangle 4"/>
-          <p:cNvSpPr/>
-          <p:nvPr/>
-        </p:nvSpPr>
-        <p:spPr>
-          <a:xfrm>
-            <a:off x="457200" y="1261872"/>
-            <a:ext cx="11277295" cy="1051560"/>
-          </a:xfrm>
-          <a:prstGeom prst="roundRect">
-            <a:avLst>
-              <a:gd name="adj" fmla="val 12000"/>
-            </a:avLst>
-          </a:prstGeom>
-          <a:solidFill>
-            <a:srgbClr val="E8F4FA"/>
-          </a:solidFill>
-          <a:ln>
-            <a:noFill/>
-          </a:ln>
-        </p:spPr>
-        <p:style>
-          <a:lnRef idx="1">
-            <a:schemeClr val="accent1"/>
-          </a:lnRef>
-          <a:fillRef idx="3">
-            <a:schemeClr val="accent1"/>
-          </a:fillRef>
-          <a:effectRef idx="2">
-            <a:schemeClr val="accent1"/>
-          </a:effectRef>
-          <a:fontRef idx="minor">
-            <a:schemeClr val="lt1"/>
-          </a:fontRef>
-        </p:style>
-        <p:txBody>
-          <a:bodyPr rtlCol="0" anchor="ctr"/>
-          <a:lstStyle/>
-          <a:p>
-            <a:pPr algn="ctr"/>
-          </a:p>
-        </p:txBody>
-      </p:sp>
-      <p:sp>
-        <p:nvSpPr>
-          <p:cNvPr id="6" name="Rectangle 5"/>
-          <p:cNvSpPr/>
-          <p:nvPr/>
-        </p:nvSpPr>
-        <p:spPr>
-          <a:xfrm>
-            <a:off x="457200" y="1261872"/>
-            <a:ext cx="128016" cy="1051560"/>
-          </a:xfrm>
-          <a:prstGeom prst="rect">
-            <a:avLst/>
-          </a:prstGeom>
-          <a:solidFill>
-            <a:srgbClr val="269CCB"/>
-          </a:solidFill>
-          <a:ln>
-            <a:noFill/>
-          </a:ln>
-        </p:spPr>
-        <p:style>
-          <a:lnRef idx="1">
-            <a:schemeClr val="accent1"/>
-          </a:lnRef>
-          <a:fillRef idx="3">
-            <a:schemeClr val="accent1"/>
-          </a:fillRef>
-          <a:effectRef idx="2">
-            <a:schemeClr val="accent1"/>
-          </a:effectRef>
-          <a:fontRef idx="minor">
-            <a:schemeClr val="lt1"/>
-          </a:fontRef>
-        </p:style>
-        <p:txBody>
-          <a:bodyPr rtlCol="0" anchor="ctr"/>
-          <a:lstStyle/>
-          <a:p>
-            <a:pPr algn="ctr"/>
-          </a:p>
-        </p:txBody>
-      </p:sp>
-      <p:sp>
-        <p:nvSpPr>
-          <p:cNvPr id="7" name="TextBox 6"/>
+              <a:t>Taller PI (paso a paso)</a:t>
+            </a:r>
+          </a:p>
+        </p:txBody>
+      </p:sp>
+      <p:sp>
+        <p:nvSpPr>
+          <p:cNvPr id="5" name="TextBox 4"/>
           <p:cNvSpPr txBox="1"/>
           <p:nvPr/>
         </p:nvSpPr>
         <p:spPr>
           <a:xfrm>
-            <a:off x="777240" y="1399031"/>
-            <a:ext cx="10774375" cy="822959"/>
+            <a:off x="457200" y="1170432"/>
+            <a:ext cx="11277295" cy="5230368"/>
           </a:xfrm>
           <a:prstGeom prst="rect">
             <a:avLst/>
@@ -4021,313 +4430,137 @@
           </a:bodyPr>
           <a:lstStyle/>
           <a:p>
-            <a:r>
-              <a:rPr sz="1200" b="1" i="0">
-                <a:solidFill>
-                  <a:srgbClr val="269CCB"/>
-                </a:solidFill>
-                <a:latin typeface="Calibri"/>
-              </a:rPr>
-              <a:t>Info</a:t>
-            </a:r>
-          </a:p>
-          <a:p>
             <a:pPr>
-              <a:spcBef>
-                <a:spcPts val="400"/>
-              </a:spcBef>
+              <a:spcAft>
+                <a:spcPts val="800"/>
+              </a:spcAft>
             </a:pPr>
             <a:r>
-              <a:rPr sz="1400" b="0" i="0">
+              <a:rPr sz="2000" b="1" i="0">
                 <a:solidFill>
                   <a:srgbClr val="333333"/>
                 </a:solidFill>
                 <a:latin typeface="Calibri"/>
               </a:rPr>
-              <a:t>Entregable: ADR-001: decisión de modelo de servicio + matriz de comparación aplicada al dominio</a:t>
-            </a:r>
-          </a:p>
-        </p:txBody>
-      </p:sp>
-      <p:sp>
-        <p:nvSpPr>
-          <p:cNvPr id="8" name="Rounded Rectangle 7"/>
-          <p:cNvSpPr/>
-          <p:nvPr/>
-        </p:nvSpPr>
-        <p:spPr>
-          <a:xfrm>
-            <a:off x="457200" y="2478024"/>
-            <a:ext cx="11277295" cy="1051560"/>
-          </a:xfrm>
-          <a:prstGeom prst="roundRect">
-            <a:avLst>
-              <a:gd name="adj" fmla="val 12000"/>
-            </a:avLst>
-          </a:prstGeom>
-          <a:solidFill>
-            <a:srgbClr val="FFF8E1"/>
-          </a:solidFill>
-          <a:ln>
-            <a:noFill/>
-          </a:ln>
-        </p:spPr>
-        <p:style>
-          <a:lnRef idx="1">
-            <a:schemeClr val="accent1"/>
-          </a:lnRef>
-          <a:fillRef idx="3">
-            <a:schemeClr val="accent1"/>
-          </a:fillRef>
-          <a:effectRef idx="2">
-            <a:schemeClr val="accent1"/>
-          </a:effectRef>
-          <a:fontRef idx="minor">
-            <a:schemeClr val="lt1"/>
-          </a:fontRef>
-        </p:style>
-        <p:txBody>
-          <a:bodyPr rtlCol="0" anchor="ctr"/>
-          <a:lstStyle/>
-          <a:p>
-            <a:pPr algn="ctr"/>
-          </a:p>
-        </p:txBody>
-      </p:sp>
-      <p:sp>
-        <p:nvSpPr>
-          <p:cNvPr id="9" name="Rectangle 8"/>
-          <p:cNvSpPr/>
-          <p:nvPr/>
-        </p:nvSpPr>
-        <p:spPr>
-          <a:xfrm>
-            <a:off x="457200" y="2478024"/>
-            <a:ext cx="128016" cy="1051560"/>
-          </a:xfrm>
-          <a:prstGeom prst="rect">
-            <a:avLst/>
-          </a:prstGeom>
-          <a:solidFill>
-            <a:srgbClr val="FFD000"/>
-          </a:solidFill>
-          <a:ln>
-            <a:noFill/>
-          </a:ln>
-        </p:spPr>
-        <p:style>
-          <a:lnRef idx="1">
-            <a:schemeClr val="accent1"/>
-          </a:lnRef>
-          <a:fillRef idx="3">
-            <a:schemeClr val="accent1"/>
-          </a:fillRef>
-          <a:effectRef idx="2">
-            <a:schemeClr val="accent1"/>
-          </a:effectRef>
-          <a:fontRef idx="minor">
-            <a:schemeClr val="lt1"/>
-          </a:fontRef>
-        </p:style>
-        <p:txBody>
-          <a:bodyPr rtlCol="0" anchor="ctr"/>
-          <a:lstStyle/>
-          <a:p>
-            <a:pPr algn="ctr"/>
-          </a:p>
-        </p:txBody>
-      </p:sp>
-      <p:sp>
-        <p:nvSpPr>
-          <p:cNvPr id="10" name="TextBox 9"/>
-          <p:cNvSpPr txBox="1"/>
-          <p:nvPr/>
-        </p:nvSpPr>
-        <p:spPr>
-          <a:xfrm>
-            <a:off x="777240" y="2615184"/>
-            <a:ext cx="10774375" cy="822959"/>
-          </a:xfrm>
-          <a:prstGeom prst="rect">
-            <a:avLst/>
-          </a:prstGeom>
-          <a:noFill/>
-        </p:spPr>
-        <p:txBody>
-          <a:bodyPr wrap="square">
-            <a:spAutoFit/>
-          </a:bodyPr>
-          <a:lstStyle/>
-          <a:p>
-            <a:r>
-              <a:rPr sz="1200" b="1" i="0">
-                <a:solidFill>
-                  <a:srgbClr val="FFD000"/>
-                </a:solidFill>
-                <a:latin typeface="Calibri"/>
-              </a:rPr>
-              <a:t>Aclaración</a:t>
+              <a:t>1.</a:t>
+            </a:r>
+            <a:r>
+              <a:rPr sz="2000" b="0" i="0">
+                <a:solidFill>
+                  <a:srgbClr val="333333"/>
+                </a:solidFill>
+                <a:latin typeface="Calibri"/>
+              </a:rPr>
+              <a:t> Paso 1: relea su ficha y su C4 Context de la Clase 1. No cambie de dominio: las preguntas 5 a 7 se califican sobre el mismo sistema, y el ADR que redacte hoy se reutiliza en el informe del PI y en la sustentacion de la Clase 15.</a:t>
             </a:r>
           </a:p>
           <a:p>
             <a:pPr>
-              <a:spcBef>
-                <a:spcPts val="400"/>
-              </a:spcBef>
+              <a:spcAft>
+                <a:spcPts val="800"/>
+              </a:spcAft>
             </a:pPr>
             <a:r>
-              <a:rPr sz="1400" b="0" i="0">
+              <a:rPr sz="2000" b="0" i="0">
                 <a:solidFill>
                   <a:srgbClr val="333333"/>
                 </a:solidFill>
                 <a:latin typeface="Calibri"/>
               </a:rPr>
-              <a:t>Subir evidencias al paquete CloudLite (Drive/repo) y a la plataforma del curso en la fecha que indique el docente.</a:t>
-            </a:r>
-          </a:p>
-        </p:txBody>
-      </p:sp>
-      <p:sp>
-        <p:nvSpPr>
-          <p:cNvPr id="11" name="Rounded Rectangle 10"/>
-          <p:cNvSpPr/>
-          <p:nvPr/>
-        </p:nvSpPr>
-        <p:spPr>
-          <a:xfrm>
-            <a:off x="457200" y="3694176"/>
-            <a:ext cx="11277295" cy="1051560"/>
-          </a:xfrm>
-          <a:prstGeom prst="roundRect">
-            <a:avLst>
-              <a:gd name="adj" fmla="val 12000"/>
-            </a:avLst>
-          </a:prstGeom>
-          <a:solidFill>
-            <a:srgbClr val="FBE4E4"/>
-          </a:solidFill>
-          <a:ln>
-            <a:noFill/>
-          </a:ln>
-        </p:spPr>
-        <p:style>
-          <a:lnRef idx="1">
-            <a:schemeClr val="accent1"/>
-          </a:lnRef>
-          <a:fillRef idx="3">
-            <a:schemeClr val="accent1"/>
-          </a:fillRef>
-          <a:effectRef idx="2">
-            <a:schemeClr val="accent1"/>
-          </a:effectRef>
-          <a:fontRef idx="minor">
-            <a:schemeClr val="lt1"/>
-          </a:fontRef>
-        </p:style>
-        <p:txBody>
-          <a:bodyPr rtlCol="0" anchor="ctr"/>
-          <a:lstStyle/>
-          <a:p>
-            <a:pPr algn="ctr"/>
-          </a:p>
-        </p:txBody>
-      </p:sp>
-      <p:sp>
-        <p:nvSpPr>
-          <p:cNvPr id="12" name="Rectangle 11"/>
-          <p:cNvSpPr/>
-          <p:nvPr/>
-        </p:nvSpPr>
-        <p:spPr>
-          <a:xfrm>
-            <a:off x="457200" y="3694176"/>
-            <a:ext cx="128016" cy="1051560"/>
-          </a:xfrm>
-          <a:prstGeom prst="rect">
-            <a:avLst/>
-          </a:prstGeom>
-          <a:solidFill>
-            <a:srgbClr val="A02030"/>
-          </a:solidFill>
-          <a:ln>
-            <a:noFill/>
-          </a:ln>
-        </p:spPr>
-        <p:style>
-          <a:lnRef idx="1">
-            <a:schemeClr val="accent1"/>
-          </a:lnRef>
-          <a:fillRef idx="3">
-            <a:schemeClr val="accent1"/>
-          </a:fillRef>
-          <a:effectRef idx="2">
-            <a:schemeClr val="accent1"/>
-          </a:effectRef>
-          <a:fontRef idx="minor">
-            <a:schemeClr val="lt1"/>
-          </a:fontRef>
-        </p:style>
-        <p:txBody>
-          <a:bodyPr rtlCol="0" anchor="ctr"/>
-          <a:lstStyle/>
-          <a:p>
-            <a:pPr algn="ctr"/>
-          </a:p>
-        </p:txBody>
-      </p:sp>
-      <p:sp>
-        <p:nvSpPr>
-          <p:cNvPr id="13" name="TextBox 12"/>
-          <p:cNvSpPr txBox="1"/>
-          <p:nvPr/>
-        </p:nvSpPr>
-        <p:spPr>
-          <a:xfrm>
-            <a:off x="777240" y="3831336"/>
-            <a:ext cx="10774375" cy="822959"/>
-          </a:xfrm>
-          <a:prstGeom prst="rect">
-            <a:avLst/>
-          </a:prstGeom>
-          <a:noFill/>
-        </p:spPr>
-        <p:txBody>
-          <a:bodyPr wrap="square">
-            <a:spAutoFit/>
-          </a:bodyPr>
-          <a:lstStyle/>
-          <a:p>
-            <a:r>
-              <a:rPr sz="1200" b="1" i="0">
-                <a:solidFill>
-                  <a:srgbClr val="A02030"/>
-                </a:solidFill>
-                <a:latin typeface="Calibri"/>
-              </a:rPr>
-              <a:t>Atención</a:t>
+              <a:t>–   </a:t>
+            </a:r>
+            <a:r>
+              <a:rPr sz="2000" b="1" i="0">
+                <a:solidFill>
+                  <a:srgbClr val="333333"/>
+                </a:solidFill>
+                <a:latin typeface="Calibri"/>
+              </a:rPr>
+              <a:t>2.</a:t>
+            </a:r>
+            <a:r>
+              <a:rPr sz="2000" b="0" i="0">
+                <a:solidFill>
+                  <a:srgbClr val="333333"/>
+                </a:solidFill>
+                <a:latin typeface="Calibri"/>
+              </a:rPr>
+              <a:t> Paso 2: construya en la pregunta 5 la matriz «Criterio | IaaS | PaaS | SaaS» con las cuatro filas en orden (control, costo cualitativo, operacion, time-to-demo) y maximo 2 lineas por celda; verifique que cada celda nombre una capacidad o una restriccion de SU dominio, y que la fila de operacion no afirme que en PaaS o SaaS usted deja de responder por su propia aplicacion.</a:t>
             </a:r>
           </a:p>
           <a:p>
             <a:pPr>
-              <a:spcBef>
-                <a:spcPts val="400"/>
-              </a:spcBef>
+              <a:spcAft>
+                <a:spcPts val="800"/>
+              </a:spcAft>
             </a:pPr>
             <a:r>
-              <a:rPr sz="1400" b="0" i="0">
+              <a:rPr sz="2000" b="0" i="0">
                 <a:solidFill>
                   <a:srgbClr val="333333"/>
                 </a:solidFill>
                 <a:latin typeface="Calibri"/>
               </a:rPr>
-              <a:t>Sin cloud de pago ni instalaciones obligatorias de hipervisores/Docker Desktop.</a:t>
-            </a:r>
-          </a:p>
-        </p:txBody>
-      </p:sp>
-      <p:sp>
-        <p:nvSpPr>
-          <p:cNvPr id="14" name="TextBox 13"/>
+              <a:t>–   </a:t>
+            </a:r>
+            <a:r>
+              <a:rPr sz="2000" b="1" i="0">
+                <a:solidFill>
+                  <a:srgbClr val="333333"/>
+                </a:solidFill>
+                <a:latin typeface="Calibri"/>
+              </a:rPr>
+              <a:t>3.</a:t>
+            </a:r>
+            <a:r>
+              <a:rPr sz="2000" b="0" i="0">
+                <a:solidFill>
+                  <a:srgbClr val="333333"/>
+                </a:solidFill>
+                <a:latin typeface="Calibri"/>
+              </a:rPr>
+              <a:t> Paso 3: redacte en la pregunta 6 el ADR-001 con las cinco secciones rotuladas —titulo, estado con fecha, contexto con sus restricciones reales, la decision en UNA sola frase con UN modelo dominante, y exactamente 2 alternativas descartadas con el motivo atado a su dominio—; verifique que la seccion de decision no nombre dos modelos, porque en ese caso vale cero.</a:t>
+            </a:r>
+          </a:p>
+          <a:p>
+            <a:pPr>
+              <a:spcAft>
+                <a:spcPts val="800"/>
+              </a:spcAft>
+            </a:pPr>
+            <a:r>
+              <a:rPr sz="2000" b="0" i="0">
+                <a:solidFill>
+                  <a:srgbClr val="333333"/>
+                </a:solidFill>
+                <a:latin typeface="Calibri"/>
+              </a:rPr>
+              <a:t>–   </a:t>
+            </a:r>
+            <a:r>
+              <a:rPr sz="2000" b="1" i="0">
+                <a:solidFill>
+                  <a:srgbClr val="333333"/>
+                </a:solidFill>
+                <a:latin typeface="Calibri"/>
+              </a:rPr>
+              <a:t>4.</a:t>
+            </a:r>
+            <a:r>
+              <a:rPr sz="2000" b="0" i="0">
+                <a:solidFill>
+                  <a:srgbClr val="333333"/>
+                </a:solidFill>
+                <a:latin typeface="Calibri"/>
+              </a:rPr>
+              <a:t> Paso 4: escriba en la pregunta 7 la seccion 6 del mismo ADR, las consecuencias en los tres ejes (operacion, costo y aprendizaje), con al menos una positiva y una negativa por eje marcadas con + y -, y verifique que al menos una negativa hable de amarre al proveedor o de perdida de control; guarde y continue, que la actividad se entrega completa al cierre del corte.</a:t>
+            </a:r>
+          </a:p>
+        </p:txBody>
+      </p:sp>
+      <p:sp>
+        <p:nvSpPr>
+          <p:cNvPr id="6" name="TextBox 5"/>
           <p:cNvSpPr txBox="1"/>
           <p:nvPr/>
         </p:nvSpPr>
@@ -4395,6 +4628,601 @@
         <p:spPr>
           <a:xfrm>
             <a:off x="0" y="0"/>
+            <a:ext cx="12191695" cy="960120"/>
+          </a:xfrm>
+          <a:prstGeom prst="rect">
+            <a:avLst/>
+          </a:prstGeom>
+          <a:solidFill>
+            <a:srgbClr val="095292"/>
+          </a:solidFill>
+          <a:ln>
+            <a:noFill/>
+          </a:ln>
+        </p:spPr>
+        <p:style>
+          <a:lnRef idx="1">
+            <a:schemeClr val="accent1"/>
+          </a:lnRef>
+          <a:fillRef idx="3">
+            <a:schemeClr val="accent1"/>
+          </a:fillRef>
+          <a:effectRef idx="2">
+            <a:schemeClr val="accent1"/>
+          </a:effectRef>
+          <a:fontRef idx="minor">
+            <a:schemeClr val="lt1"/>
+          </a:fontRef>
+        </p:style>
+        <p:txBody>
+          <a:bodyPr rtlCol="0" anchor="ctr"/>
+          <a:lstStyle/>
+          <a:p>
+            <a:pPr algn="ctr"/>
+          </a:p>
+        </p:txBody>
+      </p:sp>
+      <p:sp>
+        <p:nvSpPr>
+          <p:cNvPr id="3" name="Rectangle 2"/>
+          <p:cNvSpPr/>
+          <p:nvPr/>
+        </p:nvSpPr>
+        <p:spPr>
+          <a:xfrm>
+            <a:off x="0" y="960120"/>
+            <a:ext cx="12191695" cy="41148"/>
+          </a:xfrm>
+          <a:prstGeom prst="rect">
+            <a:avLst/>
+          </a:prstGeom>
+          <a:solidFill>
+            <a:srgbClr val="FFD000"/>
+          </a:solidFill>
+          <a:ln>
+            <a:noFill/>
+          </a:ln>
+        </p:spPr>
+        <p:style>
+          <a:lnRef idx="1">
+            <a:schemeClr val="accent1"/>
+          </a:lnRef>
+          <a:fillRef idx="3">
+            <a:schemeClr val="accent1"/>
+          </a:fillRef>
+          <a:effectRef idx="2">
+            <a:schemeClr val="accent1"/>
+          </a:effectRef>
+          <a:fontRef idx="minor">
+            <a:schemeClr val="lt1"/>
+          </a:fontRef>
+        </p:style>
+        <p:txBody>
+          <a:bodyPr rtlCol="0" anchor="ctr"/>
+          <a:lstStyle/>
+          <a:p>
+            <a:pPr algn="ctr"/>
+          </a:p>
+        </p:txBody>
+      </p:sp>
+      <p:sp>
+        <p:nvSpPr>
+          <p:cNvPr id="4" name="TextBox 3"/>
+          <p:cNvSpPr txBox="1"/>
+          <p:nvPr/>
+        </p:nvSpPr>
+        <p:spPr>
+          <a:xfrm>
+            <a:off x="457200" y="164592"/>
+            <a:ext cx="11277295" cy="502920"/>
+          </a:xfrm>
+          <a:prstGeom prst="rect">
+            <a:avLst/>
+          </a:prstGeom>
+          <a:noFill/>
+        </p:spPr>
+        <p:txBody>
+          <a:bodyPr wrap="square">
+            <a:spAutoFit/>
+          </a:bodyPr>
+          <a:lstStyle/>
+          <a:p>
+            <a:r>
+              <a:rPr sz="2600" b="1" i="0">
+                <a:solidFill>
+                  <a:srgbClr val="FFFFFF"/>
+                </a:solidFill>
+                <a:latin typeface="Calibri"/>
+              </a:rPr>
+              <a:t>Para continuar (PI)</a:t>
+            </a:r>
+          </a:p>
+        </p:txBody>
+      </p:sp>
+      <p:sp>
+        <p:nvSpPr>
+          <p:cNvPr id="5" name="Rounded Rectangle 4"/>
+          <p:cNvSpPr/>
+          <p:nvPr/>
+        </p:nvSpPr>
+        <p:spPr>
+          <a:xfrm>
+            <a:off x="457200" y="1261872"/>
+            <a:ext cx="11277295" cy="1051560"/>
+          </a:xfrm>
+          <a:prstGeom prst="roundRect">
+            <a:avLst>
+              <a:gd name="adj" fmla="val 12000"/>
+            </a:avLst>
+          </a:prstGeom>
+          <a:solidFill>
+            <a:srgbClr val="E8F4FA"/>
+          </a:solidFill>
+          <a:ln>
+            <a:noFill/>
+          </a:ln>
+        </p:spPr>
+        <p:style>
+          <a:lnRef idx="1">
+            <a:schemeClr val="accent1"/>
+          </a:lnRef>
+          <a:fillRef idx="3">
+            <a:schemeClr val="accent1"/>
+          </a:fillRef>
+          <a:effectRef idx="2">
+            <a:schemeClr val="accent1"/>
+          </a:effectRef>
+          <a:fontRef idx="minor">
+            <a:schemeClr val="lt1"/>
+          </a:fontRef>
+        </p:style>
+        <p:txBody>
+          <a:bodyPr rtlCol="0" anchor="ctr"/>
+          <a:lstStyle/>
+          <a:p>
+            <a:pPr algn="ctr"/>
+          </a:p>
+        </p:txBody>
+      </p:sp>
+      <p:sp>
+        <p:nvSpPr>
+          <p:cNvPr id="6" name="Rectangle 5"/>
+          <p:cNvSpPr/>
+          <p:nvPr/>
+        </p:nvSpPr>
+        <p:spPr>
+          <a:xfrm>
+            <a:off x="457200" y="1261872"/>
+            <a:ext cx="128016" cy="1051560"/>
+          </a:xfrm>
+          <a:prstGeom prst="rect">
+            <a:avLst/>
+          </a:prstGeom>
+          <a:solidFill>
+            <a:srgbClr val="269CCB"/>
+          </a:solidFill>
+          <a:ln>
+            <a:noFill/>
+          </a:ln>
+        </p:spPr>
+        <p:style>
+          <a:lnRef idx="1">
+            <a:schemeClr val="accent1"/>
+          </a:lnRef>
+          <a:fillRef idx="3">
+            <a:schemeClr val="accent1"/>
+          </a:fillRef>
+          <a:effectRef idx="2">
+            <a:schemeClr val="accent1"/>
+          </a:effectRef>
+          <a:fontRef idx="minor">
+            <a:schemeClr val="lt1"/>
+          </a:fontRef>
+        </p:style>
+        <p:txBody>
+          <a:bodyPr rtlCol="0" anchor="ctr"/>
+          <a:lstStyle/>
+          <a:p>
+            <a:pPr algn="ctr"/>
+          </a:p>
+        </p:txBody>
+      </p:sp>
+      <p:sp>
+        <p:nvSpPr>
+          <p:cNvPr id="7" name="TextBox 6"/>
+          <p:cNvSpPr txBox="1"/>
+          <p:nvPr/>
+        </p:nvSpPr>
+        <p:spPr>
+          <a:xfrm>
+            <a:off x="777240" y="1399031"/>
+            <a:ext cx="10774375" cy="822959"/>
+          </a:xfrm>
+          <a:prstGeom prst="rect">
+            <a:avLst/>
+          </a:prstGeom>
+          <a:noFill/>
+        </p:spPr>
+        <p:txBody>
+          <a:bodyPr wrap="square">
+            <a:spAutoFit/>
+          </a:bodyPr>
+          <a:lstStyle/>
+          <a:p>
+            <a:r>
+              <a:rPr sz="1200" b="1" i="0">
+                <a:solidFill>
+                  <a:srgbClr val="269CCB"/>
+                </a:solidFill>
+                <a:latin typeface="Calibri"/>
+              </a:rPr>
+              <a:t>Info</a:t>
+            </a:r>
+          </a:p>
+          <a:p>
+            <a:pPr>
+              <a:spcBef>
+                <a:spcPts val="400"/>
+              </a:spcBef>
+            </a:pPr>
+            <a:r>
+              <a:rPr sz="1400" b="0" i="0">
+                <a:solidFill>
+                  <a:srgbClr val="333333"/>
+                </a:solidFill>
+                <a:latin typeface="Calibri"/>
+              </a:rPr>
+              <a:t>Entregable: ADR-001: decisión de modelo de servicio + matriz de comparación aplicada al dominio</a:t>
+            </a:r>
+          </a:p>
+        </p:txBody>
+      </p:sp>
+      <p:sp>
+        <p:nvSpPr>
+          <p:cNvPr id="8" name="Rounded Rectangle 7"/>
+          <p:cNvSpPr/>
+          <p:nvPr/>
+        </p:nvSpPr>
+        <p:spPr>
+          <a:xfrm>
+            <a:off x="457200" y="2478024"/>
+            <a:ext cx="11277295" cy="1051560"/>
+          </a:xfrm>
+          <a:prstGeom prst="roundRect">
+            <a:avLst>
+              <a:gd name="adj" fmla="val 12000"/>
+            </a:avLst>
+          </a:prstGeom>
+          <a:solidFill>
+            <a:srgbClr val="FFF8E1"/>
+          </a:solidFill>
+          <a:ln>
+            <a:noFill/>
+          </a:ln>
+        </p:spPr>
+        <p:style>
+          <a:lnRef idx="1">
+            <a:schemeClr val="accent1"/>
+          </a:lnRef>
+          <a:fillRef idx="3">
+            <a:schemeClr val="accent1"/>
+          </a:fillRef>
+          <a:effectRef idx="2">
+            <a:schemeClr val="accent1"/>
+          </a:effectRef>
+          <a:fontRef idx="minor">
+            <a:schemeClr val="lt1"/>
+          </a:fontRef>
+        </p:style>
+        <p:txBody>
+          <a:bodyPr rtlCol="0" anchor="ctr"/>
+          <a:lstStyle/>
+          <a:p>
+            <a:pPr algn="ctr"/>
+          </a:p>
+        </p:txBody>
+      </p:sp>
+      <p:sp>
+        <p:nvSpPr>
+          <p:cNvPr id="9" name="Rectangle 8"/>
+          <p:cNvSpPr/>
+          <p:nvPr/>
+        </p:nvSpPr>
+        <p:spPr>
+          <a:xfrm>
+            <a:off x="457200" y="2478024"/>
+            <a:ext cx="128016" cy="1051560"/>
+          </a:xfrm>
+          <a:prstGeom prst="rect">
+            <a:avLst/>
+          </a:prstGeom>
+          <a:solidFill>
+            <a:srgbClr val="FFD000"/>
+          </a:solidFill>
+          <a:ln>
+            <a:noFill/>
+          </a:ln>
+        </p:spPr>
+        <p:style>
+          <a:lnRef idx="1">
+            <a:schemeClr val="accent1"/>
+          </a:lnRef>
+          <a:fillRef idx="3">
+            <a:schemeClr val="accent1"/>
+          </a:fillRef>
+          <a:effectRef idx="2">
+            <a:schemeClr val="accent1"/>
+          </a:effectRef>
+          <a:fontRef idx="minor">
+            <a:schemeClr val="lt1"/>
+          </a:fontRef>
+        </p:style>
+        <p:txBody>
+          <a:bodyPr rtlCol="0" anchor="ctr"/>
+          <a:lstStyle/>
+          <a:p>
+            <a:pPr algn="ctr"/>
+          </a:p>
+        </p:txBody>
+      </p:sp>
+      <p:sp>
+        <p:nvSpPr>
+          <p:cNvPr id="10" name="TextBox 9"/>
+          <p:cNvSpPr txBox="1"/>
+          <p:nvPr/>
+        </p:nvSpPr>
+        <p:spPr>
+          <a:xfrm>
+            <a:off x="777240" y="2615184"/>
+            <a:ext cx="10774375" cy="822959"/>
+          </a:xfrm>
+          <a:prstGeom prst="rect">
+            <a:avLst/>
+          </a:prstGeom>
+          <a:noFill/>
+        </p:spPr>
+        <p:txBody>
+          <a:bodyPr wrap="square">
+            <a:spAutoFit/>
+          </a:bodyPr>
+          <a:lstStyle/>
+          <a:p>
+            <a:r>
+              <a:rPr sz="1200" b="1" i="0">
+                <a:solidFill>
+                  <a:srgbClr val="FFD000"/>
+                </a:solidFill>
+                <a:latin typeface="Calibri"/>
+              </a:rPr>
+              <a:t>Aclaración</a:t>
+            </a:r>
+          </a:p>
+          <a:p>
+            <a:pPr>
+              <a:spcBef>
+                <a:spcPts val="400"/>
+              </a:spcBef>
+            </a:pPr>
+            <a:r>
+              <a:rPr sz="1400" b="0" i="0">
+                <a:solidFill>
+                  <a:srgbClr val="333333"/>
+                </a:solidFill>
+                <a:latin typeface="Calibri"/>
+              </a:rPr>
+              <a:t>Subir evidencias al paquete CloudLite (Drive/repo) y a la plataforma del curso en la fecha que indique el docente.</a:t>
+            </a:r>
+          </a:p>
+        </p:txBody>
+      </p:sp>
+      <p:sp>
+        <p:nvSpPr>
+          <p:cNvPr id="11" name="Rounded Rectangle 10"/>
+          <p:cNvSpPr/>
+          <p:nvPr/>
+        </p:nvSpPr>
+        <p:spPr>
+          <a:xfrm>
+            <a:off x="457200" y="3694176"/>
+            <a:ext cx="11277295" cy="1051560"/>
+          </a:xfrm>
+          <a:prstGeom prst="roundRect">
+            <a:avLst>
+              <a:gd name="adj" fmla="val 12000"/>
+            </a:avLst>
+          </a:prstGeom>
+          <a:solidFill>
+            <a:srgbClr val="FBE4E4"/>
+          </a:solidFill>
+          <a:ln>
+            <a:noFill/>
+          </a:ln>
+        </p:spPr>
+        <p:style>
+          <a:lnRef idx="1">
+            <a:schemeClr val="accent1"/>
+          </a:lnRef>
+          <a:fillRef idx="3">
+            <a:schemeClr val="accent1"/>
+          </a:fillRef>
+          <a:effectRef idx="2">
+            <a:schemeClr val="accent1"/>
+          </a:effectRef>
+          <a:fontRef idx="minor">
+            <a:schemeClr val="lt1"/>
+          </a:fontRef>
+        </p:style>
+        <p:txBody>
+          <a:bodyPr rtlCol="0" anchor="ctr"/>
+          <a:lstStyle/>
+          <a:p>
+            <a:pPr algn="ctr"/>
+          </a:p>
+        </p:txBody>
+      </p:sp>
+      <p:sp>
+        <p:nvSpPr>
+          <p:cNvPr id="12" name="Rectangle 11"/>
+          <p:cNvSpPr/>
+          <p:nvPr/>
+        </p:nvSpPr>
+        <p:spPr>
+          <a:xfrm>
+            <a:off x="457200" y="3694176"/>
+            <a:ext cx="128016" cy="1051560"/>
+          </a:xfrm>
+          <a:prstGeom prst="rect">
+            <a:avLst/>
+          </a:prstGeom>
+          <a:solidFill>
+            <a:srgbClr val="A02030"/>
+          </a:solidFill>
+          <a:ln>
+            <a:noFill/>
+          </a:ln>
+        </p:spPr>
+        <p:style>
+          <a:lnRef idx="1">
+            <a:schemeClr val="accent1"/>
+          </a:lnRef>
+          <a:fillRef idx="3">
+            <a:schemeClr val="accent1"/>
+          </a:fillRef>
+          <a:effectRef idx="2">
+            <a:schemeClr val="accent1"/>
+          </a:effectRef>
+          <a:fontRef idx="minor">
+            <a:schemeClr val="lt1"/>
+          </a:fontRef>
+        </p:style>
+        <p:txBody>
+          <a:bodyPr rtlCol="0" anchor="ctr"/>
+          <a:lstStyle/>
+          <a:p>
+            <a:pPr algn="ctr"/>
+          </a:p>
+        </p:txBody>
+      </p:sp>
+      <p:sp>
+        <p:nvSpPr>
+          <p:cNvPr id="13" name="TextBox 12"/>
+          <p:cNvSpPr txBox="1"/>
+          <p:nvPr/>
+        </p:nvSpPr>
+        <p:spPr>
+          <a:xfrm>
+            <a:off x="777240" y="3831336"/>
+            <a:ext cx="10774375" cy="822959"/>
+          </a:xfrm>
+          <a:prstGeom prst="rect">
+            <a:avLst/>
+          </a:prstGeom>
+          <a:noFill/>
+        </p:spPr>
+        <p:txBody>
+          <a:bodyPr wrap="square">
+            <a:spAutoFit/>
+          </a:bodyPr>
+          <a:lstStyle/>
+          <a:p>
+            <a:r>
+              <a:rPr sz="1200" b="1" i="0">
+                <a:solidFill>
+                  <a:srgbClr val="A02030"/>
+                </a:solidFill>
+                <a:latin typeface="Calibri"/>
+              </a:rPr>
+              <a:t>Atención</a:t>
+            </a:r>
+          </a:p>
+          <a:p>
+            <a:pPr>
+              <a:spcBef>
+                <a:spcPts val="400"/>
+              </a:spcBef>
+            </a:pPr>
+            <a:r>
+              <a:rPr sz="1400" b="0" i="0">
+                <a:solidFill>
+                  <a:srgbClr val="333333"/>
+                </a:solidFill>
+                <a:latin typeface="Calibri"/>
+              </a:rPr>
+              <a:t>Sin cloud de pago ni instalaciones obligatorias de hipervisores/Docker Desktop.</a:t>
+            </a:r>
+          </a:p>
+        </p:txBody>
+      </p:sp>
+      <p:sp>
+        <p:nvSpPr>
+          <p:cNvPr id="14" name="TextBox 13"/>
+          <p:cNvSpPr txBox="1"/>
+          <p:nvPr/>
+        </p:nvSpPr>
+        <p:spPr>
+          <a:xfrm>
+            <a:off x="11185855" y="6473952"/>
+            <a:ext cx="640080" cy="274320"/>
+          </a:xfrm>
+          <a:prstGeom prst="rect">
+            <a:avLst/>
+          </a:prstGeom>
+          <a:noFill/>
+        </p:spPr>
+        <p:txBody>
+          <a:bodyPr wrap="square">
+            <a:spAutoFit/>
+          </a:bodyPr>
+          <a:lstStyle/>
+          <a:p>
+            <a:pPr algn="r"/>
+            <a:r>
+              <a:rPr sz="1100" b="0" i="0">
+                <a:solidFill>
+                  <a:srgbClr val="666666"/>
+                </a:solidFill>
+                <a:latin typeface="Calibri"/>
+              </a:rPr>
+              <a:t>12</a:t>
+            </a:r>
+          </a:p>
+        </p:txBody>
+      </p:sp>
+    </p:spTree>
+  </p:cSld>
+  <p:clrMapOvr>
+    <a:masterClrMapping/>
+  </p:clrMapOvr>
+</p:sld>
+</file>
+
+<file path=ppt/slides/slide13.xml><?xml version="1.0" encoding="utf-8"?>
+<p:sld xmlns:a="http://schemas.openxmlformats.org/drawingml/2006/main" xmlns:p="http://schemas.openxmlformats.org/presentationml/2006/main" xmlns:r="http://schemas.openxmlformats.org/officeDocument/2006/relationships">
+  <p:cSld>
+    <p:bg>
+      <p:bgPr>
+        <a:solidFill>
+          <a:srgbClr val="FFFFFF"/>
+        </a:solidFill>
+        <a:effectLst/>
+      </p:bgPr>
+    </p:bg>
+    <p:spTree>
+      <p:nvGrpSpPr>
+        <p:cNvPr id="1" name=""/>
+        <p:cNvGrpSpPr/>
+        <p:nvPr/>
+      </p:nvGrpSpPr>
+      <p:grpSpPr/>
+      <p:sp>
+        <p:nvSpPr>
+          <p:cNvPr id="2" name="Rectangle 1"/>
+          <p:cNvSpPr/>
+          <p:nvPr/>
+        </p:nvSpPr>
+        <p:spPr>
+          <a:xfrm>
+            <a:off x="0" y="0"/>
             <a:ext cx="12191695" cy="164592"/>
           </a:xfrm>
           <a:prstGeom prst="rect">
@@ -6665,7 +7493,7 @@
         <p:spPr>
           <a:xfrm>
             <a:off x="0" y="0"/>
-            <a:ext cx="12191695" cy="960120"/>
+            <a:ext cx="12191695" cy="1170432"/>
           </a:xfrm>
           <a:prstGeom prst="rect">
             <a:avLst/>
@@ -6707,7 +7535,7 @@
         </p:nvSpPr>
         <p:spPr>
           <a:xfrm>
-            <a:off x="0" y="960120"/>
+            <a:off x="0" y="1170432"/>
             <a:ext cx="12191695" cy="41148"/>
           </a:xfrm>
           <a:prstGeom prst="rect">
@@ -6751,7 +7579,7 @@
         <p:spPr>
           <a:xfrm>
             <a:off x="457200" y="164592"/>
-            <a:ext cx="11277295" cy="502920"/>
+            <a:ext cx="11277295" cy="384048"/>
           </a:xfrm>
           <a:prstGeom prst="rect">
             <a:avLst/>
@@ -6771,69 +7599,60 @@
                 </a:solidFill>
                 <a:latin typeface="Calibri"/>
               </a:rPr>
-              <a:t>ADR-001 — las 6 secciones caben en una pagina</a:t>
-            </a:r>
-          </a:p>
-        </p:txBody>
-      </p:sp>
-      <p:sp>
-        <p:nvSpPr>
-          <p:cNvPr id="5" name="Rounded Rectangle 4"/>
+              <a:t>Quién administra cada capa — IaaS vs PaaS vs SaaS</a:t>
+            </a:r>
+          </a:p>
+        </p:txBody>
+      </p:sp>
+      <p:sp>
+        <p:nvSpPr>
+          <p:cNvPr id="5" name="TextBox 4"/>
+          <p:cNvSpPr txBox="1"/>
+          <p:nvPr/>
+        </p:nvSpPr>
+        <p:spPr>
+          <a:xfrm>
+            <a:off x="457200" y="566928"/>
+            <a:ext cx="11277295" cy="411480"/>
+          </a:xfrm>
+          <a:prstGeom prst="rect">
+            <a:avLst/>
+          </a:prstGeom>
+          <a:noFill/>
+        </p:spPr>
+        <p:txBody>
+          <a:bodyPr wrap="square">
+            <a:spAutoFit/>
+          </a:bodyPr>
+          <a:lstStyle/>
+          <a:p>
+            <a:r>
+              <a:rPr sz="1400" b="0" i="0">
+                <a:solidFill>
+                  <a:srgbClr val="B8D8EE"/>
+                </a:solidFill>
+                <a:latin typeface="Calibri"/>
+              </a:rPr>
+              <a:t>Misma aplicación, distinto reparto de responsabilidad entre usted y el proveedor</a:t>
+            </a:r>
+          </a:p>
+        </p:txBody>
+      </p:sp>
+      <p:sp>
+        <p:nvSpPr>
+          <p:cNvPr id="6" name="Rounded Rectangle 5"/>
           <p:cNvSpPr/>
           <p:nvPr/>
         </p:nvSpPr>
         <p:spPr>
           <a:xfrm>
-            <a:off x="457200" y="1261872"/>
-            <a:ext cx="11277295" cy="4773168"/>
+            <a:off x="548640" y="1325880"/>
+            <a:ext cx="3291840" cy="685800"/>
           </a:xfrm>
           <a:prstGeom prst="roundRect">
             <a:avLst>
               <a:gd name="adj" fmla="val 12000"/>
             </a:avLst>
-          </a:prstGeom>
-          <a:solidFill>
-            <a:srgbClr val="1E2A38"/>
-          </a:solidFill>
-          <a:ln>
-            <a:noFill/>
-          </a:ln>
-        </p:spPr>
-        <p:style>
-          <a:lnRef idx="1">
-            <a:schemeClr val="accent1"/>
-          </a:lnRef>
-          <a:fillRef idx="3">
-            <a:schemeClr val="accent1"/>
-          </a:fillRef>
-          <a:effectRef idx="2">
-            <a:schemeClr val="accent1"/>
-          </a:effectRef>
-          <a:fontRef idx="minor">
-            <a:schemeClr val="lt1"/>
-          </a:fontRef>
-        </p:style>
-        <p:txBody>
-          <a:bodyPr rtlCol="0" anchor="ctr"/>
-          <a:lstStyle/>
-          <a:p>
-            <a:pPr algn="ctr"/>
-          </a:p>
-        </p:txBody>
-      </p:sp>
-      <p:sp>
-        <p:nvSpPr>
-          <p:cNvPr id="6" name="Rectangle 5"/>
-          <p:cNvSpPr/>
-          <p:nvPr/>
-        </p:nvSpPr>
-        <p:spPr>
-          <a:xfrm>
-            <a:off x="457200" y="1261872"/>
-            <a:ext cx="11277295" cy="320040"/>
-          </a:xfrm>
-          <a:prstGeom prst="rect">
-            <a:avLst/>
           </a:prstGeom>
           <a:solidFill>
             <a:srgbClr val="095292"/>
@@ -6857,55 +7676,795 @@
           </a:fontRef>
         </p:style>
         <p:txBody>
-          <a:bodyPr rtlCol="0" anchor="ctr"/>
+          <a:bodyPr rtlCol="0" anchor="ctr" wrap="square"/>
           <a:lstStyle/>
           <a:p>
             <a:pPr algn="ctr"/>
-          </a:p>
-        </p:txBody>
-      </p:sp>
-      <p:sp>
-        <p:nvSpPr>
-          <p:cNvPr id="7" name="TextBox 6"/>
+            <a:r>
+              <a:rPr sz="1200" b="1" i="0">
+                <a:solidFill>
+                  <a:srgbClr val="FFFFFF"/>
+                </a:solidFill>
+                <a:latin typeface="Calibri"/>
+              </a:rPr>
+              <a:t>IaaS
+(DigitalOcean, AWS EC2)</a:t>
+            </a:r>
+          </a:p>
+        </p:txBody>
+      </p:sp>
+      <p:sp>
+        <p:nvSpPr>
+          <p:cNvPr id="7" name="Rounded Rectangle 6"/>
+          <p:cNvSpPr/>
+          <p:nvPr/>
+        </p:nvSpPr>
+        <p:spPr>
+          <a:xfrm>
+            <a:off x="4160520" y="1325880"/>
+            <a:ext cx="3291840" cy="685800"/>
+          </a:xfrm>
+          <a:prstGeom prst="roundRect">
+            <a:avLst>
+              <a:gd name="adj" fmla="val 12000"/>
+            </a:avLst>
+          </a:prstGeom>
+          <a:solidFill>
+            <a:srgbClr val="095292"/>
+          </a:solidFill>
+          <a:ln>
+            <a:noFill/>
+          </a:ln>
+        </p:spPr>
+        <p:style>
+          <a:lnRef idx="1">
+            <a:schemeClr val="accent1"/>
+          </a:lnRef>
+          <a:fillRef idx="3">
+            <a:schemeClr val="accent1"/>
+          </a:fillRef>
+          <a:effectRef idx="2">
+            <a:schemeClr val="accent1"/>
+          </a:effectRef>
+          <a:fontRef idx="minor">
+            <a:schemeClr val="lt1"/>
+          </a:fontRef>
+        </p:style>
+        <p:txBody>
+          <a:bodyPr rtlCol="0" anchor="ctr" wrap="square"/>
+          <a:lstStyle/>
+          <a:p>
+            <a:pPr algn="ctr"/>
+            <a:r>
+              <a:rPr sz="1200" b="1" i="0">
+                <a:solidFill>
+                  <a:srgbClr val="FFFFFF"/>
+                </a:solidFill>
+                <a:latin typeface="Calibri"/>
+              </a:rPr>
+              <a:t>PaaS
+(Render, Railway, Heroku)</a:t>
+            </a:r>
+          </a:p>
+        </p:txBody>
+      </p:sp>
+      <p:sp>
+        <p:nvSpPr>
+          <p:cNvPr id="8" name="Rounded Rectangle 7"/>
+          <p:cNvSpPr/>
+          <p:nvPr/>
+        </p:nvSpPr>
+        <p:spPr>
+          <a:xfrm>
+            <a:off x="7772400" y="1325880"/>
+            <a:ext cx="3291840" cy="685800"/>
+          </a:xfrm>
+          <a:prstGeom prst="roundRect">
+            <a:avLst>
+              <a:gd name="adj" fmla="val 12000"/>
+            </a:avLst>
+          </a:prstGeom>
+          <a:solidFill>
+            <a:srgbClr val="095292"/>
+          </a:solidFill>
+          <a:ln>
+            <a:noFill/>
+          </a:ln>
+        </p:spPr>
+        <p:style>
+          <a:lnRef idx="1">
+            <a:schemeClr val="accent1"/>
+          </a:lnRef>
+          <a:fillRef idx="3">
+            <a:schemeClr val="accent1"/>
+          </a:fillRef>
+          <a:effectRef idx="2">
+            <a:schemeClr val="accent1"/>
+          </a:effectRef>
+          <a:fontRef idx="minor">
+            <a:schemeClr val="lt1"/>
+          </a:fontRef>
+        </p:style>
+        <p:txBody>
+          <a:bodyPr rtlCol="0" anchor="ctr" wrap="square"/>
+          <a:lstStyle/>
+          <a:p>
+            <a:pPr algn="ctr"/>
+            <a:r>
+              <a:rPr sz="1200" b="1" i="0">
+                <a:solidFill>
+                  <a:srgbClr val="FFFFFF"/>
+                </a:solidFill>
+                <a:latin typeface="Calibri"/>
+              </a:rPr>
+              <a:t>SaaS
+(Gmail, Notion, Slack)</a:t>
+            </a:r>
+          </a:p>
+        </p:txBody>
+      </p:sp>
+      <p:sp>
+        <p:nvSpPr>
+          <p:cNvPr id="9" name="Rounded Rectangle 8"/>
+          <p:cNvSpPr/>
+          <p:nvPr/>
+        </p:nvSpPr>
+        <p:spPr>
+          <a:xfrm>
+            <a:off x="548640" y="2103120"/>
+            <a:ext cx="3291840" cy="548640"/>
+          </a:xfrm>
+          <a:prstGeom prst="roundRect">
+            <a:avLst>
+              <a:gd name="adj" fmla="val 12000"/>
+            </a:avLst>
+          </a:prstGeom>
+          <a:solidFill>
+            <a:srgbClr val="FFD000"/>
+          </a:solidFill>
+          <a:ln>
+            <a:noFill/>
+          </a:ln>
+        </p:spPr>
+        <p:style>
+          <a:lnRef idx="1">
+            <a:schemeClr val="accent1"/>
+          </a:lnRef>
+          <a:fillRef idx="3">
+            <a:schemeClr val="accent1"/>
+          </a:fillRef>
+          <a:effectRef idx="2">
+            <a:schemeClr val="accent1"/>
+          </a:effectRef>
+          <a:fontRef idx="minor">
+            <a:schemeClr val="lt1"/>
+          </a:fontRef>
+        </p:style>
+        <p:txBody>
+          <a:bodyPr rtlCol="0" anchor="ctr" wrap="square"/>
+          <a:lstStyle/>
+          <a:p>
+            <a:pPr algn="ctr"/>
+            <a:r>
+              <a:rPr sz="1100" b="1" i="0">
+                <a:solidFill>
+                  <a:srgbClr val="095292"/>
+                </a:solidFill>
+                <a:latin typeface="Calibri"/>
+              </a:rPr>
+              <a:t>Aplicación y datos</a:t>
+            </a:r>
+          </a:p>
+        </p:txBody>
+      </p:sp>
+      <p:sp>
+        <p:nvSpPr>
+          <p:cNvPr id="10" name="Rounded Rectangle 9"/>
+          <p:cNvSpPr/>
+          <p:nvPr/>
+        </p:nvSpPr>
+        <p:spPr>
+          <a:xfrm>
+            <a:off x="548640" y="2743200"/>
+            <a:ext cx="3291840" cy="548640"/>
+          </a:xfrm>
+          <a:prstGeom prst="roundRect">
+            <a:avLst>
+              <a:gd name="adj" fmla="val 12000"/>
+            </a:avLst>
+          </a:prstGeom>
+          <a:solidFill>
+            <a:srgbClr val="FFD000"/>
+          </a:solidFill>
+          <a:ln>
+            <a:noFill/>
+          </a:ln>
+        </p:spPr>
+        <p:style>
+          <a:lnRef idx="1">
+            <a:schemeClr val="accent1"/>
+          </a:lnRef>
+          <a:fillRef idx="3">
+            <a:schemeClr val="accent1"/>
+          </a:fillRef>
+          <a:effectRef idx="2">
+            <a:schemeClr val="accent1"/>
+          </a:effectRef>
+          <a:fontRef idx="minor">
+            <a:schemeClr val="lt1"/>
+          </a:fontRef>
+        </p:style>
+        <p:txBody>
+          <a:bodyPr rtlCol="0" anchor="ctr" wrap="square"/>
+          <a:lstStyle/>
+          <a:p>
+            <a:pPr algn="ctr"/>
+            <a:r>
+              <a:rPr sz="1100" b="1" i="0">
+                <a:solidFill>
+                  <a:srgbClr val="095292"/>
+                </a:solidFill>
+                <a:latin typeface="Calibri"/>
+              </a:rPr>
+              <a:t>Runtime / middleware</a:t>
+            </a:r>
+          </a:p>
+        </p:txBody>
+      </p:sp>
+      <p:sp>
+        <p:nvSpPr>
+          <p:cNvPr id="11" name="Rounded Rectangle 10"/>
+          <p:cNvSpPr/>
+          <p:nvPr/>
+        </p:nvSpPr>
+        <p:spPr>
+          <a:xfrm>
+            <a:off x="548640" y="3383280"/>
+            <a:ext cx="3291840" cy="548640"/>
+          </a:xfrm>
+          <a:prstGeom prst="roundRect">
+            <a:avLst>
+              <a:gd name="adj" fmla="val 12000"/>
+            </a:avLst>
+          </a:prstGeom>
+          <a:solidFill>
+            <a:srgbClr val="FFD000"/>
+          </a:solidFill>
+          <a:ln>
+            <a:noFill/>
+          </a:ln>
+        </p:spPr>
+        <p:style>
+          <a:lnRef idx="1">
+            <a:schemeClr val="accent1"/>
+          </a:lnRef>
+          <a:fillRef idx="3">
+            <a:schemeClr val="accent1"/>
+          </a:fillRef>
+          <a:effectRef idx="2">
+            <a:schemeClr val="accent1"/>
+          </a:effectRef>
+          <a:fontRef idx="minor">
+            <a:schemeClr val="lt1"/>
+          </a:fontRef>
+        </p:style>
+        <p:txBody>
+          <a:bodyPr rtlCol="0" anchor="ctr" wrap="square"/>
+          <a:lstStyle/>
+          <a:p>
+            <a:pPr algn="ctr"/>
+            <a:r>
+              <a:rPr sz="1100" b="1" i="0">
+                <a:solidFill>
+                  <a:srgbClr val="095292"/>
+                </a:solidFill>
+                <a:latin typeface="Calibri"/>
+              </a:rPr>
+              <a:t>Sistema operativo</a:t>
+            </a:r>
+          </a:p>
+        </p:txBody>
+      </p:sp>
+      <p:sp>
+        <p:nvSpPr>
+          <p:cNvPr id="12" name="Rounded Rectangle 11"/>
+          <p:cNvSpPr/>
+          <p:nvPr/>
+        </p:nvSpPr>
+        <p:spPr>
+          <a:xfrm>
+            <a:off x="548640" y="4023360"/>
+            <a:ext cx="3291840" cy="548640"/>
+          </a:xfrm>
+          <a:prstGeom prst="roundRect">
+            <a:avLst>
+              <a:gd name="adj" fmla="val 12000"/>
+            </a:avLst>
+          </a:prstGeom>
+          <a:solidFill>
+            <a:srgbClr val="269CCB"/>
+          </a:solidFill>
+          <a:ln>
+            <a:noFill/>
+          </a:ln>
+        </p:spPr>
+        <p:style>
+          <a:lnRef idx="1">
+            <a:schemeClr val="accent1"/>
+          </a:lnRef>
+          <a:fillRef idx="3">
+            <a:schemeClr val="accent1"/>
+          </a:fillRef>
+          <a:effectRef idx="2">
+            <a:schemeClr val="accent1"/>
+          </a:effectRef>
+          <a:fontRef idx="minor">
+            <a:schemeClr val="lt1"/>
+          </a:fontRef>
+        </p:style>
+        <p:txBody>
+          <a:bodyPr rtlCol="0" anchor="ctr" wrap="square"/>
+          <a:lstStyle/>
+          <a:p>
+            <a:pPr algn="ctr"/>
+            <a:r>
+              <a:rPr sz="1050" b="1" i="0">
+                <a:solidFill>
+                  <a:srgbClr val="FFFFFF"/>
+                </a:solidFill>
+                <a:latin typeface="Calibri"/>
+              </a:rPr>
+              <a:t>Infraestructura
+(cómputo, red, disco)</a:t>
+            </a:r>
+          </a:p>
+        </p:txBody>
+      </p:sp>
+      <p:sp>
+        <p:nvSpPr>
+          <p:cNvPr id="13" name="Rounded Rectangle 12"/>
+          <p:cNvSpPr/>
+          <p:nvPr/>
+        </p:nvSpPr>
+        <p:spPr>
+          <a:xfrm>
+            <a:off x="4160520" y="2103120"/>
+            <a:ext cx="3291840" cy="548640"/>
+          </a:xfrm>
+          <a:prstGeom prst="roundRect">
+            <a:avLst>
+              <a:gd name="adj" fmla="val 12000"/>
+            </a:avLst>
+          </a:prstGeom>
+          <a:solidFill>
+            <a:srgbClr val="FFD000"/>
+          </a:solidFill>
+          <a:ln>
+            <a:noFill/>
+          </a:ln>
+        </p:spPr>
+        <p:style>
+          <a:lnRef idx="1">
+            <a:schemeClr val="accent1"/>
+          </a:lnRef>
+          <a:fillRef idx="3">
+            <a:schemeClr val="accent1"/>
+          </a:fillRef>
+          <a:effectRef idx="2">
+            <a:schemeClr val="accent1"/>
+          </a:effectRef>
+          <a:fontRef idx="minor">
+            <a:schemeClr val="lt1"/>
+          </a:fontRef>
+        </p:style>
+        <p:txBody>
+          <a:bodyPr rtlCol="0" anchor="ctr" wrap="square"/>
+          <a:lstStyle/>
+          <a:p>
+            <a:pPr algn="ctr"/>
+            <a:r>
+              <a:rPr sz="1100" b="1" i="0">
+                <a:solidFill>
+                  <a:srgbClr val="095292"/>
+                </a:solidFill>
+                <a:latin typeface="Calibri"/>
+              </a:rPr>
+              <a:t>Aplicación y datos</a:t>
+            </a:r>
+          </a:p>
+        </p:txBody>
+      </p:sp>
+      <p:sp>
+        <p:nvSpPr>
+          <p:cNvPr id="14" name="Rounded Rectangle 13"/>
+          <p:cNvSpPr/>
+          <p:nvPr/>
+        </p:nvSpPr>
+        <p:spPr>
+          <a:xfrm>
+            <a:off x="4160520" y="2743200"/>
+            <a:ext cx="3291840" cy="548640"/>
+          </a:xfrm>
+          <a:prstGeom prst="roundRect">
+            <a:avLst>
+              <a:gd name="adj" fmla="val 12000"/>
+            </a:avLst>
+          </a:prstGeom>
+          <a:solidFill>
+            <a:srgbClr val="269CCB"/>
+          </a:solidFill>
+          <a:ln>
+            <a:noFill/>
+          </a:ln>
+        </p:spPr>
+        <p:style>
+          <a:lnRef idx="1">
+            <a:schemeClr val="accent1"/>
+          </a:lnRef>
+          <a:fillRef idx="3">
+            <a:schemeClr val="accent1"/>
+          </a:fillRef>
+          <a:effectRef idx="2">
+            <a:schemeClr val="accent1"/>
+          </a:effectRef>
+          <a:fontRef idx="minor">
+            <a:schemeClr val="lt1"/>
+          </a:fontRef>
+        </p:style>
+        <p:txBody>
+          <a:bodyPr rtlCol="0" anchor="ctr" wrap="square"/>
+          <a:lstStyle/>
+          <a:p>
+            <a:pPr algn="ctr"/>
+            <a:r>
+              <a:rPr sz="1100" b="1" i="0">
+                <a:solidFill>
+                  <a:srgbClr val="FFFFFF"/>
+                </a:solidFill>
+                <a:latin typeface="Calibri"/>
+              </a:rPr>
+              <a:t>Runtime / middleware</a:t>
+            </a:r>
+          </a:p>
+        </p:txBody>
+      </p:sp>
+      <p:sp>
+        <p:nvSpPr>
+          <p:cNvPr id="15" name="Rounded Rectangle 14"/>
+          <p:cNvSpPr/>
+          <p:nvPr/>
+        </p:nvSpPr>
+        <p:spPr>
+          <a:xfrm>
+            <a:off x="4160520" y="3383280"/>
+            <a:ext cx="3291840" cy="548640"/>
+          </a:xfrm>
+          <a:prstGeom prst="roundRect">
+            <a:avLst>
+              <a:gd name="adj" fmla="val 12000"/>
+            </a:avLst>
+          </a:prstGeom>
+          <a:solidFill>
+            <a:srgbClr val="269CCB"/>
+          </a:solidFill>
+          <a:ln>
+            <a:noFill/>
+          </a:ln>
+        </p:spPr>
+        <p:style>
+          <a:lnRef idx="1">
+            <a:schemeClr val="accent1"/>
+          </a:lnRef>
+          <a:fillRef idx="3">
+            <a:schemeClr val="accent1"/>
+          </a:fillRef>
+          <a:effectRef idx="2">
+            <a:schemeClr val="accent1"/>
+          </a:effectRef>
+          <a:fontRef idx="minor">
+            <a:schemeClr val="lt1"/>
+          </a:fontRef>
+        </p:style>
+        <p:txBody>
+          <a:bodyPr rtlCol="0" anchor="ctr" wrap="square"/>
+          <a:lstStyle/>
+          <a:p>
+            <a:pPr algn="ctr"/>
+            <a:r>
+              <a:rPr sz="1100" b="1" i="0">
+                <a:solidFill>
+                  <a:srgbClr val="FFFFFF"/>
+                </a:solidFill>
+                <a:latin typeface="Calibri"/>
+              </a:rPr>
+              <a:t>Sistema operativo</a:t>
+            </a:r>
+          </a:p>
+        </p:txBody>
+      </p:sp>
+      <p:sp>
+        <p:nvSpPr>
+          <p:cNvPr id="16" name="Rounded Rectangle 15"/>
+          <p:cNvSpPr/>
+          <p:nvPr/>
+        </p:nvSpPr>
+        <p:spPr>
+          <a:xfrm>
+            <a:off x="4160520" y="4023360"/>
+            <a:ext cx="3291840" cy="548640"/>
+          </a:xfrm>
+          <a:prstGeom prst="roundRect">
+            <a:avLst>
+              <a:gd name="adj" fmla="val 12000"/>
+            </a:avLst>
+          </a:prstGeom>
+          <a:solidFill>
+            <a:srgbClr val="269CCB"/>
+          </a:solidFill>
+          <a:ln>
+            <a:noFill/>
+          </a:ln>
+        </p:spPr>
+        <p:style>
+          <a:lnRef idx="1">
+            <a:schemeClr val="accent1"/>
+          </a:lnRef>
+          <a:fillRef idx="3">
+            <a:schemeClr val="accent1"/>
+          </a:fillRef>
+          <a:effectRef idx="2">
+            <a:schemeClr val="accent1"/>
+          </a:effectRef>
+          <a:fontRef idx="minor">
+            <a:schemeClr val="lt1"/>
+          </a:fontRef>
+        </p:style>
+        <p:txBody>
+          <a:bodyPr rtlCol="0" anchor="ctr" wrap="square"/>
+          <a:lstStyle/>
+          <a:p>
+            <a:pPr algn="ctr"/>
+            <a:r>
+              <a:rPr sz="1050" b="1" i="0">
+                <a:solidFill>
+                  <a:srgbClr val="FFFFFF"/>
+                </a:solidFill>
+                <a:latin typeface="Calibri"/>
+              </a:rPr>
+              <a:t>Infraestructura
+(cómputo, red, disco)</a:t>
+            </a:r>
+          </a:p>
+        </p:txBody>
+      </p:sp>
+      <p:sp>
+        <p:nvSpPr>
+          <p:cNvPr id="17" name="Rounded Rectangle 16"/>
+          <p:cNvSpPr/>
+          <p:nvPr/>
+        </p:nvSpPr>
+        <p:spPr>
+          <a:xfrm>
+            <a:off x="7772400" y="2103120"/>
+            <a:ext cx="3291840" cy="548640"/>
+          </a:xfrm>
+          <a:prstGeom prst="roundRect">
+            <a:avLst>
+              <a:gd name="adj" fmla="val 12000"/>
+            </a:avLst>
+          </a:prstGeom>
+          <a:solidFill>
+            <a:srgbClr val="FFD000"/>
+          </a:solidFill>
+          <a:ln>
+            <a:noFill/>
+          </a:ln>
+        </p:spPr>
+        <p:style>
+          <a:lnRef idx="1">
+            <a:schemeClr val="accent1"/>
+          </a:lnRef>
+          <a:fillRef idx="3">
+            <a:schemeClr val="accent1"/>
+          </a:fillRef>
+          <a:effectRef idx="2">
+            <a:schemeClr val="accent1"/>
+          </a:effectRef>
+          <a:fontRef idx="minor">
+            <a:schemeClr val="lt1"/>
+          </a:fontRef>
+        </p:style>
+        <p:txBody>
+          <a:bodyPr rtlCol="0" anchor="ctr" wrap="square"/>
+          <a:lstStyle/>
+          <a:p>
+            <a:pPr algn="ctr"/>
+            <a:r>
+              <a:rPr sz="1050" b="1" i="0">
+                <a:solidFill>
+                  <a:srgbClr val="095292"/>
+                </a:solidFill>
+                <a:latin typeface="Calibri"/>
+              </a:rPr>
+              <a:t>Aplicación y datos
+(usted solo configura)</a:t>
+            </a:r>
+          </a:p>
+        </p:txBody>
+      </p:sp>
+      <p:sp>
+        <p:nvSpPr>
+          <p:cNvPr id="18" name="Rounded Rectangle 17"/>
+          <p:cNvSpPr/>
+          <p:nvPr/>
+        </p:nvSpPr>
+        <p:spPr>
+          <a:xfrm>
+            <a:off x="7772400" y="2743200"/>
+            <a:ext cx="3291840" cy="548640"/>
+          </a:xfrm>
+          <a:prstGeom prst="roundRect">
+            <a:avLst>
+              <a:gd name="adj" fmla="val 12000"/>
+            </a:avLst>
+          </a:prstGeom>
+          <a:solidFill>
+            <a:srgbClr val="269CCB"/>
+          </a:solidFill>
+          <a:ln>
+            <a:noFill/>
+          </a:ln>
+        </p:spPr>
+        <p:style>
+          <a:lnRef idx="1">
+            <a:schemeClr val="accent1"/>
+          </a:lnRef>
+          <a:fillRef idx="3">
+            <a:schemeClr val="accent1"/>
+          </a:fillRef>
+          <a:effectRef idx="2">
+            <a:schemeClr val="accent1"/>
+          </a:effectRef>
+          <a:fontRef idx="minor">
+            <a:schemeClr val="lt1"/>
+          </a:fontRef>
+        </p:style>
+        <p:txBody>
+          <a:bodyPr rtlCol="0" anchor="ctr" wrap="square"/>
+          <a:lstStyle/>
+          <a:p>
+            <a:pPr algn="ctr"/>
+            <a:r>
+              <a:rPr sz="1100" b="1" i="0">
+                <a:solidFill>
+                  <a:srgbClr val="FFFFFF"/>
+                </a:solidFill>
+                <a:latin typeface="Calibri"/>
+              </a:rPr>
+              <a:t>Runtime / middleware</a:t>
+            </a:r>
+          </a:p>
+        </p:txBody>
+      </p:sp>
+      <p:sp>
+        <p:nvSpPr>
+          <p:cNvPr id="19" name="Rounded Rectangle 18"/>
+          <p:cNvSpPr/>
+          <p:nvPr/>
+        </p:nvSpPr>
+        <p:spPr>
+          <a:xfrm>
+            <a:off x="7772400" y="3383280"/>
+            <a:ext cx="3291840" cy="548640"/>
+          </a:xfrm>
+          <a:prstGeom prst="roundRect">
+            <a:avLst>
+              <a:gd name="adj" fmla="val 12000"/>
+            </a:avLst>
+          </a:prstGeom>
+          <a:solidFill>
+            <a:srgbClr val="269CCB"/>
+          </a:solidFill>
+          <a:ln>
+            <a:noFill/>
+          </a:ln>
+        </p:spPr>
+        <p:style>
+          <a:lnRef idx="1">
+            <a:schemeClr val="accent1"/>
+          </a:lnRef>
+          <a:fillRef idx="3">
+            <a:schemeClr val="accent1"/>
+          </a:fillRef>
+          <a:effectRef idx="2">
+            <a:schemeClr val="accent1"/>
+          </a:effectRef>
+          <a:fontRef idx="minor">
+            <a:schemeClr val="lt1"/>
+          </a:fontRef>
+        </p:style>
+        <p:txBody>
+          <a:bodyPr rtlCol="0" anchor="ctr" wrap="square"/>
+          <a:lstStyle/>
+          <a:p>
+            <a:pPr algn="ctr"/>
+            <a:r>
+              <a:rPr sz="1100" b="1" i="0">
+                <a:solidFill>
+                  <a:srgbClr val="FFFFFF"/>
+                </a:solidFill>
+                <a:latin typeface="Calibri"/>
+              </a:rPr>
+              <a:t>Sistema operativo</a:t>
+            </a:r>
+          </a:p>
+        </p:txBody>
+      </p:sp>
+      <p:sp>
+        <p:nvSpPr>
+          <p:cNvPr id="20" name="Rounded Rectangle 19"/>
+          <p:cNvSpPr/>
+          <p:nvPr/>
+        </p:nvSpPr>
+        <p:spPr>
+          <a:xfrm>
+            <a:off x="7772400" y="4023360"/>
+            <a:ext cx="3291840" cy="548640"/>
+          </a:xfrm>
+          <a:prstGeom prst="roundRect">
+            <a:avLst>
+              <a:gd name="adj" fmla="val 12000"/>
+            </a:avLst>
+          </a:prstGeom>
+          <a:solidFill>
+            <a:srgbClr val="269CCB"/>
+          </a:solidFill>
+          <a:ln>
+            <a:noFill/>
+          </a:ln>
+        </p:spPr>
+        <p:style>
+          <a:lnRef idx="1">
+            <a:schemeClr val="accent1"/>
+          </a:lnRef>
+          <a:fillRef idx="3">
+            <a:schemeClr val="accent1"/>
+          </a:fillRef>
+          <a:effectRef idx="2">
+            <a:schemeClr val="accent1"/>
+          </a:effectRef>
+          <a:fontRef idx="minor">
+            <a:schemeClr val="lt1"/>
+          </a:fontRef>
+        </p:style>
+        <p:txBody>
+          <a:bodyPr rtlCol="0" anchor="ctr" wrap="square"/>
+          <a:lstStyle/>
+          <a:p>
+            <a:pPr algn="ctr"/>
+            <a:r>
+              <a:rPr sz="1050" b="1" i="0">
+                <a:solidFill>
+                  <a:srgbClr val="FFFFFF"/>
+                </a:solidFill>
+                <a:latin typeface="Calibri"/>
+              </a:rPr>
+              <a:t>Infraestructura
+(cómputo, red, disco)</a:t>
+            </a:r>
+          </a:p>
+        </p:txBody>
+      </p:sp>
+      <p:sp>
+        <p:nvSpPr>
+          <p:cNvPr id="21" name="TextBox 20"/>
           <p:cNvSpPr txBox="1"/>
           <p:nvPr/>
         </p:nvSpPr>
         <p:spPr>
           <a:xfrm>
-            <a:off x="685800" y="1307592"/>
-            <a:ext cx="10820095" cy="256032"/>
-          </a:xfrm>
-          <a:prstGeom prst="rect">
-            <a:avLst/>
-          </a:prstGeom>
-          <a:noFill/>
-        </p:spPr>
-        <p:txBody>
-          <a:bodyPr wrap="square" anchor="ctr"/>
-          <a:lstStyle/>
-          <a:p>
-            <a:r>
-              <a:rPr sz="1000" b="1" i="0">
-                <a:solidFill>
-                  <a:srgbClr val="269CCB"/>
-                </a:solidFill>
-                <a:latin typeface="Calibri"/>
-              </a:rPr>
-              <a:t>● ● ●</a:t>
-            </a:r>
-          </a:p>
-        </p:txBody>
-      </p:sp>
-      <p:sp>
-        <p:nvSpPr>
-          <p:cNvPr id="8" name="TextBox 7"/>
-          <p:cNvSpPr txBox="1"/>
-          <p:nvPr/>
-        </p:nvSpPr>
-        <p:spPr>
-          <a:xfrm>
-            <a:off x="777240" y="1719072"/>
-            <a:ext cx="10637215" cy="4133087"/>
+            <a:off x="457200" y="5897880"/>
+            <a:ext cx="11277295" cy="320040"/>
           </a:xfrm>
           <a:prstGeom prst="rect">
             <a:avLst/>
@@ -6918,257 +8477,28 @@
           </a:bodyPr>
           <a:lstStyle/>
           <a:p>
-            <a:pPr>
-              <a:spcAft>
-                <a:spcPts val="400"/>
-              </a:spcAft>
-            </a:pPr>
-            <a:r>
-              <a:rPr sz="1400" b="0" i="0">
-                <a:solidFill>
-                  <a:srgbClr val="FFFFFF"/>
-                </a:solidFill>
-                <a:latin typeface="Calibri"/>
-              </a:rPr>
-              <a:t>## 1. Titulo     ADR-001 Modelo de servicio dominante de CloudLite App</a:t>
-            </a:r>
-          </a:p>
-          <a:p>
-            <a:pPr>
-              <a:spcAft>
-                <a:spcPts val="400"/>
-              </a:spcAft>
-            </a:pPr>
-            <a:r>
-              <a:rPr sz="1400" b="0" i="0">
-                <a:solidFill>
-                  <a:srgbClr val="FFFFFF"/>
-                </a:solidFill>
-                <a:latin typeface="Calibri"/>
-              </a:rPr>
-              <a:t>## 2. Estado     Aceptado — &lt;fecha de hoy&gt;</a:t>
-            </a:r>
-          </a:p>
-          <a:p>
-            <a:pPr>
-              <a:spcAft>
-                <a:spcPts val="400"/>
-              </a:spcAft>
-            </a:pPr>
-            <a:r>
-              <a:rPr sz="1400" b="0" i="0">
-                <a:solidFill>
-                  <a:srgbClr val="FFFFFF"/>
-                </a:solidFill>
-                <a:latin typeface="Calibri"/>
-              </a:rPr>
-              <a:t/>
-            </a:r>
-          </a:p>
-          <a:p>
-            <a:pPr>
-              <a:spcAft>
-                <a:spcPts val="400"/>
-              </a:spcAft>
-            </a:pPr>
-            <a:r>
-              <a:rPr sz="1400" b="0" i="0">
-                <a:solidFill>
-                  <a:srgbClr val="FFFFFF"/>
-                </a:solidFill>
-                <a:latin typeface="Calibri"/>
-              </a:rPr>
-              <a:t>## 3. Contexto                    &lt;- restricciones, no resumen del tema</a:t>
-            </a:r>
-          </a:p>
-          <a:p>
-            <a:pPr>
-              <a:spcAft>
-                <a:spcPts val="400"/>
-              </a:spcAft>
-            </a:pPr>
-            <a:r>
-              <a:rPr sz="1400" b="0" i="0">
-                <a:solidFill>
-                  <a:srgbClr val="FFFFFF"/>
-                </a:solidFill>
-                <a:latin typeface="Calibri"/>
-              </a:rPr>
-              <a:t>Lo sostengo yo solo, 12 semanas, sin presupuesto cloud ni tarjeta; demo viva el dia de la sustentacion.</a:t>
-            </a:r>
-          </a:p>
-          <a:p>
-            <a:pPr>
-              <a:spcAft>
-                <a:spcPts val="400"/>
-              </a:spcAft>
-            </a:pPr>
-            <a:r>
-              <a:rPr sz="1400" b="0" i="0">
-                <a:solidFill>
-                  <a:srgbClr val="FFFFFF"/>
-                </a:solidFill>
-                <a:latin typeface="Calibri"/>
-              </a:rPr>
-              <a:t/>
-            </a:r>
-          </a:p>
-          <a:p>
-            <a:pPr>
-              <a:spcAft>
-                <a:spcPts val="400"/>
-              </a:spcAft>
-            </a:pPr>
-            <a:r>
-              <a:rPr sz="1400" b="0" i="0">
-                <a:solidFill>
-                  <a:srgbClr val="FFFFFF"/>
-                </a:solidFill>
-                <a:latin typeface="Calibri"/>
-              </a:rPr>
-              <a:t>## 4. Decision                    &lt;- UNA frase, UN modelo dominante</a:t>
-            </a:r>
-          </a:p>
-          <a:p>
-            <a:pPr>
-              <a:spcAft>
-                <a:spcPts val="400"/>
-              </a:spcAft>
-            </a:pPr>
-            <a:r>
-              <a:rPr sz="1400" b="0" i="0">
-                <a:solidFill>
-                  <a:srgbClr val="FFFFFF"/>
-                </a:solidFill>
-                <a:latin typeface="Calibri"/>
-              </a:rPr>
-              <a:t>La aplicacion de CloudLite se despliega sobre PaaS.</a:t>
-            </a:r>
-          </a:p>
-          <a:p>
-            <a:pPr>
-              <a:spcAft>
-                <a:spcPts val="400"/>
-              </a:spcAft>
-            </a:pPr>
-            <a:r>
-              <a:rPr sz="1400" b="0" i="0">
-                <a:solidFill>
-                  <a:srgbClr val="FFFFFF"/>
-                </a:solidFill>
-                <a:latin typeface="Calibri"/>
-              </a:rPr>
-              <a:t/>
-            </a:r>
-          </a:p>
-          <a:p>
-            <a:pPr>
-              <a:spcAft>
-                <a:spcPts val="400"/>
-              </a:spcAft>
-            </a:pPr>
-            <a:r>
-              <a:rPr sz="1400" b="0" i="0">
-                <a:solidFill>
-                  <a:srgbClr val="FFFFFF"/>
-                </a:solidFill>
-                <a:latin typeface="Calibri"/>
-              </a:rPr>
-              <a:t>## 5. Alternativas descartadas    &lt;- exactamente 2, con motivo del dominio</a:t>
-            </a:r>
-          </a:p>
-          <a:p>
-            <a:pPr>
-              <a:spcAft>
-                <a:spcPts val="400"/>
-              </a:spcAft>
-            </a:pPr>
-            <a:r>
-              <a:rPr sz="1400" b="0" i="0">
-                <a:solidFill>
-                  <a:srgbClr val="FFFFFF"/>
-                </a:solidFill>
-                <a:latin typeface="Calibri"/>
-              </a:rPr>
-              <a:t>- IaaS: control total, pero yo opero SO y parches -&gt; tiempo que no tengo.</a:t>
-            </a:r>
-          </a:p>
-          <a:p>
-            <a:pPr>
-              <a:spcAft>
-                <a:spcPts val="400"/>
-              </a:spcAft>
-            </a:pPr>
-            <a:r>
-              <a:rPr sz="1400" b="0" i="0">
-                <a:solidFill>
-                  <a:srgbClr val="FFFFFF"/>
-                </a:solidFill>
-                <a:latin typeface="Calibri"/>
-              </a:rPr>
-              <a:t>- SaaS como nucleo: no queda nada que arquitecturar; solo satelite (auth/email).</a:t>
-            </a:r>
-          </a:p>
-          <a:p>
-            <a:pPr>
-              <a:spcAft>
-                <a:spcPts val="400"/>
-              </a:spcAft>
-            </a:pPr>
-            <a:r>
-              <a:rPr sz="1400" b="0" i="0">
-                <a:solidFill>
-                  <a:srgbClr val="FFFFFF"/>
-                </a:solidFill>
-                <a:latin typeface="Calibri"/>
-              </a:rPr>
-              <a:t/>
-            </a:r>
-          </a:p>
-          <a:p>
-            <a:pPr>
-              <a:spcAft>
-                <a:spcPts val="400"/>
-              </a:spcAft>
-            </a:pPr>
-            <a:r>
-              <a:rPr sz="1400" b="0" i="0">
-                <a:solidFill>
-                  <a:srgbClr val="FFFFFF"/>
-                </a:solidFill>
-                <a:latin typeface="Calibri"/>
-              </a:rPr>
-              <a:t>## 6. Consecuencias               &lt;- pregunta 7: 3 ejes, cada uno con + y -</a:t>
-            </a:r>
-          </a:p>
-          <a:p>
-            <a:pPr>
-              <a:spcAft>
-                <a:spcPts val="400"/>
-              </a:spcAft>
-            </a:pPr>
-            <a:r>
-              <a:rPr sz="1400" b="0" i="0">
-                <a:solidFill>
-                  <a:srgbClr val="FFFFFF"/>
-                </a:solidFill>
-                <a:latin typeface="Calibri"/>
-              </a:rPr>
-              <a:t>Operacion + / -        Costo + / -        Aprendizaje + / -</a:t>
-            </a:r>
-          </a:p>
-        </p:txBody>
-      </p:sp>
-      <p:sp>
-        <p:nvSpPr>
-          <p:cNvPr id="9" name="TextBox 8"/>
+            <a:r>
+              <a:rPr sz="1050" b="0" i="1">
+                <a:solidFill>
+                  <a:srgbClr val="666666"/>
+                </a:solidFill>
+                <a:latin typeface="Calibri"/>
+              </a:rPr>
+              <a:t>Amarillo = lo administra usted · Celeste = lo administra el proveedor</a:t>
+            </a:r>
+          </a:p>
+        </p:txBody>
+      </p:sp>
+      <p:sp>
+        <p:nvSpPr>
+          <p:cNvPr id="22" name="TextBox 21"/>
           <p:cNvSpPr txBox="1"/>
           <p:nvPr/>
         </p:nvSpPr>
         <p:spPr>
           <a:xfrm>
-            <a:off x="457200" y="6080760"/>
-            <a:ext cx="11277295" cy="320040"/>
+            <a:off x="457200" y="6263640"/>
+            <a:ext cx="11277295" cy="411480"/>
           </a:xfrm>
           <a:prstGeom prst="rect">
             <a:avLst/>
@@ -7181,22 +8511,21 @@
           </a:bodyPr>
           <a:lstStyle/>
           <a:p>
-            <a:pPr algn="ctr"/>
-            <a:r>
-              <a:rPr sz="1200" b="0" i="1">
+            <a:r>
+              <a:rPr sz="1100" b="0" i="1">
                 <a:solidFill>
                   <a:srgbClr val="666666"/>
                 </a:solidFill>
                 <a:latin typeface="Calibri"/>
               </a:rPr>
-              <a:t>Sin Titulo y Estado con fecha no hay ADR que citar en la Clase 15: son 1.5 puntos de la pregunta 6.</a:t>
-            </a:r>
-          </a:p>
-        </p:txBody>
-      </p:sp>
-      <p:sp>
-        <p:nvSpPr>
-          <p:cNvPr id="10" name="TextBox 9"/>
+              <a:t>Suba en la pila y sube el control, pero también lo que tiene que operar usted: parches, escalado, disponibilidad. Para el MVP de CloudLite, PaaS es el punto medio: usted solo responde por su aplicación y sus datos.</a:t>
+            </a:r>
+          </a:p>
+        </p:txBody>
+      </p:sp>
+      <p:sp>
+        <p:nvSpPr>
+          <p:cNvPr id="23" name="TextBox 22"/>
           <p:cNvSpPr txBox="1"/>
           <p:nvPr/>
         </p:nvSpPr>
@@ -7264,7 +8593,7 @@
         <p:spPr>
           <a:xfrm>
             <a:off x="0" y="0"/>
-            <a:ext cx="12191695" cy="1170432"/>
+            <a:ext cx="12191695" cy="960120"/>
           </a:xfrm>
           <a:prstGeom prst="rect">
             <a:avLst/>
@@ -7306,7 +8635,7 @@
         </p:nvSpPr>
         <p:spPr>
           <a:xfrm>
-            <a:off x="0" y="1170432"/>
+            <a:off x="0" y="960120"/>
             <a:ext cx="12191695" cy="41148"/>
           </a:xfrm>
           <a:prstGeom prst="rect">
@@ -7350,7 +8679,7 @@
         <p:spPr>
           <a:xfrm>
             <a:off x="457200" y="164592"/>
-            <a:ext cx="11277295" cy="384048"/>
+            <a:ext cx="11277295" cy="502920"/>
           </a:xfrm>
           <a:prstGeom prst="rect">
             <a:avLst/>
@@ -7370,55 +8699,21 @@
                 </a:solidFill>
                 <a:latin typeface="Calibri"/>
               </a:rPr>
-              <a:t>Herramientas de hoy</a:t>
-            </a:r>
-          </a:p>
-        </p:txBody>
-      </p:sp>
-      <p:sp>
-        <p:nvSpPr>
-          <p:cNvPr id="5" name="TextBox 4"/>
-          <p:cNvSpPr txBox="1"/>
-          <p:nvPr/>
-        </p:nvSpPr>
-        <p:spPr>
-          <a:xfrm>
-            <a:off x="457200" y="566928"/>
-            <a:ext cx="11277295" cy="411480"/>
-          </a:xfrm>
-          <a:prstGeom prst="rect">
-            <a:avLst/>
-          </a:prstGeom>
-          <a:noFill/>
-        </p:spPr>
-        <p:txBody>
-          <a:bodyPr wrap="square">
-            <a:spAutoFit/>
-          </a:bodyPr>
-          <a:lstStyle/>
-          <a:p>
-            <a:r>
-              <a:rPr sz="1400" b="0" i="0">
-                <a:solidFill>
-                  <a:srgbClr val="B8D8EE"/>
-                </a:solidFill>
-                <a:latin typeface="Calibri"/>
-              </a:rPr>
-              <a:t>Gratis · navegador o free tier · sin cuenta de pago</a:t>
-            </a:r>
-          </a:p>
-        </p:txBody>
-      </p:sp>
-      <p:sp>
-        <p:nvSpPr>
-          <p:cNvPr id="6" name="Rounded Rectangle 5"/>
+              <a:t>ADR-001 — las 6 secciones caben en una pagina</a:t>
+            </a:r>
+          </a:p>
+        </p:txBody>
+      </p:sp>
+      <p:sp>
+        <p:nvSpPr>
+          <p:cNvPr id="5" name="Rounded Rectangle 4"/>
           <p:cNvSpPr/>
           <p:nvPr/>
         </p:nvSpPr>
         <p:spPr>
           <a:xfrm>
-            <a:off x="457200" y="1591056"/>
-            <a:ext cx="3624986" cy="2331720"/>
+            <a:off x="457200" y="1261872"/>
+            <a:ext cx="11277295" cy="4773168"/>
           </a:xfrm>
           <a:prstGeom prst="roundRect">
             <a:avLst>
@@ -7426,7 +8721,7 @@
             </a:avLst>
           </a:prstGeom>
           <a:solidFill>
-            <a:srgbClr val="F2F2F2"/>
+            <a:srgbClr val="1E2A38"/>
           </a:solidFill>
           <a:ln>
             <a:noFill/>
@@ -7456,14 +8751,14 @@
       </p:sp>
       <p:sp>
         <p:nvSpPr>
-          <p:cNvPr id="7" name="Rectangle 6"/>
+          <p:cNvPr id="6" name="Rectangle 5"/>
           <p:cNvSpPr/>
           <p:nvPr/>
         </p:nvSpPr>
         <p:spPr>
           <a:xfrm>
-            <a:off x="457200" y="1591056"/>
-            <a:ext cx="3624986" cy="64008"/>
+            <a:off x="457200" y="1261872"/>
+            <a:ext cx="11277295" cy="320040"/>
           </a:xfrm>
           <a:prstGeom prst="rect">
             <a:avLst/>
@@ -7499,81 +8794,309 @@
       </p:sp>
       <p:sp>
         <p:nvSpPr>
-          <p:cNvPr id="8" name="Rectangle 7"/>
-          <p:cNvSpPr/>
-          <p:nvPr/>
-        </p:nvSpPr>
-        <p:spPr>
-          <a:xfrm>
-            <a:off x="457200" y="1655064"/>
-            <a:ext cx="3624986" cy="27432"/>
+          <p:cNvPr id="7" name="TextBox 6"/>
+          <p:cNvSpPr txBox="1"/>
+          <p:nvPr/>
+        </p:nvSpPr>
+        <p:spPr>
+          <a:xfrm>
+            <a:off x="685800" y="1307592"/>
+            <a:ext cx="10820095" cy="256032"/>
           </a:xfrm>
           <a:prstGeom prst="rect">
             <a:avLst/>
           </a:prstGeom>
-          <a:solidFill>
-            <a:srgbClr val="FFD000"/>
-          </a:solidFill>
-          <a:ln>
-            <a:noFill/>
-          </a:ln>
-        </p:spPr>
-        <p:style>
-          <a:lnRef idx="1">
-            <a:schemeClr val="accent1"/>
-          </a:lnRef>
-          <a:fillRef idx="3">
-            <a:schemeClr val="accent1"/>
-          </a:fillRef>
-          <a:effectRef idx="2">
-            <a:schemeClr val="accent1"/>
-          </a:effectRef>
-          <a:fontRef idx="minor">
-            <a:schemeClr val="lt1"/>
-          </a:fontRef>
-        </p:style>
-        <p:txBody>
-          <a:bodyPr rtlCol="0" anchor="ctr"/>
-          <a:lstStyle/>
-          <a:p>
-            <a:pPr algn="ctr"/>
-          </a:p>
-        </p:txBody>
-      </p:sp>
-      <p:pic>
-        <p:nvPicPr>
-          <p:cNvPr id="9" name="Picture 8" descr="google_docs.png"/>
-          <p:cNvPicPr>
-            <a:picLocks noChangeAspect="1"/>
-          </p:cNvPicPr>
-          <p:nvPr/>
-        </p:nvPicPr>
-        <p:blipFill>
-          <a:blip r:embed="rId2"/>
-          <a:stretch>
-            <a:fillRect/>
-          </a:stretch>
-        </p:blipFill>
-        <p:spPr>
-          <a:xfrm>
-            <a:off x="1643329" y="1847087"/>
-            <a:ext cx="1252728" cy="1252728"/>
+          <a:noFill/>
+        </p:spPr>
+        <p:txBody>
+          <a:bodyPr wrap="square" anchor="ctr"/>
+          <a:lstStyle/>
+          <a:p>
+            <a:r>
+              <a:rPr sz="1000" b="1" i="0">
+                <a:solidFill>
+                  <a:srgbClr val="269CCB"/>
+                </a:solidFill>
+                <a:latin typeface="Calibri"/>
+              </a:rPr>
+              <a:t>● ● ●</a:t>
+            </a:r>
+          </a:p>
+        </p:txBody>
+      </p:sp>
+      <p:sp>
+        <p:nvSpPr>
+          <p:cNvPr id="8" name="TextBox 7"/>
+          <p:cNvSpPr txBox="1"/>
+          <p:nvPr/>
+        </p:nvSpPr>
+        <p:spPr>
+          <a:xfrm>
+            <a:off x="777240" y="1719072"/>
+            <a:ext cx="10637215" cy="4133087"/>
           </a:xfrm>
           <a:prstGeom prst="rect">
             <a:avLst/>
           </a:prstGeom>
-        </p:spPr>
-      </p:pic>
-      <p:sp>
-        <p:nvSpPr>
-          <p:cNvPr id="10" name="TextBox 9"/>
+          <a:noFill/>
+        </p:spPr>
+        <p:txBody>
+          <a:bodyPr wrap="square">
+            <a:spAutoFit/>
+          </a:bodyPr>
+          <a:lstStyle/>
+          <a:p>
+            <a:pPr>
+              <a:spcAft>
+                <a:spcPts val="400"/>
+              </a:spcAft>
+            </a:pPr>
+            <a:r>
+              <a:rPr sz="1400" b="0" i="0">
+                <a:solidFill>
+                  <a:srgbClr val="FFFFFF"/>
+                </a:solidFill>
+                <a:latin typeface="Calibri"/>
+              </a:rPr>
+              <a:t>## 1. Titulo     ADR-001 Modelo de servicio dominante de CloudLite App</a:t>
+            </a:r>
+          </a:p>
+          <a:p>
+            <a:pPr>
+              <a:spcAft>
+                <a:spcPts val="400"/>
+              </a:spcAft>
+            </a:pPr>
+            <a:r>
+              <a:rPr sz="1400" b="0" i="0">
+                <a:solidFill>
+                  <a:srgbClr val="FFFFFF"/>
+                </a:solidFill>
+                <a:latin typeface="Calibri"/>
+              </a:rPr>
+              <a:t>## 2. Estado     Aceptado — &lt;fecha de hoy&gt;</a:t>
+            </a:r>
+          </a:p>
+          <a:p>
+            <a:pPr>
+              <a:spcAft>
+                <a:spcPts val="400"/>
+              </a:spcAft>
+            </a:pPr>
+            <a:r>
+              <a:rPr sz="1400" b="0" i="0">
+                <a:solidFill>
+                  <a:srgbClr val="FFFFFF"/>
+                </a:solidFill>
+                <a:latin typeface="Calibri"/>
+              </a:rPr>
+              <a:t/>
+            </a:r>
+          </a:p>
+          <a:p>
+            <a:pPr>
+              <a:spcAft>
+                <a:spcPts val="400"/>
+              </a:spcAft>
+            </a:pPr>
+            <a:r>
+              <a:rPr sz="1400" b="0" i="0">
+                <a:solidFill>
+                  <a:srgbClr val="FFFFFF"/>
+                </a:solidFill>
+                <a:latin typeface="Calibri"/>
+              </a:rPr>
+              <a:t>## 3. Contexto                    &lt;- restricciones, no resumen del tema</a:t>
+            </a:r>
+          </a:p>
+          <a:p>
+            <a:pPr>
+              <a:spcAft>
+                <a:spcPts val="400"/>
+              </a:spcAft>
+            </a:pPr>
+            <a:r>
+              <a:rPr sz="1400" b="0" i="0">
+                <a:solidFill>
+                  <a:srgbClr val="FFFFFF"/>
+                </a:solidFill>
+                <a:latin typeface="Calibri"/>
+              </a:rPr>
+              <a:t>Lo sostengo yo solo, 12 semanas, sin presupuesto cloud ni tarjeta; demo viva el dia de la sustentacion.</a:t>
+            </a:r>
+          </a:p>
+          <a:p>
+            <a:pPr>
+              <a:spcAft>
+                <a:spcPts val="400"/>
+              </a:spcAft>
+            </a:pPr>
+            <a:r>
+              <a:rPr sz="1400" b="0" i="0">
+                <a:solidFill>
+                  <a:srgbClr val="FFFFFF"/>
+                </a:solidFill>
+                <a:latin typeface="Calibri"/>
+              </a:rPr>
+              <a:t/>
+            </a:r>
+          </a:p>
+          <a:p>
+            <a:pPr>
+              <a:spcAft>
+                <a:spcPts val="400"/>
+              </a:spcAft>
+            </a:pPr>
+            <a:r>
+              <a:rPr sz="1400" b="0" i="0">
+                <a:solidFill>
+                  <a:srgbClr val="FFFFFF"/>
+                </a:solidFill>
+                <a:latin typeface="Calibri"/>
+              </a:rPr>
+              <a:t>## 4. Decision                    &lt;- UNA frase, UN modelo dominante</a:t>
+            </a:r>
+          </a:p>
+          <a:p>
+            <a:pPr>
+              <a:spcAft>
+                <a:spcPts val="400"/>
+              </a:spcAft>
+            </a:pPr>
+            <a:r>
+              <a:rPr sz="1400" b="0" i="0">
+                <a:solidFill>
+                  <a:srgbClr val="FFFFFF"/>
+                </a:solidFill>
+                <a:latin typeface="Calibri"/>
+              </a:rPr>
+              <a:t>La aplicacion de CloudLite se despliega sobre PaaS.</a:t>
+            </a:r>
+          </a:p>
+          <a:p>
+            <a:pPr>
+              <a:spcAft>
+                <a:spcPts val="400"/>
+              </a:spcAft>
+            </a:pPr>
+            <a:r>
+              <a:rPr sz="1400" b="0" i="0">
+                <a:solidFill>
+                  <a:srgbClr val="FFFFFF"/>
+                </a:solidFill>
+                <a:latin typeface="Calibri"/>
+              </a:rPr>
+              <a:t/>
+            </a:r>
+          </a:p>
+          <a:p>
+            <a:pPr>
+              <a:spcAft>
+                <a:spcPts val="400"/>
+              </a:spcAft>
+            </a:pPr>
+            <a:r>
+              <a:rPr sz="1400" b="0" i="0">
+                <a:solidFill>
+                  <a:srgbClr val="FFFFFF"/>
+                </a:solidFill>
+                <a:latin typeface="Calibri"/>
+              </a:rPr>
+              <a:t>## 5. Alternativas descartadas    &lt;- exactamente 2, con motivo del dominio</a:t>
+            </a:r>
+          </a:p>
+          <a:p>
+            <a:pPr>
+              <a:spcAft>
+                <a:spcPts val="400"/>
+              </a:spcAft>
+            </a:pPr>
+            <a:r>
+              <a:rPr sz="1400" b="0" i="0">
+                <a:solidFill>
+                  <a:srgbClr val="FFFFFF"/>
+                </a:solidFill>
+                <a:latin typeface="Calibri"/>
+              </a:rPr>
+              <a:t>- IaaS: control total, pero yo opero SO y parches -&gt; tiempo que no tengo.</a:t>
+            </a:r>
+          </a:p>
+          <a:p>
+            <a:pPr>
+              <a:spcAft>
+                <a:spcPts val="400"/>
+              </a:spcAft>
+            </a:pPr>
+            <a:r>
+              <a:rPr sz="1400" b="0" i="0">
+                <a:solidFill>
+                  <a:srgbClr val="FFFFFF"/>
+                </a:solidFill>
+                <a:latin typeface="Calibri"/>
+              </a:rPr>
+              <a:t>- SaaS como nucleo: no queda nada que arquitecturar; solo satelite (auth/email).</a:t>
+            </a:r>
+          </a:p>
+          <a:p>
+            <a:pPr>
+              <a:spcAft>
+                <a:spcPts val="400"/>
+              </a:spcAft>
+            </a:pPr>
+            <a:r>
+              <a:rPr sz="1400" b="0" i="0">
+                <a:solidFill>
+                  <a:srgbClr val="FFFFFF"/>
+                </a:solidFill>
+                <a:latin typeface="Calibri"/>
+              </a:rPr>
+              <a:t/>
+            </a:r>
+          </a:p>
+          <a:p>
+            <a:pPr>
+              <a:spcAft>
+                <a:spcPts val="400"/>
+              </a:spcAft>
+            </a:pPr>
+            <a:r>
+              <a:rPr sz="1400" b="0" i="0">
+                <a:solidFill>
+                  <a:srgbClr val="FFFFFF"/>
+                </a:solidFill>
+                <a:latin typeface="Calibri"/>
+              </a:rPr>
+              <a:t>## 6. Consecuencias               &lt;- pregunta 7: 3 ejes, cada uno con + y -</a:t>
+            </a:r>
+          </a:p>
+          <a:p>
+            <a:pPr>
+              <a:spcAft>
+                <a:spcPts val="400"/>
+              </a:spcAft>
+            </a:pPr>
+            <a:r>
+              <a:rPr sz="1400" b="0" i="0">
+                <a:solidFill>
+                  <a:srgbClr val="FFFFFF"/>
+                </a:solidFill>
+                <a:latin typeface="Calibri"/>
+              </a:rPr>
+              <a:t>Operacion + / -        Costo + / -        Aprendizaje + / -</a:t>
+            </a:r>
+          </a:p>
+        </p:txBody>
+      </p:sp>
+      <p:sp>
+        <p:nvSpPr>
+          <p:cNvPr id="9" name="TextBox 8"/>
           <p:cNvSpPr txBox="1"/>
           <p:nvPr/>
         </p:nvSpPr>
         <p:spPr>
           <a:xfrm>
-            <a:off x="530352" y="3191256"/>
-            <a:ext cx="3478682" cy="621792"/>
+            <a:off x="457200" y="6080760"/>
+            <a:ext cx="11277295" cy="320040"/>
           </a:xfrm>
           <a:prstGeom prst="rect">
             <a:avLst/>
@@ -7581,449 +9104,27 @@
           <a:noFill/>
         </p:spPr>
         <p:txBody>
-          <a:bodyPr wrap="square" anchor="t"/>
+          <a:bodyPr wrap="square">
+            <a:spAutoFit/>
+          </a:bodyPr>
           <a:lstStyle/>
           <a:p>
             <a:pPr algn="ctr"/>
             <a:r>
-              <a:rPr sz="1300" b="1" i="0">
-                <a:solidFill>
-                  <a:srgbClr val="095292"/>
-                </a:solidFill>
-                <a:latin typeface="Calibri"/>
-              </a:rPr>
-              <a:t>Google Docs</a:t>
-            </a:r>
-          </a:p>
-          <a:p>
-            <a:pPr algn="ctr">
-              <a:spcBef>
-                <a:spcPts val="200"/>
-              </a:spcBef>
-            </a:pPr>
-            <a:r>
-              <a:rPr sz="1000" b="0" i="0">
+              <a:rPr sz="1200" b="0" i="1">
                 <a:solidFill>
                   <a:srgbClr val="666666"/>
                 </a:solidFill>
                 <a:latin typeface="Calibri"/>
               </a:rPr>
-              <a:t>ADR-001</a:t>
-            </a:r>
-          </a:p>
-        </p:txBody>
-      </p:sp>
-      <p:sp>
-        <p:nvSpPr>
-          <p:cNvPr id="11" name="Rounded Rectangle 10"/>
-          <p:cNvSpPr/>
-          <p:nvPr/>
-        </p:nvSpPr>
-        <p:spPr>
-          <a:xfrm>
-            <a:off x="4283354" y="1591056"/>
-            <a:ext cx="3624986" cy="2331720"/>
-          </a:xfrm>
-          <a:prstGeom prst="roundRect">
-            <a:avLst>
-              <a:gd name="adj" fmla="val 12000"/>
-            </a:avLst>
-          </a:prstGeom>
-          <a:solidFill>
-            <a:srgbClr val="F2F2F2"/>
-          </a:solidFill>
-          <a:ln>
-            <a:noFill/>
-          </a:ln>
-        </p:spPr>
-        <p:style>
-          <a:lnRef idx="1">
-            <a:schemeClr val="accent1"/>
-          </a:lnRef>
-          <a:fillRef idx="3">
-            <a:schemeClr val="accent1"/>
-          </a:fillRef>
-          <a:effectRef idx="2">
-            <a:schemeClr val="accent1"/>
-          </a:effectRef>
-          <a:fontRef idx="minor">
-            <a:schemeClr val="lt1"/>
-          </a:fontRef>
-        </p:style>
-        <p:txBody>
-          <a:bodyPr rtlCol="0" anchor="ctr"/>
-          <a:lstStyle/>
-          <a:p>
-            <a:pPr algn="ctr"/>
-          </a:p>
-        </p:txBody>
-      </p:sp>
-      <p:sp>
-        <p:nvSpPr>
-          <p:cNvPr id="12" name="Rectangle 11"/>
-          <p:cNvSpPr/>
-          <p:nvPr/>
-        </p:nvSpPr>
-        <p:spPr>
-          <a:xfrm>
-            <a:off x="4283354" y="1591056"/>
-            <a:ext cx="3624986" cy="64008"/>
-          </a:xfrm>
-          <a:prstGeom prst="rect">
-            <a:avLst/>
-          </a:prstGeom>
-          <a:solidFill>
-            <a:srgbClr val="095292"/>
-          </a:solidFill>
-          <a:ln>
-            <a:noFill/>
-          </a:ln>
-        </p:spPr>
-        <p:style>
-          <a:lnRef idx="1">
-            <a:schemeClr val="accent1"/>
-          </a:lnRef>
-          <a:fillRef idx="3">
-            <a:schemeClr val="accent1"/>
-          </a:fillRef>
-          <a:effectRef idx="2">
-            <a:schemeClr val="accent1"/>
-          </a:effectRef>
-          <a:fontRef idx="minor">
-            <a:schemeClr val="lt1"/>
-          </a:fontRef>
-        </p:style>
-        <p:txBody>
-          <a:bodyPr rtlCol="0" anchor="ctr"/>
-          <a:lstStyle/>
-          <a:p>
-            <a:pPr algn="ctr"/>
-          </a:p>
-        </p:txBody>
-      </p:sp>
-      <p:sp>
-        <p:nvSpPr>
-          <p:cNvPr id="13" name="Rectangle 12"/>
-          <p:cNvSpPr/>
-          <p:nvPr/>
-        </p:nvSpPr>
-        <p:spPr>
-          <a:xfrm>
-            <a:off x="4283354" y="1655064"/>
-            <a:ext cx="3624986" cy="27432"/>
-          </a:xfrm>
-          <a:prstGeom prst="rect">
-            <a:avLst/>
-          </a:prstGeom>
-          <a:solidFill>
-            <a:srgbClr val="FFD000"/>
-          </a:solidFill>
-          <a:ln>
-            <a:noFill/>
-          </a:ln>
-        </p:spPr>
-        <p:style>
-          <a:lnRef idx="1">
-            <a:schemeClr val="accent1"/>
-          </a:lnRef>
-          <a:fillRef idx="3">
-            <a:schemeClr val="accent1"/>
-          </a:fillRef>
-          <a:effectRef idx="2">
-            <a:schemeClr val="accent1"/>
-          </a:effectRef>
-          <a:fontRef idx="minor">
-            <a:schemeClr val="lt1"/>
-          </a:fontRef>
-        </p:style>
-        <p:txBody>
-          <a:bodyPr rtlCol="0" anchor="ctr"/>
-          <a:lstStyle/>
-          <a:p>
-            <a:pPr algn="ctr"/>
-          </a:p>
-        </p:txBody>
-      </p:sp>
-      <p:pic>
-        <p:nvPicPr>
-          <p:cNvPr id="14" name="Picture 13" descr="drawio.png"/>
-          <p:cNvPicPr>
-            <a:picLocks noChangeAspect="1"/>
-          </p:cNvPicPr>
-          <p:nvPr/>
-        </p:nvPicPr>
-        <p:blipFill>
-          <a:blip r:embed="rId3"/>
-          <a:stretch>
-            <a:fillRect/>
-          </a:stretch>
-        </p:blipFill>
-        <p:spPr>
-          <a:xfrm>
-            <a:off x="5469483" y="1847087"/>
-            <a:ext cx="1252728" cy="1252728"/>
-          </a:xfrm>
-          <a:prstGeom prst="rect">
-            <a:avLst/>
-          </a:prstGeom>
-        </p:spPr>
-      </p:pic>
-      <p:sp>
-        <p:nvSpPr>
-          <p:cNvPr id="15" name="TextBox 14"/>
-          <p:cNvSpPr txBox="1"/>
-          <p:nvPr/>
-        </p:nvSpPr>
-        <p:spPr>
-          <a:xfrm>
-            <a:off x="4356506" y="3191256"/>
-            <a:ext cx="3478682" cy="621792"/>
-          </a:xfrm>
-          <a:prstGeom prst="rect">
-            <a:avLst/>
-          </a:prstGeom>
-          <a:noFill/>
-        </p:spPr>
-        <p:txBody>
-          <a:bodyPr wrap="square" anchor="t"/>
-          <a:lstStyle/>
-          <a:p>
-            <a:pPr algn="ctr"/>
-            <a:r>
-              <a:rPr sz="1300" b="1" i="0">
-                <a:solidFill>
-                  <a:srgbClr val="095292"/>
-                </a:solidFill>
-                <a:latin typeface="Calibri"/>
-              </a:rPr>
-              <a:t>draw.io</a:t>
-            </a:r>
-          </a:p>
-          <a:p>
-            <a:pPr algn="ctr">
-              <a:spcBef>
-                <a:spcPts val="200"/>
-              </a:spcBef>
-            </a:pPr>
-            <a:r>
-              <a:rPr sz="1000" b="0" i="0">
-                <a:solidFill>
-                  <a:srgbClr val="666666"/>
-                </a:solidFill>
-                <a:latin typeface="Calibri"/>
-              </a:rPr>
-              <a:t>Matriz de modelos</a:t>
-            </a:r>
-          </a:p>
-        </p:txBody>
-      </p:sp>
-      <p:sp>
-        <p:nvSpPr>
-          <p:cNvPr id="16" name="Rounded Rectangle 15"/>
-          <p:cNvSpPr/>
-          <p:nvPr/>
-        </p:nvSpPr>
-        <p:spPr>
-          <a:xfrm>
-            <a:off x="8109508" y="1591056"/>
-            <a:ext cx="3624986" cy="2331720"/>
-          </a:xfrm>
-          <a:prstGeom prst="roundRect">
-            <a:avLst>
-              <a:gd name="adj" fmla="val 12000"/>
-            </a:avLst>
-          </a:prstGeom>
-          <a:solidFill>
-            <a:srgbClr val="F2F2F2"/>
-          </a:solidFill>
-          <a:ln>
-            <a:noFill/>
-          </a:ln>
-        </p:spPr>
-        <p:style>
-          <a:lnRef idx="1">
-            <a:schemeClr val="accent1"/>
-          </a:lnRef>
-          <a:fillRef idx="3">
-            <a:schemeClr val="accent1"/>
-          </a:fillRef>
-          <a:effectRef idx="2">
-            <a:schemeClr val="accent1"/>
-          </a:effectRef>
-          <a:fontRef idx="minor">
-            <a:schemeClr val="lt1"/>
-          </a:fontRef>
-        </p:style>
-        <p:txBody>
-          <a:bodyPr rtlCol="0" anchor="ctr"/>
-          <a:lstStyle/>
-          <a:p>
-            <a:pPr algn="ctr"/>
-          </a:p>
-        </p:txBody>
-      </p:sp>
-      <p:sp>
-        <p:nvSpPr>
-          <p:cNvPr id="17" name="Rectangle 16"/>
-          <p:cNvSpPr/>
-          <p:nvPr/>
-        </p:nvSpPr>
-        <p:spPr>
-          <a:xfrm>
-            <a:off x="8109508" y="1591056"/>
-            <a:ext cx="3624986" cy="64008"/>
-          </a:xfrm>
-          <a:prstGeom prst="rect">
-            <a:avLst/>
-          </a:prstGeom>
-          <a:solidFill>
-            <a:srgbClr val="095292"/>
-          </a:solidFill>
-          <a:ln>
-            <a:noFill/>
-          </a:ln>
-        </p:spPr>
-        <p:style>
-          <a:lnRef idx="1">
-            <a:schemeClr val="accent1"/>
-          </a:lnRef>
-          <a:fillRef idx="3">
-            <a:schemeClr val="accent1"/>
-          </a:fillRef>
-          <a:effectRef idx="2">
-            <a:schemeClr val="accent1"/>
-          </a:effectRef>
-          <a:fontRef idx="minor">
-            <a:schemeClr val="lt1"/>
-          </a:fontRef>
-        </p:style>
-        <p:txBody>
-          <a:bodyPr rtlCol="0" anchor="ctr"/>
-          <a:lstStyle/>
-          <a:p>
-            <a:pPr algn="ctr"/>
-          </a:p>
-        </p:txBody>
-      </p:sp>
-      <p:sp>
-        <p:nvSpPr>
-          <p:cNvPr id="18" name="Rectangle 17"/>
-          <p:cNvSpPr/>
-          <p:nvPr/>
-        </p:nvSpPr>
-        <p:spPr>
-          <a:xfrm>
-            <a:off x="8109508" y="1655064"/>
-            <a:ext cx="3624986" cy="27432"/>
-          </a:xfrm>
-          <a:prstGeom prst="rect">
-            <a:avLst/>
-          </a:prstGeom>
-          <a:solidFill>
-            <a:srgbClr val="FFD000"/>
-          </a:solidFill>
-          <a:ln>
-            <a:noFill/>
-          </a:ln>
-        </p:spPr>
-        <p:style>
-          <a:lnRef idx="1">
-            <a:schemeClr val="accent1"/>
-          </a:lnRef>
-          <a:fillRef idx="3">
-            <a:schemeClr val="accent1"/>
-          </a:fillRef>
-          <a:effectRef idx="2">
-            <a:schemeClr val="accent1"/>
-          </a:effectRef>
-          <a:fontRef idx="minor">
-            <a:schemeClr val="lt1"/>
-          </a:fontRef>
-        </p:style>
-        <p:txBody>
-          <a:bodyPr rtlCol="0" anchor="ctr"/>
-          <a:lstStyle/>
-          <a:p>
-            <a:pPr algn="ctr"/>
-          </a:p>
-        </p:txBody>
-      </p:sp>
-      <p:pic>
-        <p:nvPicPr>
-          <p:cNvPr id="19" name="Picture 18" descr="examlab.png"/>
-          <p:cNvPicPr>
-            <a:picLocks noChangeAspect="1"/>
-          </p:cNvPicPr>
-          <p:nvPr/>
-        </p:nvPicPr>
-        <p:blipFill>
-          <a:blip r:embed="rId4"/>
-          <a:stretch>
-            <a:fillRect/>
-          </a:stretch>
-        </p:blipFill>
-        <p:spPr>
-          <a:xfrm>
-            <a:off x="9295638" y="1847087"/>
-            <a:ext cx="1252728" cy="1252728"/>
-          </a:xfrm>
-          <a:prstGeom prst="rect">
-            <a:avLst/>
-          </a:prstGeom>
-        </p:spPr>
-      </p:pic>
-      <p:sp>
-        <p:nvSpPr>
-          <p:cNvPr id="20" name="TextBox 19"/>
-          <p:cNvSpPr txBox="1"/>
-          <p:nvPr/>
-        </p:nvSpPr>
-        <p:spPr>
-          <a:xfrm>
-            <a:off x="8182660" y="3191256"/>
-            <a:ext cx="3478682" cy="621792"/>
-          </a:xfrm>
-          <a:prstGeom prst="rect">
-            <a:avLst/>
-          </a:prstGeom>
-          <a:noFill/>
-        </p:spPr>
-        <p:txBody>
-          <a:bodyPr wrap="square" anchor="t"/>
-          <a:lstStyle/>
-          <a:p>
-            <a:pPr algn="ctr"/>
-            <a:r>
-              <a:rPr sz="1300" b="1" i="0">
-                <a:solidFill>
-                  <a:srgbClr val="095292"/>
-                </a:solidFill>
-                <a:latin typeface="Calibri"/>
-              </a:rPr>
-              <a:t>la plataforma del curso</a:t>
-            </a:r>
-          </a:p>
-          <a:p>
-            <a:pPr algn="ctr">
-              <a:spcBef>
-                <a:spcPts val="200"/>
-              </a:spcBef>
-            </a:pPr>
-            <a:r>
-              <a:rPr sz="1000" b="0" i="0">
-                <a:solidFill>
-                  <a:srgbClr val="666666"/>
-                </a:solidFill>
-                <a:latin typeface="Calibri"/>
-              </a:rPr>
-              <a:t>Donde se entrega</a:t>
-            </a:r>
-          </a:p>
-        </p:txBody>
-      </p:sp>
-      <p:sp>
-        <p:nvSpPr>
-          <p:cNvPr id="21" name="TextBox 20"/>
+              <a:t>Sin Titulo y Estado con fecha no hay ADR que citar en la Clase 15: son 1.5 puntos de la pregunta 6.</a:t>
+            </a:r>
+          </a:p>
+        </p:txBody>
+      </p:sp>
+      <p:sp>
+        <p:nvSpPr>
+          <p:cNvPr id="10" name="TextBox 9"/>
           <p:cNvSpPr txBox="1"/>
           <p:nvPr/>
         </p:nvSpPr>

--- a/Arquitectura de Sistemas Computacionales/Clases/Clase 2 - Modelos de servicio IaaS PaaS SaaS/Presentacion.pptx
+++ b/Arquitectura de Sistemas Computacionales/Clases/Clase 2 - Modelos de servicio IaaS PaaS SaaS/Presentacion.pptx
@@ -18,6 +18,7 @@
     <p:sldId id="266" r:id="rId17"/>
     <p:sldId id="267" r:id="rId18"/>
     <p:sldId id="268" r:id="rId19"/>
+    <p:sldId id="269" r:id="rId20"/>
   </p:sldIdLst>
   <p:sldSz cx="12191695" cy="6858000" type="screen4x3"/>
   <p:notesSz cx="6858000" cy="9144000"/>
@@ -4403,7 +4404,7 @@
                 </a:solidFill>
                 <a:latin typeface="Calibri"/>
               </a:rPr>
-              <a:t>Taller PI (paso a paso)</a:t>
+              <a:t>PI CloudLite — entregable de hoy</a:t>
             </a:r>
           </a:p>
         </p:txBody>
@@ -4436,13 +4437,22 @@
               </a:spcAft>
             </a:pPr>
             <a:r>
+              <a:rPr sz="2000" b="0" i="0">
+                <a:solidFill>
+                  <a:srgbClr val="333333"/>
+                </a:solidFill>
+                <a:latin typeface="Calibri"/>
+              </a:rPr>
+              <a:t>–   </a:t>
+            </a:r>
+            <a:r>
               <a:rPr sz="2000" b="1" i="0">
                 <a:solidFill>
                   <a:srgbClr val="333333"/>
                 </a:solidFill>
                 <a:latin typeface="Calibri"/>
               </a:rPr>
-              <a:t>1.</a:t>
+              <a:t>Entregable:</a:t>
             </a:r>
             <a:r>
               <a:rPr sz="2000" b="0" i="0">
@@ -4451,7 +4461,7 @@
                 </a:solidFill>
                 <a:latin typeface="Calibri"/>
               </a:rPr>
-              <a:t> Paso 1: relea su ficha y su C4 Context de la Clase 1. No cambie de dominio: las preguntas 5 a 7 se califican sobre el mismo sistema, y el ADR que redacte hoy se reutiliza en el informe del PI y en la sustentacion de la Clase 15.</a:t>
+              <a:t> ADR-001: decisión de modelo de servicio + matriz de comparación aplicada al dominio</a:t>
             </a:r>
           </a:p>
           <a:p>
@@ -4467,7 +4477,7 @@
                 </a:solidFill>
                 <a:latin typeface="Calibri"/>
               </a:rPr>
-              <a:t>–   </a:t>
+              <a:t>–   Herramienta: </a:t>
             </a:r>
             <a:r>
               <a:rPr sz="2000" b="1" i="0">
@@ -4476,16 +4486,7 @@
                 </a:solidFill>
                 <a:latin typeface="Calibri"/>
               </a:rPr>
-              <a:t>2.</a:t>
-            </a:r>
-            <a:r>
-              <a:rPr sz="2000" b="0" i="0">
-                <a:solidFill>
-                  <a:srgbClr val="333333"/>
-                </a:solidFill>
-                <a:latin typeface="Calibri"/>
-              </a:rPr>
-              <a:t> Paso 2: construya en la pregunta 5 la matriz «Criterio | IaaS | PaaS | SaaS» con las cuatro filas en orden (control, costo cualitativo, operacion, time-to-demo) y maximo 2 lineas por celda; verifique que cada celda nombre una capacidad o una restriccion de SU dominio, y que la fila de operacion no afirme que en PaaS o SaaS usted deja de responder por su propia aplicacion.</a:t>
+              <a:t>Google Docs · draw.io (opcional)</a:t>
             </a:r>
           </a:p>
           <a:p>
@@ -4501,7 +4502,7 @@
                 </a:solidFill>
                 <a:latin typeface="Calibri"/>
               </a:rPr>
-              <a:t>–   </a:t>
+              <a:t>–   Todo lo que construyan hoy entra al </a:t>
             </a:r>
             <a:r>
               <a:rPr sz="2000" b="1" i="0">
@@ -4510,7 +4511,7 @@
                 </a:solidFill>
                 <a:latin typeface="Calibri"/>
               </a:rPr>
-              <a:t>3.</a:t>
+              <a:t>informe/repo del PI</a:t>
             </a:r>
             <a:r>
               <a:rPr sz="2000" b="0" i="0">
@@ -4519,7 +4520,7 @@
                 </a:solidFill>
                 <a:latin typeface="Calibri"/>
               </a:rPr>
-              <a:t> Paso 3: redacte en la pregunta 6 el ADR-001 con las cinco secciones rotuladas —titulo, estado con fecha, contexto con sus restricciones reales, la decision en UNA sola frase con UN modelo dominante, y exactamente 2 alternativas descartadas con el motivo atado a su dominio—; verifique que la seccion de decision no nombre dos modelos, porque en ese caso vale cero.</a:t>
+              <a:t> (no es lab suelto).</a:t>
             </a:r>
           </a:p>
           <a:p>
@@ -4535,25 +4536,7 @@
                 </a:solidFill>
                 <a:latin typeface="Calibri"/>
               </a:rPr>
-              <a:t>–   </a:t>
-            </a:r>
-            <a:r>
-              <a:rPr sz="2000" b="1" i="0">
-                <a:solidFill>
-                  <a:srgbClr val="333333"/>
-                </a:solidFill>
-                <a:latin typeface="Calibri"/>
-              </a:rPr>
-              <a:t>4.</a:t>
-            </a:r>
-            <a:r>
-              <a:rPr sz="2000" b="0" i="0">
-                <a:solidFill>
-                  <a:srgbClr val="333333"/>
-                </a:solidFill>
-                <a:latin typeface="Calibri"/>
-              </a:rPr>
-              <a:t> Paso 4: escriba en la pregunta 7 la seccion 6 del mismo ADR, las consecuencias en los tres ejes (operacion, costo y aprendizaje), con al menos una positiva y una negativa por eje marcadas con + y -, y verifique que al menos una negativa hable de amarre al proveedor o de perdida de control; guarde y continue, que la actividad se entrega completa al cierre del corte.</a:t>
+              <a:t>–   Individual por defecto · el docente puede autorizar equipos de 2–3; la entrega en la plataforma del curso siempre es individual.</a:t>
             </a:r>
           </a:p>
         </p:txBody>
@@ -4734,109 +4717,21 @@
                 </a:solidFill>
                 <a:latin typeface="Calibri"/>
               </a:rPr>
-              <a:t>Para continuar (PI)</a:t>
-            </a:r>
-          </a:p>
-        </p:txBody>
-      </p:sp>
-      <p:sp>
-        <p:nvSpPr>
-          <p:cNvPr id="5" name="Rounded Rectangle 4"/>
-          <p:cNvSpPr/>
-          <p:nvPr/>
-        </p:nvSpPr>
-        <p:spPr>
-          <a:xfrm>
-            <a:off x="457200" y="1261872"/>
-            <a:ext cx="11277295" cy="1051560"/>
-          </a:xfrm>
-          <a:prstGeom prst="roundRect">
-            <a:avLst>
-              <a:gd name="adj" fmla="val 12000"/>
-            </a:avLst>
-          </a:prstGeom>
-          <a:solidFill>
-            <a:srgbClr val="E8F4FA"/>
-          </a:solidFill>
-          <a:ln>
-            <a:noFill/>
-          </a:ln>
-        </p:spPr>
-        <p:style>
-          <a:lnRef idx="1">
-            <a:schemeClr val="accent1"/>
-          </a:lnRef>
-          <a:fillRef idx="3">
-            <a:schemeClr val="accent1"/>
-          </a:fillRef>
-          <a:effectRef idx="2">
-            <a:schemeClr val="accent1"/>
-          </a:effectRef>
-          <a:fontRef idx="minor">
-            <a:schemeClr val="lt1"/>
-          </a:fontRef>
-        </p:style>
-        <p:txBody>
-          <a:bodyPr rtlCol="0" anchor="ctr"/>
-          <a:lstStyle/>
-          <a:p>
-            <a:pPr algn="ctr"/>
-          </a:p>
-        </p:txBody>
-      </p:sp>
-      <p:sp>
-        <p:nvSpPr>
-          <p:cNvPr id="6" name="Rectangle 5"/>
-          <p:cNvSpPr/>
-          <p:nvPr/>
-        </p:nvSpPr>
-        <p:spPr>
-          <a:xfrm>
-            <a:off x="457200" y="1261872"/>
-            <a:ext cx="128016" cy="1051560"/>
-          </a:xfrm>
-          <a:prstGeom prst="rect">
-            <a:avLst/>
-          </a:prstGeom>
-          <a:solidFill>
-            <a:srgbClr val="269CCB"/>
-          </a:solidFill>
-          <a:ln>
-            <a:noFill/>
-          </a:ln>
-        </p:spPr>
-        <p:style>
-          <a:lnRef idx="1">
-            <a:schemeClr val="accent1"/>
-          </a:lnRef>
-          <a:fillRef idx="3">
-            <a:schemeClr val="accent1"/>
-          </a:fillRef>
-          <a:effectRef idx="2">
-            <a:schemeClr val="accent1"/>
-          </a:effectRef>
-          <a:fontRef idx="minor">
-            <a:schemeClr val="lt1"/>
-          </a:fontRef>
-        </p:style>
-        <p:txBody>
-          <a:bodyPr rtlCol="0" anchor="ctr"/>
-          <a:lstStyle/>
-          <a:p>
-            <a:pPr algn="ctr"/>
-          </a:p>
-        </p:txBody>
-      </p:sp>
-      <p:sp>
-        <p:nvSpPr>
-          <p:cNvPr id="7" name="TextBox 6"/>
+              <a:t>Manos a la obra (paso a paso)</a:t>
+            </a:r>
+          </a:p>
+        </p:txBody>
+      </p:sp>
+      <p:sp>
+        <p:nvSpPr>
+          <p:cNvPr id="5" name="TextBox 4"/>
           <p:cNvSpPr txBox="1"/>
           <p:nvPr/>
         </p:nvSpPr>
         <p:spPr>
           <a:xfrm>
-            <a:off x="777240" y="1399031"/>
-            <a:ext cx="10774375" cy="822959"/>
+            <a:off x="457200" y="1170432"/>
+            <a:ext cx="11277295" cy="5230368"/>
           </a:xfrm>
           <a:prstGeom prst="rect">
             <a:avLst/>
@@ -4849,313 +4744,137 @@
           </a:bodyPr>
           <a:lstStyle/>
           <a:p>
-            <a:r>
-              <a:rPr sz="1200" b="1" i="0">
-                <a:solidFill>
-                  <a:srgbClr val="269CCB"/>
-                </a:solidFill>
-                <a:latin typeface="Calibri"/>
-              </a:rPr>
-              <a:t>Info</a:t>
-            </a:r>
-          </a:p>
-          <a:p>
             <a:pPr>
-              <a:spcBef>
-                <a:spcPts val="400"/>
-              </a:spcBef>
+              <a:spcAft>
+                <a:spcPts val="800"/>
+              </a:spcAft>
             </a:pPr>
             <a:r>
-              <a:rPr sz="1400" b="0" i="0">
-                <a:solidFill>
-                  <a:srgbClr val="333333"/>
-                </a:solidFill>
-                <a:latin typeface="Calibri"/>
-              </a:rPr>
-              <a:t>Entregable: ADR-001: decisión de modelo de servicio + matriz de comparación aplicada al dominio</a:t>
-            </a:r>
-          </a:p>
-        </p:txBody>
-      </p:sp>
-      <p:sp>
-        <p:nvSpPr>
-          <p:cNvPr id="8" name="Rounded Rectangle 7"/>
-          <p:cNvSpPr/>
-          <p:nvPr/>
-        </p:nvSpPr>
-        <p:spPr>
-          <a:xfrm>
-            <a:off x="457200" y="2478024"/>
-            <a:ext cx="11277295" cy="1051560"/>
-          </a:xfrm>
-          <a:prstGeom prst="roundRect">
-            <a:avLst>
-              <a:gd name="adj" fmla="val 12000"/>
-            </a:avLst>
-          </a:prstGeom>
-          <a:solidFill>
-            <a:srgbClr val="FFF8E1"/>
-          </a:solidFill>
-          <a:ln>
-            <a:noFill/>
-          </a:ln>
-        </p:spPr>
-        <p:style>
-          <a:lnRef idx="1">
-            <a:schemeClr val="accent1"/>
-          </a:lnRef>
-          <a:fillRef idx="3">
-            <a:schemeClr val="accent1"/>
-          </a:fillRef>
-          <a:effectRef idx="2">
-            <a:schemeClr val="accent1"/>
-          </a:effectRef>
-          <a:fontRef idx="minor">
-            <a:schemeClr val="lt1"/>
-          </a:fontRef>
-        </p:style>
-        <p:txBody>
-          <a:bodyPr rtlCol="0" anchor="ctr"/>
-          <a:lstStyle/>
-          <a:p>
-            <a:pPr algn="ctr"/>
-          </a:p>
-        </p:txBody>
-      </p:sp>
-      <p:sp>
-        <p:nvSpPr>
-          <p:cNvPr id="9" name="Rectangle 8"/>
-          <p:cNvSpPr/>
-          <p:nvPr/>
-        </p:nvSpPr>
-        <p:spPr>
-          <a:xfrm>
-            <a:off x="457200" y="2478024"/>
-            <a:ext cx="128016" cy="1051560"/>
-          </a:xfrm>
-          <a:prstGeom prst="rect">
-            <a:avLst/>
-          </a:prstGeom>
-          <a:solidFill>
-            <a:srgbClr val="FFD000"/>
-          </a:solidFill>
-          <a:ln>
-            <a:noFill/>
-          </a:ln>
-        </p:spPr>
-        <p:style>
-          <a:lnRef idx="1">
-            <a:schemeClr val="accent1"/>
-          </a:lnRef>
-          <a:fillRef idx="3">
-            <a:schemeClr val="accent1"/>
-          </a:fillRef>
-          <a:effectRef idx="2">
-            <a:schemeClr val="accent1"/>
-          </a:effectRef>
-          <a:fontRef idx="minor">
-            <a:schemeClr val="lt1"/>
-          </a:fontRef>
-        </p:style>
-        <p:txBody>
-          <a:bodyPr rtlCol="0" anchor="ctr"/>
-          <a:lstStyle/>
-          <a:p>
-            <a:pPr algn="ctr"/>
-          </a:p>
-        </p:txBody>
-      </p:sp>
-      <p:sp>
-        <p:nvSpPr>
-          <p:cNvPr id="10" name="TextBox 9"/>
-          <p:cNvSpPr txBox="1"/>
-          <p:nvPr/>
-        </p:nvSpPr>
-        <p:spPr>
-          <a:xfrm>
-            <a:off x="777240" y="2615184"/>
-            <a:ext cx="10774375" cy="822959"/>
-          </a:xfrm>
-          <a:prstGeom prst="rect">
-            <a:avLst/>
-          </a:prstGeom>
-          <a:noFill/>
-        </p:spPr>
-        <p:txBody>
-          <a:bodyPr wrap="square">
-            <a:spAutoFit/>
-          </a:bodyPr>
-          <a:lstStyle/>
-          <a:p>
-            <a:r>
-              <a:rPr sz="1200" b="1" i="0">
-                <a:solidFill>
-                  <a:srgbClr val="FFD000"/>
-                </a:solidFill>
-                <a:latin typeface="Calibri"/>
-              </a:rPr>
-              <a:t>Aclaración</a:t>
+              <a:rPr sz="2000" b="1" i="0">
+                <a:solidFill>
+                  <a:srgbClr val="333333"/>
+                </a:solidFill>
+                <a:latin typeface="Calibri"/>
+              </a:rPr>
+              <a:t>1.</a:t>
+            </a:r>
+            <a:r>
+              <a:rPr sz="2000" b="0" i="0">
+                <a:solidFill>
+                  <a:srgbClr val="333333"/>
+                </a:solidFill>
+                <a:latin typeface="Calibri"/>
+              </a:rPr>
+              <a:t> Paso 1: relea su ficha y su C4 Context de la Clase 1. No cambie de dominio: las preguntas 5 a 7 se califican sobre el mismo sistema, y el ADR que redacte hoy se reutiliza en el informe del PI y en la sustentacion de la Clase 15.</a:t>
             </a:r>
           </a:p>
           <a:p>
             <a:pPr>
-              <a:spcBef>
-                <a:spcPts val="400"/>
-              </a:spcBef>
+              <a:spcAft>
+                <a:spcPts val="800"/>
+              </a:spcAft>
             </a:pPr>
             <a:r>
-              <a:rPr sz="1400" b="0" i="0">
-                <a:solidFill>
-                  <a:srgbClr val="333333"/>
-                </a:solidFill>
-                <a:latin typeface="Calibri"/>
-              </a:rPr>
-              <a:t>Subir evidencias al paquete CloudLite (Drive/repo) y a la plataforma del curso en la fecha que indique el docente.</a:t>
-            </a:r>
-          </a:p>
-        </p:txBody>
-      </p:sp>
-      <p:sp>
-        <p:nvSpPr>
-          <p:cNvPr id="11" name="Rounded Rectangle 10"/>
-          <p:cNvSpPr/>
-          <p:nvPr/>
-        </p:nvSpPr>
-        <p:spPr>
-          <a:xfrm>
-            <a:off x="457200" y="3694176"/>
-            <a:ext cx="11277295" cy="1051560"/>
-          </a:xfrm>
-          <a:prstGeom prst="roundRect">
-            <a:avLst>
-              <a:gd name="adj" fmla="val 12000"/>
-            </a:avLst>
-          </a:prstGeom>
-          <a:solidFill>
-            <a:srgbClr val="FBE4E4"/>
-          </a:solidFill>
-          <a:ln>
-            <a:noFill/>
-          </a:ln>
-        </p:spPr>
-        <p:style>
-          <a:lnRef idx="1">
-            <a:schemeClr val="accent1"/>
-          </a:lnRef>
-          <a:fillRef idx="3">
-            <a:schemeClr val="accent1"/>
-          </a:fillRef>
-          <a:effectRef idx="2">
-            <a:schemeClr val="accent1"/>
-          </a:effectRef>
-          <a:fontRef idx="minor">
-            <a:schemeClr val="lt1"/>
-          </a:fontRef>
-        </p:style>
-        <p:txBody>
-          <a:bodyPr rtlCol="0" anchor="ctr"/>
-          <a:lstStyle/>
-          <a:p>
-            <a:pPr algn="ctr"/>
-          </a:p>
-        </p:txBody>
-      </p:sp>
-      <p:sp>
-        <p:nvSpPr>
-          <p:cNvPr id="12" name="Rectangle 11"/>
-          <p:cNvSpPr/>
-          <p:nvPr/>
-        </p:nvSpPr>
-        <p:spPr>
-          <a:xfrm>
-            <a:off x="457200" y="3694176"/>
-            <a:ext cx="128016" cy="1051560"/>
-          </a:xfrm>
-          <a:prstGeom prst="rect">
-            <a:avLst/>
-          </a:prstGeom>
-          <a:solidFill>
-            <a:srgbClr val="A02030"/>
-          </a:solidFill>
-          <a:ln>
-            <a:noFill/>
-          </a:ln>
-        </p:spPr>
-        <p:style>
-          <a:lnRef idx="1">
-            <a:schemeClr val="accent1"/>
-          </a:lnRef>
-          <a:fillRef idx="3">
-            <a:schemeClr val="accent1"/>
-          </a:fillRef>
-          <a:effectRef idx="2">
-            <a:schemeClr val="accent1"/>
-          </a:effectRef>
-          <a:fontRef idx="minor">
-            <a:schemeClr val="lt1"/>
-          </a:fontRef>
-        </p:style>
-        <p:txBody>
-          <a:bodyPr rtlCol="0" anchor="ctr"/>
-          <a:lstStyle/>
-          <a:p>
-            <a:pPr algn="ctr"/>
-          </a:p>
-        </p:txBody>
-      </p:sp>
-      <p:sp>
-        <p:nvSpPr>
-          <p:cNvPr id="13" name="TextBox 12"/>
-          <p:cNvSpPr txBox="1"/>
-          <p:nvPr/>
-        </p:nvSpPr>
-        <p:spPr>
-          <a:xfrm>
-            <a:off x="777240" y="3831336"/>
-            <a:ext cx="10774375" cy="822959"/>
-          </a:xfrm>
-          <a:prstGeom prst="rect">
-            <a:avLst/>
-          </a:prstGeom>
-          <a:noFill/>
-        </p:spPr>
-        <p:txBody>
-          <a:bodyPr wrap="square">
-            <a:spAutoFit/>
-          </a:bodyPr>
-          <a:lstStyle/>
-          <a:p>
-            <a:r>
-              <a:rPr sz="1200" b="1" i="0">
-                <a:solidFill>
-                  <a:srgbClr val="A02030"/>
-                </a:solidFill>
-                <a:latin typeface="Calibri"/>
-              </a:rPr>
-              <a:t>Atención</a:t>
+              <a:rPr sz="2000" b="0" i="0">
+                <a:solidFill>
+                  <a:srgbClr val="333333"/>
+                </a:solidFill>
+                <a:latin typeface="Calibri"/>
+              </a:rPr>
+              <a:t>–   </a:t>
+            </a:r>
+            <a:r>
+              <a:rPr sz="2000" b="1" i="0">
+                <a:solidFill>
+                  <a:srgbClr val="333333"/>
+                </a:solidFill>
+                <a:latin typeface="Calibri"/>
+              </a:rPr>
+              <a:t>2.</a:t>
+            </a:r>
+            <a:r>
+              <a:rPr sz="2000" b="0" i="0">
+                <a:solidFill>
+                  <a:srgbClr val="333333"/>
+                </a:solidFill>
+                <a:latin typeface="Calibri"/>
+              </a:rPr>
+              <a:t> Paso 2: construya en la pregunta 5 la matriz «Criterio | IaaS | PaaS | SaaS» con las cuatro filas en orden (control, costo cualitativo, operacion, time-to-demo) y maximo 2 lineas por celda; verifique que cada celda nombre una capacidad o una restriccion de SU dominio, y que la fila de operacion no afirme que en PaaS o SaaS usted deja de responder por su propia aplicacion.</a:t>
             </a:r>
           </a:p>
           <a:p>
             <a:pPr>
-              <a:spcBef>
-                <a:spcPts val="400"/>
-              </a:spcBef>
+              <a:spcAft>
+                <a:spcPts val="800"/>
+              </a:spcAft>
             </a:pPr>
             <a:r>
-              <a:rPr sz="1400" b="0" i="0">
-                <a:solidFill>
-                  <a:srgbClr val="333333"/>
-                </a:solidFill>
-                <a:latin typeface="Calibri"/>
-              </a:rPr>
-              <a:t>Sin cloud de pago ni instalaciones obligatorias de hipervisores/Docker Desktop.</a:t>
-            </a:r>
-          </a:p>
-        </p:txBody>
-      </p:sp>
-      <p:sp>
-        <p:nvSpPr>
-          <p:cNvPr id="14" name="TextBox 13"/>
+              <a:rPr sz="2000" b="0" i="0">
+                <a:solidFill>
+                  <a:srgbClr val="333333"/>
+                </a:solidFill>
+                <a:latin typeface="Calibri"/>
+              </a:rPr>
+              <a:t>–   </a:t>
+            </a:r>
+            <a:r>
+              <a:rPr sz="2000" b="1" i="0">
+                <a:solidFill>
+                  <a:srgbClr val="333333"/>
+                </a:solidFill>
+                <a:latin typeface="Calibri"/>
+              </a:rPr>
+              <a:t>3.</a:t>
+            </a:r>
+            <a:r>
+              <a:rPr sz="2000" b="0" i="0">
+                <a:solidFill>
+                  <a:srgbClr val="333333"/>
+                </a:solidFill>
+                <a:latin typeface="Calibri"/>
+              </a:rPr>
+              <a:t> Paso 3: redacte en la pregunta 6 el ADR-001 con las cinco secciones rotuladas —titulo, estado con fecha, contexto con sus restricciones reales, la decision en UNA sola frase con UN modelo dominante, y exactamente 2 alternativas descartadas con el motivo atado a su dominio—; verifique que la seccion de decision no nombre dos modelos, porque en ese caso vale cero.</a:t>
+            </a:r>
+          </a:p>
+          <a:p>
+            <a:pPr>
+              <a:spcAft>
+                <a:spcPts val="800"/>
+              </a:spcAft>
+            </a:pPr>
+            <a:r>
+              <a:rPr sz="2000" b="0" i="0">
+                <a:solidFill>
+                  <a:srgbClr val="333333"/>
+                </a:solidFill>
+                <a:latin typeface="Calibri"/>
+              </a:rPr>
+              <a:t>–   </a:t>
+            </a:r>
+            <a:r>
+              <a:rPr sz="2000" b="1" i="0">
+                <a:solidFill>
+                  <a:srgbClr val="333333"/>
+                </a:solidFill>
+                <a:latin typeface="Calibri"/>
+              </a:rPr>
+              <a:t>4.</a:t>
+            </a:r>
+            <a:r>
+              <a:rPr sz="2000" b="0" i="0">
+                <a:solidFill>
+                  <a:srgbClr val="333333"/>
+                </a:solidFill>
+                <a:latin typeface="Calibri"/>
+              </a:rPr>
+              <a:t> Paso 4: escriba en la pregunta 7 la seccion 6 del mismo ADR, las consecuencias en los tres ejes (operacion, costo y aprendizaje), con al menos una positiva y una negativa por eje marcadas con + y -, y verifique que al menos una negativa hable de amarre al proveedor o de perdida de control; guarde y continue, que la actividad se entrega completa al cierre del corte.</a:t>
+            </a:r>
+          </a:p>
+        </p:txBody>
+      </p:sp>
+      <p:sp>
+        <p:nvSpPr>
+          <p:cNvPr id="6" name="TextBox 5"/>
           <p:cNvSpPr txBox="1"/>
           <p:nvPr/>
         </p:nvSpPr>
@@ -5223,6 +4942,601 @@
         <p:spPr>
           <a:xfrm>
             <a:off x="0" y="0"/>
+            <a:ext cx="12191695" cy="960120"/>
+          </a:xfrm>
+          <a:prstGeom prst="rect">
+            <a:avLst/>
+          </a:prstGeom>
+          <a:solidFill>
+            <a:srgbClr val="095292"/>
+          </a:solidFill>
+          <a:ln>
+            <a:noFill/>
+          </a:ln>
+        </p:spPr>
+        <p:style>
+          <a:lnRef idx="1">
+            <a:schemeClr val="accent1"/>
+          </a:lnRef>
+          <a:fillRef idx="3">
+            <a:schemeClr val="accent1"/>
+          </a:fillRef>
+          <a:effectRef idx="2">
+            <a:schemeClr val="accent1"/>
+          </a:effectRef>
+          <a:fontRef idx="minor">
+            <a:schemeClr val="lt1"/>
+          </a:fontRef>
+        </p:style>
+        <p:txBody>
+          <a:bodyPr rtlCol="0" anchor="ctr"/>
+          <a:lstStyle/>
+          <a:p>
+            <a:pPr algn="ctr"/>
+          </a:p>
+        </p:txBody>
+      </p:sp>
+      <p:sp>
+        <p:nvSpPr>
+          <p:cNvPr id="3" name="Rectangle 2"/>
+          <p:cNvSpPr/>
+          <p:nvPr/>
+        </p:nvSpPr>
+        <p:spPr>
+          <a:xfrm>
+            <a:off x="0" y="960120"/>
+            <a:ext cx="12191695" cy="41148"/>
+          </a:xfrm>
+          <a:prstGeom prst="rect">
+            <a:avLst/>
+          </a:prstGeom>
+          <a:solidFill>
+            <a:srgbClr val="FFD000"/>
+          </a:solidFill>
+          <a:ln>
+            <a:noFill/>
+          </a:ln>
+        </p:spPr>
+        <p:style>
+          <a:lnRef idx="1">
+            <a:schemeClr val="accent1"/>
+          </a:lnRef>
+          <a:fillRef idx="3">
+            <a:schemeClr val="accent1"/>
+          </a:fillRef>
+          <a:effectRef idx="2">
+            <a:schemeClr val="accent1"/>
+          </a:effectRef>
+          <a:fontRef idx="minor">
+            <a:schemeClr val="lt1"/>
+          </a:fontRef>
+        </p:style>
+        <p:txBody>
+          <a:bodyPr rtlCol="0" anchor="ctr"/>
+          <a:lstStyle/>
+          <a:p>
+            <a:pPr algn="ctr"/>
+          </a:p>
+        </p:txBody>
+      </p:sp>
+      <p:sp>
+        <p:nvSpPr>
+          <p:cNvPr id="4" name="TextBox 3"/>
+          <p:cNvSpPr txBox="1"/>
+          <p:nvPr/>
+        </p:nvSpPr>
+        <p:spPr>
+          <a:xfrm>
+            <a:off x="457200" y="164592"/>
+            <a:ext cx="11277295" cy="502920"/>
+          </a:xfrm>
+          <a:prstGeom prst="rect">
+            <a:avLst/>
+          </a:prstGeom>
+          <a:noFill/>
+        </p:spPr>
+        <p:txBody>
+          <a:bodyPr wrap="square">
+            <a:spAutoFit/>
+          </a:bodyPr>
+          <a:lstStyle/>
+          <a:p>
+            <a:r>
+              <a:rPr sz="2600" b="1" i="0">
+                <a:solidFill>
+                  <a:srgbClr val="FFFFFF"/>
+                </a:solidFill>
+                <a:latin typeface="Calibri"/>
+              </a:rPr>
+              <a:t>Para continuar (PI)</a:t>
+            </a:r>
+          </a:p>
+        </p:txBody>
+      </p:sp>
+      <p:sp>
+        <p:nvSpPr>
+          <p:cNvPr id="5" name="Rounded Rectangle 4"/>
+          <p:cNvSpPr/>
+          <p:nvPr/>
+        </p:nvSpPr>
+        <p:spPr>
+          <a:xfrm>
+            <a:off x="457200" y="1261872"/>
+            <a:ext cx="11277295" cy="1051560"/>
+          </a:xfrm>
+          <a:prstGeom prst="roundRect">
+            <a:avLst>
+              <a:gd name="adj" fmla="val 12000"/>
+            </a:avLst>
+          </a:prstGeom>
+          <a:solidFill>
+            <a:srgbClr val="E8F4FA"/>
+          </a:solidFill>
+          <a:ln>
+            <a:noFill/>
+          </a:ln>
+        </p:spPr>
+        <p:style>
+          <a:lnRef idx="1">
+            <a:schemeClr val="accent1"/>
+          </a:lnRef>
+          <a:fillRef idx="3">
+            <a:schemeClr val="accent1"/>
+          </a:fillRef>
+          <a:effectRef idx="2">
+            <a:schemeClr val="accent1"/>
+          </a:effectRef>
+          <a:fontRef idx="minor">
+            <a:schemeClr val="lt1"/>
+          </a:fontRef>
+        </p:style>
+        <p:txBody>
+          <a:bodyPr rtlCol="0" anchor="ctr"/>
+          <a:lstStyle/>
+          <a:p>
+            <a:pPr algn="ctr"/>
+          </a:p>
+        </p:txBody>
+      </p:sp>
+      <p:sp>
+        <p:nvSpPr>
+          <p:cNvPr id="6" name="Rectangle 5"/>
+          <p:cNvSpPr/>
+          <p:nvPr/>
+        </p:nvSpPr>
+        <p:spPr>
+          <a:xfrm>
+            <a:off x="457200" y="1261872"/>
+            <a:ext cx="128016" cy="1051560"/>
+          </a:xfrm>
+          <a:prstGeom prst="rect">
+            <a:avLst/>
+          </a:prstGeom>
+          <a:solidFill>
+            <a:srgbClr val="269CCB"/>
+          </a:solidFill>
+          <a:ln>
+            <a:noFill/>
+          </a:ln>
+        </p:spPr>
+        <p:style>
+          <a:lnRef idx="1">
+            <a:schemeClr val="accent1"/>
+          </a:lnRef>
+          <a:fillRef idx="3">
+            <a:schemeClr val="accent1"/>
+          </a:fillRef>
+          <a:effectRef idx="2">
+            <a:schemeClr val="accent1"/>
+          </a:effectRef>
+          <a:fontRef idx="minor">
+            <a:schemeClr val="lt1"/>
+          </a:fontRef>
+        </p:style>
+        <p:txBody>
+          <a:bodyPr rtlCol="0" anchor="ctr"/>
+          <a:lstStyle/>
+          <a:p>
+            <a:pPr algn="ctr"/>
+          </a:p>
+        </p:txBody>
+      </p:sp>
+      <p:sp>
+        <p:nvSpPr>
+          <p:cNvPr id="7" name="TextBox 6"/>
+          <p:cNvSpPr txBox="1"/>
+          <p:nvPr/>
+        </p:nvSpPr>
+        <p:spPr>
+          <a:xfrm>
+            <a:off x="777240" y="1399031"/>
+            <a:ext cx="10774375" cy="822959"/>
+          </a:xfrm>
+          <a:prstGeom prst="rect">
+            <a:avLst/>
+          </a:prstGeom>
+          <a:noFill/>
+        </p:spPr>
+        <p:txBody>
+          <a:bodyPr wrap="square">
+            <a:spAutoFit/>
+          </a:bodyPr>
+          <a:lstStyle/>
+          <a:p>
+            <a:r>
+              <a:rPr sz="1200" b="1" i="0">
+                <a:solidFill>
+                  <a:srgbClr val="269CCB"/>
+                </a:solidFill>
+                <a:latin typeface="Calibri"/>
+              </a:rPr>
+              <a:t>Info</a:t>
+            </a:r>
+          </a:p>
+          <a:p>
+            <a:pPr>
+              <a:spcBef>
+                <a:spcPts val="400"/>
+              </a:spcBef>
+            </a:pPr>
+            <a:r>
+              <a:rPr sz="1400" b="0" i="0">
+                <a:solidFill>
+                  <a:srgbClr val="333333"/>
+                </a:solidFill>
+                <a:latin typeface="Calibri"/>
+              </a:rPr>
+              <a:t>Entregable: ADR-001: decisión de modelo de servicio + matriz de comparación aplicada al dominio</a:t>
+            </a:r>
+          </a:p>
+        </p:txBody>
+      </p:sp>
+      <p:sp>
+        <p:nvSpPr>
+          <p:cNvPr id="8" name="Rounded Rectangle 7"/>
+          <p:cNvSpPr/>
+          <p:nvPr/>
+        </p:nvSpPr>
+        <p:spPr>
+          <a:xfrm>
+            <a:off x="457200" y="2478024"/>
+            <a:ext cx="11277295" cy="1051560"/>
+          </a:xfrm>
+          <a:prstGeom prst="roundRect">
+            <a:avLst>
+              <a:gd name="adj" fmla="val 12000"/>
+            </a:avLst>
+          </a:prstGeom>
+          <a:solidFill>
+            <a:srgbClr val="FFF8E1"/>
+          </a:solidFill>
+          <a:ln>
+            <a:noFill/>
+          </a:ln>
+        </p:spPr>
+        <p:style>
+          <a:lnRef idx="1">
+            <a:schemeClr val="accent1"/>
+          </a:lnRef>
+          <a:fillRef idx="3">
+            <a:schemeClr val="accent1"/>
+          </a:fillRef>
+          <a:effectRef idx="2">
+            <a:schemeClr val="accent1"/>
+          </a:effectRef>
+          <a:fontRef idx="minor">
+            <a:schemeClr val="lt1"/>
+          </a:fontRef>
+        </p:style>
+        <p:txBody>
+          <a:bodyPr rtlCol="0" anchor="ctr"/>
+          <a:lstStyle/>
+          <a:p>
+            <a:pPr algn="ctr"/>
+          </a:p>
+        </p:txBody>
+      </p:sp>
+      <p:sp>
+        <p:nvSpPr>
+          <p:cNvPr id="9" name="Rectangle 8"/>
+          <p:cNvSpPr/>
+          <p:nvPr/>
+        </p:nvSpPr>
+        <p:spPr>
+          <a:xfrm>
+            <a:off x="457200" y="2478024"/>
+            <a:ext cx="128016" cy="1051560"/>
+          </a:xfrm>
+          <a:prstGeom prst="rect">
+            <a:avLst/>
+          </a:prstGeom>
+          <a:solidFill>
+            <a:srgbClr val="FFD000"/>
+          </a:solidFill>
+          <a:ln>
+            <a:noFill/>
+          </a:ln>
+        </p:spPr>
+        <p:style>
+          <a:lnRef idx="1">
+            <a:schemeClr val="accent1"/>
+          </a:lnRef>
+          <a:fillRef idx="3">
+            <a:schemeClr val="accent1"/>
+          </a:fillRef>
+          <a:effectRef idx="2">
+            <a:schemeClr val="accent1"/>
+          </a:effectRef>
+          <a:fontRef idx="minor">
+            <a:schemeClr val="lt1"/>
+          </a:fontRef>
+        </p:style>
+        <p:txBody>
+          <a:bodyPr rtlCol="0" anchor="ctr"/>
+          <a:lstStyle/>
+          <a:p>
+            <a:pPr algn="ctr"/>
+          </a:p>
+        </p:txBody>
+      </p:sp>
+      <p:sp>
+        <p:nvSpPr>
+          <p:cNvPr id="10" name="TextBox 9"/>
+          <p:cNvSpPr txBox="1"/>
+          <p:nvPr/>
+        </p:nvSpPr>
+        <p:spPr>
+          <a:xfrm>
+            <a:off x="777240" y="2615184"/>
+            <a:ext cx="10774375" cy="822959"/>
+          </a:xfrm>
+          <a:prstGeom prst="rect">
+            <a:avLst/>
+          </a:prstGeom>
+          <a:noFill/>
+        </p:spPr>
+        <p:txBody>
+          <a:bodyPr wrap="square">
+            <a:spAutoFit/>
+          </a:bodyPr>
+          <a:lstStyle/>
+          <a:p>
+            <a:r>
+              <a:rPr sz="1200" b="1" i="0">
+                <a:solidFill>
+                  <a:srgbClr val="FFD000"/>
+                </a:solidFill>
+                <a:latin typeface="Calibri"/>
+              </a:rPr>
+              <a:t>Aclaración</a:t>
+            </a:r>
+          </a:p>
+          <a:p>
+            <a:pPr>
+              <a:spcBef>
+                <a:spcPts val="400"/>
+              </a:spcBef>
+            </a:pPr>
+            <a:r>
+              <a:rPr sz="1400" b="0" i="0">
+                <a:solidFill>
+                  <a:srgbClr val="333333"/>
+                </a:solidFill>
+                <a:latin typeface="Calibri"/>
+              </a:rPr>
+              <a:t>Subir evidencias al paquete CloudLite (Drive/repo) y a la plataforma del curso en la fecha que indique el docente.</a:t>
+            </a:r>
+          </a:p>
+        </p:txBody>
+      </p:sp>
+      <p:sp>
+        <p:nvSpPr>
+          <p:cNvPr id="11" name="Rounded Rectangle 10"/>
+          <p:cNvSpPr/>
+          <p:nvPr/>
+        </p:nvSpPr>
+        <p:spPr>
+          <a:xfrm>
+            <a:off x="457200" y="3694176"/>
+            <a:ext cx="11277295" cy="1051560"/>
+          </a:xfrm>
+          <a:prstGeom prst="roundRect">
+            <a:avLst>
+              <a:gd name="adj" fmla="val 12000"/>
+            </a:avLst>
+          </a:prstGeom>
+          <a:solidFill>
+            <a:srgbClr val="FBE4E4"/>
+          </a:solidFill>
+          <a:ln>
+            <a:noFill/>
+          </a:ln>
+        </p:spPr>
+        <p:style>
+          <a:lnRef idx="1">
+            <a:schemeClr val="accent1"/>
+          </a:lnRef>
+          <a:fillRef idx="3">
+            <a:schemeClr val="accent1"/>
+          </a:fillRef>
+          <a:effectRef idx="2">
+            <a:schemeClr val="accent1"/>
+          </a:effectRef>
+          <a:fontRef idx="minor">
+            <a:schemeClr val="lt1"/>
+          </a:fontRef>
+        </p:style>
+        <p:txBody>
+          <a:bodyPr rtlCol="0" anchor="ctr"/>
+          <a:lstStyle/>
+          <a:p>
+            <a:pPr algn="ctr"/>
+          </a:p>
+        </p:txBody>
+      </p:sp>
+      <p:sp>
+        <p:nvSpPr>
+          <p:cNvPr id="12" name="Rectangle 11"/>
+          <p:cNvSpPr/>
+          <p:nvPr/>
+        </p:nvSpPr>
+        <p:spPr>
+          <a:xfrm>
+            <a:off x="457200" y="3694176"/>
+            <a:ext cx="128016" cy="1051560"/>
+          </a:xfrm>
+          <a:prstGeom prst="rect">
+            <a:avLst/>
+          </a:prstGeom>
+          <a:solidFill>
+            <a:srgbClr val="A02030"/>
+          </a:solidFill>
+          <a:ln>
+            <a:noFill/>
+          </a:ln>
+        </p:spPr>
+        <p:style>
+          <a:lnRef idx="1">
+            <a:schemeClr val="accent1"/>
+          </a:lnRef>
+          <a:fillRef idx="3">
+            <a:schemeClr val="accent1"/>
+          </a:fillRef>
+          <a:effectRef idx="2">
+            <a:schemeClr val="accent1"/>
+          </a:effectRef>
+          <a:fontRef idx="minor">
+            <a:schemeClr val="lt1"/>
+          </a:fontRef>
+        </p:style>
+        <p:txBody>
+          <a:bodyPr rtlCol="0" anchor="ctr"/>
+          <a:lstStyle/>
+          <a:p>
+            <a:pPr algn="ctr"/>
+          </a:p>
+        </p:txBody>
+      </p:sp>
+      <p:sp>
+        <p:nvSpPr>
+          <p:cNvPr id="13" name="TextBox 12"/>
+          <p:cNvSpPr txBox="1"/>
+          <p:nvPr/>
+        </p:nvSpPr>
+        <p:spPr>
+          <a:xfrm>
+            <a:off x="777240" y="3831336"/>
+            <a:ext cx="10774375" cy="822959"/>
+          </a:xfrm>
+          <a:prstGeom prst="rect">
+            <a:avLst/>
+          </a:prstGeom>
+          <a:noFill/>
+        </p:spPr>
+        <p:txBody>
+          <a:bodyPr wrap="square">
+            <a:spAutoFit/>
+          </a:bodyPr>
+          <a:lstStyle/>
+          <a:p>
+            <a:r>
+              <a:rPr sz="1200" b="1" i="0">
+                <a:solidFill>
+                  <a:srgbClr val="A02030"/>
+                </a:solidFill>
+                <a:latin typeface="Calibri"/>
+              </a:rPr>
+              <a:t>Atención</a:t>
+            </a:r>
+          </a:p>
+          <a:p>
+            <a:pPr>
+              <a:spcBef>
+                <a:spcPts val="400"/>
+              </a:spcBef>
+            </a:pPr>
+            <a:r>
+              <a:rPr sz="1400" b="0" i="0">
+                <a:solidFill>
+                  <a:srgbClr val="333333"/>
+                </a:solidFill>
+                <a:latin typeface="Calibri"/>
+              </a:rPr>
+              <a:t>Sin cloud de pago ni instalaciones obligatorias de hipervisores/Docker Desktop.</a:t>
+            </a:r>
+          </a:p>
+        </p:txBody>
+      </p:sp>
+      <p:sp>
+        <p:nvSpPr>
+          <p:cNvPr id="14" name="TextBox 13"/>
+          <p:cNvSpPr txBox="1"/>
+          <p:nvPr/>
+        </p:nvSpPr>
+        <p:spPr>
+          <a:xfrm>
+            <a:off x="11185855" y="6473952"/>
+            <a:ext cx="640080" cy="274320"/>
+          </a:xfrm>
+          <a:prstGeom prst="rect">
+            <a:avLst/>
+          </a:prstGeom>
+          <a:noFill/>
+        </p:spPr>
+        <p:txBody>
+          <a:bodyPr wrap="square">
+            <a:spAutoFit/>
+          </a:bodyPr>
+          <a:lstStyle/>
+          <a:p>
+            <a:pPr algn="r"/>
+            <a:r>
+              <a:rPr sz="1100" b="0" i="0">
+                <a:solidFill>
+                  <a:srgbClr val="666666"/>
+                </a:solidFill>
+                <a:latin typeface="Calibri"/>
+              </a:rPr>
+              <a:t>13</a:t>
+            </a:r>
+          </a:p>
+        </p:txBody>
+      </p:sp>
+    </p:spTree>
+  </p:cSld>
+  <p:clrMapOvr>
+    <a:masterClrMapping/>
+  </p:clrMapOvr>
+</p:sld>
+</file>
+
+<file path=ppt/slides/slide14.xml><?xml version="1.0" encoding="utf-8"?>
+<p:sld xmlns:a="http://schemas.openxmlformats.org/drawingml/2006/main" xmlns:p="http://schemas.openxmlformats.org/presentationml/2006/main" xmlns:r="http://schemas.openxmlformats.org/officeDocument/2006/relationships">
+  <p:cSld>
+    <p:bg>
+      <p:bgPr>
+        <a:solidFill>
+          <a:srgbClr val="FFFFFF"/>
+        </a:solidFill>
+        <a:effectLst/>
+      </p:bgPr>
+    </p:bg>
+    <p:spTree>
+      <p:nvGrpSpPr>
+        <p:cNvPr id="1" name=""/>
+        <p:cNvGrpSpPr/>
+        <p:nvPr/>
+      </p:nvGrpSpPr>
+      <p:grpSpPr/>
+      <p:sp>
+        <p:nvSpPr>
+          <p:cNvPr id="2" name="Rectangle 1"/>
+          <p:cNvSpPr/>
+          <p:nvPr/>
+        </p:nvSpPr>
+        <p:spPr>
+          <a:xfrm>
+            <a:off x="0" y="0"/>
             <a:ext cx="12191695" cy="164592"/>
           </a:xfrm>
           <a:prstGeom prst="rect">
@@ -5677,7 +5991,7 @@
                 </a:solidFill>
                 <a:latin typeface="Calibri"/>
               </a:rPr>
-              <a:t> Taller guiado PI (demo en vivo + avance individual).</a:t>
+              <a:t> Trabajo guiado del PI (demo en vivo + avance individual).</a:t>
             </a:r>
           </a:p>
           <a:p>
@@ -6196,7 +6510,7 @@
                 </a:solidFill>
                 <a:latin typeface="Calibri"/>
               </a:rPr>
-              <a:t>PI CloudLite — entregable de hoy</a:t>
+              <a:t>IaaS · PaaS · SaaS (sin cloud de pago)</a:t>
             </a:r>
           </a:p>
         </p:txBody>
@@ -6244,7 +6558,7 @@
                 </a:solidFill>
                 <a:latin typeface="Calibri"/>
               </a:rPr>
-              <a:t>Entregable:</a:t>
+              <a:t>IaaS</a:t>
             </a:r>
             <a:r>
               <a:rPr sz="2000" b="0" i="0">
@@ -6253,7 +6567,7 @@
                 </a:solidFill>
                 <a:latin typeface="Calibri"/>
               </a:rPr>
-              <a:t> ADR-001: decisión de modelo de servicio + matriz de comparación aplicada al dominio</a:t>
+              <a:t>: usted administra SO/red/runtime; el proveedor da cómputo/red/disco.</a:t>
             </a:r>
           </a:p>
           <a:p>
@@ -6269,7 +6583,7 @@
                 </a:solidFill>
                 <a:latin typeface="Calibri"/>
               </a:rPr>
-              <a:t>–   Herramienta: </a:t>
+              <a:t>–   </a:t>
             </a:r>
             <a:r>
               <a:rPr sz="2000" b="1" i="0">
@@ -6278,7 +6592,16 @@
                 </a:solidFill>
                 <a:latin typeface="Calibri"/>
               </a:rPr>
-              <a:t>Google Docs · draw.io (opcional)</a:t>
+              <a:t>PaaS</a:t>
+            </a:r>
+            <a:r>
+              <a:rPr sz="2000" b="0" i="0">
+                <a:solidFill>
+                  <a:srgbClr val="333333"/>
+                </a:solidFill>
+                <a:latin typeface="Calibri"/>
+              </a:rPr>
+              <a:t>: usted despliega app; el proveedor gestiona runtime/escala básica.</a:t>
             </a:r>
           </a:p>
           <a:p>
@@ -6294,7 +6617,7 @@
                 </a:solidFill>
                 <a:latin typeface="Calibri"/>
               </a:rPr>
-              <a:t>–   Todo lo que construyan hoy entra al </a:t>
+              <a:t>–   </a:t>
             </a:r>
             <a:r>
               <a:rPr sz="2000" b="1" i="0">
@@ -6303,7 +6626,7 @@
                 </a:solidFill>
                 <a:latin typeface="Calibri"/>
               </a:rPr>
-              <a:t>informe/repo del PI</a:t>
+              <a:t>SaaS</a:t>
             </a:r>
             <a:r>
               <a:rPr sz="2000" b="0" i="0">
@@ -6312,7 +6635,7 @@
                 </a:solidFill>
                 <a:latin typeface="Calibri"/>
               </a:rPr>
-              <a:t> (no es lab suelto).</a:t>
+              <a:t>: consume el servicio listo (correo, CRM); poca personalización profunda.</a:t>
             </a:r>
           </a:p>
           <a:p>
@@ -6328,7 +6651,25 @@
                 </a:solidFill>
                 <a:latin typeface="Calibri"/>
               </a:rPr>
-              <a:t>–   Individual por defecto · el docente puede autorizar equipos de 2–3; la entrega en la plataforma del curso siempre es individual.</a:t>
+              <a:t>–   En este curso </a:t>
+            </a:r>
+            <a:r>
+              <a:rPr sz="2000" b="1" i="0">
+                <a:solidFill>
+                  <a:srgbClr val="333333"/>
+                </a:solidFill>
+                <a:latin typeface="Calibri"/>
+              </a:rPr>
+              <a:t>simulamos</a:t>
+            </a:r>
+            <a:r>
+              <a:rPr sz="2000" b="0" i="0">
+                <a:solidFill>
+                  <a:srgbClr val="333333"/>
+                </a:solidFill>
+                <a:latin typeface="Calibri"/>
+              </a:rPr>
+              <a:t> con labs/navegador; no abrimos cuentas IaaS con tarjeta.</a:t>
             </a:r>
           </a:p>
         </p:txBody>
@@ -6509,7 +6850,7 @@
                 </a:solidFill>
                 <a:latin typeface="Calibri"/>
               </a:rPr>
-              <a:t>IaaS · PaaS · SaaS (sin cloud de pago)</a:t>
+              <a:t>Cómo decidir para CloudLite</a:t>
             </a:r>
           </a:p>
         </p:txBody>
@@ -6548,25 +6889,7 @@
                 </a:solidFill>
                 <a:latin typeface="Calibri"/>
               </a:rPr>
-              <a:t>–   </a:t>
-            </a:r>
-            <a:r>
-              <a:rPr sz="2000" b="1" i="0">
-                <a:solidFill>
-                  <a:srgbClr val="333333"/>
-                </a:solidFill>
-                <a:latin typeface="Calibri"/>
-              </a:rPr>
-              <a:t>IaaS</a:t>
-            </a:r>
-            <a:r>
-              <a:rPr sz="2000" b="0" i="0">
-                <a:solidFill>
-                  <a:srgbClr val="333333"/>
-                </a:solidFill>
-                <a:latin typeface="Calibri"/>
-              </a:rPr>
-              <a:t>: usted administra SO/red/runtime; el proveedor da cómputo/red/disco.</a:t>
+              <a:t>–   Pregunte: ¿necesito controlar red/SO o solo desplegar API+datos?</a:t>
             </a:r>
           </a:p>
           <a:p>
@@ -6582,7 +6905,7 @@
                 </a:solidFill>
                 <a:latin typeface="Calibri"/>
               </a:rPr>
-              <a:t>–   </a:t>
+              <a:t>–   Para un MVP académico suele ganar </a:t>
             </a:r>
             <a:r>
               <a:rPr sz="2000" b="1" i="0">
@@ -6591,7 +6914,7 @@
                 </a:solidFill>
                 <a:latin typeface="Calibri"/>
               </a:rPr>
-              <a:t>PaaS</a:t>
+              <a:t>PaaS conceptual</a:t>
             </a:r>
             <a:r>
               <a:rPr sz="2000" b="0" i="0">
@@ -6600,7 +6923,7 @@
                 </a:solidFill>
                 <a:latin typeface="Calibri"/>
               </a:rPr>
-              <a:t>: usted despliega app; el proveedor gestiona runtime/escala básica.</a:t>
+              <a:t> + contenedores (portable).</a:t>
             </a:r>
           </a:p>
           <a:p>
@@ -6616,25 +6939,7 @@
                 </a:solidFill>
                 <a:latin typeface="Calibri"/>
               </a:rPr>
-              <a:t>–   </a:t>
-            </a:r>
-            <a:r>
-              <a:rPr sz="2000" b="1" i="0">
-                <a:solidFill>
-                  <a:srgbClr val="333333"/>
-                </a:solidFill>
-                <a:latin typeface="Calibri"/>
-              </a:rPr>
-              <a:t>SaaS</a:t>
-            </a:r>
-            <a:r>
-              <a:rPr sz="2000" b="0" i="0">
-                <a:solidFill>
-                  <a:srgbClr val="333333"/>
-                </a:solidFill>
-                <a:latin typeface="Calibri"/>
-              </a:rPr>
-              <a:t>: consume el servicio listo (correo, CRM); poca personalización profunda.</a:t>
+              <a:t>–   Si el dominio exige mucho control de red → justifique IaaS *simulado* en diagrama.</a:t>
             </a:r>
           </a:p>
           <a:p>
@@ -6650,7 +6955,7 @@
                 </a:solidFill>
                 <a:latin typeface="Calibri"/>
               </a:rPr>
-              <a:t>–   En este curso </a:t>
+              <a:t>–   SaaS solo como </a:t>
             </a:r>
             <a:r>
               <a:rPr sz="2000" b="1" i="0">
@@ -6659,7 +6964,7 @@
                 </a:solidFill>
                 <a:latin typeface="Calibri"/>
               </a:rPr>
-              <a:t>simulamos</a:t>
+              <a:t>satélite</a:t>
             </a:r>
             <a:r>
               <a:rPr sz="2000" b="0" i="0">
@@ -6668,7 +6973,7 @@
                 </a:solidFill>
                 <a:latin typeface="Calibri"/>
               </a:rPr>
-              <a:t> con labs/navegador; no abrimos cuentas IaaS con tarjeta.</a:t>
+              <a:t> (auth, email, analytics) — no como toda la app.</a:t>
             </a:r>
           </a:p>
         </p:txBody>
@@ -6849,7 +7154,7 @@
                 </a:solidFill>
                 <a:latin typeface="Calibri"/>
               </a:rPr>
-              <a:t>Cómo decidir para CloudLite</a:t>
+              <a:t>Responsabilidad compartida: quién responde por qué</a:t>
             </a:r>
           </a:p>
         </p:txBody>
@@ -6888,7 +7193,61 @@
                 </a:solidFill>
                 <a:latin typeface="Calibri"/>
               </a:rPr>
-              <a:t>–   Pregunte: ¿necesito controlar red/SO o solo desplegar API+datos?</a:t>
+              <a:t>–   </a:t>
+            </a:r>
+            <a:r>
+              <a:rPr sz="2000" b="1" i="0">
+                <a:solidFill>
+                  <a:srgbClr val="333333"/>
+                </a:solidFill>
+                <a:latin typeface="Calibri"/>
+              </a:rPr>
+              <a:t>Regla que hay que memorizar:</a:t>
+            </a:r>
+            <a:r>
+              <a:rPr sz="2000" b="0" i="0">
+                <a:solidFill>
+                  <a:srgbClr val="333333"/>
+                </a:solidFill>
+                <a:latin typeface="Calibri"/>
+              </a:rPr>
+              <a:t> el proveedor responde por la seguridad </a:t>
+            </a:r>
+            <a:r>
+              <a:rPr sz="2000" b="1" i="0">
+                <a:solidFill>
+                  <a:srgbClr val="333333"/>
+                </a:solidFill>
+                <a:latin typeface="Calibri"/>
+              </a:rPr>
+              <a:t>DE</a:t>
+            </a:r>
+            <a:r>
+              <a:rPr sz="2000" b="0" i="0">
+                <a:solidFill>
+                  <a:srgbClr val="333333"/>
+                </a:solidFill>
+                <a:latin typeface="Calibri"/>
+              </a:rPr>
+              <a:t> la nube (centro de datos, hipervisor, cifrado en reposo); usted responde por la seguridad </a:t>
+            </a:r>
+            <a:r>
+              <a:rPr sz="2000" b="1" i="0">
+                <a:solidFill>
+                  <a:srgbClr val="333333"/>
+                </a:solidFill>
+                <a:latin typeface="Calibri"/>
+              </a:rPr>
+              <a:t>EN</a:t>
+            </a:r>
+            <a:r>
+              <a:rPr sz="2000" b="0" i="0">
+                <a:solidFill>
+                  <a:srgbClr val="333333"/>
+                </a:solidFill>
+                <a:latin typeface="Calibri"/>
+              </a:rPr>
+              <a:t> la nube (contraseñas, permisos, datos, configuración).</a:t>
             </a:r>
           </a:p>
           <a:p>
@@ -6904,7 +7263,7 @@
                 </a:solidFill>
                 <a:latin typeface="Calibri"/>
               </a:rPr>
-              <a:t>–   Para un MVP académico suele ganar </a:t>
+              <a:t>–   La causa dominante de incidentes en la nube </a:t>
             </a:r>
             <a:r>
               <a:rPr sz="2000" b="1" i="0">
@@ -6913,7 +7272,7 @@
                 </a:solidFill>
                 <a:latin typeface="Calibri"/>
               </a:rPr>
-              <a:t>PaaS conceptual</a:t>
+              <a:t>no</a:t>
             </a:r>
             <a:r>
               <a:rPr sz="2000" b="0" i="0">
@@ -6922,7 +7281,7 @@
                 </a:solidFill>
                 <a:latin typeface="Calibri"/>
               </a:rPr>
-              <a:t> + contenedores (portable).</a:t>
+              <a:t> es una falla del proveedor: es una configuración del cliente (un bucket público, una credencial en el repo, un puerto de base de datos expuesto).</a:t>
             </a:r>
           </a:p>
           <a:p>
@@ -6938,7 +7297,79 @@
                 </a:solidFill>
                 <a:latin typeface="Calibri"/>
               </a:rPr>
-              <a:t>–   Si el dominio exige mucho control de red → justifique IaaS *simulado* en diagrama.</a:t>
+              <a:t>–   </a:t>
+            </a:r>
+            <a:r>
+              <a:rPr sz="2000" b="1" i="0">
+                <a:solidFill>
+                  <a:srgbClr val="333333"/>
+                </a:solidFill>
+                <a:latin typeface="Calibri"/>
+              </a:rPr>
+              <a:t>Vendor lock-in</a:t>
+            </a:r>
+            <a:r>
+              <a:rPr sz="2000" b="0" i="0">
+                <a:solidFill>
+                  <a:srgbClr val="333333"/>
+                </a:solidFill>
+                <a:latin typeface="Calibri"/>
+              </a:rPr>
+              <a:t> (costo de mudarse de proveedor): </a:t>
+            </a:r>
+            <a:r>
+              <a:rPr sz="2000" b="1" i="0">
+                <a:solidFill>
+                  <a:srgbClr val="333333"/>
+                </a:solidFill>
+                <a:latin typeface="Calibri"/>
+              </a:rPr>
+              <a:t>bajo</a:t>
+            </a:r>
+            <a:r>
+              <a:rPr sz="2000" b="0" i="0">
+                <a:solidFill>
+                  <a:srgbClr val="333333"/>
+                </a:solidFill>
+                <a:latin typeface="Calibri"/>
+              </a:rPr>
+              <a:t> en IaaS (una VM Linux se parece a cualquier otra) · </a:t>
+            </a:r>
+            <a:r>
+              <a:rPr sz="2000" b="1" i="0">
+                <a:solidFill>
+                  <a:srgbClr val="333333"/>
+                </a:solidFill>
+                <a:latin typeface="Calibri"/>
+              </a:rPr>
+              <a:t>medio</a:t>
+            </a:r>
+            <a:r>
+              <a:rPr sz="2000" b="0" i="0">
+                <a:solidFill>
+                  <a:srgbClr val="333333"/>
+                </a:solidFill>
+                <a:latin typeface="Calibri"/>
+              </a:rPr>
+              <a:t> en PaaS (el archivo de configuración y algún servicio son propietarios) · </a:t>
+            </a:r>
+            <a:r>
+              <a:rPr sz="2000" b="1" i="0">
+                <a:solidFill>
+                  <a:srgbClr val="333333"/>
+                </a:solidFill>
+                <a:latin typeface="Calibri"/>
+              </a:rPr>
+              <a:t>potencialmente alto</a:t>
+            </a:r>
+            <a:r>
+              <a:rPr sz="2000" b="0" i="0">
+                <a:solidFill>
+                  <a:srgbClr val="333333"/>
+                </a:solidFill>
+                <a:latin typeface="Calibri"/>
+              </a:rPr>
+              <a:t> en SaaS (datos y lógica viven dentro del producto ajeno).</a:t>
             </a:r>
           </a:p>
           <a:p>
@@ -6954,7 +7385,7 @@
                 </a:solidFill>
                 <a:latin typeface="Calibri"/>
               </a:rPr>
-              <a:t>–   SaaS solo como </a:t>
+              <a:t>–   Mitigación para CloudLite: no evitar SaaS, </a:t>
             </a:r>
             <a:r>
               <a:rPr sz="2000" b="1" i="0">
@@ -6963,7 +7394,7 @@
                 </a:solidFill>
                 <a:latin typeface="Calibri"/>
               </a:rPr>
-              <a:t>satélite</a:t>
+              <a:t>acotarlo</a:t>
             </a:r>
             <a:r>
               <a:rPr sz="2000" b="0" i="0">
@@ -6972,7 +7403,7 @@
                 </a:solidFill>
                 <a:latin typeface="Calibri"/>
               </a:rPr>
-              <a:t> (auth, email, analytics) — no como toda la app.</a:t>
+              <a:t> — si el envío de correos vive detrás de una interfaz propia («Notificador.enviar()»), cambiar de proveedor toca un archivo, no cuarenta.</a:t>
             </a:r>
           </a:p>
         </p:txBody>
